--- a/ground-vehicle/docs/courses/advanced/l5_sensors_and_self_test.pptx
+++ b/ground-vehicle/docs/courses/advanced/l5_sensors_and_self_test.pptx
@@ -12099,14 +12099,14 @@
                 </a:solidFill>
                 <a:latin typeface="Consolas"/>
               </a:rPr>
-              <a:t>Sensors.ino  /  a5b_ina219_current.ino</a:t>
-            </a:r>
-          </a:p>
-        </p:txBody>
-      </p:sp>
-      <p:sp>
-        <p:nvSpPr>
-          <p:cNvPr id="7" name="Rounded Rectangle 6"/>
+              <a:t>Sensors.ino</a:t>
+            </a:r>
+          </a:p>
+        </p:txBody>
+      </p:sp>
+      <p:sp>
+        <p:nvSpPr>
+          <p:cNvPr id="7" name="CODE_PANEL"/>
           <p:cNvSpPr/>
           <p:nvPr/>
         </p:nvSpPr>
@@ -12364,7 +12364,7 @@
                 </a:solidFill>
                 <a:latin typeface="Consolas"/>
               </a:rPr>
-              <a:t>  int16_t raw = (int16_t)ina219_read16(REG_SHUNT);   // SIGNED</a:t>
+              <a:t>  int16_t raw = (int16_t)ina219_read16(0x01);   // shunt reg, SIGNED</a:t>
             </a:r>
           </a:p>
           <a:p>
@@ -12474,7 +12474,7 @@
                 </a:solidFill>
                 <a:latin typeface="Consolas"/>
               </a:rPr>
-              <a:t>  uint16_t value = ina219_read16(REG_BUS);</a:t>
+              <a:t>  uint16_t value = ina219_read16(0x02);</a:t>
             </a:r>
           </a:p>
           <a:p>

--- a/ground-vehicle/docs/courses/advanced/l5_sensors_and_self_test.pptx
+++ b/ground-vehicle/docs/courses/advanced/l5_sensors_and_self_test.pptx
@@ -6,34 +6,34 @@
   </p:sldMasterIdLst>
   <p:sldIdLst>
     <p:sldId id="256" r:id="rId7"/>
-    <p:sldId id="257" r:id="rId8"/>
-    <p:sldId id="258" r:id="rId9"/>
-    <p:sldId id="259" r:id="rId10"/>
-    <p:sldId id="260" r:id="rId11"/>
-    <p:sldId id="261" r:id="rId12"/>
-    <p:sldId id="262" r:id="rId13"/>
-    <p:sldId id="263" r:id="rId14"/>
-    <p:sldId id="264" r:id="rId15"/>
-    <p:sldId id="265" r:id="rId16"/>
-    <p:sldId id="266" r:id="rId17"/>
-    <p:sldId id="267" r:id="rId18"/>
-    <p:sldId id="268" r:id="rId19"/>
-    <p:sldId id="269" r:id="rId20"/>
-    <p:sldId id="270" r:id="rId21"/>
-    <p:sldId id="271" r:id="rId22"/>
-    <p:sldId id="272" r:id="rId23"/>
-    <p:sldId id="273" r:id="rId24"/>
-    <p:sldId id="274" r:id="rId25"/>
-    <p:sldId id="275" r:id="rId26"/>
-    <p:sldId id="276" r:id="rId27"/>
-    <p:sldId id="277" r:id="rId28"/>
-    <p:sldId id="278" r:id="rId29"/>
-    <p:sldId id="279" r:id="rId30"/>
-    <p:sldId id="280" r:id="rId31"/>
-    <p:sldId id="281" r:id="rId32"/>
-    <p:sldId id="282" r:id="rId33"/>
-    <p:sldId id="283" r:id="rId34"/>
-    <p:sldId id="284" r:id="rId35"/>
+    <p:sldId id="257" r:id="rId9"/>
+    <p:sldId id="258" r:id="rId10"/>
+    <p:sldId id="259" r:id="rId11"/>
+    <p:sldId id="260" r:id="rId12"/>
+    <p:sldId id="261" r:id="rId13"/>
+    <p:sldId id="262" r:id="rId14"/>
+    <p:sldId id="263" r:id="rId15"/>
+    <p:sldId id="264" r:id="rId16"/>
+    <p:sldId id="265" r:id="rId17"/>
+    <p:sldId id="266" r:id="rId18"/>
+    <p:sldId id="267" r:id="rId19"/>
+    <p:sldId id="268" r:id="rId20"/>
+    <p:sldId id="269" r:id="rId21"/>
+    <p:sldId id="270" r:id="rId22"/>
+    <p:sldId id="271" r:id="rId23"/>
+    <p:sldId id="272" r:id="rId24"/>
+    <p:sldId id="273" r:id="rId25"/>
+    <p:sldId id="274" r:id="rId26"/>
+    <p:sldId id="275" r:id="rId27"/>
+    <p:sldId id="276" r:id="rId28"/>
+    <p:sldId id="277" r:id="rId29"/>
+    <p:sldId id="278" r:id="rId30"/>
+    <p:sldId id="279" r:id="rId31"/>
+    <p:sldId id="280" r:id="rId32"/>
+    <p:sldId id="281" r:id="rId33"/>
+    <p:sldId id="282" r:id="rId34"/>
+    <p:sldId id="283" r:id="rId35"/>
+    <p:sldId id="284" r:id="rId36"/>
   </p:sldIdLst>
   <p:sldSz cx="12191695" cy="6858000" type="screen4x3"/>
   <p:notesSz cx="6858000" cy="9144000"/>
@@ -133,6 +133,3162 @@
     </a:lvl9pPr>
   </p:defaultTextStyle>
 </p:presentation>
+</file>
+
+<file path=ppt/notesMasters/notesMaster1.xml><?xml version="1.0" encoding="utf-8"?>
+<p:notesMaster xmlns:a="http://schemas.openxmlformats.org/drawingml/2006/main" xmlns:p="http://schemas.openxmlformats.org/presentationml/2006/main" xmlns:r="http://schemas.openxmlformats.org/officeDocument/2006/relationships">
+  <p:cSld>
+    <p:bg>
+      <p:bgRef idx="1001">
+        <a:schemeClr val="bg1"/>
+      </p:bgRef>
+    </p:bg>
+    <p:spTree>
+      <p:nvGrpSpPr>
+        <p:cNvPr id="1" name=""/>
+        <p:cNvGrpSpPr/>
+        <p:nvPr/>
+      </p:nvGrpSpPr>
+      <p:grpSpPr>
+        <a:xfrm>
+          <a:off x="0" y="0"/>
+          <a:ext cx="0" cy="0"/>
+          <a:chOff x="0" y="0"/>
+          <a:chExt cx="0" cy="0"/>
+        </a:xfrm>
+      </p:grpSpPr>
+      <p:sp>
+        <p:nvSpPr>
+          <p:cNvPr id="2" name="Header Placeholder 1"/>
+          <p:cNvSpPr>
+            <a:spLocks noGrp="1"/>
+          </p:cNvSpPr>
+          <p:nvPr>
+            <p:ph type="hdr" sz="quarter"/>
+          </p:nvPr>
+        </p:nvSpPr>
+        <p:spPr>
+          <a:xfrm>
+            <a:off x="0" y="0"/>
+            <a:ext cx="2971800" cy="457200"/>
+          </a:xfrm>
+          <a:prstGeom prst="rect">
+            <a:avLst/>
+          </a:prstGeom>
+        </p:spPr>
+        <p:txBody>
+          <a:bodyPr vert="horz" lIns="91440" tIns="45720" rIns="91440" bIns="45720" rtlCol="0"/>
+          <a:lstStyle>
+            <a:lvl1pPr algn="l">
+              <a:defRPr sz="1200"/>
+            </a:lvl1pPr>
+          </a:lstStyle>
+          <a:p>
+            <a:endParaRPr lang="en-US"/>
+          </a:p>
+        </p:txBody>
+      </p:sp>
+      <p:sp>
+        <p:nvSpPr>
+          <p:cNvPr id="3" name="Date Placeholder 2"/>
+          <p:cNvSpPr>
+            <a:spLocks noGrp="1"/>
+          </p:cNvSpPr>
+          <p:nvPr>
+            <p:ph type="dt" idx="1"/>
+          </p:nvPr>
+        </p:nvSpPr>
+        <p:spPr>
+          <a:xfrm>
+            <a:off x="3884613" y="0"/>
+            <a:ext cx="2971800" cy="457200"/>
+          </a:xfrm>
+          <a:prstGeom prst="rect">
+            <a:avLst/>
+          </a:prstGeom>
+        </p:spPr>
+        <p:txBody>
+          <a:bodyPr vert="horz" lIns="91440" tIns="45720" rIns="91440" bIns="45720" rtlCol="0"/>
+          <a:lstStyle>
+            <a:lvl1pPr algn="r">
+              <a:defRPr sz="1200"/>
+            </a:lvl1pPr>
+          </a:lstStyle>
+          <a:p>
+            <a:fld id="{0F89C1C7-3DCD-1040-A9CF-14679D8B5DDD}" type="datetimeFigureOut">
+              <a:rPr lang="en-US" smtClean="0"/>
+              <a:t>10/17/16</a:t>
+            </a:fld>
+            <a:endParaRPr lang="en-US"/>
+          </a:p>
+        </p:txBody>
+      </p:sp>
+      <p:sp>
+        <p:nvSpPr>
+          <p:cNvPr id="4" name="Slide Image Placeholder 3"/>
+          <p:cNvSpPr>
+            <a:spLocks noGrp="1" noRot="1" noChangeAspect="1"/>
+          </p:cNvSpPr>
+          <p:nvPr>
+            <p:ph type="sldImg" idx="2"/>
+          </p:nvPr>
+        </p:nvSpPr>
+        <p:spPr>
+          <a:xfrm>
+            <a:off x="1143000" y="685800"/>
+            <a:ext cx="4572000" cy="3429000"/>
+          </a:xfrm>
+          <a:prstGeom prst="rect">
+            <a:avLst/>
+          </a:prstGeom>
+          <a:noFill/>
+          <a:ln w="12700">
+            <a:solidFill>
+              <a:prstClr val="black"/>
+            </a:solidFill>
+          </a:ln>
+        </p:spPr>
+        <p:txBody>
+          <a:bodyPr vert="horz" lIns="91440" tIns="45720" rIns="91440" bIns="45720" rtlCol="0" anchor="ctr"/>
+          <a:lstStyle/>
+          <a:p>
+            <a:endParaRPr lang="en-US"/>
+          </a:p>
+        </p:txBody>
+      </p:sp>
+      <p:sp>
+        <p:nvSpPr>
+          <p:cNvPr id="5" name="Notes Placeholder 4"/>
+          <p:cNvSpPr>
+            <a:spLocks noGrp="1"/>
+          </p:cNvSpPr>
+          <p:nvPr>
+            <p:ph type="body" sz="quarter" idx="3"/>
+          </p:nvPr>
+        </p:nvSpPr>
+        <p:spPr>
+          <a:xfrm>
+            <a:off x="685800" y="4343400"/>
+            <a:ext cx="5486400" cy="4114800"/>
+          </a:xfrm>
+          <a:prstGeom prst="rect">
+            <a:avLst/>
+          </a:prstGeom>
+        </p:spPr>
+        <p:txBody>
+          <a:bodyPr vert="horz" lIns="91440" tIns="45720" rIns="91440" bIns="45720" rtlCol="0"/>
+          <a:lstStyle/>
+          <a:p>
+            <a:pPr lvl="0"/>
+            <a:r>
+              <a:rPr lang="en-US" smtClean="0"/>
+              <a:t>Click to edit Master text styles</a:t>
+            </a:r>
+          </a:p>
+          <a:p>
+            <a:pPr lvl="1"/>
+            <a:r>
+              <a:rPr lang="en-US" smtClean="0"/>
+              <a:t>Second level</a:t>
+            </a:r>
+          </a:p>
+          <a:p>
+            <a:pPr lvl="2"/>
+            <a:r>
+              <a:rPr lang="en-US" smtClean="0"/>
+              <a:t>Third level</a:t>
+            </a:r>
+          </a:p>
+          <a:p>
+            <a:pPr lvl="3"/>
+            <a:r>
+              <a:rPr lang="en-US" smtClean="0"/>
+              <a:t>Fourth level</a:t>
+            </a:r>
+          </a:p>
+          <a:p>
+            <a:pPr lvl="4"/>
+            <a:r>
+              <a:rPr lang="en-US" smtClean="0"/>
+              <a:t>Fifth level</a:t>
+            </a:r>
+            <a:endParaRPr lang="en-US"/>
+          </a:p>
+        </p:txBody>
+      </p:sp>
+      <p:sp>
+        <p:nvSpPr>
+          <p:cNvPr id="6" name="Footer Placeholder 5"/>
+          <p:cNvSpPr>
+            <a:spLocks noGrp="1"/>
+          </p:cNvSpPr>
+          <p:nvPr>
+            <p:ph type="ftr" sz="quarter" idx="4"/>
+          </p:nvPr>
+        </p:nvSpPr>
+        <p:spPr>
+          <a:xfrm>
+            <a:off x="0" y="8685213"/>
+            <a:ext cx="2971800" cy="457200"/>
+          </a:xfrm>
+          <a:prstGeom prst="rect">
+            <a:avLst/>
+          </a:prstGeom>
+        </p:spPr>
+        <p:txBody>
+          <a:bodyPr vert="horz" lIns="91440" tIns="45720" rIns="91440" bIns="45720" rtlCol="0" anchor="b"/>
+          <a:lstStyle>
+            <a:lvl1pPr algn="l">
+              <a:defRPr sz="1200"/>
+            </a:lvl1pPr>
+          </a:lstStyle>
+          <a:p>
+            <a:endParaRPr lang="en-US"/>
+          </a:p>
+        </p:txBody>
+      </p:sp>
+      <p:sp>
+        <p:nvSpPr>
+          <p:cNvPr id="7" name="Slide Number Placeholder 6"/>
+          <p:cNvSpPr>
+            <a:spLocks noGrp="1"/>
+          </p:cNvSpPr>
+          <p:nvPr>
+            <p:ph type="sldNum" sz="quarter" idx="5"/>
+          </p:nvPr>
+        </p:nvSpPr>
+        <p:spPr>
+          <a:xfrm>
+            <a:off x="3884613" y="8685213"/>
+            <a:ext cx="2971800" cy="457200"/>
+          </a:xfrm>
+          <a:prstGeom prst="rect">
+            <a:avLst/>
+          </a:prstGeom>
+        </p:spPr>
+        <p:txBody>
+          <a:bodyPr vert="horz" lIns="91440" tIns="45720" rIns="91440" bIns="45720" rtlCol="0" anchor="b"/>
+          <a:lstStyle>
+            <a:lvl1pPr algn="r">
+              <a:defRPr sz="1200"/>
+            </a:lvl1pPr>
+          </a:lstStyle>
+          <a:p>
+            <a:fld id="{BB5E49A5-4136-284D-997B-48E1D791AD67}" type="slidenum">
+              <a:rPr lang="en-US" smtClean="0"/>
+              <a:t>‹#›</a:t>
+            </a:fld>
+            <a:endParaRPr lang="en-US"/>
+          </a:p>
+        </p:txBody>
+      </p:sp>
+    </p:spTree>
+    <p:extLst>
+      <p:ext uri="{BB962C8B-B14F-4D97-AF65-F5344CB8AC3E}">
+        <p14:creationId xmlns:p14="http://schemas.microsoft.com/office/powerpoint/2010/main" val="2623252185"/>
+      </p:ext>
+    </p:extLst>
+  </p:cSld>
+  <p:clrMap bg1="lt1" tx1="dk1" bg2="lt2" tx2="dk2" accent1="accent1" accent2="accent2" accent3="accent3" accent4="accent4" accent5="accent5" accent6="accent6" hlink="hlink" folHlink="folHlink"/>
+  <p:notesStyle>
+    <a:lvl1pPr marL="0" algn="l" defTabSz="457200" rtl="0" eaLnBrk="1" latinLnBrk="0" hangingPunct="1">
+      <a:defRPr sz="1200" kern="1200">
+        <a:solidFill>
+          <a:schemeClr val="tx1"/>
+        </a:solidFill>
+        <a:latin typeface="+mn-lt"/>
+        <a:ea typeface="+mn-ea"/>
+        <a:cs typeface="+mn-cs"/>
+      </a:defRPr>
+    </a:lvl1pPr>
+    <a:lvl2pPr marL="457200" algn="l" defTabSz="457200" rtl="0" eaLnBrk="1" latinLnBrk="0" hangingPunct="1">
+      <a:defRPr sz="1200" kern="1200">
+        <a:solidFill>
+          <a:schemeClr val="tx1"/>
+        </a:solidFill>
+        <a:latin typeface="+mn-lt"/>
+        <a:ea typeface="+mn-ea"/>
+        <a:cs typeface="+mn-cs"/>
+      </a:defRPr>
+    </a:lvl2pPr>
+    <a:lvl3pPr marL="914400" algn="l" defTabSz="457200" rtl="0" eaLnBrk="1" latinLnBrk="0" hangingPunct="1">
+      <a:defRPr sz="1200" kern="1200">
+        <a:solidFill>
+          <a:schemeClr val="tx1"/>
+        </a:solidFill>
+        <a:latin typeface="+mn-lt"/>
+        <a:ea typeface="+mn-ea"/>
+        <a:cs typeface="+mn-cs"/>
+      </a:defRPr>
+    </a:lvl3pPr>
+    <a:lvl4pPr marL="1371600" algn="l" defTabSz="457200" rtl="0" eaLnBrk="1" latinLnBrk="0" hangingPunct="1">
+      <a:defRPr sz="1200" kern="1200">
+        <a:solidFill>
+          <a:schemeClr val="tx1"/>
+        </a:solidFill>
+        <a:latin typeface="+mn-lt"/>
+        <a:ea typeface="+mn-ea"/>
+        <a:cs typeface="+mn-cs"/>
+      </a:defRPr>
+    </a:lvl4pPr>
+    <a:lvl5pPr marL="1828800" algn="l" defTabSz="457200" rtl="0" eaLnBrk="1" latinLnBrk="0" hangingPunct="1">
+      <a:defRPr sz="1200" kern="1200">
+        <a:solidFill>
+          <a:schemeClr val="tx1"/>
+        </a:solidFill>
+        <a:latin typeface="+mn-lt"/>
+        <a:ea typeface="+mn-ea"/>
+        <a:cs typeface="+mn-cs"/>
+      </a:defRPr>
+    </a:lvl5pPr>
+    <a:lvl6pPr marL="2286000" algn="l" defTabSz="457200" rtl="0" eaLnBrk="1" latinLnBrk="0" hangingPunct="1">
+      <a:defRPr sz="1200" kern="1200">
+        <a:solidFill>
+          <a:schemeClr val="tx1"/>
+        </a:solidFill>
+        <a:latin typeface="+mn-lt"/>
+        <a:ea typeface="+mn-ea"/>
+        <a:cs typeface="+mn-cs"/>
+      </a:defRPr>
+    </a:lvl6pPr>
+    <a:lvl7pPr marL="2743200" algn="l" defTabSz="457200" rtl="0" eaLnBrk="1" latinLnBrk="0" hangingPunct="1">
+      <a:defRPr sz="1200" kern="1200">
+        <a:solidFill>
+          <a:schemeClr val="tx1"/>
+        </a:solidFill>
+        <a:latin typeface="+mn-lt"/>
+        <a:ea typeface="+mn-ea"/>
+        <a:cs typeface="+mn-cs"/>
+      </a:defRPr>
+    </a:lvl7pPr>
+    <a:lvl8pPr marL="3200400" algn="l" defTabSz="457200" rtl="0" eaLnBrk="1" latinLnBrk="0" hangingPunct="1">
+      <a:defRPr sz="1200" kern="1200">
+        <a:solidFill>
+          <a:schemeClr val="tx1"/>
+        </a:solidFill>
+        <a:latin typeface="+mn-lt"/>
+        <a:ea typeface="+mn-ea"/>
+        <a:cs typeface="+mn-cs"/>
+      </a:defRPr>
+    </a:lvl8pPr>
+    <a:lvl9pPr marL="3657600" algn="l" defTabSz="457200" rtl="0" eaLnBrk="1" latinLnBrk="0" hangingPunct="1">
+      <a:defRPr sz="1200" kern="1200">
+        <a:solidFill>
+          <a:schemeClr val="tx1"/>
+        </a:solidFill>
+        <a:latin typeface="+mn-lt"/>
+        <a:ea typeface="+mn-ea"/>
+        <a:cs typeface="+mn-cs"/>
+      </a:defRPr>
+    </a:lvl9pPr>
+  </p:notesStyle>
+</p:notesMaster>
+</file>
+
+<file path=ppt/notesSlides/notesSlide1.xml><?xml version="1.0" encoding="utf-8"?>
+<p:notes xmlns:a="http://schemas.openxmlformats.org/drawingml/2006/main" xmlns:p="http://schemas.openxmlformats.org/presentationml/2006/main" xmlns:r="http://schemas.openxmlformats.org/officeDocument/2006/relationships">
+  <p:cSld>
+    <p:spTree>
+      <p:nvGrpSpPr>
+        <p:cNvPr id="1" name=""/>
+        <p:cNvGrpSpPr/>
+        <p:nvPr/>
+      </p:nvGrpSpPr>
+      <p:grpSpPr>
+        <a:xfrm>
+          <a:off x="0" y="0"/>
+          <a:ext cx="0" cy="0"/>
+          <a:chOff x="0" y="0"/>
+          <a:chExt cx="0" cy="0"/>
+        </a:xfrm>
+      </p:grpSpPr>
+      <p:sp>
+        <p:nvSpPr>
+          <p:cNvPr id="2" name="Slide Image Placeholder 1"/>
+          <p:cNvSpPr>
+            <a:spLocks noGrp="1"/>
+          </p:cNvSpPr>
+          <p:nvPr>
+            <p:ph type="sldImg" idx="2"/>
+          </p:nvPr>
+        </p:nvSpPr>
+        <p:spPr/>
+      </p:sp>
+      <p:sp>
+        <p:nvSpPr>
+          <p:cNvPr id="3" name="Notes Placeholder 2"/>
+          <p:cNvSpPr>
+            <a:spLocks noGrp="1"/>
+          </p:cNvSpPr>
+          <p:nvPr>
+            <p:ph type="body" idx="3" sz="quarter"/>
+          </p:nvPr>
+        </p:nvSpPr>
+        <p:spPr/>
+        <p:txBody>
+          <a:bodyPr/>
+          <a:lstStyle/>
+          <a:p>
+            <a:r>
+              <a:rPr sz="1200">
+                <a:latin typeface="Calibri"/>
+              </a:rPr>
+              <a:t>You need at least one Gen 3 vehicle per two groups for the sensor work. A Gen 2 is still useful - the second step of the first activity needs one.</a:t>
+            </a:r>
+          </a:p>
+          <a:p>
+            <a:r>
+              <a:rPr sz="1200">
+                <a:latin typeface="Calibri"/>
+              </a:rPr>
+              <a:t>Blocks out again. The current measurements need a motor spinning freely and then held.</a:t>
+            </a:r>
+          </a:p>
+          <a:p>
+            <a:r>
+              <a:rPr sz="1200">
+                <a:latin typeface="Calibri"/>
+              </a:rPr>
+              <a:t>This is the last lesson. Leave time at the end for the capstone slide - it is what they take away.</a:t>
+            </a:r>
+          </a:p>
+        </p:txBody>
+      </p:sp>
+      <p:sp>
+        <p:nvSpPr>
+          <p:cNvPr id="4" name="Slide Number Placeholder 3"/>
+          <p:cNvSpPr>
+            <a:spLocks noGrp="1"/>
+          </p:cNvSpPr>
+          <p:nvPr>
+            <p:ph type="sldNum" idx="5" sz="quarter"/>
+          </p:nvPr>
+        </p:nvSpPr>
+        <p:spPr/>
+      </p:sp>
+    </p:spTree>
+  </p:cSld>
+  <p:clrMapOvr>
+    <a:masterClrMapping/>
+  </p:clrMapOvr>
+</p:notes>
+</file>
+
+<file path=ppt/notesSlides/notesSlide10.xml><?xml version="1.0" encoding="utf-8"?>
+<p:notes xmlns:a="http://schemas.openxmlformats.org/drawingml/2006/main" xmlns:p="http://schemas.openxmlformats.org/presentationml/2006/main" xmlns:r="http://schemas.openxmlformats.org/officeDocument/2006/relationships">
+  <p:cSld>
+    <p:spTree>
+      <p:nvGrpSpPr>
+        <p:cNvPr id="1" name=""/>
+        <p:cNvGrpSpPr/>
+        <p:nvPr/>
+      </p:nvGrpSpPr>
+      <p:grpSpPr>
+        <a:xfrm>
+          <a:off x="0" y="0"/>
+          <a:ext cx="0" cy="0"/>
+          <a:chOff x="0" y="0"/>
+          <a:chExt cx="0" cy="0"/>
+        </a:xfrm>
+      </p:grpSpPr>
+      <p:sp>
+        <p:nvSpPr>
+          <p:cNvPr id="2" name="Slide Image Placeholder 1"/>
+          <p:cNvSpPr>
+            <a:spLocks noGrp="1"/>
+          </p:cNvSpPr>
+          <p:nvPr>
+            <p:ph type="sldImg" idx="2"/>
+          </p:nvPr>
+        </p:nvSpPr>
+        <p:spPr/>
+      </p:sp>
+      <p:sp>
+        <p:nvSpPr>
+          <p:cNvPr id="3" name="Notes Placeholder 2"/>
+          <p:cNvSpPr>
+            <a:spLocks noGrp="1"/>
+          </p:cNvSpPr>
+          <p:nvPr>
+            <p:ph type="body" idx="3" sz="quarter"/>
+          </p:nvPr>
+        </p:nvSpPr>
+        <p:spPr/>
+        <p:txBody>
+          <a:bodyPr/>
+          <a:lstStyle/>
+          <a:p>
+            <a:r>
+              <a:rPr sz="1200">
+                <a:latin typeface="Calibri"/>
+              </a:rPr>
+              <a:t>Two relationships, and between them they explain every resistor and every current budget on this vehicle.</a:t>
+            </a:r>
+          </a:p>
+          <a:p>
+            <a:r>
+              <a:rPr sz="1200">
+                <a:latin typeface="Calibri"/>
+              </a:rPr>
+              <a:t>Do one worked example on the board before they look at the slide, and make them tell you which quantity is the unknown.</a:t>
+            </a:r>
+          </a:p>
+          <a:p>
+            <a:r>
+              <a:rPr sz="1200">
+                <a:latin typeface="Calibri"/>
+              </a:rPr>
+              <a:t>Units matter more than the algebra here. Volts, amps, ohms, watts - keep saying them.</a:t>
+            </a:r>
+          </a:p>
+          <a:p>
+            <a:r>
+              <a:rPr sz="1200">
+                <a:latin typeface="Calibri"/>
+              </a:rPr>
+              <a:t>The reason this is in a robotics course: the LED resistor and the 32-LED current budget are both this, and getting them wrong smells of hot plastic.</a:t>
+            </a:r>
+          </a:p>
+        </p:txBody>
+      </p:sp>
+      <p:sp>
+        <p:nvSpPr>
+          <p:cNvPr id="4" name="Slide Number Placeholder 3"/>
+          <p:cNvSpPr>
+            <a:spLocks noGrp="1"/>
+          </p:cNvSpPr>
+          <p:nvPr>
+            <p:ph type="sldNum" idx="5" sz="quarter"/>
+          </p:nvPr>
+        </p:nvSpPr>
+        <p:spPr/>
+      </p:sp>
+    </p:spTree>
+  </p:cSld>
+  <p:clrMapOvr>
+    <a:masterClrMapping/>
+  </p:clrMapOvr>
+</p:notes>
+</file>
+
+<file path=ppt/notesSlides/notesSlide11.xml><?xml version="1.0" encoding="utf-8"?>
+<p:notes xmlns:a="http://schemas.openxmlformats.org/drawingml/2006/main" xmlns:p="http://schemas.openxmlformats.org/presentationml/2006/main" xmlns:r="http://schemas.openxmlformats.org/officeDocument/2006/relationships">
+  <p:cSld>
+    <p:spTree>
+      <p:nvGrpSpPr>
+        <p:cNvPr id="1" name=""/>
+        <p:cNvGrpSpPr/>
+        <p:nvPr/>
+      </p:nvGrpSpPr>
+      <p:grpSpPr>
+        <a:xfrm>
+          <a:off x="0" y="0"/>
+          <a:ext cx="0" cy="0"/>
+          <a:chOff x="0" y="0"/>
+          <a:chExt cx="0" cy="0"/>
+        </a:xfrm>
+      </p:grpSpPr>
+      <p:sp>
+        <p:nvSpPr>
+          <p:cNvPr id="2" name="Slide Image Placeholder 1"/>
+          <p:cNvSpPr>
+            <a:spLocks noGrp="1"/>
+          </p:cNvSpPr>
+          <p:nvPr>
+            <p:ph type="sldImg" idx="2"/>
+          </p:nvPr>
+        </p:nvSpPr>
+        <p:spPr/>
+      </p:sp>
+      <p:sp>
+        <p:nvSpPr>
+          <p:cNvPr id="3" name="Notes Placeholder 2"/>
+          <p:cNvSpPr>
+            <a:spLocks noGrp="1"/>
+          </p:cNvSpPr>
+          <p:nvPr>
+            <p:ph type="body" idx="3" sz="quarter"/>
+          </p:nvPr>
+        </p:nvSpPr>
+        <p:spPr/>
+        <p:txBody>
+          <a:bodyPr/>
+          <a:lstStyle/>
+          <a:p>
+            <a:r>
+              <a:rPr sz="1200">
+                <a:latin typeface="Calibri"/>
+              </a:rPr>
+              <a:t>No library. Two functions and a datasheet. That is the point of the slide.</a:t>
+            </a:r>
+          </a:p>
+          <a:p>
+            <a:r>
+              <a:rPr sz="1200">
+                <a:latin typeface="Calibri"/>
+              </a:rPr>
+              <a:t>The repeated start matters: a full stop would let another master grab the bus between writing the register number and reading the answer.</a:t>
+            </a:r>
+          </a:p>
+          <a:p>
+            <a:r>
+              <a:rPr sz="1200">
+                <a:latin typeface="Calibri"/>
+              </a:rPr>
+              <a:t>The signed read is the trap. Read the shunt register unsigned and every regenerative spike comes back as a huge positive number.</a:t>
+            </a:r>
+          </a:p>
+          <a:p>
+            <a:r>
+              <a:rPr sz="1200">
+                <a:latin typeface="Calibri"/>
+              </a:rPr>
+              <a:t>The bus voltage register keeps flags in the bottom three bits, which is why it shifts right by three. That is normal for register maps, and reading a datasheet is a skill worth naming.</a:t>
+            </a:r>
+          </a:p>
+        </p:txBody>
+      </p:sp>
+      <p:sp>
+        <p:nvSpPr>
+          <p:cNvPr id="4" name="Slide Number Placeholder 3"/>
+          <p:cNvSpPr>
+            <a:spLocks noGrp="1"/>
+          </p:cNvSpPr>
+          <p:nvPr>
+            <p:ph type="sldNum" idx="5" sz="quarter"/>
+          </p:nvPr>
+        </p:nvSpPr>
+        <p:spPr/>
+      </p:sp>
+    </p:spTree>
+  </p:cSld>
+  <p:clrMapOvr>
+    <a:masterClrMapping/>
+  </p:clrMapOvr>
+</p:notes>
+</file>
+
+<file path=ppt/notesSlides/notesSlide12.xml><?xml version="1.0" encoding="utf-8"?>
+<p:notes xmlns:a="http://schemas.openxmlformats.org/drawingml/2006/main" xmlns:p="http://schemas.openxmlformats.org/presentationml/2006/main" xmlns:r="http://schemas.openxmlformats.org/officeDocument/2006/relationships">
+  <p:cSld>
+    <p:spTree>
+      <p:nvGrpSpPr>
+        <p:cNvPr id="1" name=""/>
+        <p:cNvGrpSpPr/>
+        <p:nvPr/>
+      </p:nvGrpSpPr>
+      <p:grpSpPr>
+        <a:xfrm>
+          <a:off x="0" y="0"/>
+          <a:ext cx="0" cy="0"/>
+          <a:chOff x="0" y="0"/>
+          <a:chExt cx="0" cy="0"/>
+        </a:xfrm>
+      </p:grpSpPr>
+      <p:sp>
+        <p:nvSpPr>
+          <p:cNvPr id="2" name="Slide Image Placeholder 1"/>
+          <p:cNvSpPr>
+            <a:spLocks noGrp="1"/>
+          </p:cNvSpPr>
+          <p:nvPr>
+            <p:ph type="sldImg" idx="2"/>
+          </p:nvPr>
+        </p:nvSpPr>
+        <p:spPr/>
+      </p:sp>
+      <p:sp>
+        <p:nvSpPr>
+          <p:cNvPr id="3" name="Notes Placeholder 2"/>
+          <p:cNvSpPr>
+            <a:spLocks noGrp="1"/>
+          </p:cNvSpPr>
+          <p:nvPr>
+            <p:ph type="body" idx="3" sz="quarter"/>
+          </p:nvPr>
+        </p:nvSpPr>
+        <p:spPr/>
+        <p:txBody>
+          <a:bodyPr/>
+          <a:lstStyle/>
+          <a:p>
+            <a:r>
+              <a:rPr sz="1200">
+                <a:latin typeface="Calibri"/>
+              </a:rPr>
+              <a:t>Twenty seconds. Second activity.</a:t>
+            </a:r>
+          </a:p>
+        </p:txBody>
+      </p:sp>
+      <p:sp>
+        <p:nvSpPr>
+          <p:cNvPr id="4" name="Slide Number Placeholder 3"/>
+          <p:cNvSpPr>
+            <a:spLocks noGrp="1"/>
+          </p:cNvSpPr>
+          <p:nvPr>
+            <p:ph type="sldNum" idx="5" sz="quarter"/>
+          </p:nvPr>
+        </p:nvSpPr>
+        <p:spPr/>
+      </p:sp>
+    </p:spTree>
+  </p:cSld>
+  <p:clrMapOvr>
+    <a:masterClrMapping/>
+  </p:clrMapOvr>
+</p:notes>
+</file>
+
+<file path=ppt/notesSlides/notesSlide13.xml><?xml version="1.0" encoding="utf-8"?>
+<p:notes xmlns:a="http://schemas.openxmlformats.org/drawingml/2006/main" xmlns:p="http://schemas.openxmlformats.org/presentationml/2006/main" xmlns:r="http://schemas.openxmlformats.org/officeDocument/2006/relationships">
+  <p:cSld>
+    <p:spTree>
+      <p:nvGrpSpPr>
+        <p:cNvPr id="1" name=""/>
+        <p:cNvGrpSpPr/>
+        <p:nvPr/>
+      </p:nvGrpSpPr>
+      <p:grpSpPr>
+        <a:xfrm>
+          <a:off x="0" y="0"/>
+          <a:ext cx="0" cy="0"/>
+          <a:chOff x="0" y="0"/>
+          <a:chExt cx="0" cy="0"/>
+        </a:xfrm>
+      </p:grpSpPr>
+      <p:sp>
+        <p:nvSpPr>
+          <p:cNvPr id="2" name="Slide Image Placeholder 1"/>
+          <p:cNvSpPr>
+            <a:spLocks noGrp="1"/>
+          </p:cNvSpPr>
+          <p:nvPr>
+            <p:ph type="sldImg" idx="2"/>
+          </p:nvPr>
+        </p:nvSpPr>
+        <p:spPr/>
+      </p:sp>
+      <p:sp>
+        <p:nvSpPr>
+          <p:cNvPr id="3" name="Notes Placeholder 2"/>
+          <p:cNvSpPr>
+            <a:spLocks noGrp="1"/>
+          </p:cNvSpPr>
+          <p:nvPr>
+            <p:ph type="body" idx="3" sz="quarter"/>
+          </p:nvPr>
+        </p:nvSpPr>
+        <p:spPr/>
+        <p:txBody>
+          <a:bodyPr/>
+          <a:lstStyle/>
+          <a:p>
+            <a:r>
+              <a:rPr sz="1200">
+                <a:latin typeface="Calibri"/>
+              </a:rPr>
+              <a:t>Step 2 needs care: hold the wheel firmly but keep fingers out of the spokes, and do not hold a stalled motor for more than a second or two.</a:t>
+            </a:r>
+          </a:p>
+          <a:p>
+            <a:r>
+              <a:rPr sz="1200">
+                <a:latin typeface="Calibri"/>
+              </a:rPr>
+              <a:t>Step 3 is the diagnostic payoff - an unplugged motor draws almost nothing, and that is unmistakable in the numbers.</a:t>
+            </a:r>
+          </a:p>
+          <a:p>
+            <a:r>
+              <a:rPr sz="1200">
+                <a:latin typeface="Calibri"/>
+              </a:rPr>
+              <a:t>Steps 5 and 6 connect this to the beginner course. Get them to compare the motor draw with the LED power budget and say which dominates.</a:t>
+            </a:r>
+          </a:p>
+          <a:p>
+            <a:r>
+              <a:rPr sz="1200">
+                <a:latin typeface="Calibri"/>
+              </a:rPr>
+              <a:t>Collect resting currents from a few groups. They vary, and the variation is itself interesting.</a:t>
+            </a:r>
+          </a:p>
+        </p:txBody>
+      </p:sp>
+      <p:sp>
+        <p:nvSpPr>
+          <p:cNvPr id="4" name="Slide Number Placeholder 3"/>
+          <p:cNvSpPr>
+            <a:spLocks noGrp="1"/>
+          </p:cNvSpPr>
+          <p:nvPr>
+            <p:ph type="sldNum" idx="5" sz="quarter"/>
+          </p:nvPr>
+        </p:nvSpPr>
+        <p:spPr/>
+      </p:sp>
+    </p:spTree>
+  </p:cSld>
+  <p:clrMapOvr>
+    <a:masterClrMapping/>
+  </p:clrMapOvr>
+</p:notes>
+</file>
+
+<file path=ppt/notesSlides/notesSlide14.xml><?xml version="1.0" encoding="utf-8"?>
+<p:notes xmlns:a="http://schemas.openxmlformats.org/drawingml/2006/main" xmlns:p="http://schemas.openxmlformats.org/presentationml/2006/main" xmlns:r="http://schemas.openxmlformats.org/officeDocument/2006/relationships">
+  <p:cSld>
+    <p:spTree>
+      <p:nvGrpSpPr>
+        <p:cNvPr id="1" name=""/>
+        <p:cNvGrpSpPr/>
+        <p:nvPr/>
+      </p:nvGrpSpPr>
+      <p:grpSpPr>
+        <a:xfrm>
+          <a:off x="0" y="0"/>
+          <a:ext cx="0" cy="0"/>
+          <a:chOff x="0" y="0"/>
+          <a:chExt cx="0" cy="0"/>
+        </a:xfrm>
+      </p:grpSpPr>
+      <p:sp>
+        <p:nvSpPr>
+          <p:cNvPr id="2" name="Slide Image Placeholder 1"/>
+          <p:cNvSpPr>
+            <a:spLocks noGrp="1"/>
+          </p:cNvSpPr>
+          <p:nvPr>
+            <p:ph type="sldImg" idx="2"/>
+          </p:nvPr>
+        </p:nvSpPr>
+        <p:spPr/>
+      </p:sp>
+      <p:sp>
+        <p:nvSpPr>
+          <p:cNvPr id="3" name="Notes Placeholder 2"/>
+          <p:cNvSpPr>
+            <a:spLocks noGrp="1"/>
+          </p:cNvSpPr>
+          <p:nvPr>
+            <p:ph type="body" idx="3" sz="quarter"/>
+          </p:nvPr>
+        </p:nvSpPr>
+        <p:spPr/>
+        <p:txBody>
+          <a:bodyPr/>
+          <a:lstStyle/>
+          <a:p>
+            <a:r>
+              <a:rPr sz="1200">
+                <a:latin typeface="Calibri"/>
+              </a:rPr>
+              <a:t>(Continued from the previous slide - the same notes apply.)</a:t>
+            </a:r>
+          </a:p>
+          <a:p/>
+          <a:p>
+            <a:r>
+              <a:rPr sz="1200">
+                <a:latin typeface="Calibri"/>
+              </a:rPr>
+              <a:t>Step 2 needs care: hold the wheel firmly but keep fingers out of the spokes, and do not hold a stalled motor for more than a second or two.</a:t>
+            </a:r>
+          </a:p>
+          <a:p>
+            <a:r>
+              <a:rPr sz="1200">
+                <a:latin typeface="Calibri"/>
+              </a:rPr>
+              <a:t>Step 3 is the diagnostic payoff - an unplugged motor draws almost nothing, and that is unmistakable in the numbers.</a:t>
+            </a:r>
+          </a:p>
+          <a:p>
+            <a:r>
+              <a:rPr sz="1200">
+                <a:latin typeface="Calibri"/>
+              </a:rPr>
+              <a:t>Steps 5 and 6 connect this to the beginner course. Get them to compare the motor draw with the LED power budget and say which dominates.</a:t>
+            </a:r>
+          </a:p>
+          <a:p>
+            <a:r>
+              <a:rPr sz="1200">
+                <a:latin typeface="Calibri"/>
+              </a:rPr>
+              <a:t>Collect resting currents from a few groups. They vary, and the variation is itself interesting.</a:t>
+            </a:r>
+          </a:p>
+        </p:txBody>
+      </p:sp>
+      <p:sp>
+        <p:nvSpPr>
+          <p:cNvPr id="4" name="Slide Number Placeholder 3"/>
+          <p:cNvSpPr>
+            <a:spLocks noGrp="1"/>
+          </p:cNvSpPr>
+          <p:nvPr>
+            <p:ph type="sldNum" idx="5" sz="quarter"/>
+          </p:nvPr>
+        </p:nvSpPr>
+        <p:spPr/>
+      </p:sp>
+    </p:spTree>
+  </p:cSld>
+  <p:clrMapOvr>
+    <a:masterClrMapping/>
+  </p:clrMapOvr>
+</p:notes>
+</file>
+
+<file path=ppt/notesSlides/notesSlide15.xml><?xml version="1.0" encoding="utf-8"?>
+<p:notes xmlns:a="http://schemas.openxmlformats.org/drawingml/2006/main" xmlns:p="http://schemas.openxmlformats.org/presentationml/2006/main" xmlns:r="http://schemas.openxmlformats.org/officeDocument/2006/relationships">
+  <p:cSld>
+    <p:spTree>
+      <p:nvGrpSpPr>
+        <p:cNvPr id="1" name=""/>
+        <p:cNvGrpSpPr/>
+        <p:nvPr/>
+      </p:nvGrpSpPr>
+      <p:grpSpPr>
+        <a:xfrm>
+          <a:off x="0" y="0"/>
+          <a:ext cx="0" cy="0"/>
+          <a:chOff x="0" y="0"/>
+          <a:chExt cx="0" cy="0"/>
+        </a:xfrm>
+      </p:grpSpPr>
+      <p:sp>
+        <p:nvSpPr>
+          <p:cNvPr id="2" name="Slide Image Placeholder 1"/>
+          <p:cNvSpPr>
+            <a:spLocks noGrp="1"/>
+          </p:cNvSpPr>
+          <p:nvPr>
+            <p:ph type="sldImg" idx="2"/>
+          </p:nvPr>
+        </p:nvSpPr>
+        <p:spPr/>
+      </p:sp>
+      <p:sp>
+        <p:nvSpPr>
+          <p:cNvPr id="3" name="Notes Placeholder 2"/>
+          <p:cNvSpPr>
+            <a:spLocks noGrp="1"/>
+          </p:cNvSpPr>
+          <p:nvPr>
+            <p:ph type="body" idx="3" sz="quarter"/>
+          </p:nvPr>
+        </p:nvSpPr>
+        <p:spPr/>
+        <p:txBody>
+          <a:bodyPr/>
+          <a:lstStyle/>
+          <a:p>
+            <a:r>
+              <a:rPr sz="1200">
+                <a:latin typeface="Calibri"/>
+              </a:rPr>
+              <a:t>Have a Gen 3 open on the desk and let people look at the actual part before the theory starts.</a:t>
+            </a:r>
+          </a:p>
+          <a:p>
+            <a:r>
+              <a:rPr sz="1200">
+                <a:latin typeface="Calibri"/>
+              </a:rPr>
+              <a:t>The shunt is the small, low-value resistor next to it. That is what the whole measurement happens across.</a:t>
+            </a:r>
+          </a:p>
+          <a:p>
+            <a:r>
+              <a:rPr sz="1200">
+                <a:latin typeface="Calibri"/>
+              </a:rPr>
+              <a:t>Two wires to GPIO 32 and 33 is the entire electrical interface. Everything else is I2C protocol.</a:t>
+            </a:r>
+          </a:p>
+          <a:p>
+            <a:r>
+              <a:rPr sz="1200">
+                <a:latin typeface="Calibri"/>
+              </a:rPr>
+              <a:t>The close-up photograph is still outstanding for this deck. Until it arrives, pass a board round.</a:t>
+            </a:r>
+          </a:p>
+        </p:txBody>
+      </p:sp>
+      <p:sp>
+        <p:nvSpPr>
+          <p:cNvPr id="4" name="Slide Number Placeholder 3"/>
+          <p:cNvSpPr>
+            <a:spLocks noGrp="1"/>
+          </p:cNvSpPr>
+          <p:nvPr>
+            <p:ph type="sldNum" idx="5" sz="quarter"/>
+          </p:nvPr>
+        </p:nvSpPr>
+        <p:spPr/>
+      </p:sp>
+    </p:spTree>
+  </p:cSld>
+  <p:clrMapOvr>
+    <a:masterClrMapping/>
+  </p:clrMapOvr>
+</p:notes>
+</file>
+
+<file path=ppt/notesSlides/notesSlide16.xml><?xml version="1.0" encoding="utf-8"?>
+<p:notes xmlns:a="http://schemas.openxmlformats.org/drawingml/2006/main" xmlns:p="http://schemas.openxmlformats.org/presentationml/2006/main" xmlns:r="http://schemas.openxmlformats.org/officeDocument/2006/relationships">
+  <p:cSld>
+    <p:spTree>
+      <p:nvGrpSpPr>
+        <p:cNvPr id="1" name=""/>
+        <p:cNvGrpSpPr/>
+        <p:nvPr/>
+      </p:nvGrpSpPr>
+      <p:grpSpPr>
+        <a:xfrm>
+          <a:off x="0" y="0"/>
+          <a:ext cx="0" cy="0"/>
+          <a:chOff x="0" y="0"/>
+          <a:chExt cx="0" cy="0"/>
+        </a:xfrm>
+      </p:grpSpPr>
+      <p:sp>
+        <p:nvSpPr>
+          <p:cNvPr id="2" name="Slide Image Placeholder 1"/>
+          <p:cNvSpPr>
+            <a:spLocks noGrp="1"/>
+          </p:cNvSpPr>
+          <p:nvPr>
+            <p:ph type="sldImg" idx="2"/>
+          </p:nvPr>
+        </p:nvSpPr>
+        <p:spPr/>
+      </p:sp>
+      <p:sp>
+        <p:nvSpPr>
+          <p:cNvPr id="3" name="Notes Placeholder 2"/>
+          <p:cNvSpPr>
+            <a:spLocks noGrp="1"/>
+          </p:cNvSpPr>
+          <p:nvPr>
+            <p:ph type="body" idx="3" sz="quarter"/>
+          </p:nvPr>
+        </p:nvSpPr>
+        <p:spPr/>
+        <p:txBody>
+          <a:bodyPr/>
+          <a:lstStyle/>
+          <a:p>
+            <a:r>
+              <a:rPr sz="1200">
+                <a:latin typeface="Calibri"/>
+              </a:rPr>
+              <a:t>Current is the cheapest sensor on the vehicle, because it is already there. Every fault has a shape.</a:t>
+            </a:r>
+          </a:p>
+          <a:p>
+            <a:r>
+              <a:rPr sz="1200">
+                <a:latin typeface="Calibri"/>
+              </a:rPr>
+              <a:t>Walk the three regions: no load, working, stalled. A stalled motor draws the most and moves the least, which is the worst of both.</a:t>
+            </a:r>
+          </a:p>
+          <a:p>
+            <a:r>
+              <a:rPr sz="1200">
+                <a:latin typeface="Calibri"/>
+              </a:rPr>
+              <a:t>Ask what a broken wire looks like. Near zero current with the command still on - and the vehicle limping in a circle.</a:t>
+            </a:r>
+          </a:p>
+          <a:p>
+            <a:r>
+              <a:rPr sz="1200">
+                <a:latin typeface="Calibri"/>
+              </a:rPr>
+              <a:t>This is the foundation of the powered self-test later in the lesson.</a:t>
+            </a:r>
+          </a:p>
+        </p:txBody>
+      </p:sp>
+      <p:sp>
+        <p:nvSpPr>
+          <p:cNvPr id="4" name="Slide Number Placeholder 3"/>
+          <p:cNvSpPr>
+            <a:spLocks noGrp="1"/>
+          </p:cNvSpPr>
+          <p:nvPr>
+            <p:ph type="sldNum" idx="5" sz="quarter"/>
+          </p:nvPr>
+        </p:nvSpPr>
+        <p:spPr/>
+      </p:sp>
+    </p:spTree>
+  </p:cSld>
+  <p:clrMapOvr>
+    <a:masterClrMapping/>
+  </p:clrMapOvr>
+</p:notes>
+</file>
+
+<file path=ppt/notesSlides/notesSlide17.xml><?xml version="1.0" encoding="utf-8"?>
+<p:notes xmlns:a="http://schemas.openxmlformats.org/drawingml/2006/main" xmlns:p="http://schemas.openxmlformats.org/presentationml/2006/main" xmlns:r="http://schemas.openxmlformats.org/officeDocument/2006/relationships">
+  <p:cSld>
+    <p:spTree>
+      <p:nvGrpSpPr>
+        <p:cNvPr id="1" name=""/>
+        <p:cNvGrpSpPr/>
+        <p:nvPr/>
+      </p:nvGrpSpPr>
+      <p:grpSpPr>
+        <a:xfrm>
+          <a:off x="0" y="0"/>
+          <a:ext cx="0" cy="0"/>
+          <a:chOff x="0" y="0"/>
+          <a:chExt cx="0" cy="0"/>
+        </a:xfrm>
+      </p:grpSpPr>
+      <p:sp>
+        <p:nvSpPr>
+          <p:cNvPr id="2" name="Slide Image Placeholder 1"/>
+          <p:cNvSpPr>
+            <a:spLocks noGrp="1"/>
+          </p:cNvSpPr>
+          <p:nvPr>
+            <p:ph type="sldImg" idx="2"/>
+          </p:nvPr>
+        </p:nvSpPr>
+        <p:spPr/>
+      </p:sp>
+      <p:sp>
+        <p:nvSpPr>
+          <p:cNvPr id="3" name="Notes Placeholder 2"/>
+          <p:cNvSpPr>
+            <a:spLocks noGrp="1"/>
+          </p:cNvSpPr>
+          <p:nvPr>
+            <p:ph type="body" idx="3" sz="quarter"/>
+          </p:nvPr>
+        </p:nvSpPr>
+        <p:spPr/>
+        <p:txBody>
+          <a:bodyPr/>
+          <a:lstStyle/>
+          <a:p>
+            <a:r>
+              <a:rPr sz="1200">
+                <a:latin typeface="Calibri"/>
+              </a:rPr>
+              <a:t>Five states, and it is driven from loop() rather than blocking. That is the same discipline as the lighting lesson.</a:t>
+            </a:r>
+          </a:p>
+          <a:p>
+            <a:r>
+              <a:rPr sz="1200">
+                <a:latin typeface="Calibri"/>
+              </a:rPr>
+              <a:t>So the LEDs keep animating and the console keeps responding while the test runs. Ask why that matters - because a machine that goes deaf during a self-test cannot be interrupted.</a:t>
+            </a:r>
+          </a:p>
+          <a:p>
+            <a:r>
+              <a:rPr sz="1200">
+                <a:latin typeface="Calibri"/>
+              </a:rPr>
+              <a:t>The GPIO 34 note is a real hardware trap. Input-only, no internal pulls, so the board carries an external pull-down.</a:t>
+            </a:r>
+          </a:p>
+          <a:p>
+            <a:r>
+              <a:rPr sz="1200">
+                <a:latin typeface="Calibri"/>
+              </a:rPr>
+              <a:t>A floating input-only pin reads whatever the room's electrical noise says. Worth saying, because somebody will try this on a breadboard.</a:t>
+            </a:r>
+          </a:p>
+        </p:txBody>
+      </p:sp>
+      <p:sp>
+        <p:nvSpPr>
+          <p:cNvPr id="4" name="Slide Number Placeholder 3"/>
+          <p:cNvSpPr>
+            <a:spLocks noGrp="1"/>
+          </p:cNvSpPr>
+          <p:nvPr>
+            <p:ph type="sldNum" idx="5" sz="quarter"/>
+          </p:nvPr>
+        </p:nvSpPr>
+        <p:spPr/>
+      </p:sp>
+    </p:spTree>
+  </p:cSld>
+  <p:clrMapOvr>
+    <a:masterClrMapping/>
+  </p:clrMapOvr>
+</p:notes>
+</file>
+
+<file path=ppt/notesSlides/notesSlide18.xml><?xml version="1.0" encoding="utf-8"?>
+<p:notes xmlns:a="http://schemas.openxmlformats.org/drawingml/2006/main" xmlns:p="http://schemas.openxmlformats.org/presentationml/2006/main" xmlns:r="http://schemas.openxmlformats.org/officeDocument/2006/relationships">
+  <p:cSld>
+    <p:spTree>
+      <p:nvGrpSpPr>
+        <p:cNvPr id="1" name=""/>
+        <p:cNvGrpSpPr/>
+        <p:nvPr/>
+      </p:nvGrpSpPr>
+      <p:grpSpPr>
+        <a:xfrm>
+          <a:off x="0" y="0"/>
+          <a:ext cx="0" cy="0"/>
+          <a:chOff x="0" y="0"/>
+          <a:chExt cx="0" cy="0"/>
+        </a:xfrm>
+      </p:grpSpPr>
+      <p:sp>
+        <p:nvSpPr>
+          <p:cNvPr id="2" name="Slide Image Placeholder 1"/>
+          <p:cNvSpPr>
+            <a:spLocks noGrp="1"/>
+          </p:cNvSpPr>
+          <p:nvPr>
+            <p:ph type="sldImg" idx="2"/>
+          </p:nvPr>
+        </p:nvSpPr>
+        <p:spPr/>
+      </p:sp>
+      <p:sp>
+        <p:nvSpPr>
+          <p:cNvPr id="3" name="Notes Placeholder 2"/>
+          <p:cNvSpPr>
+            <a:spLocks noGrp="1"/>
+          </p:cNvSpPr>
+          <p:nvPr>
+            <p:ph type="body" idx="3" sz="quarter"/>
+          </p:nvPr>
+        </p:nvSpPr>
+        <p:spPr/>
+        <p:txBody>
+          <a:bodyPr/>
+          <a:lstStyle/>
+          <a:p>
+            <a:r>
+              <a:rPr sz="1200">
+                <a:latin typeface="Calibri"/>
+              </a:rPr>
+              <a:t>(Continued from the previous slide - the same notes apply.)</a:t>
+            </a:r>
+          </a:p>
+          <a:p/>
+          <a:p>
+            <a:r>
+              <a:rPr sz="1200">
+                <a:latin typeface="Calibri"/>
+              </a:rPr>
+              <a:t>Five states, and it is driven from loop() rather than blocking. That is the same discipline as the lighting lesson.</a:t>
+            </a:r>
+          </a:p>
+          <a:p>
+            <a:r>
+              <a:rPr sz="1200">
+                <a:latin typeface="Calibri"/>
+              </a:rPr>
+              <a:t>So the LEDs keep animating and the console keeps responding while the test runs. Ask why that matters - because a machine that goes deaf during a self-test cannot be interrupted.</a:t>
+            </a:r>
+          </a:p>
+          <a:p>
+            <a:r>
+              <a:rPr sz="1200">
+                <a:latin typeface="Calibri"/>
+              </a:rPr>
+              <a:t>The GPIO 34 note is a real hardware trap. Input-only, no internal pulls, so the board carries an external pull-down.</a:t>
+            </a:r>
+          </a:p>
+          <a:p>
+            <a:r>
+              <a:rPr sz="1200">
+                <a:latin typeface="Calibri"/>
+              </a:rPr>
+              <a:t>A floating input-only pin reads whatever the room's electrical noise says. Worth saying, because somebody will try this on a breadboard.</a:t>
+            </a:r>
+          </a:p>
+        </p:txBody>
+      </p:sp>
+      <p:sp>
+        <p:nvSpPr>
+          <p:cNvPr id="4" name="Slide Number Placeholder 3"/>
+          <p:cNvSpPr>
+            <a:spLocks noGrp="1"/>
+          </p:cNvSpPr>
+          <p:nvPr>
+            <p:ph type="sldNum" idx="5" sz="quarter"/>
+          </p:nvPr>
+        </p:nvSpPr>
+        <p:spPr/>
+      </p:sp>
+    </p:spTree>
+  </p:cSld>
+  <p:clrMapOvr>
+    <a:masterClrMapping/>
+  </p:clrMapOvr>
+</p:notes>
+</file>
+
+<file path=ppt/notesSlides/notesSlide19.xml><?xml version="1.0" encoding="utf-8"?>
+<p:notes xmlns:a="http://schemas.openxmlformats.org/drawingml/2006/main" xmlns:p="http://schemas.openxmlformats.org/presentationml/2006/main" xmlns:r="http://schemas.openxmlformats.org/officeDocument/2006/relationships">
+  <p:cSld>
+    <p:spTree>
+      <p:nvGrpSpPr>
+        <p:cNvPr id="1" name=""/>
+        <p:cNvGrpSpPr/>
+        <p:nvPr/>
+      </p:nvGrpSpPr>
+      <p:grpSpPr>
+        <a:xfrm>
+          <a:off x="0" y="0"/>
+          <a:ext cx="0" cy="0"/>
+          <a:chOff x="0" y="0"/>
+          <a:chExt cx="0" cy="0"/>
+        </a:xfrm>
+      </p:grpSpPr>
+      <p:sp>
+        <p:nvSpPr>
+          <p:cNvPr id="2" name="Slide Image Placeholder 1"/>
+          <p:cNvSpPr>
+            <a:spLocks noGrp="1"/>
+          </p:cNvSpPr>
+          <p:nvPr>
+            <p:ph type="sldImg" idx="2"/>
+          </p:nvPr>
+        </p:nvSpPr>
+        <p:spPr/>
+      </p:sp>
+      <p:sp>
+        <p:nvSpPr>
+          <p:cNvPr id="3" name="Notes Placeholder 2"/>
+          <p:cNvSpPr>
+            <a:spLocks noGrp="1"/>
+          </p:cNvSpPr>
+          <p:nvPr>
+            <p:ph type="body" idx="3" sz="quarter"/>
+          </p:nvPr>
+        </p:nvSpPr>
+        <p:spPr/>
+        <p:txBody>
+          <a:bodyPr/>
+          <a:lstStyle/>
+          <a:p>
+            <a:r>
+              <a:rPr sz="1200">
+                <a:latin typeface="Calibri"/>
+              </a:rPr>
+              <a:t>The negative current is the interesting column. A spinning motor with the throttle cut becomes a generator and pushes current back.</a:t>
+            </a:r>
+          </a:p>
+          <a:p>
+            <a:r>
+              <a:rPr sz="1200">
+                <a:latin typeface="Calibri"/>
+              </a:rPr>
+              <a:t>That is why the shunt register is signed, and it links straight back to the previous code slide.</a:t>
+            </a:r>
+          </a:p>
+          <a:p>
+            <a:r>
+              <a:rPr sz="1200">
+                <a:latin typeface="Calibri"/>
+              </a:rPr>
+              <a:t>The right column is arithmetic they can do for their own vehicle. Get everybody to compute a runtime from their own measured average.</a:t>
+            </a:r>
+          </a:p>
+          <a:p>
+            <a:r>
+              <a:rPr sz="1200">
+                <a:latin typeface="Calibri"/>
+              </a:rPr>
+              <a:t>Point out that the tracking resets after each report, so each line describes the last five seconds, not the whole session.</a:t>
+            </a:r>
+          </a:p>
+        </p:txBody>
+      </p:sp>
+      <p:sp>
+        <p:nvSpPr>
+          <p:cNvPr id="4" name="Slide Number Placeholder 3"/>
+          <p:cNvSpPr>
+            <a:spLocks noGrp="1"/>
+          </p:cNvSpPr>
+          <p:nvPr>
+            <p:ph type="sldNum" idx="5" sz="quarter"/>
+          </p:nvPr>
+        </p:nvSpPr>
+        <p:spPr/>
+      </p:sp>
+    </p:spTree>
+  </p:cSld>
+  <p:clrMapOvr>
+    <a:masterClrMapping/>
+  </p:clrMapOvr>
+</p:notes>
+</file>
+
+<file path=ppt/notesSlides/notesSlide2.xml><?xml version="1.0" encoding="utf-8"?>
+<p:notes xmlns:a="http://schemas.openxmlformats.org/drawingml/2006/main" xmlns:p="http://schemas.openxmlformats.org/presentationml/2006/main" xmlns:r="http://schemas.openxmlformats.org/officeDocument/2006/relationships">
+  <p:cSld>
+    <p:spTree>
+      <p:nvGrpSpPr>
+        <p:cNvPr id="1" name=""/>
+        <p:cNvGrpSpPr/>
+        <p:nvPr/>
+      </p:nvGrpSpPr>
+      <p:grpSpPr>
+        <a:xfrm>
+          <a:off x="0" y="0"/>
+          <a:ext cx="0" cy="0"/>
+          <a:chOff x="0" y="0"/>
+          <a:chExt cx="0" cy="0"/>
+        </a:xfrm>
+      </p:grpSpPr>
+      <p:sp>
+        <p:nvSpPr>
+          <p:cNvPr id="2" name="Slide Image Placeholder 1"/>
+          <p:cNvSpPr>
+            <a:spLocks noGrp="1"/>
+          </p:cNvSpPr>
+          <p:nvPr>
+            <p:ph type="sldImg" idx="2"/>
+          </p:nvPr>
+        </p:nvSpPr>
+        <p:spPr/>
+      </p:sp>
+      <p:sp>
+        <p:nvSpPr>
+          <p:cNvPr id="3" name="Notes Placeholder 2"/>
+          <p:cNvSpPr>
+            <a:spLocks noGrp="1"/>
+          </p:cNvSpPr>
+          <p:nvPr>
+            <p:ph type="body" idx="3" sz="quarter"/>
+          </p:nvPr>
+        </p:nvSpPr>
+        <p:spPr/>
+        <p:txBody>
+          <a:bodyPr/>
+          <a:lstStyle/>
+          <a:p>
+            <a:r>
+              <a:rPr sz="1200">
+                <a:latin typeface="Calibri"/>
+              </a:rPr>
+              <a:t>Objective six is the real one. Everything before it is groundwork for being able to extend the program without making it worse.</a:t>
+            </a:r>
+          </a:p>
+        </p:txBody>
+      </p:sp>
+      <p:sp>
+        <p:nvSpPr>
+          <p:cNvPr id="4" name="Slide Number Placeholder 3"/>
+          <p:cNvSpPr>
+            <a:spLocks noGrp="1"/>
+          </p:cNvSpPr>
+          <p:nvPr>
+            <p:ph type="sldNum" idx="5" sz="quarter"/>
+          </p:nvPr>
+        </p:nvSpPr>
+        <p:spPr/>
+      </p:sp>
+    </p:spTree>
+  </p:cSld>
+  <p:clrMapOvr>
+    <a:masterClrMapping/>
+  </p:clrMapOvr>
+</p:notes>
+</file>
+
+<file path=ppt/notesSlides/notesSlide20.xml><?xml version="1.0" encoding="utf-8"?>
+<p:notes xmlns:a="http://schemas.openxmlformats.org/drawingml/2006/main" xmlns:p="http://schemas.openxmlformats.org/presentationml/2006/main" xmlns:r="http://schemas.openxmlformats.org/officeDocument/2006/relationships">
+  <p:cSld>
+    <p:spTree>
+      <p:nvGrpSpPr>
+        <p:cNvPr id="1" name=""/>
+        <p:cNvGrpSpPr/>
+        <p:nvPr/>
+      </p:nvGrpSpPr>
+      <p:grpSpPr>
+        <a:xfrm>
+          <a:off x="0" y="0"/>
+          <a:ext cx="0" cy="0"/>
+          <a:chOff x="0" y="0"/>
+          <a:chExt cx="0" cy="0"/>
+        </a:xfrm>
+      </p:grpSpPr>
+      <p:sp>
+        <p:nvSpPr>
+          <p:cNvPr id="2" name="Slide Image Placeholder 1"/>
+          <p:cNvSpPr>
+            <a:spLocks noGrp="1"/>
+          </p:cNvSpPr>
+          <p:nvPr>
+            <p:ph type="sldImg" idx="2"/>
+          </p:nvPr>
+        </p:nvSpPr>
+        <p:spPr/>
+      </p:sp>
+      <p:sp>
+        <p:nvSpPr>
+          <p:cNvPr id="3" name="Notes Placeholder 2"/>
+          <p:cNvSpPr>
+            <a:spLocks noGrp="1"/>
+          </p:cNvSpPr>
+          <p:nvPr>
+            <p:ph type="body" idx="3" sz="quarter"/>
+          </p:nvPr>
+        </p:nvSpPr>
+        <p:spPr/>
+        <p:txBody>
+          <a:bodyPr/>
+          <a:lstStyle/>
+          <a:p>
+            <a:r>
+              <a:rPr sz="1200">
+                <a:latin typeface="Calibri"/>
+              </a:rPr>
+              <a:t>(Continued from the previous slide - the same notes apply.)</a:t>
+            </a:r>
+          </a:p>
+          <a:p/>
+          <a:p>
+            <a:r>
+              <a:rPr sz="1200">
+                <a:latin typeface="Calibri"/>
+              </a:rPr>
+              <a:t>The negative current is the interesting column. A spinning motor with the throttle cut becomes a generator and pushes current back.</a:t>
+            </a:r>
+          </a:p>
+          <a:p>
+            <a:r>
+              <a:rPr sz="1200">
+                <a:latin typeface="Calibri"/>
+              </a:rPr>
+              <a:t>That is why the shunt register is signed, and it links straight back to the previous code slide.</a:t>
+            </a:r>
+          </a:p>
+          <a:p>
+            <a:r>
+              <a:rPr sz="1200">
+                <a:latin typeface="Calibri"/>
+              </a:rPr>
+              <a:t>The right column is arithmetic they can do for their own vehicle. Get everybody to compute a runtime from their own measured average.</a:t>
+            </a:r>
+          </a:p>
+          <a:p>
+            <a:r>
+              <a:rPr sz="1200">
+                <a:latin typeface="Calibri"/>
+              </a:rPr>
+              <a:t>Point out that the tracking resets after each report, so each line describes the last five seconds, not the whole session.</a:t>
+            </a:r>
+          </a:p>
+        </p:txBody>
+      </p:sp>
+      <p:sp>
+        <p:nvSpPr>
+          <p:cNvPr id="4" name="Slide Number Placeholder 3"/>
+          <p:cNvSpPr>
+            <a:spLocks noGrp="1"/>
+          </p:cNvSpPr>
+          <p:nvPr>
+            <p:ph type="sldNum" idx="5" sz="quarter"/>
+          </p:nvPr>
+        </p:nvSpPr>
+        <p:spPr/>
+      </p:sp>
+    </p:spTree>
+  </p:cSld>
+  <p:clrMapOvr>
+    <a:masterClrMapping/>
+  </p:clrMapOvr>
+</p:notes>
+</file>
+
+<file path=ppt/notesSlides/notesSlide21.xml><?xml version="1.0" encoding="utf-8"?>
+<p:notes xmlns:a="http://schemas.openxmlformats.org/drawingml/2006/main" xmlns:p="http://schemas.openxmlformats.org/presentationml/2006/main" xmlns:r="http://schemas.openxmlformats.org/officeDocument/2006/relationships">
+  <p:cSld>
+    <p:spTree>
+      <p:nvGrpSpPr>
+        <p:cNvPr id="1" name=""/>
+        <p:cNvGrpSpPr/>
+        <p:nvPr/>
+      </p:nvGrpSpPr>
+      <p:grpSpPr>
+        <a:xfrm>
+          <a:off x="0" y="0"/>
+          <a:ext cx="0" cy="0"/>
+          <a:chOff x="0" y="0"/>
+          <a:chExt cx="0" cy="0"/>
+        </a:xfrm>
+      </p:grpSpPr>
+      <p:sp>
+        <p:nvSpPr>
+          <p:cNvPr id="2" name="Slide Image Placeholder 1"/>
+          <p:cNvSpPr>
+            <a:spLocks noGrp="1"/>
+          </p:cNvSpPr>
+          <p:nvPr>
+            <p:ph type="sldImg" idx="2"/>
+          </p:nvPr>
+        </p:nvSpPr>
+        <p:spPr/>
+      </p:sp>
+      <p:sp>
+        <p:nvSpPr>
+          <p:cNvPr id="3" name="Notes Placeholder 2"/>
+          <p:cNvSpPr>
+            <a:spLocks noGrp="1"/>
+          </p:cNvSpPr>
+          <p:nvPr>
+            <p:ph type="body" idx="3" sz="quarter"/>
+          </p:nvPr>
+        </p:nvSpPr>
+        <p:spPr/>
+        <p:txBody>
+          <a:bodyPr/>
+          <a:lstStyle/>
+          <a:p>
+            <a:r>
+              <a:rPr sz="1200">
+                <a:latin typeface="Calibri"/>
+              </a:rPr>
+              <a:t>Seven rules, and they are the summary of the whole course. Read them slowly.</a:t>
+            </a:r>
+          </a:p>
+          <a:p>
+            <a:r>
+              <a:rPr sz="1200">
+                <a:latin typeface="Calibri"/>
+              </a:rPr>
+              <a:t>Every one of them is something Op 12 already does, so they can check each against the real program.</a:t>
+            </a:r>
+          </a:p>
+          <a:p>
+            <a:r>
+              <a:rPr sz="1200">
+                <a:latin typeface="Calibri"/>
+              </a:rPr>
+              <a:t>Rule seven is the one people skip: expose functions, not variables. Ask what goes wrong when another tab writes your state directly.</a:t>
+            </a:r>
+          </a:p>
+          <a:p>
+            <a:r>
+              <a:rPr sz="1200">
+                <a:latin typeface="Calibri"/>
+              </a:rPr>
+              <a:t>If they can do these seven things, they can extend this program without making it worse. That is the whole point of five lessons.</a:t>
+            </a:r>
+          </a:p>
+        </p:txBody>
+      </p:sp>
+      <p:sp>
+        <p:nvSpPr>
+          <p:cNvPr id="4" name="Slide Number Placeholder 3"/>
+          <p:cNvSpPr>
+            <a:spLocks noGrp="1"/>
+          </p:cNvSpPr>
+          <p:nvPr>
+            <p:ph type="sldNum" idx="5" sz="quarter"/>
+          </p:nvPr>
+        </p:nvSpPr>
+        <p:spPr/>
+      </p:sp>
+    </p:spTree>
+  </p:cSld>
+  <p:clrMapOvr>
+    <a:masterClrMapping/>
+  </p:clrMapOvr>
+</p:notes>
+</file>
+
+<file path=ppt/notesSlides/notesSlide22.xml><?xml version="1.0" encoding="utf-8"?>
+<p:notes xmlns:a="http://schemas.openxmlformats.org/drawingml/2006/main" xmlns:p="http://schemas.openxmlformats.org/presentationml/2006/main" xmlns:r="http://schemas.openxmlformats.org/officeDocument/2006/relationships">
+  <p:cSld>
+    <p:spTree>
+      <p:nvGrpSpPr>
+        <p:cNvPr id="1" name=""/>
+        <p:cNvGrpSpPr/>
+        <p:nvPr/>
+      </p:nvGrpSpPr>
+      <p:grpSpPr>
+        <a:xfrm>
+          <a:off x="0" y="0"/>
+          <a:ext cx="0" cy="0"/>
+          <a:chOff x="0" y="0"/>
+          <a:chExt cx="0" cy="0"/>
+        </a:xfrm>
+      </p:grpSpPr>
+      <p:sp>
+        <p:nvSpPr>
+          <p:cNvPr id="2" name="Slide Image Placeholder 1"/>
+          <p:cNvSpPr>
+            <a:spLocks noGrp="1"/>
+          </p:cNvSpPr>
+          <p:nvPr>
+            <p:ph type="sldImg" idx="2"/>
+          </p:nvPr>
+        </p:nvSpPr>
+        <p:spPr/>
+      </p:sp>
+      <p:sp>
+        <p:nvSpPr>
+          <p:cNvPr id="3" name="Notes Placeholder 2"/>
+          <p:cNvSpPr>
+            <a:spLocks noGrp="1"/>
+          </p:cNvSpPr>
+          <p:nvPr>
+            <p:ph type="body" idx="3" sz="quarter"/>
+          </p:nvPr>
+        </p:nvSpPr>
+        <p:spPr/>
+        <p:txBody>
+          <a:bodyPr/>
+          <a:lstStyle/>
+          <a:p>
+            <a:r>
+              <a:rPr sz="1200">
+                <a:latin typeface="Calibri"/>
+              </a:rPr>
+              <a:t>(Continued from the previous slide - the same notes apply.)</a:t>
+            </a:r>
+          </a:p>
+          <a:p/>
+          <a:p>
+            <a:r>
+              <a:rPr sz="1200">
+                <a:latin typeface="Calibri"/>
+              </a:rPr>
+              <a:t>Seven rules, and they are the summary of the whole course. Read them slowly.</a:t>
+            </a:r>
+          </a:p>
+          <a:p>
+            <a:r>
+              <a:rPr sz="1200">
+                <a:latin typeface="Calibri"/>
+              </a:rPr>
+              <a:t>Every one of them is something Op 12 already does, so they can check each against the real program.</a:t>
+            </a:r>
+          </a:p>
+          <a:p>
+            <a:r>
+              <a:rPr sz="1200">
+                <a:latin typeface="Calibri"/>
+              </a:rPr>
+              <a:t>Rule seven is the one people skip: expose functions, not variables. Ask what goes wrong when another tab writes your state directly.</a:t>
+            </a:r>
+          </a:p>
+          <a:p>
+            <a:r>
+              <a:rPr sz="1200">
+                <a:latin typeface="Calibri"/>
+              </a:rPr>
+              <a:t>If they can do these seven things, they can extend this program without making it worse. That is the whole point of five lessons.</a:t>
+            </a:r>
+          </a:p>
+        </p:txBody>
+      </p:sp>
+      <p:sp>
+        <p:nvSpPr>
+          <p:cNvPr id="4" name="Slide Number Placeholder 3"/>
+          <p:cNvSpPr>
+            <a:spLocks noGrp="1"/>
+          </p:cNvSpPr>
+          <p:nvPr>
+            <p:ph type="sldNum" idx="5" sz="quarter"/>
+          </p:nvPr>
+        </p:nvSpPr>
+        <p:spPr/>
+      </p:sp>
+    </p:spTree>
+  </p:cSld>
+  <p:clrMapOvr>
+    <a:masterClrMapping/>
+  </p:clrMapOvr>
+</p:notes>
+</file>
+
+<file path=ppt/notesSlides/notesSlide23.xml><?xml version="1.0" encoding="utf-8"?>
+<p:notes xmlns:a="http://schemas.openxmlformats.org/drawingml/2006/main" xmlns:p="http://schemas.openxmlformats.org/presentationml/2006/main" xmlns:r="http://schemas.openxmlformats.org/officeDocument/2006/relationships">
+  <p:cSld>
+    <p:spTree>
+      <p:nvGrpSpPr>
+        <p:cNvPr id="1" name=""/>
+        <p:cNvGrpSpPr/>
+        <p:nvPr/>
+      </p:nvGrpSpPr>
+      <p:grpSpPr>
+        <a:xfrm>
+          <a:off x="0" y="0"/>
+          <a:ext cx="0" cy="0"/>
+          <a:chOff x="0" y="0"/>
+          <a:chExt cx="0" cy="0"/>
+        </a:xfrm>
+      </p:grpSpPr>
+      <p:sp>
+        <p:nvSpPr>
+          <p:cNvPr id="2" name="Slide Image Placeholder 1"/>
+          <p:cNvSpPr>
+            <a:spLocks noGrp="1"/>
+          </p:cNvSpPr>
+          <p:nvPr>
+            <p:ph type="sldImg" idx="2"/>
+          </p:nvPr>
+        </p:nvSpPr>
+        <p:spPr/>
+      </p:sp>
+      <p:sp>
+        <p:nvSpPr>
+          <p:cNvPr id="3" name="Notes Placeholder 2"/>
+          <p:cNvSpPr>
+            <a:spLocks noGrp="1"/>
+          </p:cNvSpPr>
+          <p:nvPr>
+            <p:ph type="body" idx="3" sz="quarter"/>
+          </p:nvPr>
+        </p:nvSpPr>
+        <p:spPr/>
+        <p:txBody>
+          <a:bodyPr/>
+          <a:lstStyle/>
+          <a:p>
+            <a:r>
+              <a:rPr sz="1200">
+                <a:latin typeface="Calibri"/>
+              </a:rPr>
+              <a:t>The left column is concrete next steps. The right column is why any of it mattered.</a:t>
+            </a:r>
+          </a:p>
+          <a:p>
+            <a:r>
+              <a:rPr sz="1200">
+                <a:latin typeface="Calibri"/>
+              </a:rPr>
+              <a:t>Say the last line plainly: six of the ideas in this course exist because somebody shipped the bug first. That is also how it works in industry, and it is not a shameful thing.</a:t>
+            </a:r>
+          </a:p>
+          <a:p>
+            <a:r>
+              <a:rPr sz="1200">
+                <a:latin typeface="Calibri"/>
+              </a:rPr>
+              <a:t>The same patterns run cars, medical devices, satellites and industrial controllers. That is not hyperbole.</a:t>
+            </a:r>
+          </a:p>
+        </p:txBody>
+      </p:sp>
+      <p:sp>
+        <p:nvSpPr>
+          <p:cNvPr id="4" name="Slide Number Placeholder 3"/>
+          <p:cNvSpPr>
+            <a:spLocks noGrp="1"/>
+          </p:cNvSpPr>
+          <p:nvPr>
+            <p:ph type="sldNum" idx="5" sz="quarter"/>
+          </p:nvPr>
+        </p:nvSpPr>
+        <p:spPr/>
+      </p:sp>
+    </p:spTree>
+  </p:cSld>
+  <p:clrMapOvr>
+    <a:masterClrMapping/>
+  </p:clrMapOvr>
+</p:notes>
+</file>
+
+<file path=ppt/notesSlides/notesSlide24.xml><?xml version="1.0" encoding="utf-8"?>
+<p:notes xmlns:a="http://schemas.openxmlformats.org/drawingml/2006/main" xmlns:p="http://schemas.openxmlformats.org/presentationml/2006/main" xmlns:r="http://schemas.openxmlformats.org/officeDocument/2006/relationships">
+  <p:cSld>
+    <p:spTree>
+      <p:nvGrpSpPr>
+        <p:cNvPr id="1" name=""/>
+        <p:cNvGrpSpPr/>
+        <p:nvPr/>
+      </p:nvGrpSpPr>
+      <p:grpSpPr>
+        <a:xfrm>
+          <a:off x="0" y="0"/>
+          <a:ext cx="0" cy="0"/>
+          <a:chOff x="0" y="0"/>
+          <a:chExt cx="0" cy="0"/>
+        </a:xfrm>
+      </p:grpSpPr>
+      <p:sp>
+        <p:nvSpPr>
+          <p:cNvPr id="2" name="Slide Image Placeholder 1"/>
+          <p:cNvSpPr>
+            <a:spLocks noGrp="1"/>
+          </p:cNvSpPr>
+          <p:nvPr>
+            <p:ph type="sldImg" idx="2"/>
+          </p:nvPr>
+        </p:nvSpPr>
+        <p:spPr/>
+      </p:sp>
+      <p:sp>
+        <p:nvSpPr>
+          <p:cNvPr id="3" name="Notes Placeholder 2"/>
+          <p:cNvSpPr>
+            <a:spLocks noGrp="1"/>
+          </p:cNvSpPr>
+          <p:nvPr>
+            <p:ph type="body" idx="3" sz="quarter"/>
+          </p:nvPr>
+        </p:nvSpPr>
+        <p:spPr/>
+        <p:txBody>
+          <a:bodyPr/>
+          <a:lstStyle/>
+          <a:p>
+            <a:r>
+              <a:rPr sz="1200">
+                <a:latin typeface="Calibri"/>
+              </a:rPr>
+              <a:t>(Continued from the previous slide - the same notes apply.)</a:t>
+            </a:r>
+          </a:p>
+          <a:p/>
+          <a:p>
+            <a:r>
+              <a:rPr sz="1200">
+                <a:latin typeface="Calibri"/>
+              </a:rPr>
+              <a:t>The left column is concrete next steps. The right column is why any of it mattered.</a:t>
+            </a:r>
+          </a:p>
+          <a:p>
+            <a:r>
+              <a:rPr sz="1200">
+                <a:latin typeface="Calibri"/>
+              </a:rPr>
+              <a:t>Say the last line plainly: six of the ideas in this course exist because somebody shipped the bug first. That is also how it works in industry, and it is not a shameful thing.</a:t>
+            </a:r>
+          </a:p>
+          <a:p>
+            <a:r>
+              <a:rPr sz="1200">
+                <a:latin typeface="Calibri"/>
+              </a:rPr>
+              <a:t>The same patterns run cars, medical devices, satellites and industrial controllers. That is not hyperbole.</a:t>
+            </a:r>
+          </a:p>
+        </p:txBody>
+      </p:sp>
+      <p:sp>
+        <p:nvSpPr>
+          <p:cNvPr id="4" name="Slide Number Placeholder 3"/>
+          <p:cNvSpPr>
+            <a:spLocks noGrp="1"/>
+          </p:cNvSpPr>
+          <p:nvPr>
+            <p:ph type="sldNum" idx="5" sz="quarter"/>
+          </p:nvPr>
+        </p:nvSpPr>
+        <p:spPr/>
+      </p:sp>
+    </p:spTree>
+  </p:cSld>
+  <p:clrMapOvr>
+    <a:masterClrMapping/>
+  </p:clrMapOvr>
+</p:notes>
+</file>
+
+<file path=ppt/notesSlides/notesSlide25.xml><?xml version="1.0" encoding="utf-8"?>
+<p:notes xmlns:a="http://schemas.openxmlformats.org/drawingml/2006/main" xmlns:p="http://schemas.openxmlformats.org/presentationml/2006/main" xmlns:r="http://schemas.openxmlformats.org/officeDocument/2006/relationships">
+  <p:cSld>
+    <p:spTree>
+      <p:nvGrpSpPr>
+        <p:cNvPr id="1" name=""/>
+        <p:cNvGrpSpPr/>
+        <p:nvPr/>
+      </p:nvGrpSpPr>
+      <p:grpSpPr>
+        <a:xfrm>
+          <a:off x="0" y="0"/>
+          <a:ext cx="0" cy="0"/>
+          <a:chOff x="0" y="0"/>
+          <a:chExt cx="0" cy="0"/>
+        </a:xfrm>
+      </p:grpSpPr>
+      <p:sp>
+        <p:nvSpPr>
+          <p:cNvPr id="2" name="Slide Image Placeholder 1"/>
+          <p:cNvSpPr>
+            <a:spLocks noGrp="1"/>
+          </p:cNvSpPr>
+          <p:nvPr>
+            <p:ph type="sldImg" idx="2"/>
+          </p:nvPr>
+        </p:nvSpPr>
+        <p:spPr/>
+      </p:sp>
+      <p:sp>
+        <p:nvSpPr>
+          <p:cNvPr id="3" name="Notes Placeholder 2"/>
+          <p:cNvSpPr>
+            <a:spLocks noGrp="1"/>
+          </p:cNvSpPr>
+          <p:nvPr>
+            <p:ph type="body" idx="3" sz="quarter"/>
+          </p:nvPr>
+        </p:nvSpPr>
+        <p:spPr/>
+        <p:txBody>
+          <a:bodyPr/>
+          <a:lstStyle/>
+          <a:p>
+            <a:r>
+              <a:rPr sz="1200">
+                <a:latin typeface="Calibri"/>
+              </a:rPr>
+              <a:t>Two versions of the same test, and the comparison is the lesson.</a:t>
+            </a:r>
+          </a:p>
+          <a:p>
+            <a:r>
+              <a:rPr sz="1200">
+                <a:latin typeface="Calibri"/>
+              </a:rPr>
+              <a:t>The bench test is more accurate and needs a meter, a bench and a person. The self-test is less accurate and runs in ten seconds, anywhere, on every vehicle.</a:t>
+            </a:r>
+          </a:p>
+          <a:p>
+            <a:r>
+              <a:rPr sz="1200">
+                <a:latin typeface="Calibri"/>
+              </a:rPr>
+              <a:t>Ask which one you would want in a classroom of thirty vehicles. Then ask which one you would want before a board ships.</a:t>
+            </a:r>
+          </a:p>
+          <a:p>
+            <a:r>
+              <a:rPr sz="1200">
+                <a:latin typeface="Calibri"/>
+              </a:rPr>
+              <a:t>The answer is both, for different reasons. That is a real engineering judgement rather than a right answer.</a:t>
+            </a:r>
+          </a:p>
+        </p:txBody>
+      </p:sp>
+      <p:sp>
+        <p:nvSpPr>
+          <p:cNvPr id="4" name="Slide Number Placeholder 3"/>
+          <p:cNvSpPr>
+            <a:spLocks noGrp="1"/>
+          </p:cNvSpPr>
+          <p:nvPr>
+            <p:ph type="sldNum" idx="5" sz="quarter"/>
+          </p:nvPr>
+        </p:nvSpPr>
+        <p:spPr/>
+      </p:sp>
+    </p:spTree>
+  </p:cSld>
+  <p:clrMapOvr>
+    <a:masterClrMapping/>
+  </p:clrMapOvr>
+</p:notes>
+</file>
+
+<file path=ppt/notesSlides/notesSlide26.xml><?xml version="1.0" encoding="utf-8"?>
+<p:notes xmlns:a="http://schemas.openxmlformats.org/drawingml/2006/main" xmlns:p="http://schemas.openxmlformats.org/presentationml/2006/main" xmlns:r="http://schemas.openxmlformats.org/officeDocument/2006/relationships">
+  <p:cSld>
+    <p:spTree>
+      <p:nvGrpSpPr>
+        <p:cNvPr id="1" name=""/>
+        <p:cNvGrpSpPr/>
+        <p:nvPr/>
+      </p:nvGrpSpPr>
+      <p:grpSpPr>
+        <a:xfrm>
+          <a:off x="0" y="0"/>
+          <a:ext cx="0" cy="0"/>
+          <a:chOff x="0" y="0"/>
+          <a:chExt cx="0" cy="0"/>
+        </a:xfrm>
+      </p:grpSpPr>
+      <p:sp>
+        <p:nvSpPr>
+          <p:cNvPr id="2" name="Slide Image Placeholder 1"/>
+          <p:cNvSpPr>
+            <a:spLocks noGrp="1"/>
+          </p:cNvSpPr>
+          <p:nvPr>
+            <p:ph type="sldImg" idx="2"/>
+          </p:nvPr>
+        </p:nvSpPr>
+        <p:spPr/>
+      </p:sp>
+      <p:sp>
+        <p:nvSpPr>
+          <p:cNvPr id="3" name="Notes Placeholder 2"/>
+          <p:cNvSpPr>
+            <a:spLocks noGrp="1"/>
+          </p:cNvSpPr>
+          <p:nvPr>
+            <p:ph type="body" idx="3" sz="quarter"/>
+          </p:nvPr>
+        </p:nvSpPr>
+        <p:spPr/>
+        <p:txBody>
+          <a:bodyPr/>
+          <a:lstStyle/>
+          <a:p>
+            <a:r>
+              <a:rPr sz="1200">
+                <a:latin typeface="Calibri"/>
+              </a:rPr>
+              <a:t>(Continued from the previous slide - the same notes apply.)</a:t>
+            </a:r>
+          </a:p>
+          <a:p/>
+          <a:p>
+            <a:r>
+              <a:rPr sz="1200">
+                <a:latin typeface="Calibri"/>
+              </a:rPr>
+              <a:t>Two versions of the same test, and the comparison is the lesson.</a:t>
+            </a:r>
+          </a:p>
+          <a:p>
+            <a:r>
+              <a:rPr sz="1200">
+                <a:latin typeface="Calibri"/>
+              </a:rPr>
+              <a:t>The bench test is more accurate and needs a meter, a bench and a person. The self-test is less accurate and runs in ten seconds, anywhere, on every vehicle.</a:t>
+            </a:r>
+          </a:p>
+          <a:p>
+            <a:r>
+              <a:rPr sz="1200">
+                <a:latin typeface="Calibri"/>
+              </a:rPr>
+              <a:t>Ask which one you would want in a classroom of thirty vehicles. Then ask which one you would want before a board ships.</a:t>
+            </a:r>
+          </a:p>
+          <a:p>
+            <a:r>
+              <a:rPr sz="1200">
+                <a:latin typeface="Calibri"/>
+              </a:rPr>
+              <a:t>The answer is both, for different reasons. That is a real engineering judgement rather than a right answer.</a:t>
+            </a:r>
+          </a:p>
+        </p:txBody>
+      </p:sp>
+      <p:sp>
+        <p:nvSpPr>
+          <p:cNvPr id="4" name="Slide Number Placeholder 3"/>
+          <p:cNvSpPr>
+            <a:spLocks noGrp="1"/>
+          </p:cNvSpPr>
+          <p:nvPr>
+            <p:ph type="sldNum" idx="5" sz="quarter"/>
+          </p:nvPr>
+        </p:nvSpPr>
+        <p:spPr/>
+      </p:sp>
+    </p:spTree>
+  </p:cSld>
+  <p:clrMapOvr>
+    <a:masterClrMapping/>
+  </p:clrMapOvr>
+</p:notes>
+</file>
+
+<file path=ppt/notesSlides/notesSlide27.xml><?xml version="1.0" encoding="utf-8"?>
+<p:notes xmlns:a="http://schemas.openxmlformats.org/drawingml/2006/main" xmlns:p="http://schemas.openxmlformats.org/presentationml/2006/main" xmlns:r="http://schemas.openxmlformats.org/officeDocument/2006/relationships">
+  <p:cSld>
+    <p:spTree>
+      <p:nvGrpSpPr>
+        <p:cNvPr id="1" name=""/>
+        <p:cNvGrpSpPr/>
+        <p:nvPr/>
+      </p:nvGrpSpPr>
+      <p:grpSpPr>
+        <a:xfrm>
+          <a:off x="0" y="0"/>
+          <a:ext cx="0" cy="0"/>
+          <a:chOff x="0" y="0"/>
+          <a:chExt cx="0" cy="0"/>
+        </a:xfrm>
+      </p:grpSpPr>
+      <p:sp>
+        <p:nvSpPr>
+          <p:cNvPr id="2" name="Slide Image Placeholder 1"/>
+          <p:cNvSpPr>
+            <a:spLocks noGrp="1"/>
+          </p:cNvSpPr>
+          <p:nvPr>
+            <p:ph type="sldImg" idx="2"/>
+          </p:nvPr>
+        </p:nvSpPr>
+        <p:spPr/>
+      </p:sp>
+      <p:sp>
+        <p:nvSpPr>
+          <p:cNvPr id="3" name="Notes Placeholder 2"/>
+          <p:cNvSpPr>
+            <a:spLocks noGrp="1"/>
+          </p:cNvSpPr>
+          <p:nvPr>
+            <p:ph type="body" idx="3" sz="quarter"/>
+          </p:nvPr>
+        </p:nvSpPr>
+        <p:spPr/>
+        <p:txBody>
+          <a:bodyPr/>
+          <a:lstStyle/>
+          <a:p>
+            <a:r>
+              <a:rPr sz="1200">
+                <a:latin typeface="Calibri"/>
+              </a:rPr>
+              <a:t>This is the last teaching slide. Give it proper time.</a:t>
+            </a:r>
+          </a:p>
+          <a:p>
+            <a:r>
+              <a:rPr sz="1200">
+                <a:latin typeface="Calibri"/>
+              </a:rPr>
+              <a:t>Insist on the seven rules from the earlier slide. A capstone built badly teaches the wrong thing.</a:t>
+            </a:r>
+          </a:p>
+          <a:p>
+            <a:r>
+              <a:rPr sz="1200">
+                <a:latin typeface="Calibri"/>
+              </a:rPr>
+              <a:t>The obstacle-stop option has the best hidden question in it: what happens when the sensor gives one bad reading? Push whoever picks it.</a:t>
+            </a:r>
+          </a:p>
+          <a:p>
+            <a:r>
+              <a:rPr sz="1200">
+                <a:latin typeface="Calibri"/>
+              </a:rPr>
+              <a:t>If anybody is continuing after the course, get them to commit to one today while the enthusiasm is still there.</a:t>
+            </a:r>
+          </a:p>
+        </p:txBody>
+      </p:sp>
+      <p:sp>
+        <p:nvSpPr>
+          <p:cNvPr id="4" name="Slide Number Placeholder 3"/>
+          <p:cNvSpPr>
+            <a:spLocks noGrp="1"/>
+          </p:cNvSpPr>
+          <p:nvPr>
+            <p:ph type="sldNum" idx="5" sz="quarter"/>
+          </p:nvPr>
+        </p:nvSpPr>
+        <p:spPr/>
+      </p:sp>
+    </p:spTree>
+  </p:cSld>
+  <p:clrMapOvr>
+    <a:masterClrMapping/>
+  </p:clrMapOvr>
+</p:notes>
+</file>
+
+<file path=ppt/notesSlides/notesSlide28.xml><?xml version="1.0" encoding="utf-8"?>
+<p:notes xmlns:a="http://schemas.openxmlformats.org/drawingml/2006/main" xmlns:p="http://schemas.openxmlformats.org/presentationml/2006/main" xmlns:r="http://schemas.openxmlformats.org/officeDocument/2006/relationships">
+  <p:cSld>
+    <p:spTree>
+      <p:nvGrpSpPr>
+        <p:cNvPr id="1" name=""/>
+        <p:cNvGrpSpPr/>
+        <p:nvPr/>
+      </p:nvGrpSpPr>
+      <p:grpSpPr>
+        <a:xfrm>
+          <a:off x="0" y="0"/>
+          <a:ext cx="0" cy="0"/>
+          <a:chOff x="0" y="0"/>
+          <a:chExt cx="0" cy="0"/>
+        </a:xfrm>
+      </p:grpSpPr>
+      <p:sp>
+        <p:nvSpPr>
+          <p:cNvPr id="2" name="Slide Image Placeholder 1"/>
+          <p:cNvSpPr>
+            <a:spLocks noGrp="1"/>
+          </p:cNvSpPr>
+          <p:nvPr>
+            <p:ph type="sldImg" idx="2"/>
+          </p:nvPr>
+        </p:nvSpPr>
+        <p:spPr/>
+      </p:sp>
+      <p:sp>
+        <p:nvSpPr>
+          <p:cNvPr id="3" name="Notes Placeholder 2"/>
+          <p:cNvSpPr>
+            <a:spLocks noGrp="1"/>
+          </p:cNvSpPr>
+          <p:nvPr>
+            <p:ph type="body" idx="3" sz="quarter"/>
+          </p:nvPr>
+        </p:nvSpPr>
+        <p:spPr/>
+        <p:txBody>
+          <a:bodyPr/>
+          <a:lstStyle/>
+          <a:p>
+            <a:r>
+              <a:rPr sz="1200">
+                <a:latin typeface="Calibri"/>
+              </a:rPr>
+              <a:t>(Continued from the previous slide - the same notes apply.)</a:t>
+            </a:r>
+          </a:p>
+          <a:p/>
+          <a:p>
+            <a:r>
+              <a:rPr sz="1200">
+                <a:latin typeface="Calibri"/>
+              </a:rPr>
+              <a:t>This is the last teaching slide. Give it proper time.</a:t>
+            </a:r>
+          </a:p>
+          <a:p>
+            <a:r>
+              <a:rPr sz="1200">
+                <a:latin typeface="Calibri"/>
+              </a:rPr>
+              <a:t>Insist on the seven rules from the earlier slide. A capstone built badly teaches the wrong thing.</a:t>
+            </a:r>
+          </a:p>
+          <a:p>
+            <a:r>
+              <a:rPr sz="1200">
+                <a:latin typeface="Calibri"/>
+              </a:rPr>
+              <a:t>The obstacle-stop option has the best hidden question in it: what happens when the sensor gives one bad reading? Push whoever picks it.</a:t>
+            </a:r>
+          </a:p>
+          <a:p>
+            <a:r>
+              <a:rPr sz="1200">
+                <a:latin typeface="Calibri"/>
+              </a:rPr>
+              <a:t>If anybody is continuing after the course, get them to commit to one today while the enthusiasm is still there.</a:t>
+            </a:r>
+          </a:p>
+        </p:txBody>
+      </p:sp>
+      <p:sp>
+        <p:nvSpPr>
+          <p:cNvPr id="4" name="Slide Number Placeholder 3"/>
+          <p:cNvSpPr>
+            <a:spLocks noGrp="1"/>
+          </p:cNvSpPr>
+          <p:nvPr>
+            <p:ph type="sldNum" idx="5" sz="quarter"/>
+          </p:nvPr>
+        </p:nvSpPr>
+        <p:spPr/>
+      </p:sp>
+    </p:spTree>
+  </p:cSld>
+  <p:clrMapOvr>
+    <a:masterClrMapping/>
+  </p:clrMapOvr>
+</p:notes>
+</file>
+
+<file path=ppt/notesSlides/notesSlide29.xml><?xml version="1.0" encoding="utf-8"?>
+<p:notes xmlns:a="http://schemas.openxmlformats.org/drawingml/2006/main" xmlns:p="http://schemas.openxmlformats.org/presentationml/2006/main" xmlns:r="http://schemas.openxmlformats.org/officeDocument/2006/relationships">
+  <p:cSld>
+    <p:spTree>
+      <p:nvGrpSpPr>
+        <p:cNvPr id="1" name=""/>
+        <p:cNvGrpSpPr/>
+        <p:nvPr/>
+      </p:nvGrpSpPr>
+      <p:grpSpPr>
+        <a:xfrm>
+          <a:off x="0" y="0"/>
+          <a:ext cx="0" cy="0"/>
+          <a:chOff x="0" y="0"/>
+          <a:chExt cx="0" cy="0"/>
+        </a:xfrm>
+      </p:grpSpPr>
+      <p:sp>
+        <p:nvSpPr>
+          <p:cNvPr id="2" name="Slide Image Placeholder 1"/>
+          <p:cNvSpPr>
+            <a:spLocks noGrp="1"/>
+          </p:cNvSpPr>
+          <p:nvPr>
+            <p:ph type="sldImg" idx="2"/>
+          </p:nvPr>
+        </p:nvSpPr>
+        <p:spPr/>
+      </p:sp>
+      <p:sp>
+        <p:nvSpPr>
+          <p:cNvPr id="3" name="Notes Placeholder 2"/>
+          <p:cNvSpPr>
+            <a:spLocks noGrp="1"/>
+          </p:cNvSpPr>
+          <p:nvPr>
+            <p:ph type="body" idx="3" sz="quarter"/>
+          </p:nvPr>
+        </p:nvSpPr>
+        <p:spPr/>
+        <p:txBody>
+          <a:bodyPr/>
+          <a:lstStyle/>
+          <a:p>
+            <a:r>
+              <a:rPr sz="1200">
+                <a:latin typeface="Calibri"/>
+              </a:rPr>
+              <a:t>Conversation, not a test. This is the last thing they do.</a:t>
+            </a:r>
+          </a:p>
+          <a:p>
+            <a:r>
+              <a:rPr sz="1200">
+                <a:latin typeface="Calibri"/>
+              </a:rPr>
+              <a:t>Answers: address it and end the transmission with no data, then check the acknowledgement; nothing on any address means a missing pull-up; a small shunt wastes less power and steals less voltage from the motors.</a:t>
+            </a:r>
+          </a:p>
+          <a:p>
+            <a:r>
+              <a:rPr sz="1200">
+                <a:latin typeface="Calibri"/>
+              </a:rPr>
+              <a:t>Signed, because a motor pushes current back when the throttle is cut.</a:t>
+            </a:r>
+          </a:p>
+          <a:p>
+            <a:r>
+              <a:rPr sz="1200">
+                <a:latin typeface="Calibri"/>
+              </a:rPr>
+              <a:t>A repeated start keeps the bus so no other master can take it mid-read.</a:t>
+            </a:r>
+          </a:p>
+          <a:p>
+            <a:r>
+              <a:rPr sz="1200">
+                <a:latin typeface="Calibri"/>
+              </a:rPr>
+              <a:t>Healthy: a spike then a settle. Disconnected: almost nothing. Jammed: high and never settling.</a:t>
+            </a:r>
+          </a:p>
+          <a:p>
+            <a:r>
+              <a:rPr sz="1200">
+                <a:latin typeface="Calibri"/>
+              </a:rPr>
+              <a:t>Thresholds sit above a measured baseline because the resting draw differs between vehicles and with battery charge.</a:t>
+            </a:r>
+          </a:p>
+          <a:p>
+            <a:r>
+              <a:rPr sz="1200">
+                <a:latin typeface="Calibri"/>
+              </a:rPr>
+              <a:t>The self-test is a state machine so the LEDs and console keep working.</a:t>
+            </a:r>
+          </a:p>
+          <a:p>
+            <a:r>
+              <a:rPr sz="1200">
+                <a:latin typeface="Calibri"/>
+              </a:rPr>
+              <a:t>Question 9 is the seven rules. If they can list them, the course did its job.</a:t>
+            </a:r>
+          </a:p>
+        </p:txBody>
+      </p:sp>
+      <p:sp>
+        <p:nvSpPr>
+          <p:cNvPr id="4" name="Slide Number Placeholder 3"/>
+          <p:cNvSpPr>
+            <a:spLocks noGrp="1"/>
+          </p:cNvSpPr>
+          <p:nvPr>
+            <p:ph type="sldNum" idx="5" sz="quarter"/>
+          </p:nvPr>
+        </p:nvSpPr>
+        <p:spPr/>
+      </p:sp>
+    </p:spTree>
+  </p:cSld>
+  <p:clrMapOvr>
+    <a:masterClrMapping/>
+  </p:clrMapOvr>
+</p:notes>
+</file>
+
+<file path=ppt/notesSlides/notesSlide3.xml><?xml version="1.0" encoding="utf-8"?>
+<p:notes xmlns:a="http://schemas.openxmlformats.org/drawingml/2006/main" xmlns:p="http://schemas.openxmlformats.org/presentationml/2006/main" xmlns:r="http://schemas.openxmlformats.org/officeDocument/2006/relationships">
+  <p:cSld>
+    <p:spTree>
+      <p:nvGrpSpPr>
+        <p:cNvPr id="1" name=""/>
+        <p:cNvGrpSpPr/>
+        <p:nvPr/>
+      </p:nvGrpSpPr>
+      <p:grpSpPr>
+        <a:xfrm>
+          <a:off x="0" y="0"/>
+          <a:ext cx="0" cy="0"/>
+          <a:chOff x="0" y="0"/>
+          <a:chExt cx="0" cy="0"/>
+        </a:xfrm>
+      </p:grpSpPr>
+      <p:sp>
+        <p:nvSpPr>
+          <p:cNvPr id="2" name="Slide Image Placeholder 1"/>
+          <p:cNvSpPr>
+            <a:spLocks noGrp="1"/>
+          </p:cNvSpPr>
+          <p:nvPr>
+            <p:ph type="sldImg" idx="2"/>
+          </p:nvPr>
+        </p:nvSpPr>
+        <p:spPr/>
+      </p:sp>
+      <p:sp>
+        <p:nvSpPr>
+          <p:cNvPr id="3" name="Notes Placeholder 2"/>
+          <p:cNvSpPr>
+            <a:spLocks noGrp="1"/>
+          </p:cNvSpPr>
+          <p:nvPr>
+            <p:ph type="body" idx="3" sz="quarter"/>
+          </p:nvPr>
+        </p:nvSpPr>
+        <p:spPr/>
+        <p:txBody>
+          <a:bodyPr/>
+          <a:lstStyle/>
+          <a:p>
+            <a:r>
+              <a:rPr sz="1200">
+                <a:latin typeface="Calibri"/>
+              </a:rPr>
+              <a:t>Two breaks. The capstone discussion at 2:50 will overrun if you let the measurement activity run long.</a:t>
+            </a:r>
+          </a:p>
+        </p:txBody>
+      </p:sp>
+      <p:sp>
+        <p:nvSpPr>
+          <p:cNvPr id="4" name="Slide Number Placeholder 3"/>
+          <p:cNvSpPr>
+            <a:spLocks noGrp="1"/>
+          </p:cNvSpPr>
+          <p:nvPr>
+            <p:ph type="sldNum" idx="5" sz="quarter"/>
+          </p:nvPr>
+        </p:nvSpPr>
+        <p:spPr/>
+      </p:sp>
+    </p:spTree>
+  </p:cSld>
+  <p:clrMapOvr>
+    <a:masterClrMapping/>
+  </p:clrMapOvr>
+</p:notes>
+</file>
+
+<file path=ppt/notesSlides/notesSlide4.xml><?xml version="1.0" encoding="utf-8"?>
+<p:notes xmlns:a="http://schemas.openxmlformats.org/drawingml/2006/main" xmlns:p="http://schemas.openxmlformats.org/presentationml/2006/main" xmlns:r="http://schemas.openxmlformats.org/officeDocument/2006/relationships">
+  <p:cSld>
+    <p:spTree>
+      <p:nvGrpSpPr>
+        <p:cNvPr id="1" name=""/>
+        <p:cNvGrpSpPr/>
+        <p:nvPr/>
+      </p:nvGrpSpPr>
+      <p:grpSpPr>
+        <a:xfrm>
+          <a:off x="0" y="0"/>
+          <a:ext cx="0" cy="0"/>
+          <a:chOff x="0" y="0"/>
+          <a:chExt cx="0" cy="0"/>
+        </a:xfrm>
+      </p:grpSpPr>
+      <p:sp>
+        <p:nvSpPr>
+          <p:cNvPr id="2" name="Slide Image Placeholder 1"/>
+          <p:cNvSpPr>
+            <a:spLocks noGrp="1"/>
+          </p:cNvSpPr>
+          <p:nvPr>
+            <p:ph type="sldImg" idx="2"/>
+          </p:nvPr>
+        </p:nvSpPr>
+        <p:spPr/>
+      </p:sp>
+      <p:sp>
+        <p:nvSpPr>
+          <p:cNvPr id="3" name="Notes Placeholder 2"/>
+          <p:cNvSpPr>
+            <a:spLocks noGrp="1"/>
+          </p:cNvSpPr>
+          <p:nvPr>
+            <p:ph type="body" idx="3" sz="quarter"/>
+          </p:nvPr>
+        </p:nvSpPr>
+        <p:spPr/>
+        <p:txBody>
+          <a:bodyPr/>
+          <a:lstStyle/>
+          <a:p>
+            <a:r>
+              <a:rPr sz="1200">
+                <a:latin typeface="Calibri"/>
+              </a:rPr>
+              <a:t>Ten lines, and it covers what they need. Do not turn this into a bus protocol lecture.</a:t>
+            </a:r>
+          </a:p>
+          <a:p>
+            <a:r>
+              <a:rPr sz="1200">
+                <a:latin typeface="Calibri"/>
+              </a:rPr>
+              <a:t>The acknowledge mechanism is the clever bit: address it, send nothing, and see whether anything pulls SDA low.</a:t>
+            </a:r>
+          </a:p>
+          <a:p>
+            <a:r>
+              <a:rPr sz="1200">
+                <a:latin typeface="Calibri"/>
+              </a:rPr>
+              <a:t>The pull-up point is the one that will save them an afternoon. Devices can only pull a line DOWN, so something has to pull it back up.</a:t>
+            </a:r>
+          </a:p>
+          <a:p>
+            <a:r>
+              <a:rPr sz="1200">
+                <a:latin typeface="Calibri"/>
+              </a:rPr>
+              <a:t>Nothing on every address is the classic missing-pull-up symptom. It matters the moment they wire their own sensor on the breadboard.</a:t>
+            </a:r>
+          </a:p>
+        </p:txBody>
+      </p:sp>
+      <p:sp>
+        <p:nvSpPr>
+          <p:cNvPr id="4" name="Slide Number Placeholder 3"/>
+          <p:cNvSpPr>
+            <a:spLocks noGrp="1"/>
+          </p:cNvSpPr>
+          <p:nvPr>
+            <p:ph type="sldNum" idx="5" sz="quarter"/>
+          </p:nvPr>
+        </p:nvSpPr>
+        <p:spPr/>
+      </p:sp>
+    </p:spTree>
+  </p:cSld>
+  <p:clrMapOvr>
+    <a:masterClrMapping/>
+  </p:clrMapOvr>
+</p:notes>
+</file>
+
+<file path=ppt/notesSlides/notesSlide5.xml><?xml version="1.0" encoding="utf-8"?>
+<p:notes xmlns:a="http://schemas.openxmlformats.org/drawingml/2006/main" xmlns:p="http://schemas.openxmlformats.org/presentationml/2006/main" xmlns:r="http://schemas.openxmlformats.org/officeDocument/2006/relationships">
+  <p:cSld>
+    <p:spTree>
+      <p:nvGrpSpPr>
+        <p:cNvPr id="1" name=""/>
+        <p:cNvGrpSpPr/>
+        <p:nvPr/>
+      </p:nvGrpSpPr>
+      <p:grpSpPr>
+        <a:xfrm>
+          <a:off x="0" y="0"/>
+          <a:ext cx="0" cy="0"/>
+          <a:chOff x="0" y="0"/>
+          <a:chExt cx="0" cy="0"/>
+        </a:xfrm>
+      </p:grpSpPr>
+      <p:sp>
+        <p:nvSpPr>
+          <p:cNvPr id="2" name="Slide Image Placeholder 1"/>
+          <p:cNvSpPr>
+            <a:spLocks noGrp="1"/>
+          </p:cNvSpPr>
+          <p:nvPr>
+            <p:ph type="sldImg" idx="2"/>
+          </p:nvPr>
+        </p:nvSpPr>
+        <p:spPr/>
+      </p:sp>
+      <p:sp>
+        <p:nvSpPr>
+          <p:cNvPr id="3" name="Notes Placeholder 2"/>
+          <p:cNvSpPr>
+            <a:spLocks noGrp="1"/>
+          </p:cNvSpPr>
+          <p:nvPr>
+            <p:ph type="body" idx="3" sz="quarter"/>
+          </p:nvPr>
+        </p:nvSpPr>
+        <p:spPr/>
+        <p:txBody>
+          <a:bodyPr/>
+          <a:lstStyle/>
+          <a:p>
+            <a:r>
+              <a:rPr sz="1200">
+                <a:latin typeface="Calibri"/>
+              </a:rPr>
+              <a:t>(Continued from the previous slide - the same notes apply.)</a:t>
+            </a:r>
+          </a:p>
+          <a:p/>
+          <a:p>
+            <a:r>
+              <a:rPr sz="1200">
+                <a:latin typeface="Calibri"/>
+              </a:rPr>
+              <a:t>Ten lines, and it covers what they need. Do not turn this into a bus protocol lecture.</a:t>
+            </a:r>
+          </a:p>
+          <a:p>
+            <a:r>
+              <a:rPr sz="1200">
+                <a:latin typeface="Calibri"/>
+              </a:rPr>
+              <a:t>The acknowledge mechanism is the clever bit: address it, send nothing, and see whether anything pulls SDA low.</a:t>
+            </a:r>
+          </a:p>
+          <a:p>
+            <a:r>
+              <a:rPr sz="1200">
+                <a:latin typeface="Calibri"/>
+              </a:rPr>
+              <a:t>The pull-up point is the one that will save them an afternoon. Devices can only pull a line DOWN, so something has to pull it back up.</a:t>
+            </a:r>
+          </a:p>
+          <a:p>
+            <a:r>
+              <a:rPr sz="1200">
+                <a:latin typeface="Calibri"/>
+              </a:rPr>
+              <a:t>Nothing on every address is the classic missing-pull-up symptom. It matters the moment they wire their own sensor on the breadboard.</a:t>
+            </a:r>
+          </a:p>
+        </p:txBody>
+      </p:sp>
+      <p:sp>
+        <p:nvSpPr>
+          <p:cNvPr id="4" name="Slide Number Placeholder 3"/>
+          <p:cNvSpPr>
+            <a:spLocks noGrp="1"/>
+          </p:cNvSpPr>
+          <p:nvPr>
+            <p:ph type="sldNum" idx="5" sz="quarter"/>
+          </p:nvPr>
+        </p:nvSpPr>
+        <p:spPr/>
+      </p:sp>
+    </p:spTree>
+  </p:cSld>
+  <p:clrMapOvr>
+    <a:masterClrMapping/>
+  </p:clrMapOvr>
+</p:notes>
+</file>
+
+<file path=ppt/notesSlides/notesSlide6.xml><?xml version="1.0" encoding="utf-8"?>
+<p:notes xmlns:a="http://schemas.openxmlformats.org/drawingml/2006/main" xmlns:p="http://schemas.openxmlformats.org/presentationml/2006/main" xmlns:r="http://schemas.openxmlformats.org/officeDocument/2006/relationships">
+  <p:cSld>
+    <p:spTree>
+      <p:nvGrpSpPr>
+        <p:cNvPr id="1" name=""/>
+        <p:cNvGrpSpPr/>
+        <p:nvPr/>
+      </p:nvGrpSpPr>
+      <p:grpSpPr>
+        <a:xfrm>
+          <a:off x="0" y="0"/>
+          <a:ext cx="0" cy="0"/>
+          <a:chOff x="0" y="0"/>
+          <a:chExt cx="0" cy="0"/>
+        </a:xfrm>
+      </p:grpSpPr>
+      <p:sp>
+        <p:nvSpPr>
+          <p:cNvPr id="2" name="Slide Image Placeholder 1"/>
+          <p:cNvSpPr>
+            <a:spLocks noGrp="1"/>
+          </p:cNvSpPr>
+          <p:nvPr>
+            <p:ph type="sldImg" idx="2"/>
+          </p:nvPr>
+        </p:nvSpPr>
+        <p:spPr/>
+      </p:sp>
+      <p:sp>
+        <p:nvSpPr>
+          <p:cNvPr id="3" name="Notes Placeholder 2"/>
+          <p:cNvSpPr>
+            <a:spLocks noGrp="1"/>
+          </p:cNvSpPr>
+          <p:nvPr>
+            <p:ph type="body" idx="3" sz="quarter"/>
+          </p:nvPr>
+        </p:nvSpPr>
+        <p:spPr/>
+        <p:txBody>
+          <a:bodyPr/>
+          <a:lstStyle/>
+          <a:p>
+            <a:r>
+              <a:rPr sz="1200">
+                <a:latin typeface="Calibri"/>
+              </a:rPr>
+              <a:t>Twenty seconds. First activity.</a:t>
+            </a:r>
+          </a:p>
+        </p:txBody>
+      </p:sp>
+      <p:sp>
+        <p:nvSpPr>
+          <p:cNvPr id="4" name="Slide Number Placeholder 3"/>
+          <p:cNvSpPr>
+            <a:spLocks noGrp="1"/>
+          </p:cNvSpPr>
+          <p:nvPr>
+            <p:ph type="sldNum" idx="5" sz="quarter"/>
+          </p:nvPr>
+        </p:nvSpPr>
+        <p:spPr/>
+      </p:sp>
+    </p:spTree>
+  </p:cSld>
+  <p:clrMapOvr>
+    <a:masterClrMapping/>
+  </p:clrMapOvr>
+</p:notes>
+</file>
+
+<file path=ppt/notesSlides/notesSlide7.xml><?xml version="1.0" encoding="utf-8"?>
+<p:notes xmlns:a="http://schemas.openxmlformats.org/drawingml/2006/main" xmlns:p="http://schemas.openxmlformats.org/presentationml/2006/main" xmlns:r="http://schemas.openxmlformats.org/officeDocument/2006/relationships">
+  <p:cSld>
+    <p:spTree>
+      <p:nvGrpSpPr>
+        <p:cNvPr id="1" name=""/>
+        <p:cNvGrpSpPr/>
+        <p:nvPr/>
+      </p:nvGrpSpPr>
+      <p:grpSpPr>
+        <a:xfrm>
+          <a:off x="0" y="0"/>
+          <a:ext cx="0" cy="0"/>
+          <a:chOff x="0" y="0"/>
+          <a:chExt cx="0" cy="0"/>
+        </a:xfrm>
+      </p:grpSpPr>
+      <p:sp>
+        <p:nvSpPr>
+          <p:cNvPr id="2" name="Slide Image Placeholder 1"/>
+          <p:cNvSpPr>
+            <a:spLocks noGrp="1"/>
+          </p:cNvSpPr>
+          <p:nvPr>
+            <p:ph type="sldImg" idx="2"/>
+          </p:nvPr>
+        </p:nvSpPr>
+        <p:spPr/>
+      </p:sp>
+      <p:sp>
+        <p:nvSpPr>
+          <p:cNvPr id="3" name="Notes Placeholder 2"/>
+          <p:cNvSpPr>
+            <a:spLocks noGrp="1"/>
+          </p:cNvSpPr>
+          <p:nvPr>
+            <p:ph type="body" idx="3" sz="quarter"/>
+          </p:nvPr>
+        </p:nvSpPr>
+        <p:spPr/>
+        <p:txBody>
+          <a:bodyPr/>
+          <a:lstStyle/>
+          <a:p>
+            <a:r>
+              <a:rPr sz="1200">
+                <a:latin typeface="Calibri"/>
+              </a:rPr>
+              <a:t>Step 2 is the important one and it is counter-intuitive: finding nothing on a Gen 2 is the CORRECT answer, not a failure.</a:t>
+            </a:r>
+          </a:p>
+          <a:p>
+            <a:r>
+              <a:rPr sz="1200">
+                <a:latin typeface="Calibri"/>
+              </a:rPr>
+              <a:t>Step 4 uses the ESP32 default pins, which are not the ones this board wires the sensor to. Nothing answers, and that is the point.</a:t>
+            </a:r>
+          </a:p>
+          <a:p>
+            <a:r>
+              <a:rPr sz="1200">
+                <a:latin typeface="Calibri"/>
+              </a:rPr>
+              <a:t>Step 5 tries input-only pins. The sketch explains why that cannot work.</a:t>
+            </a:r>
+          </a:p>
+          <a:p>
+            <a:r>
+              <a:rPr sz="1200">
+                <a:latin typeface="Calibri"/>
+              </a:rPr>
+              <a:t>The question ties it back: this is exactly what is_ina219_present() does in Op 12, and the decision it drives is which capability flags get set.</a:t>
+            </a:r>
+          </a:p>
+        </p:txBody>
+      </p:sp>
+      <p:sp>
+        <p:nvSpPr>
+          <p:cNvPr id="4" name="Slide Number Placeholder 3"/>
+          <p:cNvSpPr>
+            <a:spLocks noGrp="1"/>
+          </p:cNvSpPr>
+          <p:nvPr>
+            <p:ph type="sldNum" idx="5" sz="quarter"/>
+          </p:nvPr>
+        </p:nvSpPr>
+        <p:spPr/>
+      </p:sp>
+    </p:spTree>
+  </p:cSld>
+  <p:clrMapOvr>
+    <a:masterClrMapping/>
+  </p:clrMapOvr>
+</p:notes>
+</file>
+
+<file path=ppt/notesSlides/notesSlide8.xml><?xml version="1.0" encoding="utf-8"?>
+<p:notes xmlns:a="http://schemas.openxmlformats.org/drawingml/2006/main" xmlns:p="http://schemas.openxmlformats.org/presentationml/2006/main" xmlns:r="http://schemas.openxmlformats.org/officeDocument/2006/relationships">
+  <p:cSld>
+    <p:spTree>
+      <p:nvGrpSpPr>
+        <p:cNvPr id="1" name=""/>
+        <p:cNvGrpSpPr/>
+        <p:nvPr/>
+      </p:nvGrpSpPr>
+      <p:grpSpPr>
+        <a:xfrm>
+          <a:off x="0" y="0"/>
+          <a:ext cx="0" cy="0"/>
+          <a:chOff x="0" y="0"/>
+          <a:chExt cx="0" cy="0"/>
+        </a:xfrm>
+      </p:grpSpPr>
+      <p:sp>
+        <p:nvSpPr>
+          <p:cNvPr id="2" name="Slide Image Placeholder 1"/>
+          <p:cNvSpPr>
+            <a:spLocks noGrp="1"/>
+          </p:cNvSpPr>
+          <p:nvPr>
+            <p:ph type="sldImg" idx="2"/>
+          </p:nvPr>
+        </p:nvSpPr>
+        <p:spPr/>
+      </p:sp>
+      <p:sp>
+        <p:nvSpPr>
+          <p:cNvPr id="3" name="Notes Placeholder 2"/>
+          <p:cNvSpPr>
+            <a:spLocks noGrp="1"/>
+          </p:cNvSpPr>
+          <p:nvPr>
+            <p:ph type="body" idx="3" sz="quarter"/>
+          </p:nvPr>
+        </p:nvSpPr>
+        <p:spPr/>
+        <p:txBody>
+          <a:bodyPr/>
+          <a:lstStyle/>
+          <a:p>
+            <a:r>
+              <a:rPr sz="1200">
+                <a:latin typeface="Calibri"/>
+              </a:rPr>
+              <a:t>You cannot measure current directly. Say that first - it is the reason the whole shunt idea exists.</a:t>
+            </a:r>
+          </a:p>
+          <a:p>
+            <a:r>
+              <a:rPr sz="1200">
+                <a:latin typeface="Calibri"/>
+              </a:rPr>
+              <a:t>Do both power calculations on the board. 0.01 W against 0.4 W is the whole argument for a tiny resistor.</a:t>
+            </a:r>
+          </a:p>
+          <a:p>
+            <a:r>
+              <a:rPr sz="1200">
+                <a:latin typeface="Calibri"/>
+              </a:rPr>
+              <a:t>Five millivolts at two amps. Reading that accurately is the sensor's entire job, and it is why an INA219 exists rather than an analog input.</a:t>
+            </a:r>
+          </a:p>
+          <a:p>
+            <a:r>
+              <a:rPr sz="1200">
+                <a:latin typeface="Calibri"/>
+              </a:rPr>
+              <a:t>This is Ohm's law from the beginner course doing real work. Point back at it.</a:t>
+            </a:r>
+          </a:p>
+        </p:txBody>
+      </p:sp>
+      <p:sp>
+        <p:nvSpPr>
+          <p:cNvPr id="4" name="Slide Number Placeholder 3"/>
+          <p:cNvSpPr>
+            <a:spLocks noGrp="1"/>
+          </p:cNvSpPr>
+          <p:nvPr>
+            <p:ph type="sldNum" idx="5" sz="quarter"/>
+          </p:nvPr>
+        </p:nvSpPr>
+        <p:spPr/>
+      </p:sp>
+    </p:spTree>
+  </p:cSld>
+  <p:clrMapOvr>
+    <a:masterClrMapping/>
+  </p:clrMapOvr>
+</p:notes>
+</file>
+
+<file path=ppt/notesSlides/notesSlide9.xml><?xml version="1.0" encoding="utf-8"?>
+<p:notes xmlns:a="http://schemas.openxmlformats.org/drawingml/2006/main" xmlns:p="http://schemas.openxmlformats.org/presentationml/2006/main" xmlns:r="http://schemas.openxmlformats.org/officeDocument/2006/relationships">
+  <p:cSld>
+    <p:spTree>
+      <p:nvGrpSpPr>
+        <p:cNvPr id="1" name=""/>
+        <p:cNvGrpSpPr/>
+        <p:nvPr/>
+      </p:nvGrpSpPr>
+      <p:grpSpPr>
+        <a:xfrm>
+          <a:off x="0" y="0"/>
+          <a:ext cx="0" cy="0"/>
+          <a:chOff x="0" y="0"/>
+          <a:chExt cx="0" cy="0"/>
+        </a:xfrm>
+      </p:grpSpPr>
+      <p:sp>
+        <p:nvSpPr>
+          <p:cNvPr id="2" name="Slide Image Placeholder 1"/>
+          <p:cNvSpPr>
+            <a:spLocks noGrp="1"/>
+          </p:cNvSpPr>
+          <p:nvPr>
+            <p:ph type="sldImg" idx="2"/>
+          </p:nvPr>
+        </p:nvSpPr>
+        <p:spPr/>
+      </p:sp>
+      <p:sp>
+        <p:nvSpPr>
+          <p:cNvPr id="3" name="Notes Placeholder 2"/>
+          <p:cNvSpPr>
+            <a:spLocks noGrp="1"/>
+          </p:cNvSpPr>
+          <p:nvPr>
+            <p:ph type="body" idx="3" sz="quarter"/>
+          </p:nvPr>
+        </p:nvSpPr>
+        <p:spPr/>
+        <p:txBody>
+          <a:bodyPr/>
+          <a:lstStyle/>
+          <a:p>
+            <a:r>
+              <a:rPr sz="1200">
+                <a:latin typeface="Calibri"/>
+              </a:rPr>
+              <a:t>(Continued from the previous slide - the same notes apply.)</a:t>
+            </a:r>
+          </a:p>
+          <a:p/>
+          <a:p>
+            <a:r>
+              <a:rPr sz="1200">
+                <a:latin typeface="Calibri"/>
+              </a:rPr>
+              <a:t>You cannot measure current directly. Say that first - it is the reason the whole shunt idea exists.</a:t>
+            </a:r>
+          </a:p>
+          <a:p>
+            <a:r>
+              <a:rPr sz="1200">
+                <a:latin typeface="Calibri"/>
+              </a:rPr>
+              <a:t>Do both power calculations on the board. 0.01 W against 0.4 W is the whole argument for a tiny resistor.</a:t>
+            </a:r>
+          </a:p>
+          <a:p>
+            <a:r>
+              <a:rPr sz="1200">
+                <a:latin typeface="Calibri"/>
+              </a:rPr>
+              <a:t>Five millivolts at two amps. Reading that accurately is the sensor's entire job, and it is why an INA219 exists rather than an analog input.</a:t>
+            </a:r>
+          </a:p>
+          <a:p>
+            <a:r>
+              <a:rPr sz="1200">
+                <a:latin typeface="Calibri"/>
+              </a:rPr>
+              <a:t>This is Ohm's law from the beginner course doing real work. Point back at it.</a:t>
+            </a:r>
+          </a:p>
+        </p:txBody>
+      </p:sp>
+      <p:sp>
+        <p:nvSpPr>
+          <p:cNvPr id="4" name="Slide Number Placeholder 3"/>
+          <p:cNvSpPr>
+            <a:spLocks noGrp="1"/>
+          </p:cNvSpPr>
+          <p:nvPr>
+            <p:ph type="sldNum" idx="5" sz="quarter"/>
+          </p:nvPr>
+        </p:nvSpPr>
+        <p:spPr/>
+      </p:sp>
+    </p:spTree>
+  </p:cSld>
+  <p:clrMapOvr>
+    <a:masterClrMapping/>
+  </p:clrMapOvr>
+</p:notes>
 </file>
 
 <file path=ppt/slideLayouts/slideLayout1.xml><?xml version="1.0" encoding="utf-8"?>
@@ -3599,7 +6755,7 @@
         </p:blipFill>
         <p:spPr>
           <a:xfrm>
-            <a:off x="7223760" y="1371600"/>
+            <a:off x="7223760" y="2023110"/>
             <a:ext cx="4480560" cy="3360420"/>
           </a:xfrm>
           <a:prstGeom prst="rect">
@@ -7605,7 +10761,7 @@
                 </a:solidFill>
                 <a:latin typeface="Calibri"/>
               </a:rPr>
-              <a:t>What a healthy motor looks like to a current sensor</a:t>
+              <a:t>Where the current sensor actually is</a:t>
             </a:r>
           </a:p>
         </p:txBody>
@@ -7752,25 +10908,146 @@
       </p:sp>
       <p:sp>
         <p:nvSpPr>
-          <p:cNvPr id="6" name="Rectangle 5"/>
+          <p:cNvPr id="6" name="TextBox 5"/>
+          <p:cNvSpPr txBox="1"/>
+          <p:nvPr/>
+        </p:nvSpPr>
+        <p:spPr>
+          <a:xfrm>
+            <a:off x="502920" y="1188720"/>
+            <a:ext cx="11185855" cy="548640"/>
+          </a:xfrm>
+          <a:prstGeom prst="rect">
+            <a:avLst/>
+          </a:prstGeom>
+          <a:noFill/>
+        </p:spPr>
+        <p:txBody>
+          <a:bodyPr wrap="square" lIns="0" tIns="0" rIns="0" bIns="0">
+            <a:spAutoFit/>
+          </a:bodyPr>
+          <a:lstStyle/>
+          <a:p>
+            <a:pPr algn="l">
+              <a:lnSpc>
+                <a:spcPct val="100000"/>
+              </a:lnSpc>
+              <a:spcAft>
+                <a:spcPts val="200"/>
+              </a:spcAft>
+              <a:defRPr sz="1800" b="0">
+                <a:solidFill>
+                  <a:srgbClr val="222222"/>
+                </a:solidFill>
+                <a:latin typeface="Calibri"/>
+              </a:defRPr>
+            </a:pPr>
+            <a:r>
+              <a:rPr sz="1800" b="0">
+                <a:solidFill>
+                  <a:srgbClr val="222222"/>
+                </a:solidFill>
+                <a:latin typeface="Calibri"/>
+              </a:rPr>
+              <a:t>Everything in this lesson depends on one small part that only Gen 3 vehicles carry. Find it before you write code that assumes it.</a:t>
+            </a:r>
+          </a:p>
+        </p:txBody>
+      </p:sp>
+      <p:pic>
+        <p:nvPicPr>
+          <p:cNvPr id="7" name="Picture 6" descr="vehicle-gen3-top.jpg"/>
+          <p:cNvPicPr>
+            <a:picLocks noChangeAspect="1"/>
+          </p:cNvPicPr>
+          <p:nvPr/>
+        </p:nvPicPr>
+        <p:blipFill>
+          <a:blip r:embed="rId2"/>
+          <a:stretch>
+            <a:fillRect/>
+          </a:stretch>
+        </p:blipFill>
+        <p:spPr>
+          <a:xfrm>
+            <a:off x="757351" y="1810512"/>
+            <a:ext cx="4901184" cy="3675888"/>
+          </a:xfrm>
+          <a:prstGeom prst="rect">
+            <a:avLst/>
+          </a:prstGeom>
+        </p:spPr>
+      </p:pic>
+      <p:sp>
+        <p:nvSpPr>
+          <p:cNvPr id="8" name="TextBox 7"/>
+          <p:cNvSpPr txBox="1"/>
+          <p:nvPr/>
+        </p:nvSpPr>
+        <p:spPr>
+          <a:xfrm>
+            <a:off x="502920" y="5559552"/>
+            <a:ext cx="5410047" cy="658368"/>
+          </a:xfrm>
+          <a:prstGeom prst="rect">
+            <a:avLst/>
+          </a:prstGeom>
+          <a:noFill/>
+        </p:spPr>
+        <p:txBody>
+          <a:bodyPr wrap="square" lIns="0" tIns="0" rIns="0" bIns="0">
+            <a:spAutoFit/>
+          </a:bodyPr>
+          <a:lstStyle/>
+          <a:p>
+            <a:pPr algn="ctr">
+              <a:lnSpc>
+                <a:spcPct val="100000"/>
+              </a:lnSpc>
+              <a:spcAft>
+                <a:spcPts val="200"/>
+              </a:spcAft>
+              <a:defRPr sz="1800" b="0">
+                <a:solidFill>
+                  <a:srgbClr val="666666"/>
+                </a:solidFill>
+                <a:latin typeface="Calibri"/>
+              </a:defRPr>
+            </a:pPr>
+            <a:r>
+              <a:rPr sz="1800" b="0">
+                <a:solidFill>
+                  <a:srgbClr val="666666"/>
+                </a:solidFill>
+                <a:latin typeface="Calibri"/>
+              </a:rPr>
+              <a:t>A Gen 3, looking down through the lexan top plate</a:t>
+            </a:r>
+          </a:p>
+        </p:txBody>
+      </p:sp>
+      <p:sp>
+        <p:nvSpPr>
+          <p:cNvPr id="9" name="Rectangle 8"/>
           <p:cNvSpPr/>
           <p:nvPr/>
         </p:nvSpPr>
         <p:spPr>
           <a:xfrm>
-            <a:off x="1325880" y="1691640"/>
-            <a:ext cx="3017520" cy="2286000"/>
+            <a:off x="6278727" y="1810512"/>
+            <a:ext cx="5410047" cy="3675888"/>
           </a:xfrm>
           <a:prstGeom prst="rect">
             <a:avLst/>
           </a:prstGeom>
           <a:solidFill>
-            <a:srgbClr val="D6ECEE"/>
+            <a:srgbClr val="EEF3F8"/>
           </a:solidFill>
-          <a:ln w="9525">
+          <a:ln w="19050">
             <a:solidFill>
-              <a:srgbClr val="C8D2DE"/>
+              <a:srgbClr val="0E7C86"/>
             </a:solidFill>
+            <a:prstDash val="dash"/>
           </a:ln>
           <a:effectLst/>
         </p:spPr>
@@ -7789,316 +11066,95 @@
           </a:fontRef>
         </p:style>
         <p:txBody>
-          <a:bodyPr rtlCol="0" anchor="ctr" wrap="square"/>
-          <a:lstStyle/>
-          <a:p>
-            <a:pPr algn="l">
-              <a:lnSpc>
-                <a:spcPct val="100000"/>
-              </a:lnSpc>
-              <a:spcAft>
-                <a:spcPts val="600"/>
-              </a:spcAft>
-              <a:defRPr sz="800" b="0">
-                <a:solidFill>
-                  <a:srgbClr val="222222"/>
-                </a:solidFill>
-                <a:latin typeface="Calibri"/>
-              </a:defRPr>
-            </a:pPr>
-          </a:p>
-        </p:txBody>
-      </p:sp>
-      <p:cxnSp>
-        <p:nvCxnSpPr>
-          <p:cNvPr id="7" name="Connector 6"/>
-          <p:cNvCxnSpPr/>
-          <p:nvPr/>
-        </p:nvCxnSpPr>
-        <p:spPr>
-          <a:xfrm>
-            <a:off x="1325880" y="3749040"/>
-            <a:ext cx="3017520" cy="0"/>
-          </a:xfrm>
-          <a:prstGeom prst="line">
-            <a:avLst/>
-          </a:prstGeom>
-          <a:ln w="12700">
-            <a:solidFill>
-              <a:srgbClr val="666666"/>
-            </a:solidFill>
-          </a:ln>
-        </p:spPr>
-        <p:style>
-          <a:lnRef idx="2">
-            <a:schemeClr val="accent1"/>
-          </a:lnRef>
-          <a:fillRef idx="0">
-            <a:schemeClr val="accent1"/>
-          </a:fillRef>
-          <a:effectRef idx="1">
-            <a:schemeClr val="accent1"/>
-          </a:effectRef>
-          <a:fontRef idx="minor">
-            <a:schemeClr val="tx1"/>
-          </a:fontRef>
-        </p:style>
-      </p:cxnSp>
-      <p:cxnSp>
-        <p:nvCxnSpPr>
-          <p:cNvPr id="8" name="Connector 7"/>
-          <p:cNvCxnSpPr/>
-          <p:nvPr/>
-        </p:nvCxnSpPr>
-        <p:spPr>
-          <a:xfrm>
-            <a:off x="1325880" y="3809391"/>
-            <a:ext cx="431074" cy="0"/>
-          </a:xfrm>
-          <a:prstGeom prst="line">
-            <a:avLst/>
-          </a:prstGeom>
-          <a:ln w="31750">
-            <a:solidFill>
-              <a:srgbClr val="0E7C86"/>
-            </a:solidFill>
-          </a:ln>
-        </p:spPr>
-        <p:style>
-          <a:lnRef idx="2">
-            <a:schemeClr val="accent1"/>
-          </a:lnRef>
-          <a:fillRef idx="0">
-            <a:schemeClr val="accent1"/>
-          </a:fillRef>
-          <a:effectRef idx="1">
-            <a:schemeClr val="accent1"/>
-          </a:effectRef>
-          <a:fontRef idx="minor">
-            <a:schemeClr val="tx1"/>
-          </a:fontRef>
-        </p:style>
-      </p:cxnSp>
-      <p:cxnSp>
-        <p:nvCxnSpPr>
-          <p:cNvPr id="9" name="Connector 8"/>
-          <p:cNvCxnSpPr/>
-          <p:nvPr/>
-        </p:nvCxnSpPr>
-        <p:spPr>
-          <a:xfrm flipV="1">
-            <a:off x="1756954" y="1979676"/>
-            <a:ext cx="431074" cy="1829715"/>
-          </a:xfrm>
-          <a:prstGeom prst="line">
-            <a:avLst/>
-          </a:prstGeom>
-          <a:ln w="31750">
-            <a:solidFill>
-              <a:srgbClr val="0E7C86"/>
-            </a:solidFill>
-          </a:ln>
-        </p:spPr>
-        <p:style>
-          <a:lnRef idx="2">
-            <a:schemeClr val="accent1"/>
-          </a:lnRef>
-          <a:fillRef idx="0">
-            <a:schemeClr val="accent1"/>
-          </a:fillRef>
-          <a:effectRef idx="1">
-            <a:schemeClr val="accent1"/>
-          </a:effectRef>
-          <a:fontRef idx="minor">
-            <a:schemeClr val="tx1"/>
-          </a:fontRef>
-        </p:style>
-      </p:cxnSp>
-      <p:cxnSp>
-        <p:nvCxnSpPr>
-          <p:cNvPr id="10" name="Connector 9"/>
-          <p:cNvCxnSpPr/>
-          <p:nvPr/>
-        </p:nvCxnSpPr>
-        <p:spPr>
-          <a:xfrm>
-            <a:off x="2188028" y="1979676"/>
-            <a:ext cx="431074" cy="694030"/>
-          </a:xfrm>
-          <a:prstGeom prst="line">
-            <a:avLst/>
-          </a:prstGeom>
-          <a:ln w="31750">
-            <a:solidFill>
-              <a:srgbClr val="0E7C86"/>
-            </a:solidFill>
-          </a:ln>
-        </p:spPr>
-        <p:style>
-          <a:lnRef idx="2">
-            <a:schemeClr val="accent1"/>
-          </a:lnRef>
-          <a:fillRef idx="0">
-            <a:schemeClr val="accent1"/>
-          </a:fillRef>
-          <a:effectRef idx="1">
-            <a:schemeClr val="accent1"/>
-          </a:effectRef>
-          <a:fontRef idx="minor">
-            <a:schemeClr val="tx1"/>
-          </a:fontRef>
-        </p:style>
-      </p:cxnSp>
-      <p:cxnSp>
-        <p:nvCxnSpPr>
-          <p:cNvPr id="11" name="Connector 10"/>
-          <p:cNvCxnSpPr/>
-          <p:nvPr/>
-        </p:nvCxnSpPr>
-        <p:spPr>
-          <a:xfrm>
-            <a:off x="2619102" y="2673706"/>
-            <a:ext cx="431074" cy="357530"/>
-          </a:xfrm>
-          <a:prstGeom prst="line">
-            <a:avLst/>
-          </a:prstGeom>
-          <a:ln w="31750">
-            <a:solidFill>
-              <a:srgbClr val="0E7C86"/>
-            </a:solidFill>
-          </a:ln>
-        </p:spPr>
-        <p:style>
-          <a:lnRef idx="2">
-            <a:schemeClr val="accent1"/>
-          </a:lnRef>
-          <a:fillRef idx="0">
-            <a:schemeClr val="accent1"/>
-          </a:fillRef>
-          <a:effectRef idx="1">
-            <a:schemeClr val="accent1"/>
-          </a:effectRef>
-          <a:fontRef idx="minor">
-            <a:schemeClr val="tx1"/>
-          </a:fontRef>
-        </p:style>
-      </p:cxnSp>
-      <p:cxnSp>
-        <p:nvCxnSpPr>
-          <p:cNvPr id="12" name="Connector 11"/>
-          <p:cNvCxnSpPr/>
-          <p:nvPr/>
-        </p:nvCxnSpPr>
-        <p:spPr>
-          <a:xfrm>
-            <a:off x="3050176" y="3031236"/>
-            <a:ext cx="431074" cy="105156"/>
-          </a:xfrm>
-          <a:prstGeom prst="line">
-            <a:avLst/>
-          </a:prstGeom>
-          <a:ln w="31750">
-            <a:solidFill>
-              <a:srgbClr val="0E7C86"/>
-            </a:solidFill>
-          </a:ln>
-        </p:spPr>
-        <p:style>
-          <a:lnRef idx="2">
-            <a:schemeClr val="accent1"/>
-          </a:lnRef>
-          <a:fillRef idx="0">
-            <a:schemeClr val="accent1"/>
-          </a:fillRef>
-          <a:effectRef idx="1">
-            <a:schemeClr val="accent1"/>
-          </a:effectRef>
-          <a:fontRef idx="minor">
-            <a:schemeClr val="tx1"/>
-          </a:fontRef>
-        </p:style>
-      </p:cxnSp>
-      <p:cxnSp>
-        <p:nvCxnSpPr>
-          <p:cNvPr id="13" name="Connector 12"/>
-          <p:cNvCxnSpPr/>
-          <p:nvPr/>
-        </p:nvCxnSpPr>
-        <p:spPr>
-          <a:xfrm>
-            <a:off x="3481250" y="3136392"/>
-            <a:ext cx="431074" cy="42063"/>
-          </a:xfrm>
-          <a:prstGeom prst="line">
-            <a:avLst/>
-          </a:prstGeom>
-          <a:ln w="31750">
-            <a:solidFill>
-              <a:srgbClr val="0E7C86"/>
-            </a:solidFill>
-          </a:ln>
-        </p:spPr>
-        <p:style>
-          <a:lnRef idx="2">
-            <a:schemeClr val="accent1"/>
-          </a:lnRef>
-          <a:fillRef idx="0">
-            <a:schemeClr val="accent1"/>
-          </a:fillRef>
-          <a:effectRef idx="1">
-            <a:schemeClr val="accent1"/>
-          </a:effectRef>
-          <a:fontRef idx="minor">
-            <a:schemeClr val="tx1"/>
-          </a:fontRef>
-        </p:style>
-      </p:cxnSp>
-      <p:cxnSp>
-        <p:nvCxnSpPr>
-          <p:cNvPr id="14" name="Connector 13"/>
-          <p:cNvCxnSpPr/>
-          <p:nvPr/>
-        </p:nvCxnSpPr>
-        <p:spPr>
-          <a:xfrm>
-            <a:off x="3912324" y="3178455"/>
-            <a:ext cx="431074" cy="0"/>
-          </a:xfrm>
-          <a:prstGeom prst="line">
-            <a:avLst/>
-          </a:prstGeom>
-          <a:ln w="31750">
-            <a:solidFill>
-              <a:srgbClr val="0E7C86"/>
-            </a:solidFill>
-          </a:ln>
-        </p:spPr>
-        <p:style>
-          <a:lnRef idx="2">
-            <a:schemeClr val="accent1"/>
-          </a:lnRef>
-          <a:fillRef idx="0">
-            <a:schemeClr val="accent1"/>
-          </a:fillRef>
-          <a:effectRef idx="1">
-            <a:schemeClr val="accent1"/>
-          </a:effectRef>
-          <a:fontRef idx="minor">
-            <a:schemeClr val="tx1"/>
-          </a:fontRef>
-        </p:style>
-      </p:cxnSp>
-      <p:sp>
-        <p:nvSpPr>
-          <p:cNvPr id="15" name="TextBox 14"/>
+          <a:bodyPr rtlCol="0" anchor="ctr" wrap="square" lIns="164592" rIns="164592" tIns="109728" bIns="109728"/>
+          <a:lstStyle/>
+          <a:p>
+            <a:pPr algn="ctr">
+              <a:lnSpc>
+                <a:spcPct val="100000"/>
+              </a:lnSpc>
+              <a:spcAft>
+                <a:spcPts val="700"/>
+              </a:spcAft>
+              <a:defRPr sz="1600" b="0">
+                <a:solidFill>
+                  <a:srgbClr val="0E7C86"/>
+                </a:solidFill>
+                <a:latin typeface="Calibri"/>
+              </a:defRPr>
+            </a:pPr>
+            <a:r>
+              <a:rPr sz="1600" b="1">
+                <a:solidFill>
+                  <a:srgbClr val="666666"/>
+                </a:solidFill>
+                <a:latin typeface="Calibri"/>
+              </a:rPr>
+              <a:t>PLACEHOLDER</a:t>
+            </a:r>
+          </a:p>
+          <a:p>
+            <a:pPr algn="ctr">
+              <a:lnSpc>
+                <a:spcPct val="100000"/>
+              </a:lnSpc>
+              <a:spcAft>
+                <a:spcPts val="700"/>
+              </a:spcAft>
+              <a:defRPr sz="1600" b="0">
+                <a:solidFill>
+                  <a:srgbClr val="0E7C86"/>
+                </a:solidFill>
+                <a:latin typeface="Calibri"/>
+              </a:defRPr>
+            </a:pPr>
+            <a:r>
+              <a:rPr sz="1600" b="0">
+                <a:solidFill>
+                  <a:srgbClr val="0E7C86"/>
+                </a:solidFill>
+                <a:latin typeface="Calibri"/>
+              </a:rPr>
+              <a:t>PHOTO: the INA219 on a Gen 3 board, close up</a:t>
+            </a:r>
+          </a:p>
+          <a:p>
+            <a:pPr algn="ctr">
+              <a:lnSpc>
+                <a:spcPct val="100000"/>
+              </a:lnSpc>
+              <a:spcAft>
+                <a:spcPts val="700"/>
+              </a:spcAft>
+              <a:defRPr sz="1600" b="0">
+                <a:solidFill>
+                  <a:srgbClr val="0E7C86"/>
+                </a:solidFill>
+                <a:latin typeface="Calibri"/>
+              </a:defRPr>
+            </a:pPr>
+            <a:r>
+              <a:rPr sz="1600" b="0">
+                <a:solidFill>
+                  <a:srgbClr val="0E7C86"/>
+                </a:solidFill>
+                <a:latin typeface="Calibri"/>
+              </a:rPr>
+              <a:t>Close enough to read the part, with the shunt and the two I2C wires to GPIO 32 and 33 visible.</a:t>
+            </a:r>
+          </a:p>
+        </p:txBody>
+      </p:sp>
+      <p:sp>
+        <p:nvSpPr>
+          <p:cNvPr id="10" name="TextBox 9"/>
           <p:cNvSpPr txBox="1"/>
           <p:nvPr/>
         </p:nvSpPr>
         <p:spPr>
           <a:xfrm>
-            <a:off x="1325880" y="1344168"/>
-            <a:ext cx="3017520" cy="367792"/>
+            <a:off x="6278727" y="5559552"/>
+            <a:ext cx="5410047" cy="658368"/>
           </a:xfrm>
           <a:prstGeom prst="rect">
             <a:avLst/>
@@ -8116,59 +11172,11 @@
                 <a:spcPct val="100000"/>
               </a:lnSpc>
               <a:spcAft>
-                <a:spcPts val="0"/>
-              </a:spcAft>
-              <a:defRPr sz="1800" b="1">
-                <a:solidFill>
-                  <a:srgbClr val="0E7C86"/>
-                </a:solidFill>
-                <a:latin typeface="Calibri"/>
-              </a:defRPr>
-            </a:pPr>
-            <a:r>
-              <a:rPr sz="1800" b="1">
-                <a:solidFill>
-                  <a:srgbClr val="0E7C86"/>
-                </a:solidFill>
-                <a:latin typeface="Calibri"/>
-              </a:rPr>
-              <a:t>HEALTHY</a:t>
-            </a:r>
-          </a:p>
-        </p:txBody>
-      </p:sp>
-      <p:sp>
-        <p:nvSpPr>
-          <p:cNvPr id="16" name="TextBox 15"/>
-          <p:cNvSpPr txBox="1"/>
-          <p:nvPr/>
-        </p:nvSpPr>
-        <p:spPr>
-          <a:xfrm>
-            <a:off x="1325880" y="4069080"/>
-            <a:ext cx="3017520" cy="659384"/>
-          </a:xfrm>
-          <a:prstGeom prst="rect">
-            <a:avLst/>
-          </a:prstGeom>
-          <a:noFill/>
-        </p:spPr>
-        <p:txBody>
-          <a:bodyPr wrap="square" lIns="0" tIns="0" rIns="0" bIns="0">
-            <a:spAutoFit/>
-          </a:bodyPr>
-          <a:lstStyle/>
-          <a:p>
-            <a:pPr algn="ctr">
-              <a:lnSpc>
-                <a:spcPct val="100000"/>
-              </a:lnSpc>
-              <a:spcAft>
-                <a:spcPts val="0"/>
+                <a:spcPts val="600"/>
               </a:spcAft>
               <a:defRPr sz="1800" b="0">
                 <a:solidFill>
-                  <a:srgbClr val="222222"/>
+                  <a:srgbClr val="666666"/>
                 </a:solidFill>
                 <a:latin typeface="Calibri"/>
               </a:defRPr>
@@ -8176,1113 +11184,11 @@
             <a:r>
               <a:rPr sz="1800" b="0">
                 <a:solidFill>
-                  <a:srgbClr val="222222"/>
-                </a:solidFill>
-                <a:latin typeface="Calibri"/>
-              </a:rPr>
-              <a:t>spikes as it breaks away,</a:t>
-            </a:r>
-          </a:p>
-          <a:p>
-            <a:pPr algn="ctr">
-              <a:lnSpc>
-                <a:spcPct val="100000"/>
-              </a:lnSpc>
-              <a:spcAft>
-                <a:spcPts val="0"/>
-              </a:spcAft>
-              <a:defRPr sz="1800" b="0">
-                <a:solidFill>
-                  <a:srgbClr val="222222"/>
-                </a:solidFill>
-                <a:latin typeface="Calibri"/>
-              </a:defRPr>
-            </a:pPr>
-            <a:r>
-              <a:rPr sz="1800" b="0">
-                <a:solidFill>
-                  <a:srgbClr val="222222"/>
-                </a:solidFill>
-                <a:latin typeface="Calibri"/>
-              </a:rPr>
-              <a:t>then settles</a:t>
-            </a:r>
-          </a:p>
-        </p:txBody>
-      </p:sp>
-      <p:sp>
-        <p:nvSpPr>
-          <p:cNvPr id="17" name="Rectangle 16"/>
-          <p:cNvSpPr/>
-          <p:nvPr/>
-        </p:nvSpPr>
-        <p:spPr>
-          <a:xfrm>
-            <a:off x="4846320" y="1691640"/>
-            <a:ext cx="3017520" cy="2286000"/>
-          </a:xfrm>
-          <a:prstGeom prst="rect">
-            <a:avLst/>
-          </a:prstGeom>
-          <a:solidFill>
-            <a:srgbClr val="E8ECF0"/>
-          </a:solidFill>
-          <a:ln w="9525">
-            <a:solidFill>
-              <a:srgbClr val="C8D2DE"/>
-            </a:solidFill>
-          </a:ln>
-          <a:effectLst/>
-        </p:spPr>
-        <p:style>
-          <a:lnRef idx="1">
-            <a:schemeClr val="accent1"/>
-          </a:lnRef>
-          <a:fillRef idx="3">
-            <a:schemeClr val="accent1"/>
-          </a:fillRef>
-          <a:effectRef idx="2">
-            <a:schemeClr val="accent1"/>
-          </a:effectRef>
-          <a:fontRef idx="minor">
-            <a:schemeClr val="lt1"/>
-          </a:fontRef>
-        </p:style>
-        <p:txBody>
-          <a:bodyPr rtlCol="0" anchor="ctr" wrap="square"/>
-          <a:lstStyle/>
-          <a:p>
-            <a:pPr algn="l">
-              <a:lnSpc>
-                <a:spcPct val="100000"/>
-              </a:lnSpc>
-              <a:spcAft>
-                <a:spcPts val="600"/>
-              </a:spcAft>
-              <a:defRPr sz="800" b="0">
-                <a:solidFill>
-                  <a:srgbClr val="222222"/>
-                </a:solidFill>
-                <a:latin typeface="Calibri"/>
-              </a:defRPr>
-            </a:pPr>
-          </a:p>
-        </p:txBody>
-      </p:sp>
-      <p:cxnSp>
-        <p:nvCxnSpPr>
-          <p:cNvPr id="18" name="Connector 17"/>
-          <p:cNvCxnSpPr/>
-          <p:nvPr/>
-        </p:nvCxnSpPr>
-        <p:spPr>
-          <a:xfrm>
-            <a:off x="4846320" y="3749040"/>
-            <a:ext cx="3017520" cy="0"/>
-          </a:xfrm>
-          <a:prstGeom prst="line">
-            <a:avLst/>
-          </a:prstGeom>
-          <a:ln w="12700">
-            <a:solidFill>
-              <a:srgbClr val="666666"/>
-            </a:solidFill>
-          </a:ln>
-        </p:spPr>
-        <p:style>
-          <a:lnRef idx="2">
-            <a:schemeClr val="accent1"/>
-          </a:lnRef>
-          <a:fillRef idx="0">
-            <a:schemeClr val="accent1"/>
-          </a:fillRef>
-          <a:effectRef idx="1">
-            <a:schemeClr val="accent1"/>
-          </a:effectRef>
-          <a:fontRef idx="minor">
-            <a:schemeClr val="tx1"/>
-          </a:fontRef>
-        </p:style>
-      </p:cxnSp>
-      <p:cxnSp>
-        <p:nvCxnSpPr>
-          <p:cNvPr id="19" name="Connector 18"/>
-          <p:cNvCxnSpPr/>
-          <p:nvPr/>
-        </p:nvCxnSpPr>
-        <p:spPr>
-          <a:xfrm>
-            <a:off x="4846320" y="3851453"/>
-            <a:ext cx="431074" cy="0"/>
-          </a:xfrm>
-          <a:prstGeom prst="line">
-            <a:avLst/>
-          </a:prstGeom>
-          <a:ln w="31750">
-            <a:solidFill>
-              <a:srgbClr val="666666"/>
-            </a:solidFill>
-          </a:ln>
-        </p:spPr>
-        <p:style>
-          <a:lnRef idx="2">
-            <a:schemeClr val="accent1"/>
-          </a:lnRef>
-          <a:fillRef idx="0">
-            <a:schemeClr val="accent1"/>
-          </a:fillRef>
-          <a:effectRef idx="1">
-            <a:schemeClr val="accent1"/>
-          </a:effectRef>
-          <a:fontRef idx="minor">
-            <a:schemeClr val="tx1"/>
-          </a:fontRef>
-        </p:style>
-      </p:cxnSp>
-      <p:cxnSp>
-        <p:nvCxnSpPr>
-          <p:cNvPr id="20" name="Connector 19"/>
-          <p:cNvCxnSpPr/>
-          <p:nvPr/>
-        </p:nvCxnSpPr>
-        <p:spPr>
-          <a:xfrm flipV="1">
-            <a:off x="5277394" y="3809391"/>
-            <a:ext cx="431074" cy="42062"/>
-          </a:xfrm>
-          <a:prstGeom prst="line">
-            <a:avLst/>
-          </a:prstGeom>
-          <a:ln w="31750">
-            <a:solidFill>
-              <a:srgbClr val="666666"/>
-            </a:solidFill>
-          </a:ln>
-        </p:spPr>
-        <p:style>
-          <a:lnRef idx="2">
-            <a:schemeClr val="accent1"/>
-          </a:lnRef>
-          <a:fillRef idx="0">
-            <a:schemeClr val="accent1"/>
-          </a:fillRef>
-          <a:effectRef idx="1">
-            <a:schemeClr val="accent1"/>
-          </a:effectRef>
-          <a:fontRef idx="minor">
-            <a:schemeClr val="tx1"/>
-          </a:fontRef>
-        </p:style>
-      </p:cxnSp>
-      <p:cxnSp>
-        <p:nvCxnSpPr>
-          <p:cNvPr id="21" name="Connector 20"/>
-          <p:cNvCxnSpPr/>
-          <p:nvPr/>
-        </p:nvCxnSpPr>
-        <p:spPr>
-          <a:xfrm>
-            <a:off x="5708468" y="3809391"/>
-            <a:ext cx="431074" cy="21031"/>
-          </a:xfrm>
-          <a:prstGeom prst="line">
-            <a:avLst/>
-          </a:prstGeom>
-          <a:ln w="31750">
-            <a:solidFill>
-              <a:srgbClr val="666666"/>
-            </a:solidFill>
-          </a:ln>
-        </p:spPr>
-        <p:style>
-          <a:lnRef idx="2">
-            <a:schemeClr val="accent1"/>
-          </a:lnRef>
-          <a:fillRef idx="0">
-            <a:schemeClr val="accent1"/>
-          </a:fillRef>
-          <a:effectRef idx="1">
-            <a:schemeClr val="accent1"/>
-          </a:effectRef>
-          <a:fontRef idx="minor">
-            <a:schemeClr val="tx1"/>
-          </a:fontRef>
-        </p:style>
-      </p:cxnSp>
-      <p:cxnSp>
-        <p:nvCxnSpPr>
-          <p:cNvPr id="22" name="Connector 21"/>
-          <p:cNvCxnSpPr/>
-          <p:nvPr/>
-        </p:nvCxnSpPr>
-        <p:spPr>
-          <a:xfrm>
-            <a:off x="6139542" y="3830422"/>
-            <a:ext cx="431074" cy="21031"/>
-          </a:xfrm>
-          <a:prstGeom prst="line">
-            <a:avLst/>
-          </a:prstGeom>
-          <a:ln w="31750">
-            <a:solidFill>
-              <a:srgbClr val="666666"/>
-            </a:solidFill>
-          </a:ln>
-        </p:spPr>
-        <p:style>
-          <a:lnRef idx="2">
-            <a:schemeClr val="accent1"/>
-          </a:lnRef>
-          <a:fillRef idx="0">
-            <a:schemeClr val="accent1"/>
-          </a:fillRef>
-          <a:effectRef idx="1">
-            <a:schemeClr val="accent1"/>
-          </a:effectRef>
-          <a:fontRef idx="minor">
-            <a:schemeClr val="tx1"/>
-          </a:fontRef>
-        </p:style>
-      </p:cxnSp>
-      <p:cxnSp>
-        <p:nvCxnSpPr>
-          <p:cNvPr id="23" name="Connector 22"/>
-          <p:cNvCxnSpPr/>
-          <p:nvPr/>
-        </p:nvCxnSpPr>
-        <p:spPr>
-          <a:xfrm flipV="1">
-            <a:off x="6570616" y="3830422"/>
-            <a:ext cx="431074" cy="21031"/>
-          </a:xfrm>
-          <a:prstGeom prst="line">
-            <a:avLst/>
-          </a:prstGeom>
-          <a:ln w="31750">
-            <a:solidFill>
-              <a:srgbClr val="666666"/>
-            </a:solidFill>
-          </a:ln>
-        </p:spPr>
-        <p:style>
-          <a:lnRef idx="2">
-            <a:schemeClr val="accent1"/>
-          </a:lnRef>
-          <a:fillRef idx="0">
-            <a:schemeClr val="accent1"/>
-          </a:fillRef>
-          <a:effectRef idx="1">
-            <a:schemeClr val="accent1"/>
-          </a:effectRef>
-          <a:fontRef idx="minor">
-            <a:schemeClr val="tx1"/>
-          </a:fontRef>
-        </p:style>
-      </p:cxnSp>
-      <p:cxnSp>
-        <p:nvCxnSpPr>
-          <p:cNvPr id="24" name="Connector 23"/>
-          <p:cNvCxnSpPr/>
-          <p:nvPr/>
-        </p:nvCxnSpPr>
-        <p:spPr>
-          <a:xfrm>
-            <a:off x="7001690" y="3830422"/>
-            <a:ext cx="431074" cy="21031"/>
-          </a:xfrm>
-          <a:prstGeom prst="line">
-            <a:avLst/>
-          </a:prstGeom>
-          <a:ln w="31750">
-            <a:solidFill>
-              <a:srgbClr val="666666"/>
-            </a:solidFill>
-          </a:ln>
-        </p:spPr>
-        <p:style>
-          <a:lnRef idx="2">
-            <a:schemeClr val="accent1"/>
-          </a:lnRef>
-          <a:fillRef idx="0">
-            <a:schemeClr val="accent1"/>
-          </a:fillRef>
-          <a:effectRef idx="1">
-            <a:schemeClr val="accent1"/>
-          </a:effectRef>
-          <a:fontRef idx="minor">
-            <a:schemeClr val="tx1"/>
-          </a:fontRef>
-        </p:style>
-      </p:cxnSp>
-      <p:cxnSp>
-        <p:nvCxnSpPr>
-          <p:cNvPr id="25" name="Connector 24"/>
-          <p:cNvCxnSpPr/>
-          <p:nvPr/>
-        </p:nvCxnSpPr>
-        <p:spPr>
-          <a:xfrm>
-            <a:off x="7432764" y="3851453"/>
-            <a:ext cx="431074" cy="0"/>
-          </a:xfrm>
-          <a:prstGeom prst="line">
-            <a:avLst/>
-          </a:prstGeom>
-          <a:ln w="31750">
-            <a:solidFill>
-              <a:srgbClr val="666666"/>
-            </a:solidFill>
-          </a:ln>
-        </p:spPr>
-        <p:style>
-          <a:lnRef idx="2">
-            <a:schemeClr val="accent1"/>
-          </a:lnRef>
-          <a:fillRef idx="0">
-            <a:schemeClr val="accent1"/>
-          </a:fillRef>
-          <a:effectRef idx="1">
-            <a:schemeClr val="accent1"/>
-          </a:effectRef>
-          <a:fontRef idx="minor">
-            <a:schemeClr val="tx1"/>
-          </a:fontRef>
-        </p:style>
-      </p:cxnSp>
-      <p:sp>
-        <p:nvSpPr>
-          <p:cNvPr id="26" name="TextBox 25"/>
-          <p:cNvSpPr txBox="1"/>
-          <p:nvPr/>
-        </p:nvSpPr>
-        <p:spPr>
-          <a:xfrm>
-            <a:off x="4846320" y="1344168"/>
-            <a:ext cx="3017520" cy="367792"/>
-          </a:xfrm>
-          <a:prstGeom prst="rect">
-            <a:avLst/>
-          </a:prstGeom>
-          <a:noFill/>
-        </p:spPr>
-        <p:txBody>
-          <a:bodyPr wrap="square" lIns="0" tIns="0" rIns="0" bIns="0">
-            <a:spAutoFit/>
-          </a:bodyPr>
-          <a:lstStyle/>
-          <a:p>
-            <a:pPr algn="ctr">
-              <a:lnSpc>
-                <a:spcPct val="100000"/>
-              </a:lnSpc>
-              <a:spcAft>
-                <a:spcPts val="0"/>
-              </a:spcAft>
-              <a:defRPr sz="1800" b="1">
-                <a:solidFill>
                   <a:srgbClr val="666666"/>
                 </a:solidFill>
                 <a:latin typeface="Calibri"/>
-              </a:defRPr>
-            </a:pPr>
-            <a:r>
-              <a:rPr sz="1800" b="1">
-                <a:solidFill>
-                  <a:srgbClr val="666666"/>
-                </a:solidFill>
-                <a:latin typeface="Calibri"/>
-              </a:rPr>
-              <a:t>DISCONNECTED</a:t>
-            </a:r>
-          </a:p>
-        </p:txBody>
-      </p:sp>
-      <p:sp>
-        <p:nvSpPr>
-          <p:cNvPr id="27" name="TextBox 26"/>
-          <p:cNvSpPr txBox="1"/>
-          <p:nvPr/>
-        </p:nvSpPr>
-        <p:spPr>
-          <a:xfrm>
-            <a:off x="4846320" y="4069080"/>
-            <a:ext cx="3017520" cy="367792"/>
-          </a:xfrm>
-          <a:prstGeom prst="rect">
-            <a:avLst/>
-          </a:prstGeom>
-          <a:noFill/>
-        </p:spPr>
-        <p:txBody>
-          <a:bodyPr wrap="square" lIns="0" tIns="0" rIns="0" bIns="0">
-            <a:spAutoFit/>
-          </a:bodyPr>
-          <a:lstStyle/>
-          <a:p>
-            <a:pPr algn="ctr">
-              <a:lnSpc>
-                <a:spcPct val="100000"/>
-              </a:lnSpc>
-              <a:spcAft>
-                <a:spcPts val="0"/>
-              </a:spcAft>
-              <a:defRPr sz="1800" b="0">
-                <a:solidFill>
-                  <a:srgbClr val="222222"/>
-                </a:solidFill>
-                <a:latin typeface="Calibri"/>
-              </a:defRPr>
-            </a:pPr>
-            <a:r>
-              <a:rPr sz="1800" b="0">
-                <a:solidFill>
-                  <a:srgbClr val="222222"/>
-                </a:solidFill>
-                <a:latin typeface="Calibri"/>
-              </a:rPr>
-              <a:t>no spike, almost no draw</a:t>
-            </a:r>
-          </a:p>
-        </p:txBody>
-      </p:sp>
-      <p:sp>
-        <p:nvSpPr>
-          <p:cNvPr id="28" name="Rectangle 27"/>
-          <p:cNvSpPr/>
-          <p:nvPr/>
-        </p:nvSpPr>
-        <p:spPr>
-          <a:xfrm>
-            <a:off x="8366760" y="1691640"/>
-            <a:ext cx="3017520" cy="2286000"/>
-          </a:xfrm>
-          <a:prstGeom prst="rect">
-            <a:avLst/>
-          </a:prstGeom>
-          <a:solidFill>
-            <a:srgbClr val="F6D8D8"/>
-          </a:solidFill>
-          <a:ln w="9525">
-            <a:solidFill>
-              <a:srgbClr val="C8D2DE"/>
-            </a:solidFill>
-          </a:ln>
-          <a:effectLst/>
-        </p:spPr>
-        <p:style>
-          <a:lnRef idx="1">
-            <a:schemeClr val="accent1"/>
-          </a:lnRef>
-          <a:fillRef idx="3">
-            <a:schemeClr val="accent1"/>
-          </a:fillRef>
-          <a:effectRef idx="2">
-            <a:schemeClr val="accent1"/>
-          </a:effectRef>
-          <a:fontRef idx="minor">
-            <a:schemeClr val="lt1"/>
-          </a:fontRef>
-        </p:style>
-        <p:txBody>
-          <a:bodyPr rtlCol="0" anchor="ctr" wrap="square"/>
-          <a:lstStyle/>
-          <a:p>
-            <a:pPr algn="l">
-              <a:lnSpc>
-                <a:spcPct val="100000"/>
-              </a:lnSpc>
-              <a:spcAft>
-                <a:spcPts val="600"/>
-              </a:spcAft>
-              <a:defRPr sz="800" b="0">
-                <a:solidFill>
-                  <a:srgbClr val="222222"/>
-                </a:solidFill>
-                <a:latin typeface="Calibri"/>
-              </a:defRPr>
-            </a:pPr>
-          </a:p>
-        </p:txBody>
-      </p:sp>
-      <p:cxnSp>
-        <p:nvCxnSpPr>
-          <p:cNvPr id="29" name="Connector 28"/>
-          <p:cNvCxnSpPr/>
-          <p:nvPr/>
-        </p:nvCxnSpPr>
-        <p:spPr>
-          <a:xfrm>
-            <a:off x="8366760" y="3749040"/>
-            <a:ext cx="3017520" cy="0"/>
-          </a:xfrm>
-          <a:prstGeom prst="line">
-            <a:avLst/>
-          </a:prstGeom>
-          <a:ln w="12700">
-            <a:solidFill>
-              <a:srgbClr val="666666"/>
-            </a:solidFill>
-          </a:ln>
-        </p:spPr>
-        <p:style>
-          <a:lnRef idx="2">
-            <a:schemeClr val="accent1"/>
-          </a:lnRef>
-          <a:fillRef idx="0">
-            <a:schemeClr val="accent1"/>
-          </a:fillRef>
-          <a:effectRef idx="1">
-            <a:schemeClr val="accent1"/>
-          </a:effectRef>
-          <a:fontRef idx="minor">
-            <a:schemeClr val="tx1"/>
-          </a:fontRef>
-        </p:style>
-      </p:cxnSp>
-      <p:cxnSp>
-        <p:nvCxnSpPr>
-          <p:cNvPr id="30" name="Connector 29"/>
-          <p:cNvCxnSpPr/>
-          <p:nvPr/>
-        </p:nvCxnSpPr>
-        <p:spPr>
-          <a:xfrm>
-            <a:off x="8366760" y="3809391"/>
-            <a:ext cx="431074" cy="0"/>
-          </a:xfrm>
-          <a:prstGeom prst="line">
-            <a:avLst/>
-          </a:prstGeom>
-          <a:ln w="31750">
-            <a:solidFill>
-              <a:srgbClr val="A32A2A"/>
-            </a:solidFill>
-          </a:ln>
-        </p:spPr>
-        <p:style>
-          <a:lnRef idx="2">
-            <a:schemeClr val="accent1"/>
-          </a:lnRef>
-          <a:fillRef idx="0">
-            <a:schemeClr val="accent1"/>
-          </a:fillRef>
-          <a:effectRef idx="1">
-            <a:schemeClr val="accent1"/>
-          </a:effectRef>
-          <a:fontRef idx="minor">
-            <a:schemeClr val="tx1"/>
-          </a:fontRef>
-        </p:style>
-      </p:cxnSp>
-      <p:cxnSp>
-        <p:nvCxnSpPr>
-          <p:cNvPr id="31" name="Connector 30"/>
-          <p:cNvCxnSpPr/>
-          <p:nvPr/>
-        </p:nvCxnSpPr>
-        <p:spPr>
-          <a:xfrm flipV="1">
-            <a:off x="8797834" y="1916583"/>
-            <a:ext cx="431074" cy="1892808"/>
-          </a:xfrm>
-          <a:prstGeom prst="line">
-            <a:avLst/>
-          </a:prstGeom>
-          <a:ln w="31750">
-            <a:solidFill>
-              <a:srgbClr val="A32A2A"/>
-            </a:solidFill>
-          </a:ln>
-        </p:spPr>
-        <p:style>
-          <a:lnRef idx="2">
-            <a:schemeClr val="accent1"/>
-          </a:lnRef>
-          <a:fillRef idx="0">
-            <a:schemeClr val="accent1"/>
-          </a:fillRef>
-          <a:effectRef idx="1">
-            <a:schemeClr val="accent1"/>
-          </a:effectRef>
-          <a:fontRef idx="minor">
-            <a:schemeClr val="tx1"/>
-          </a:fontRef>
-        </p:style>
-      </p:cxnSp>
-      <p:cxnSp>
-        <p:nvCxnSpPr>
-          <p:cNvPr id="32" name="Connector 31"/>
-          <p:cNvCxnSpPr/>
-          <p:nvPr/>
-        </p:nvCxnSpPr>
-        <p:spPr>
-          <a:xfrm>
-            <a:off x="9228908" y="1916583"/>
-            <a:ext cx="431074" cy="63093"/>
-          </a:xfrm>
-          <a:prstGeom prst="line">
-            <a:avLst/>
-          </a:prstGeom>
-          <a:ln w="31750">
-            <a:solidFill>
-              <a:srgbClr val="A32A2A"/>
-            </a:solidFill>
-          </a:ln>
-        </p:spPr>
-        <p:style>
-          <a:lnRef idx="2">
-            <a:schemeClr val="accent1"/>
-          </a:lnRef>
-          <a:fillRef idx="0">
-            <a:schemeClr val="accent1"/>
-          </a:fillRef>
-          <a:effectRef idx="1">
-            <a:schemeClr val="accent1"/>
-          </a:effectRef>
-          <a:fontRef idx="minor">
-            <a:schemeClr val="tx1"/>
-          </a:fontRef>
-        </p:style>
-      </p:cxnSp>
-      <p:cxnSp>
-        <p:nvCxnSpPr>
-          <p:cNvPr id="33" name="Connector 32"/>
-          <p:cNvCxnSpPr/>
-          <p:nvPr/>
-        </p:nvCxnSpPr>
-        <p:spPr>
-          <a:xfrm>
-            <a:off x="9659982" y="1979676"/>
-            <a:ext cx="431074" cy="21032"/>
-          </a:xfrm>
-          <a:prstGeom prst="line">
-            <a:avLst/>
-          </a:prstGeom>
-          <a:ln w="31750">
-            <a:solidFill>
-              <a:srgbClr val="A32A2A"/>
-            </a:solidFill>
-          </a:ln>
-        </p:spPr>
-        <p:style>
-          <a:lnRef idx="2">
-            <a:schemeClr val="accent1"/>
-          </a:lnRef>
-          <a:fillRef idx="0">
-            <a:schemeClr val="accent1"/>
-          </a:fillRef>
-          <a:effectRef idx="1">
-            <a:schemeClr val="accent1"/>
-          </a:effectRef>
-          <a:fontRef idx="minor">
-            <a:schemeClr val="tx1"/>
-          </a:fontRef>
-        </p:style>
-      </p:cxnSp>
-      <p:cxnSp>
-        <p:nvCxnSpPr>
-          <p:cNvPr id="34" name="Connector 33"/>
-          <p:cNvCxnSpPr/>
-          <p:nvPr/>
-        </p:nvCxnSpPr>
-        <p:spPr>
-          <a:xfrm flipV="1">
-            <a:off x="10091056" y="1958645"/>
-            <a:ext cx="431074" cy="42063"/>
-          </a:xfrm>
-          <a:prstGeom prst="line">
-            <a:avLst/>
-          </a:prstGeom>
-          <a:ln w="31750">
-            <a:solidFill>
-              <a:srgbClr val="A32A2A"/>
-            </a:solidFill>
-          </a:ln>
-        </p:spPr>
-        <p:style>
-          <a:lnRef idx="2">
-            <a:schemeClr val="accent1"/>
-          </a:lnRef>
-          <a:fillRef idx="0">
-            <a:schemeClr val="accent1"/>
-          </a:fillRef>
-          <a:effectRef idx="1">
-            <a:schemeClr val="accent1"/>
-          </a:effectRef>
-          <a:fontRef idx="minor">
-            <a:schemeClr val="tx1"/>
-          </a:fontRef>
-        </p:style>
-      </p:cxnSp>
-      <p:cxnSp>
-        <p:nvCxnSpPr>
-          <p:cNvPr id="35" name="Connector 34"/>
-          <p:cNvCxnSpPr/>
-          <p:nvPr/>
-        </p:nvCxnSpPr>
-        <p:spPr>
-          <a:xfrm>
-            <a:off x="10522130" y="1958645"/>
-            <a:ext cx="431074" cy="21031"/>
-          </a:xfrm>
-          <a:prstGeom prst="line">
-            <a:avLst/>
-          </a:prstGeom>
-          <a:ln w="31750">
-            <a:solidFill>
-              <a:srgbClr val="A32A2A"/>
-            </a:solidFill>
-          </a:ln>
-        </p:spPr>
-        <p:style>
-          <a:lnRef idx="2">
-            <a:schemeClr val="accent1"/>
-          </a:lnRef>
-          <a:fillRef idx="0">
-            <a:schemeClr val="accent1"/>
-          </a:fillRef>
-          <a:effectRef idx="1">
-            <a:schemeClr val="accent1"/>
-          </a:effectRef>
-          <a:fontRef idx="minor">
-            <a:schemeClr val="tx1"/>
-          </a:fontRef>
-        </p:style>
-      </p:cxnSp>
-      <p:cxnSp>
-        <p:nvCxnSpPr>
-          <p:cNvPr id="36" name="Connector 35"/>
-          <p:cNvCxnSpPr/>
-          <p:nvPr/>
-        </p:nvCxnSpPr>
-        <p:spPr>
-          <a:xfrm>
-            <a:off x="10953204" y="1979676"/>
-            <a:ext cx="431074" cy="21032"/>
-          </a:xfrm>
-          <a:prstGeom prst="line">
-            <a:avLst/>
-          </a:prstGeom>
-          <a:ln w="31750">
-            <a:solidFill>
-              <a:srgbClr val="A32A2A"/>
-            </a:solidFill>
-          </a:ln>
-        </p:spPr>
-        <p:style>
-          <a:lnRef idx="2">
-            <a:schemeClr val="accent1"/>
-          </a:lnRef>
-          <a:fillRef idx="0">
-            <a:schemeClr val="accent1"/>
-          </a:fillRef>
-          <a:effectRef idx="1">
-            <a:schemeClr val="accent1"/>
-          </a:effectRef>
-          <a:fontRef idx="minor">
-            <a:schemeClr val="tx1"/>
-          </a:fontRef>
-        </p:style>
-      </p:cxnSp>
-      <p:sp>
-        <p:nvSpPr>
-          <p:cNvPr id="37" name="TextBox 36"/>
-          <p:cNvSpPr txBox="1"/>
-          <p:nvPr/>
-        </p:nvSpPr>
-        <p:spPr>
-          <a:xfrm>
-            <a:off x="8366760" y="1344168"/>
-            <a:ext cx="3017520" cy="367792"/>
-          </a:xfrm>
-          <a:prstGeom prst="rect">
-            <a:avLst/>
-          </a:prstGeom>
-          <a:noFill/>
-        </p:spPr>
-        <p:txBody>
-          <a:bodyPr wrap="square" lIns="0" tIns="0" rIns="0" bIns="0">
-            <a:spAutoFit/>
-          </a:bodyPr>
-          <a:lstStyle/>
-          <a:p>
-            <a:pPr algn="ctr">
-              <a:lnSpc>
-                <a:spcPct val="100000"/>
-              </a:lnSpc>
-              <a:spcAft>
-                <a:spcPts val="0"/>
-              </a:spcAft>
-              <a:defRPr sz="1800" b="1">
-                <a:solidFill>
-                  <a:srgbClr val="A32A2A"/>
-                </a:solidFill>
-                <a:latin typeface="Calibri"/>
-              </a:defRPr>
-            </a:pPr>
-            <a:r>
-              <a:rPr sz="1800" b="1">
-                <a:solidFill>
-                  <a:srgbClr val="A32A2A"/>
-                </a:solidFill>
-                <a:latin typeface="Calibri"/>
-              </a:rPr>
-              <a:t>JAMMED</a:t>
-            </a:r>
-          </a:p>
-        </p:txBody>
-      </p:sp>
-      <p:sp>
-        <p:nvSpPr>
-          <p:cNvPr id="38" name="TextBox 37"/>
-          <p:cNvSpPr txBox="1"/>
-          <p:nvPr/>
-        </p:nvSpPr>
-        <p:spPr>
-          <a:xfrm>
-            <a:off x="8366760" y="4069080"/>
-            <a:ext cx="3017520" cy="646684"/>
-          </a:xfrm>
-          <a:prstGeom prst="rect">
-            <a:avLst/>
-          </a:prstGeom>
-          <a:noFill/>
-        </p:spPr>
-        <p:txBody>
-          <a:bodyPr wrap="square" lIns="0" tIns="0" rIns="0" bIns="0">
-            <a:spAutoFit/>
-          </a:bodyPr>
-          <a:lstStyle/>
-          <a:p>
-            <a:pPr algn="ctr">
-              <a:lnSpc>
-                <a:spcPct val="100000"/>
-              </a:lnSpc>
-              <a:spcAft>
-                <a:spcPts val="0"/>
-              </a:spcAft>
-              <a:defRPr sz="1800" b="0">
-                <a:solidFill>
-                  <a:srgbClr val="222222"/>
-                </a:solidFill>
-                <a:latin typeface="Calibri"/>
-              </a:defRPr>
-            </a:pPr>
-            <a:r>
-              <a:rPr sz="1800" b="0">
-                <a:solidFill>
-                  <a:srgbClr val="222222"/>
-                </a:solidFill>
-                <a:latin typeface="Calibri"/>
-              </a:rPr>
-              <a:t>draws a lot and never settles</a:t>
-            </a:r>
-          </a:p>
-        </p:txBody>
-      </p:sp>
-      <p:sp>
-        <p:nvSpPr>
-          <p:cNvPr id="39" name="TextBox 38"/>
-          <p:cNvSpPr txBox="1"/>
-          <p:nvPr/>
-        </p:nvSpPr>
-        <p:spPr>
-          <a:xfrm>
-            <a:off x="548640" y="3566159"/>
-            <a:ext cx="731520" cy="646684"/>
-          </a:xfrm>
-          <a:prstGeom prst="rect">
-            <a:avLst/>
-          </a:prstGeom>
-          <a:noFill/>
-        </p:spPr>
-        <p:txBody>
-          <a:bodyPr wrap="square" lIns="0" tIns="0" rIns="0" bIns="0">
-            <a:spAutoFit/>
-          </a:bodyPr>
-          <a:lstStyle/>
-          <a:p>
-            <a:pPr algn="r">
-              <a:lnSpc>
-                <a:spcPct val="100000"/>
-              </a:lnSpc>
-              <a:spcAft>
-                <a:spcPts val="0"/>
-              </a:spcAft>
-              <a:defRPr sz="1800" b="0">
-                <a:solidFill>
-                  <a:srgbClr val="666666"/>
-                </a:solidFill>
-                <a:latin typeface="Calibri"/>
-              </a:defRPr>
-            </a:pPr>
-            <a:r>
-              <a:rPr sz="1800" b="0">
-                <a:solidFill>
-                  <a:srgbClr val="666666"/>
-                </a:solidFill>
-                <a:latin typeface="Calibri"/>
-              </a:rPr>
-              <a:t>baseline</a:t>
-            </a:r>
-          </a:p>
-        </p:txBody>
-      </p:sp>
-      <p:sp>
-        <p:nvSpPr>
-          <p:cNvPr id="40" name="Rectangle 39"/>
-          <p:cNvSpPr/>
-          <p:nvPr/>
-        </p:nvSpPr>
-        <p:spPr>
-          <a:xfrm>
-            <a:off x="502920" y="5074920"/>
-            <a:ext cx="11185855" cy="914400"/>
-          </a:xfrm>
-          <a:prstGeom prst="rect">
-            <a:avLst/>
-          </a:prstGeom>
-          <a:solidFill>
-            <a:srgbClr val="F4F6F8"/>
-          </a:solidFill>
-          <a:ln w="12700">
-            <a:solidFill>
-              <a:srgbClr val="0E7C86"/>
-            </a:solidFill>
-          </a:ln>
-          <a:effectLst/>
-        </p:spPr>
-        <p:style>
-          <a:lnRef idx="1">
-            <a:schemeClr val="accent1"/>
-          </a:lnRef>
-          <a:fillRef idx="3">
-            <a:schemeClr val="accent1"/>
-          </a:fillRef>
-          <a:effectRef idx="2">
-            <a:schemeClr val="accent1"/>
-          </a:effectRef>
-          <a:fontRef idx="minor">
-            <a:schemeClr val="lt1"/>
-          </a:fontRef>
-        </p:style>
-        <p:txBody>
-          <a:bodyPr rtlCol="0" anchor="ctr" wrap="square" lIns="45720" rIns="45720" tIns="18288" bIns="18288"/>
-          <a:lstStyle/>
-          <a:p>
-            <a:pPr algn="l">
-              <a:lnSpc>
-                <a:spcPct val="100000"/>
-              </a:lnSpc>
-              <a:spcAft>
-                <a:spcPts val="0"/>
-              </a:spcAft>
-              <a:defRPr sz="1400" b="0">
-                <a:solidFill>
-                  <a:srgbClr val="222222"/>
-                </a:solidFill>
-                <a:latin typeface="Consolas"/>
-              </a:defRPr>
-            </a:pPr>
-            <a:r>
-              <a:rPr sz="1400" b="0">
-                <a:solidFill>
-                  <a:srgbClr val="222222"/>
-                </a:solidFill>
-                <a:latin typeface="Consolas"/>
-              </a:rPr>
-              <a:t>Both thresholds are measured ABOVE the baseline that was just taken, not as absolute amps:</a:t>
-            </a:r>
-          </a:p>
-          <a:p>
-            <a:pPr algn="l">
-              <a:lnSpc>
-                <a:spcPct val="100000"/>
-              </a:lnSpc>
-              <a:spcAft>
-                <a:spcPts val="0"/>
-              </a:spcAft>
-              <a:defRPr sz="1400" b="0">
-                <a:solidFill>
-                  <a:srgbClr val="222222"/>
-                </a:solidFill>
-                <a:latin typeface="Consolas"/>
-              </a:defRPr>
-            </a:pPr>
-            <a:r>
-              <a:rPr sz="1400" b="0">
-                <a:solidFill>
-                  <a:srgbClr val="222222"/>
-                </a:solidFill>
-                <a:latin typeface="Consolas"/>
-              </a:rPr>
-              <a:t>peak - baseline &gt;= 1.500 A     AND     average - baseline &gt;= 1.000 A</a:t>
-            </a:r>
-          </a:p>
-        </p:txBody>
-      </p:sp>
-      <p:sp>
-        <p:nvSpPr>
-          <p:cNvPr id="41" name="Rounded Rectangle 40"/>
-          <p:cNvSpPr/>
-          <p:nvPr/>
-        </p:nvSpPr>
-        <p:spPr>
-          <a:xfrm>
-            <a:off x="502920" y="5303520"/>
-            <a:ext cx="11185855" cy="960120"/>
-          </a:xfrm>
-          <a:prstGeom prst="roundRect">
-            <a:avLst>
-              <a:gd name="adj" fmla="val 4000"/>
-            </a:avLst>
-          </a:prstGeom>
-          <a:solidFill>
-            <a:srgbClr val="FDF3E3"/>
-          </a:solidFill>
-          <a:ln w="12700">
-            <a:solidFill>
-              <a:srgbClr val="B46A0F"/>
-            </a:solidFill>
-          </a:ln>
-          <a:effectLst/>
-        </p:spPr>
-        <p:style>
-          <a:lnRef idx="1">
-            <a:schemeClr val="accent1"/>
-          </a:lnRef>
-          <a:fillRef idx="3">
-            <a:schemeClr val="accent1"/>
-          </a:fillRef>
-          <a:effectRef idx="2">
-            <a:schemeClr val="accent1"/>
-          </a:effectRef>
-          <a:fontRef idx="minor">
-            <a:schemeClr val="lt1"/>
-          </a:fontRef>
-        </p:style>
-        <p:txBody>
-          <a:bodyPr rtlCol="0" anchor="ctr" wrap="square" lIns="164592" rIns="164592" tIns="73152" bIns="73152"/>
-          <a:lstStyle/>
-          <a:p>
-            <a:pPr algn="l"/>
-            <a:r>
-              <a:rPr sz="1300" b="1">
-                <a:solidFill>
-                  <a:srgbClr val="B46A0F"/>
-                </a:solidFill>
-                <a:latin typeface="Calibri"/>
-              </a:rPr>
-              <a:t>WATCH OUT   </a:t>
-            </a:r>
-            <a:r>
-              <a:rPr sz="1500">
-                <a:solidFill>
-                  <a:srgbClr val="222222"/>
-                </a:solidFill>
-                <a:latin typeface="Calibri"/>
-              </a:rPr>
-              <a:t>Op 11.2 measured a baseline, printed it, then compared against fixed absolutes anyway - so a vehicle idling at half an amp failed every motor. Op 12 fixed it.</a:t>
+              </a:rPr>
+              <a:t>The INA219, and the shunt it measures across</a:t>
             </a:r>
           </a:p>
         </p:txBody>
@@ -9346,7 +11252,7 @@
                 </a:solidFill>
                 <a:latin typeface="Calibri"/>
               </a:rPr>
-              <a:t>The self-test as a state machine</a:t>
+              <a:t>What a healthy motor looks like to a current sensor</a:t>
             </a:r>
           </a:p>
         </p:txBody>
@@ -9493,14 +11399,353 @@
       </p:sp>
       <p:sp>
         <p:nvSpPr>
-          <p:cNvPr id="6" name="TextBox 5"/>
+          <p:cNvPr id="6" name="Rectangle 5"/>
+          <p:cNvSpPr/>
+          <p:nvPr/>
+        </p:nvSpPr>
+        <p:spPr>
+          <a:xfrm>
+            <a:off x="1554480" y="1645920"/>
+            <a:ext cx="3017520" cy="1920240"/>
+          </a:xfrm>
+          <a:prstGeom prst="rect">
+            <a:avLst/>
+          </a:prstGeom>
+          <a:solidFill>
+            <a:srgbClr val="D6ECEE"/>
+          </a:solidFill>
+          <a:ln w="9525">
+            <a:solidFill>
+              <a:srgbClr val="C8D2DE"/>
+            </a:solidFill>
+          </a:ln>
+          <a:effectLst/>
+        </p:spPr>
+        <p:style>
+          <a:lnRef idx="1">
+            <a:schemeClr val="accent1"/>
+          </a:lnRef>
+          <a:fillRef idx="3">
+            <a:schemeClr val="accent1"/>
+          </a:fillRef>
+          <a:effectRef idx="2">
+            <a:schemeClr val="accent1"/>
+          </a:effectRef>
+          <a:fontRef idx="minor">
+            <a:schemeClr val="lt1"/>
+          </a:fontRef>
+        </p:style>
+        <p:txBody>
+          <a:bodyPr rtlCol="0" anchor="ctr" wrap="square"/>
+          <a:lstStyle/>
+          <a:p>
+            <a:pPr algn="l">
+              <a:lnSpc>
+                <a:spcPct val="100000"/>
+              </a:lnSpc>
+              <a:spcAft>
+                <a:spcPts val="600"/>
+              </a:spcAft>
+              <a:defRPr sz="800" b="0">
+                <a:solidFill>
+                  <a:srgbClr val="222222"/>
+                </a:solidFill>
+                <a:latin typeface="Calibri"/>
+              </a:defRPr>
+            </a:pPr>
+          </a:p>
+        </p:txBody>
+      </p:sp>
+      <p:cxnSp>
+        <p:nvCxnSpPr>
+          <p:cNvPr id="7" name="Connector 6"/>
+          <p:cNvCxnSpPr/>
+          <p:nvPr/>
+        </p:nvCxnSpPr>
+        <p:spPr>
+          <a:xfrm>
+            <a:off x="1554480" y="3374136"/>
+            <a:ext cx="3017520" cy="0"/>
+          </a:xfrm>
+          <a:prstGeom prst="line">
+            <a:avLst/>
+          </a:prstGeom>
+          <a:ln w="12700">
+            <a:solidFill>
+              <a:srgbClr val="666666"/>
+            </a:solidFill>
+          </a:ln>
+        </p:spPr>
+        <p:style>
+          <a:lnRef idx="2">
+            <a:schemeClr val="accent1"/>
+          </a:lnRef>
+          <a:fillRef idx="0">
+            <a:schemeClr val="accent1"/>
+          </a:fillRef>
+          <a:effectRef idx="1">
+            <a:schemeClr val="accent1"/>
+          </a:effectRef>
+          <a:fontRef idx="minor">
+            <a:schemeClr val="tx1"/>
+          </a:fontRef>
+        </p:style>
+      </p:cxnSp>
+      <p:cxnSp>
+        <p:nvCxnSpPr>
+          <p:cNvPr id="8" name="Connector 7"/>
+          <p:cNvCxnSpPr/>
+          <p:nvPr/>
+        </p:nvCxnSpPr>
+        <p:spPr>
+          <a:xfrm>
+            <a:off x="1554480" y="3424831"/>
+            <a:ext cx="431074" cy="0"/>
+          </a:xfrm>
+          <a:prstGeom prst="line">
+            <a:avLst/>
+          </a:prstGeom>
+          <a:ln w="31750">
+            <a:solidFill>
+              <a:srgbClr val="0E7C86"/>
+            </a:solidFill>
+          </a:ln>
+        </p:spPr>
+        <p:style>
+          <a:lnRef idx="2">
+            <a:schemeClr val="accent1"/>
+          </a:lnRef>
+          <a:fillRef idx="0">
+            <a:schemeClr val="accent1"/>
+          </a:fillRef>
+          <a:effectRef idx="1">
+            <a:schemeClr val="accent1"/>
+          </a:effectRef>
+          <a:fontRef idx="minor">
+            <a:schemeClr val="tx1"/>
+          </a:fontRef>
+        </p:style>
+      </p:cxnSp>
+      <p:cxnSp>
+        <p:nvCxnSpPr>
+          <p:cNvPr id="9" name="Connector 8"/>
+          <p:cNvCxnSpPr/>
+          <p:nvPr/>
+        </p:nvCxnSpPr>
+        <p:spPr>
+          <a:xfrm flipV="1">
+            <a:off x="1985554" y="1887871"/>
+            <a:ext cx="431074" cy="1536960"/>
+          </a:xfrm>
+          <a:prstGeom prst="line">
+            <a:avLst/>
+          </a:prstGeom>
+          <a:ln w="31750">
+            <a:solidFill>
+              <a:srgbClr val="0E7C86"/>
+            </a:solidFill>
+          </a:ln>
+        </p:spPr>
+        <p:style>
+          <a:lnRef idx="2">
+            <a:schemeClr val="accent1"/>
+          </a:lnRef>
+          <a:fillRef idx="0">
+            <a:schemeClr val="accent1"/>
+          </a:fillRef>
+          <a:effectRef idx="1">
+            <a:schemeClr val="accent1"/>
+          </a:effectRef>
+          <a:fontRef idx="minor">
+            <a:schemeClr val="tx1"/>
+          </a:fontRef>
+        </p:style>
+      </p:cxnSp>
+      <p:cxnSp>
+        <p:nvCxnSpPr>
+          <p:cNvPr id="10" name="Connector 9"/>
+          <p:cNvCxnSpPr/>
+          <p:nvPr/>
+        </p:nvCxnSpPr>
+        <p:spPr>
+          <a:xfrm>
+            <a:off x="2416628" y="1887871"/>
+            <a:ext cx="431074" cy="582985"/>
+          </a:xfrm>
+          <a:prstGeom prst="line">
+            <a:avLst/>
+          </a:prstGeom>
+          <a:ln w="31750">
+            <a:solidFill>
+              <a:srgbClr val="0E7C86"/>
+            </a:solidFill>
+          </a:ln>
+        </p:spPr>
+        <p:style>
+          <a:lnRef idx="2">
+            <a:schemeClr val="accent1"/>
+          </a:lnRef>
+          <a:fillRef idx="0">
+            <a:schemeClr val="accent1"/>
+          </a:fillRef>
+          <a:effectRef idx="1">
+            <a:schemeClr val="accent1"/>
+          </a:effectRef>
+          <a:fontRef idx="minor">
+            <a:schemeClr val="tx1"/>
+          </a:fontRef>
+        </p:style>
+      </p:cxnSp>
+      <p:cxnSp>
+        <p:nvCxnSpPr>
+          <p:cNvPr id="11" name="Connector 10"/>
+          <p:cNvCxnSpPr/>
+          <p:nvPr/>
+        </p:nvCxnSpPr>
+        <p:spPr>
+          <a:xfrm>
+            <a:off x="2847702" y="2470856"/>
+            <a:ext cx="431074" cy="300325"/>
+          </a:xfrm>
+          <a:prstGeom prst="line">
+            <a:avLst/>
+          </a:prstGeom>
+          <a:ln w="31750">
+            <a:solidFill>
+              <a:srgbClr val="0E7C86"/>
+            </a:solidFill>
+          </a:ln>
+        </p:spPr>
+        <p:style>
+          <a:lnRef idx="2">
+            <a:schemeClr val="accent1"/>
+          </a:lnRef>
+          <a:fillRef idx="0">
+            <a:schemeClr val="accent1"/>
+          </a:fillRef>
+          <a:effectRef idx="1">
+            <a:schemeClr val="accent1"/>
+          </a:effectRef>
+          <a:fontRef idx="minor">
+            <a:schemeClr val="tx1"/>
+          </a:fontRef>
+        </p:style>
+      </p:cxnSp>
+      <p:cxnSp>
+        <p:nvCxnSpPr>
+          <p:cNvPr id="12" name="Connector 11"/>
+          <p:cNvCxnSpPr/>
+          <p:nvPr/>
+        </p:nvCxnSpPr>
+        <p:spPr>
+          <a:xfrm>
+            <a:off x="3278776" y="2771181"/>
+            <a:ext cx="431074" cy="88331"/>
+          </a:xfrm>
+          <a:prstGeom prst="line">
+            <a:avLst/>
+          </a:prstGeom>
+          <a:ln w="31750">
+            <a:solidFill>
+              <a:srgbClr val="0E7C86"/>
+            </a:solidFill>
+          </a:ln>
+        </p:spPr>
+        <p:style>
+          <a:lnRef idx="2">
+            <a:schemeClr val="accent1"/>
+          </a:lnRef>
+          <a:fillRef idx="0">
+            <a:schemeClr val="accent1"/>
+          </a:fillRef>
+          <a:effectRef idx="1">
+            <a:schemeClr val="accent1"/>
+          </a:effectRef>
+          <a:fontRef idx="minor">
+            <a:schemeClr val="tx1"/>
+          </a:fontRef>
+        </p:style>
+      </p:cxnSp>
+      <p:cxnSp>
+        <p:nvCxnSpPr>
+          <p:cNvPr id="13" name="Connector 12"/>
+          <p:cNvCxnSpPr/>
+          <p:nvPr/>
+        </p:nvCxnSpPr>
+        <p:spPr>
+          <a:xfrm>
+            <a:off x="3709850" y="2859512"/>
+            <a:ext cx="431074" cy="35333"/>
+          </a:xfrm>
+          <a:prstGeom prst="line">
+            <a:avLst/>
+          </a:prstGeom>
+          <a:ln w="31750">
+            <a:solidFill>
+              <a:srgbClr val="0E7C86"/>
+            </a:solidFill>
+          </a:ln>
+        </p:spPr>
+        <p:style>
+          <a:lnRef idx="2">
+            <a:schemeClr val="accent1"/>
+          </a:lnRef>
+          <a:fillRef idx="0">
+            <a:schemeClr val="accent1"/>
+          </a:fillRef>
+          <a:effectRef idx="1">
+            <a:schemeClr val="accent1"/>
+          </a:effectRef>
+          <a:fontRef idx="minor">
+            <a:schemeClr val="tx1"/>
+          </a:fontRef>
+        </p:style>
+      </p:cxnSp>
+      <p:cxnSp>
+        <p:nvCxnSpPr>
+          <p:cNvPr id="14" name="Connector 13"/>
+          <p:cNvCxnSpPr/>
+          <p:nvPr/>
+        </p:nvCxnSpPr>
+        <p:spPr>
+          <a:xfrm>
+            <a:off x="4140924" y="2894845"/>
+            <a:ext cx="431074" cy="0"/>
+          </a:xfrm>
+          <a:prstGeom prst="line">
+            <a:avLst/>
+          </a:prstGeom>
+          <a:ln w="31750">
+            <a:solidFill>
+              <a:srgbClr val="0E7C86"/>
+            </a:solidFill>
+          </a:ln>
+        </p:spPr>
+        <p:style>
+          <a:lnRef idx="2">
+            <a:schemeClr val="accent1"/>
+          </a:lnRef>
+          <a:fillRef idx="0">
+            <a:schemeClr val="accent1"/>
+          </a:fillRef>
+          <a:effectRef idx="1">
+            <a:schemeClr val="accent1"/>
+          </a:effectRef>
+          <a:fontRef idx="minor">
+            <a:schemeClr val="tx1"/>
+          </a:fontRef>
+        </p:style>
+      </p:cxnSp>
+      <p:sp>
+        <p:nvSpPr>
+          <p:cNvPr id="15" name="TextBox 14"/>
           <p:cNvSpPr txBox="1"/>
           <p:nvPr/>
         </p:nvSpPr>
         <p:spPr>
           <a:xfrm>
-            <a:off x="502920" y="1188720"/>
-            <a:ext cx="11185855" cy="530352"/>
+            <a:off x="1554480" y="1298448"/>
+            <a:ext cx="3017520" cy="367792"/>
           </a:xfrm>
           <a:prstGeom prst="rect">
             <a:avLst/>
@@ -9513,14 +11758,14 @@
           </a:bodyPr>
           <a:lstStyle/>
           <a:p>
-            <a:pPr algn="l">
-              <a:lnSpc>
-                <a:spcPct val="100000"/>
-              </a:lnSpc>
-              <a:spcAft>
-                <a:spcPts val="600"/>
-              </a:spcAft>
-              <a:defRPr sz="1900" b="1">
+            <a:pPr algn="ctr">
+              <a:lnSpc>
+                <a:spcPct val="100000"/>
+              </a:lnSpc>
+              <a:spcAft>
+                <a:spcPts val="0"/>
+              </a:spcAft>
+              <a:defRPr sz="1800" b="1">
                 <a:solidFill>
                   <a:srgbClr val="0E7C86"/>
                 </a:solidFill>
@@ -9528,27 +11773,27 @@
               </a:defRPr>
             </a:pPr>
             <a:r>
-              <a:rPr sz="1900" b="1">
+              <a:rPr sz="1800" b="1">
                 <a:solidFill>
                   <a:srgbClr val="0E7C86"/>
                 </a:solidFill>
                 <a:latin typeface="Calibri"/>
               </a:rPr>
-              <a:t>Five states, no blocking</a:t>
-            </a:r>
-          </a:p>
-        </p:txBody>
-      </p:sp>
-      <p:sp>
-        <p:nvSpPr>
-          <p:cNvPr id="7" name="TextBox 6"/>
+              <a:t>HEALTHY</a:t>
+            </a:r>
+          </a:p>
+        </p:txBody>
+      </p:sp>
+      <p:sp>
+        <p:nvSpPr>
+          <p:cNvPr id="16" name="TextBox 15"/>
           <p:cNvSpPr txBox="1"/>
           <p:nvPr/>
         </p:nvSpPr>
         <p:spPr>
           <a:xfrm>
-            <a:off x="502920" y="1755648"/>
-            <a:ext cx="11185855" cy="4507992"/>
+            <a:off x="1554480" y="3657600"/>
+            <a:ext cx="3017520" cy="659384"/>
           </a:xfrm>
           <a:prstGeom prst="rect">
             <a:avLst/>
@@ -9561,12 +11806,472 @@
           </a:bodyPr>
           <a:lstStyle/>
           <a:p>
+            <a:pPr algn="ctr">
+              <a:lnSpc>
+                <a:spcPct val="100000"/>
+              </a:lnSpc>
+              <a:spcAft>
+                <a:spcPts val="0"/>
+              </a:spcAft>
+              <a:defRPr sz="1800" b="0">
+                <a:solidFill>
+                  <a:srgbClr val="222222"/>
+                </a:solidFill>
+                <a:latin typeface="Calibri"/>
+              </a:defRPr>
+            </a:pPr>
+            <a:r>
+              <a:rPr sz="1800" b="0">
+                <a:solidFill>
+                  <a:srgbClr val="222222"/>
+                </a:solidFill>
+                <a:latin typeface="Calibri"/>
+              </a:rPr>
+              <a:t>spikes as it breaks away,</a:t>
+            </a:r>
+          </a:p>
+          <a:p>
+            <a:pPr algn="ctr">
+              <a:lnSpc>
+                <a:spcPct val="100000"/>
+              </a:lnSpc>
+              <a:spcAft>
+                <a:spcPts val="0"/>
+              </a:spcAft>
+              <a:defRPr sz="1800" b="0">
+                <a:solidFill>
+                  <a:srgbClr val="222222"/>
+                </a:solidFill>
+                <a:latin typeface="Calibri"/>
+              </a:defRPr>
+            </a:pPr>
+            <a:r>
+              <a:rPr sz="1800" b="0">
+                <a:solidFill>
+                  <a:srgbClr val="222222"/>
+                </a:solidFill>
+                <a:latin typeface="Calibri"/>
+              </a:rPr>
+              <a:t>then settles</a:t>
+            </a:r>
+          </a:p>
+        </p:txBody>
+      </p:sp>
+      <p:sp>
+        <p:nvSpPr>
+          <p:cNvPr id="17" name="Rectangle 16"/>
+          <p:cNvSpPr/>
+          <p:nvPr/>
+        </p:nvSpPr>
+        <p:spPr>
+          <a:xfrm>
+            <a:off x="5029200" y="1645920"/>
+            <a:ext cx="3017520" cy="1920240"/>
+          </a:xfrm>
+          <a:prstGeom prst="rect">
+            <a:avLst/>
+          </a:prstGeom>
+          <a:solidFill>
+            <a:srgbClr val="E8ECF0"/>
+          </a:solidFill>
+          <a:ln w="9525">
+            <a:solidFill>
+              <a:srgbClr val="C8D2DE"/>
+            </a:solidFill>
+          </a:ln>
+          <a:effectLst/>
+        </p:spPr>
+        <p:style>
+          <a:lnRef idx="1">
+            <a:schemeClr val="accent1"/>
+          </a:lnRef>
+          <a:fillRef idx="3">
+            <a:schemeClr val="accent1"/>
+          </a:fillRef>
+          <a:effectRef idx="2">
+            <a:schemeClr val="accent1"/>
+          </a:effectRef>
+          <a:fontRef idx="minor">
+            <a:schemeClr val="lt1"/>
+          </a:fontRef>
+        </p:style>
+        <p:txBody>
+          <a:bodyPr rtlCol="0" anchor="ctr" wrap="square"/>
+          <a:lstStyle/>
+          <a:p>
             <a:pPr algn="l">
               <a:lnSpc>
                 <a:spcPct val="100000"/>
               </a:lnSpc>
               <a:spcAft>
-                <a:spcPts val="900"/>
+                <a:spcPts val="600"/>
+              </a:spcAft>
+              <a:defRPr sz="800" b="0">
+                <a:solidFill>
+                  <a:srgbClr val="222222"/>
+                </a:solidFill>
+                <a:latin typeface="Calibri"/>
+              </a:defRPr>
+            </a:pPr>
+          </a:p>
+        </p:txBody>
+      </p:sp>
+      <p:cxnSp>
+        <p:nvCxnSpPr>
+          <p:cNvPr id="18" name="Connector 17"/>
+          <p:cNvCxnSpPr/>
+          <p:nvPr/>
+        </p:nvCxnSpPr>
+        <p:spPr>
+          <a:xfrm>
+            <a:off x="5029200" y="3374136"/>
+            <a:ext cx="3017520" cy="0"/>
+          </a:xfrm>
+          <a:prstGeom prst="line">
+            <a:avLst/>
+          </a:prstGeom>
+          <a:ln w="12700">
+            <a:solidFill>
+              <a:srgbClr val="666666"/>
+            </a:solidFill>
+          </a:ln>
+        </p:spPr>
+        <p:style>
+          <a:lnRef idx="2">
+            <a:schemeClr val="accent1"/>
+          </a:lnRef>
+          <a:fillRef idx="0">
+            <a:schemeClr val="accent1"/>
+          </a:fillRef>
+          <a:effectRef idx="1">
+            <a:schemeClr val="accent1"/>
+          </a:effectRef>
+          <a:fontRef idx="minor">
+            <a:schemeClr val="tx1"/>
+          </a:fontRef>
+        </p:style>
+      </p:cxnSp>
+      <p:cxnSp>
+        <p:nvCxnSpPr>
+          <p:cNvPr id="19" name="Connector 18"/>
+          <p:cNvCxnSpPr/>
+          <p:nvPr/>
+        </p:nvCxnSpPr>
+        <p:spPr>
+          <a:xfrm>
+            <a:off x="5029200" y="3460163"/>
+            <a:ext cx="431074" cy="0"/>
+          </a:xfrm>
+          <a:prstGeom prst="line">
+            <a:avLst/>
+          </a:prstGeom>
+          <a:ln w="31750">
+            <a:solidFill>
+              <a:srgbClr val="666666"/>
+            </a:solidFill>
+          </a:ln>
+        </p:spPr>
+        <p:style>
+          <a:lnRef idx="2">
+            <a:schemeClr val="accent1"/>
+          </a:lnRef>
+          <a:fillRef idx="0">
+            <a:schemeClr val="accent1"/>
+          </a:fillRef>
+          <a:effectRef idx="1">
+            <a:schemeClr val="accent1"/>
+          </a:effectRef>
+          <a:fontRef idx="minor">
+            <a:schemeClr val="tx1"/>
+          </a:fontRef>
+        </p:style>
+      </p:cxnSp>
+      <p:cxnSp>
+        <p:nvCxnSpPr>
+          <p:cNvPr id="20" name="Connector 19"/>
+          <p:cNvCxnSpPr/>
+          <p:nvPr/>
+        </p:nvCxnSpPr>
+        <p:spPr>
+          <a:xfrm flipV="1">
+            <a:off x="5460274" y="3424831"/>
+            <a:ext cx="431074" cy="35332"/>
+          </a:xfrm>
+          <a:prstGeom prst="line">
+            <a:avLst/>
+          </a:prstGeom>
+          <a:ln w="31750">
+            <a:solidFill>
+              <a:srgbClr val="666666"/>
+            </a:solidFill>
+          </a:ln>
+        </p:spPr>
+        <p:style>
+          <a:lnRef idx="2">
+            <a:schemeClr val="accent1"/>
+          </a:lnRef>
+          <a:fillRef idx="0">
+            <a:schemeClr val="accent1"/>
+          </a:fillRef>
+          <a:effectRef idx="1">
+            <a:schemeClr val="accent1"/>
+          </a:effectRef>
+          <a:fontRef idx="minor">
+            <a:schemeClr val="tx1"/>
+          </a:fontRef>
+        </p:style>
+      </p:cxnSp>
+      <p:cxnSp>
+        <p:nvCxnSpPr>
+          <p:cNvPr id="21" name="Connector 20"/>
+          <p:cNvCxnSpPr/>
+          <p:nvPr/>
+        </p:nvCxnSpPr>
+        <p:spPr>
+          <a:xfrm>
+            <a:off x="5891348" y="3424831"/>
+            <a:ext cx="431074" cy="17666"/>
+          </a:xfrm>
+          <a:prstGeom prst="line">
+            <a:avLst/>
+          </a:prstGeom>
+          <a:ln w="31750">
+            <a:solidFill>
+              <a:srgbClr val="666666"/>
+            </a:solidFill>
+          </a:ln>
+        </p:spPr>
+        <p:style>
+          <a:lnRef idx="2">
+            <a:schemeClr val="accent1"/>
+          </a:lnRef>
+          <a:fillRef idx="0">
+            <a:schemeClr val="accent1"/>
+          </a:fillRef>
+          <a:effectRef idx="1">
+            <a:schemeClr val="accent1"/>
+          </a:effectRef>
+          <a:fontRef idx="minor">
+            <a:schemeClr val="tx1"/>
+          </a:fontRef>
+        </p:style>
+      </p:cxnSp>
+      <p:cxnSp>
+        <p:nvCxnSpPr>
+          <p:cNvPr id="22" name="Connector 21"/>
+          <p:cNvCxnSpPr/>
+          <p:nvPr/>
+        </p:nvCxnSpPr>
+        <p:spPr>
+          <a:xfrm>
+            <a:off x="6322422" y="3442497"/>
+            <a:ext cx="431074" cy="17666"/>
+          </a:xfrm>
+          <a:prstGeom prst="line">
+            <a:avLst/>
+          </a:prstGeom>
+          <a:ln w="31750">
+            <a:solidFill>
+              <a:srgbClr val="666666"/>
+            </a:solidFill>
+          </a:ln>
+        </p:spPr>
+        <p:style>
+          <a:lnRef idx="2">
+            <a:schemeClr val="accent1"/>
+          </a:lnRef>
+          <a:fillRef idx="0">
+            <a:schemeClr val="accent1"/>
+          </a:fillRef>
+          <a:effectRef idx="1">
+            <a:schemeClr val="accent1"/>
+          </a:effectRef>
+          <a:fontRef idx="minor">
+            <a:schemeClr val="tx1"/>
+          </a:fontRef>
+        </p:style>
+      </p:cxnSp>
+      <p:cxnSp>
+        <p:nvCxnSpPr>
+          <p:cNvPr id="23" name="Connector 22"/>
+          <p:cNvCxnSpPr/>
+          <p:nvPr/>
+        </p:nvCxnSpPr>
+        <p:spPr>
+          <a:xfrm flipV="1">
+            <a:off x="6753496" y="3442497"/>
+            <a:ext cx="431074" cy="17666"/>
+          </a:xfrm>
+          <a:prstGeom prst="line">
+            <a:avLst/>
+          </a:prstGeom>
+          <a:ln w="31750">
+            <a:solidFill>
+              <a:srgbClr val="666666"/>
+            </a:solidFill>
+          </a:ln>
+        </p:spPr>
+        <p:style>
+          <a:lnRef idx="2">
+            <a:schemeClr val="accent1"/>
+          </a:lnRef>
+          <a:fillRef idx="0">
+            <a:schemeClr val="accent1"/>
+          </a:fillRef>
+          <a:effectRef idx="1">
+            <a:schemeClr val="accent1"/>
+          </a:effectRef>
+          <a:fontRef idx="minor">
+            <a:schemeClr val="tx1"/>
+          </a:fontRef>
+        </p:style>
+      </p:cxnSp>
+      <p:cxnSp>
+        <p:nvCxnSpPr>
+          <p:cNvPr id="24" name="Connector 23"/>
+          <p:cNvCxnSpPr/>
+          <p:nvPr/>
+        </p:nvCxnSpPr>
+        <p:spPr>
+          <a:xfrm>
+            <a:off x="7184570" y="3442497"/>
+            <a:ext cx="431074" cy="17666"/>
+          </a:xfrm>
+          <a:prstGeom prst="line">
+            <a:avLst/>
+          </a:prstGeom>
+          <a:ln w="31750">
+            <a:solidFill>
+              <a:srgbClr val="666666"/>
+            </a:solidFill>
+          </a:ln>
+        </p:spPr>
+        <p:style>
+          <a:lnRef idx="2">
+            <a:schemeClr val="accent1"/>
+          </a:lnRef>
+          <a:fillRef idx="0">
+            <a:schemeClr val="accent1"/>
+          </a:fillRef>
+          <a:effectRef idx="1">
+            <a:schemeClr val="accent1"/>
+          </a:effectRef>
+          <a:fontRef idx="minor">
+            <a:schemeClr val="tx1"/>
+          </a:fontRef>
+        </p:style>
+      </p:cxnSp>
+      <p:cxnSp>
+        <p:nvCxnSpPr>
+          <p:cNvPr id="25" name="Connector 24"/>
+          <p:cNvCxnSpPr/>
+          <p:nvPr/>
+        </p:nvCxnSpPr>
+        <p:spPr>
+          <a:xfrm>
+            <a:off x="7615644" y="3460163"/>
+            <a:ext cx="431074" cy="0"/>
+          </a:xfrm>
+          <a:prstGeom prst="line">
+            <a:avLst/>
+          </a:prstGeom>
+          <a:ln w="31750">
+            <a:solidFill>
+              <a:srgbClr val="666666"/>
+            </a:solidFill>
+          </a:ln>
+        </p:spPr>
+        <p:style>
+          <a:lnRef idx="2">
+            <a:schemeClr val="accent1"/>
+          </a:lnRef>
+          <a:fillRef idx="0">
+            <a:schemeClr val="accent1"/>
+          </a:fillRef>
+          <a:effectRef idx="1">
+            <a:schemeClr val="accent1"/>
+          </a:effectRef>
+          <a:fontRef idx="minor">
+            <a:schemeClr val="tx1"/>
+          </a:fontRef>
+        </p:style>
+      </p:cxnSp>
+      <p:sp>
+        <p:nvSpPr>
+          <p:cNvPr id="26" name="TextBox 25"/>
+          <p:cNvSpPr txBox="1"/>
+          <p:nvPr/>
+        </p:nvSpPr>
+        <p:spPr>
+          <a:xfrm>
+            <a:off x="5029200" y="1298448"/>
+            <a:ext cx="3017520" cy="367792"/>
+          </a:xfrm>
+          <a:prstGeom prst="rect">
+            <a:avLst/>
+          </a:prstGeom>
+          <a:noFill/>
+        </p:spPr>
+        <p:txBody>
+          <a:bodyPr wrap="square" lIns="0" tIns="0" rIns="0" bIns="0">
+            <a:spAutoFit/>
+          </a:bodyPr>
+          <a:lstStyle/>
+          <a:p>
+            <a:pPr algn="ctr">
+              <a:lnSpc>
+                <a:spcPct val="100000"/>
+              </a:lnSpc>
+              <a:spcAft>
+                <a:spcPts val="0"/>
+              </a:spcAft>
+              <a:defRPr sz="1800" b="1">
+                <a:solidFill>
+                  <a:srgbClr val="666666"/>
+                </a:solidFill>
+                <a:latin typeface="Calibri"/>
+              </a:defRPr>
+            </a:pPr>
+            <a:r>
+              <a:rPr sz="1800" b="1">
+                <a:solidFill>
+                  <a:srgbClr val="666666"/>
+                </a:solidFill>
+                <a:latin typeface="Calibri"/>
+              </a:rPr>
+              <a:t>DISCONNECTED</a:t>
+            </a:r>
+          </a:p>
+        </p:txBody>
+      </p:sp>
+      <p:sp>
+        <p:nvSpPr>
+          <p:cNvPr id="27" name="TextBox 26"/>
+          <p:cNvSpPr txBox="1"/>
+          <p:nvPr/>
+        </p:nvSpPr>
+        <p:spPr>
+          <a:xfrm>
+            <a:off x="5029200" y="3657600"/>
+            <a:ext cx="3017520" cy="367792"/>
+          </a:xfrm>
+          <a:prstGeom prst="rect">
+            <a:avLst/>
+          </a:prstGeom>
+          <a:noFill/>
+        </p:spPr>
+        <p:txBody>
+          <a:bodyPr wrap="square" lIns="0" tIns="0" rIns="0" bIns="0">
+            <a:spAutoFit/>
+          </a:bodyPr>
+          <a:lstStyle/>
+          <a:p>
+            <a:pPr algn="ctr">
+              <a:lnSpc>
+                <a:spcPct val="100000"/>
+              </a:lnSpc>
+              <a:spcAft>
+                <a:spcPts val="0"/>
               </a:spcAft>
               <a:defRPr sz="1800" b="0">
                 <a:solidFill>
@@ -9582,16 +12287,426 @@
                 </a:solidFill>
                 <a:latin typeface="Calibri"/>
               </a:rPr>
-              <a:t>Jumper GPIO 34 high at boot. Each motor is driven forward then reverse while the current sensor watches.</a:t>
-            </a:r>
-          </a:p>
+              <a:t>no spike, almost no draw</a:t>
+            </a:r>
+          </a:p>
+        </p:txBody>
+      </p:sp>
+      <p:sp>
+        <p:nvSpPr>
+          <p:cNvPr id="28" name="Rectangle 27"/>
+          <p:cNvSpPr/>
+          <p:nvPr/>
+        </p:nvSpPr>
+        <p:spPr>
+          <a:xfrm>
+            <a:off x="8503920" y="1645920"/>
+            <a:ext cx="3017520" cy="1920240"/>
+          </a:xfrm>
+          <a:prstGeom prst="rect">
+            <a:avLst/>
+          </a:prstGeom>
+          <a:solidFill>
+            <a:srgbClr val="F6D8D8"/>
+          </a:solidFill>
+          <a:ln w="9525">
+            <a:solidFill>
+              <a:srgbClr val="C8D2DE"/>
+            </a:solidFill>
+          </a:ln>
+          <a:effectLst/>
+        </p:spPr>
+        <p:style>
+          <a:lnRef idx="1">
+            <a:schemeClr val="accent1"/>
+          </a:lnRef>
+          <a:fillRef idx="3">
+            <a:schemeClr val="accent1"/>
+          </a:fillRef>
+          <a:effectRef idx="2">
+            <a:schemeClr val="accent1"/>
+          </a:effectRef>
+          <a:fontRef idx="minor">
+            <a:schemeClr val="lt1"/>
+          </a:fontRef>
+        </p:style>
+        <p:txBody>
+          <a:bodyPr rtlCol="0" anchor="ctr" wrap="square"/>
+          <a:lstStyle/>
           <a:p>
             <a:pPr algn="l">
               <a:lnSpc>
                 <a:spcPct val="100000"/>
               </a:lnSpc>
               <a:spcAft>
-                <a:spcPts val="900"/>
+                <a:spcPts val="600"/>
+              </a:spcAft>
+              <a:defRPr sz="800" b="0">
+                <a:solidFill>
+                  <a:srgbClr val="222222"/>
+                </a:solidFill>
+                <a:latin typeface="Calibri"/>
+              </a:defRPr>
+            </a:pPr>
+          </a:p>
+        </p:txBody>
+      </p:sp>
+      <p:cxnSp>
+        <p:nvCxnSpPr>
+          <p:cNvPr id="29" name="Connector 28"/>
+          <p:cNvCxnSpPr/>
+          <p:nvPr/>
+        </p:nvCxnSpPr>
+        <p:spPr>
+          <a:xfrm>
+            <a:off x="8503920" y="3374136"/>
+            <a:ext cx="3017520" cy="0"/>
+          </a:xfrm>
+          <a:prstGeom prst="line">
+            <a:avLst/>
+          </a:prstGeom>
+          <a:ln w="12700">
+            <a:solidFill>
+              <a:srgbClr val="666666"/>
+            </a:solidFill>
+          </a:ln>
+        </p:spPr>
+        <p:style>
+          <a:lnRef idx="2">
+            <a:schemeClr val="accent1"/>
+          </a:lnRef>
+          <a:fillRef idx="0">
+            <a:schemeClr val="accent1"/>
+          </a:fillRef>
+          <a:effectRef idx="1">
+            <a:schemeClr val="accent1"/>
+          </a:effectRef>
+          <a:fontRef idx="minor">
+            <a:schemeClr val="tx1"/>
+          </a:fontRef>
+        </p:style>
+      </p:cxnSp>
+      <p:cxnSp>
+        <p:nvCxnSpPr>
+          <p:cNvPr id="30" name="Connector 29"/>
+          <p:cNvCxnSpPr/>
+          <p:nvPr/>
+        </p:nvCxnSpPr>
+        <p:spPr>
+          <a:xfrm>
+            <a:off x="8503920" y="3424831"/>
+            <a:ext cx="431074" cy="0"/>
+          </a:xfrm>
+          <a:prstGeom prst="line">
+            <a:avLst/>
+          </a:prstGeom>
+          <a:ln w="31750">
+            <a:solidFill>
+              <a:srgbClr val="A32A2A"/>
+            </a:solidFill>
+          </a:ln>
+        </p:spPr>
+        <p:style>
+          <a:lnRef idx="2">
+            <a:schemeClr val="accent1"/>
+          </a:lnRef>
+          <a:fillRef idx="0">
+            <a:schemeClr val="accent1"/>
+          </a:fillRef>
+          <a:effectRef idx="1">
+            <a:schemeClr val="accent1"/>
+          </a:effectRef>
+          <a:fontRef idx="minor">
+            <a:schemeClr val="tx1"/>
+          </a:fontRef>
+        </p:style>
+      </p:cxnSp>
+      <p:cxnSp>
+        <p:nvCxnSpPr>
+          <p:cNvPr id="31" name="Connector 30"/>
+          <p:cNvCxnSpPr/>
+          <p:nvPr/>
+        </p:nvCxnSpPr>
+        <p:spPr>
+          <a:xfrm flipV="1">
+            <a:off x="8934994" y="1834872"/>
+            <a:ext cx="431074" cy="1589959"/>
+          </a:xfrm>
+          <a:prstGeom prst="line">
+            <a:avLst/>
+          </a:prstGeom>
+          <a:ln w="31750">
+            <a:solidFill>
+              <a:srgbClr val="A32A2A"/>
+            </a:solidFill>
+          </a:ln>
+        </p:spPr>
+        <p:style>
+          <a:lnRef idx="2">
+            <a:schemeClr val="accent1"/>
+          </a:lnRef>
+          <a:fillRef idx="0">
+            <a:schemeClr val="accent1"/>
+          </a:fillRef>
+          <a:effectRef idx="1">
+            <a:schemeClr val="accent1"/>
+          </a:effectRef>
+          <a:fontRef idx="minor">
+            <a:schemeClr val="tx1"/>
+          </a:fontRef>
+        </p:style>
+      </p:cxnSp>
+      <p:cxnSp>
+        <p:nvCxnSpPr>
+          <p:cNvPr id="32" name="Connector 31"/>
+          <p:cNvCxnSpPr/>
+          <p:nvPr/>
+        </p:nvCxnSpPr>
+        <p:spPr>
+          <a:xfrm>
+            <a:off x="9366068" y="1834872"/>
+            <a:ext cx="431074" cy="52999"/>
+          </a:xfrm>
+          <a:prstGeom prst="line">
+            <a:avLst/>
+          </a:prstGeom>
+          <a:ln w="31750">
+            <a:solidFill>
+              <a:srgbClr val="A32A2A"/>
+            </a:solidFill>
+          </a:ln>
+        </p:spPr>
+        <p:style>
+          <a:lnRef idx="2">
+            <a:schemeClr val="accent1"/>
+          </a:lnRef>
+          <a:fillRef idx="0">
+            <a:schemeClr val="accent1"/>
+          </a:fillRef>
+          <a:effectRef idx="1">
+            <a:schemeClr val="accent1"/>
+          </a:effectRef>
+          <a:fontRef idx="minor">
+            <a:schemeClr val="tx1"/>
+          </a:fontRef>
+        </p:style>
+      </p:cxnSp>
+      <p:cxnSp>
+        <p:nvCxnSpPr>
+          <p:cNvPr id="33" name="Connector 32"/>
+          <p:cNvCxnSpPr/>
+          <p:nvPr/>
+        </p:nvCxnSpPr>
+        <p:spPr>
+          <a:xfrm>
+            <a:off x="9797142" y="1887871"/>
+            <a:ext cx="431074" cy="17666"/>
+          </a:xfrm>
+          <a:prstGeom prst="line">
+            <a:avLst/>
+          </a:prstGeom>
+          <a:ln w="31750">
+            <a:solidFill>
+              <a:srgbClr val="A32A2A"/>
+            </a:solidFill>
+          </a:ln>
+        </p:spPr>
+        <p:style>
+          <a:lnRef idx="2">
+            <a:schemeClr val="accent1"/>
+          </a:lnRef>
+          <a:fillRef idx="0">
+            <a:schemeClr val="accent1"/>
+          </a:fillRef>
+          <a:effectRef idx="1">
+            <a:schemeClr val="accent1"/>
+          </a:effectRef>
+          <a:fontRef idx="minor">
+            <a:schemeClr val="tx1"/>
+          </a:fontRef>
+        </p:style>
+      </p:cxnSp>
+      <p:cxnSp>
+        <p:nvCxnSpPr>
+          <p:cNvPr id="34" name="Connector 33"/>
+          <p:cNvCxnSpPr/>
+          <p:nvPr/>
+        </p:nvCxnSpPr>
+        <p:spPr>
+          <a:xfrm flipV="1">
+            <a:off x="10228216" y="1870205"/>
+            <a:ext cx="431074" cy="35332"/>
+          </a:xfrm>
+          <a:prstGeom prst="line">
+            <a:avLst/>
+          </a:prstGeom>
+          <a:ln w="31750">
+            <a:solidFill>
+              <a:srgbClr val="A32A2A"/>
+            </a:solidFill>
+          </a:ln>
+        </p:spPr>
+        <p:style>
+          <a:lnRef idx="2">
+            <a:schemeClr val="accent1"/>
+          </a:lnRef>
+          <a:fillRef idx="0">
+            <a:schemeClr val="accent1"/>
+          </a:fillRef>
+          <a:effectRef idx="1">
+            <a:schemeClr val="accent1"/>
+          </a:effectRef>
+          <a:fontRef idx="minor">
+            <a:schemeClr val="tx1"/>
+          </a:fontRef>
+        </p:style>
+      </p:cxnSp>
+      <p:cxnSp>
+        <p:nvCxnSpPr>
+          <p:cNvPr id="35" name="Connector 34"/>
+          <p:cNvCxnSpPr/>
+          <p:nvPr/>
+        </p:nvCxnSpPr>
+        <p:spPr>
+          <a:xfrm>
+            <a:off x="10659290" y="1870205"/>
+            <a:ext cx="431074" cy="17666"/>
+          </a:xfrm>
+          <a:prstGeom prst="line">
+            <a:avLst/>
+          </a:prstGeom>
+          <a:ln w="31750">
+            <a:solidFill>
+              <a:srgbClr val="A32A2A"/>
+            </a:solidFill>
+          </a:ln>
+        </p:spPr>
+        <p:style>
+          <a:lnRef idx="2">
+            <a:schemeClr val="accent1"/>
+          </a:lnRef>
+          <a:fillRef idx="0">
+            <a:schemeClr val="accent1"/>
+          </a:fillRef>
+          <a:effectRef idx="1">
+            <a:schemeClr val="accent1"/>
+          </a:effectRef>
+          <a:fontRef idx="minor">
+            <a:schemeClr val="tx1"/>
+          </a:fontRef>
+        </p:style>
+      </p:cxnSp>
+      <p:cxnSp>
+        <p:nvCxnSpPr>
+          <p:cNvPr id="36" name="Connector 35"/>
+          <p:cNvCxnSpPr/>
+          <p:nvPr/>
+        </p:nvCxnSpPr>
+        <p:spPr>
+          <a:xfrm>
+            <a:off x="11090364" y="1887871"/>
+            <a:ext cx="431074" cy="17666"/>
+          </a:xfrm>
+          <a:prstGeom prst="line">
+            <a:avLst/>
+          </a:prstGeom>
+          <a:ln w="31750">
+            <a:solidFill>
+              <a:srgbClr val="A32A2A"/>
+            </a:solidFill>
+          </a:ln>
+        </p:spPr>
+        <p:style>
+          <a:lnRef idx="2">
+            <a:schemeClr val="accent1"/>
+          </a:lnRef>
+          <a:fillRef idx="0">
+            <a:schemeClr val="accent1"/>
+          </a:fillRef>
+          <a:effectRef idx="1">
+            <a:schemeClr val="accent1"/>
+          </a:effectRef>
+          <a:fontRef idx="minor">
+            <a:schemeClr val="tx1"/>
+          </a:fontRef>
+        </p:style>
+      </p:cxnSp>
+      <p:sp>
+        <p:nvSpPr>
+          <p:cNvPr id="37" name="TextBox 36"/>
+          <p:cNvSpPr txBox="1"/>
+          <p:nvPr/>
+        </p:nvSpPr>
+        <p:spPr>
+          <a:xfrm>
+            <a:off x="8503920" y="1298448"/>
+            <a:ext cx="3017520" cy="367792"/>
+          </a:xfrm>
+          <a:prstGeom prst="rect">
+            <a:avLst/>
+          </a:prstGeom>
+          <a:noFill/>
+        </p:spPr>
+        <p:txBody>
+          <a:bodyPr wrap="square" lIns="0" tIns="0" rIns="0" bIns="0">
+            <a:spAutoFit/>
+          </a:bodyPr>
+          <a:lstStyle/>
+          <a:p>
+            <a:pPr algn="ctr">
+              <a:lnSpc>
+                <a:spcPct val="100000"/>
+              </a:lnSpc>
+              <a:spcAft>
+                <a:spcPts val="0"/>
+              </a:spcAft>
+              <a:defRPr sz="1800" b="1">
+                <a:solidFill>
+                  <a:srgbClr val="A32A2A"/>
+                </a:solidFill>
+                <a:latin typeface="Calibri"/>
+              </a:defRPr>
+            </a:pPr>
+            <a:r>
+              <a:rPr sz="1800" b="1">
+                <a:solidFill>
+                  <a:srgbClr val="A32A2A"/>
+                </a:solidFill>
+                <a:latin typeface="Calibri"/>
+              </a:rPr>
+              <a:t>JAMMED</a:t>
+            </a:r>
+          </a:p>
+        </p:txBody>
+      </p:sp>
+      <p:sp>
+        <p:nvSpPr>
+          <p:cNvPr id="38" name="TextBox 37"/>
+          <p:cNvSpPr txBox="1"/>
+          <p:nvPr/>
+        </p:nvSpPr>
+        <p:spPr>
+          <a:xfrm>
+            <a:off x="8503920" y="3657600"/>
+            <a:ext cx="3017520" cy="646684"/>
+          </a:xfrm>
+          <a:prstGeom prst="rect">
+            <a:avLst/>
+          </a:prstGeom>
+          <a:noFill/>
+        </p:spPr>
+        <p:txBody>
+          <a:bodyPr wrap="square" lIns="0" tIns="0" rIns="0" bIns="0">
+            <a:spAutoFit/>
+          </a:bodyPr>
+          <a:lstStyle/>
+          <a:p>
+            <a:pPr algn="ctr">
+              <a:lnSpc>
+                <a:spcPct val="100000"/>
+              </a:lnSpc>
+              <a:spcAft>
+                <a:spcPts val="0"/>
               </a:spcAft>
               <a:defRPr sz="1800" b="0">
                 <a:solidFill>
@@ -9600,18 +12715,50 @@
                 <a:latin typeface="Calibri"/>
               </a:defRPr>
             </a:pPr>
-          </a:p>
-          <a:p>
-            <a:pPr lvl="1" algn="l">
-              <a:lnSpc>
-                <a:spcPct val="100000"/>
-              </a:lnSpc>
-              <a:spcAft>
-                <a:spcPts val="900"/>
+            <a:r>
+              <a:rPr sz="1800" b="0">
+                <a:solidFill>
+                  <a:srgbClr val="222222"/>
+                </a:solidFill>
+                <a:latin typeface="Calibri"/>
+              </a:rPr>
+              <a:t>draws a lot and never settles</a:t>
+            </a:r>
+          </a:p>
+        </p:txBody>
+      </p:sp>
+      <p:sp>
+        <p:nvSpPr>
+          <p:cNvPr id="39" name="TextBox 38"/>
+          <p:cNvSpPr txBox="1"/>
+          <p:nvPr/>
+        </p:nvSpPr>
+        <p:spPr>
+          <a:xfrm>
+            <a:off x="502920" y="3255264"/>
+            <a:ext cx="960120" cy="367792"/>
+          </a:xfrm>
+          <a:prstGeom prst="rect">
+            <a:avLst/>
+          </a:prstGeom>
+          <a:noFill/>
+        </p:spPr>
+        <p:txBody>
+          <a:bodyPr wrap="square" lIns="0" tIns="0" rIns="0" bIns="0">
+            <a:spAutoFit/>
+          </a:bodyPr>
+          <a:lstStyle/>
+          <a:p>
+            <a:pPr algn="r">
+              <a:lnSpc>
+                <a:spcPct val="100000"/>
+              </a:lnSpc>
+              <a:spcAft>
+                <a:spcPts val="0"/>
               </a:spcAft>
               <a:defRPr sz="1800" b="0">
                 <a:solidFill>
-                  <a:srgbClr val="222222"/>
+                  <a:srgbClr val="666666"/>
                 </a:solidFill>
                 <a:latin typeface="Calibri"/>
               </a:defRPr>
@@ -9619,111 +12766,170 @@
             <a:r>
               <a:rPr sz="1800" b="0">
                 <a:solidFill>
-                  <a:srgbClr val="222222"/>
-                </a:solidFill>
-                <a:latin typeface="Calibri"/>
-              </a:rPr>
-              <a:t>CHECK_TRIGGER   wait for the pin to settle, then decide</a:t>
-            </a:r>
-          </a:p>
-          <a:p>
-            <a:pPr lvl="1" algn="l">
-              <a:lnSpc>
-                <a:spcPct val="100000"/>
-              </a:lnSpc>
-              <a:spcAft>
-                <a:spcPts val="900"/>
-              </a:spcAft>
-              <a:defRPr sz="1800" b="0">
-                <a:solidFill>
-                  <a:srgbClr val="222222"/>
-                </a:solidFill>
-                <a:latin typeface="Calibri"/>
-              </a:defRPr>
-            </a:pPr>
-            <a:r>
-              <a:rPr sz="1800" b="0">
-                <a:solidFill>
-                  <a:srgbClr val="222222"/>
-                </a:solidFill>
-                <a:latin typeface="Calibri"/>
-              </a:rPr>
-              <a:t>BASELINE_CURRENT  measure the resting draw, motors off</a:t>
-            </a:r>
-          </a:p>
-          <a:p>
-            <a:pPr lvl="1" algn="l">
-              <a:lnSpc>
-                <a:spcPct val="100000"/>
-              </a:lnSpc>
-              <a:spcAft>
-                <a:spcPts val="900"/>
-              </a:spcAft>
-              <a:defRPr sz="1800" b="0">
-                <a:solidFill>
-                  <a:srgbClr val="222222"/>
-                </a:solidFill>
-                <a:latin typeface="Calibri"/>
-              </a:defRPr>
-            </a:pPr>
-            <a:r>
-              <a:rPr sz="1800" b="0">
-                <a:solidFill>
-                  <a:srgbClr val="222222"/>
-                </a:solidFill>
-                <a:latin typeface="Calibri"/>
-              </a:rPr>
-              <a:t>RUNNING_TESTS     eight steps: four motors, two directions</a:t>
-            </a:r>
-          </a:p>
-          <a:p>
-            <a:pPr lvl="1" algn="l">
-              <a:lnSpc>
-                <a:spcPct val="100000"/>
-              </a:lnSpc>
-              <a:spcAft>
-                <a:spcPts val="900"/>
-              </a:spcAft>
-              <a:defRPr sz="1800" b="0">
-                <a:solidFill>
-                  <a:srgbClr val="222222"/>
-                </a:solidFill>
-                <a:latin typeface="Calibri"/>
-              </a:defRPr>
-            </a:pPr>
-            <a:r>
-              <a:rPr sz="1800" b="0">
-                <a:solidFill>
-                  <a:srgbClr val="222222"/>
-                </a:solidFill>
-                <a:latin typeface="Calibri"/>
-              </a:rPr>
-              <a:t>TEST_RESULT       green blinks for pass, red for fail</a:t>
-            </a:r>
-          </a:p>
-          <a:p>
-            <a:pPr lvl="1" algn="l">
-              <a:lnSpc>
-                <a:spcPct val="100000"/>
-              </a:lnSpc>
-              <a:spcAft>
-                <a:spcPts val="900"/>
-              </a:spcAft>
-              <a:defRPr sz="1800" b="0">
-                <a:solidFill>
-                  <a:srgbClr val="222222"/>
-                </a:solidFill>
-                <a:latin typeface="Calibri"/>
-              </a:defRPr>
-            </a:pPr>
-            <a:r>
-              <a:rPr sz="1800" b="0">
-                <a:solidFill>
-                  <a:srgbClr val="222222"/>
-                </a:solidFill>
-                <a:latin typeface="Calibri"/>
-              </a:rPr>
-              <a:t>TEST_DISABLED     hand over to normal driving</a:t>
+                  <a:srgbClr val="666666"/>
+                </a:solidFill>
+                <a:latin typeface="Calibri"/>
+              </a:rPr>
+              <a:t>baseline</a:t>
+            </a:r>
+          </a:p>
+        </p:txBody>
+      </p:sp>
+      <p:sp>
+        <p:nvSpPr>
+          <p:cNvPr id="40" name="Rectangle 39"/>
+          <p:cNvSpPr/>
+          <p:nvPr/>
+        </p:nvSpPr>
+        <p:spPr>
+          <a:xfrm>
+            <a:off x="502920" y="4297680"/>
+            <a:ext cx="11185855" cy="731520"/>
+          </a:xfrm>
+          <a:prstGeom prst="rect">
+            <a:avLst/>
+          </a:prstGeom>
+          <a:solidFill>
+            <a:srgbClr val="F4F6F8"/>
+          </a:solidFill>
+          <a:ln w="12700">
+            <a:solidFill>
+              <a:srgbClr val="0E7C86"/>
+            </a:solidFill>
+          </a:ln>
+          <a:effectLst/>
+        </p:spPr>
+        <p:style>
+          <a:lnRef idx="1">
+            <a:schemeClr val="accent1"/>
+          </a:lnRef>
+          <a:fillRef idx="3">
+            <a:schemeClr val="accent1"/>
+          </a:fillRef>
+          <a:effectRef idx="2">
+            <a:schemeClr val="accent1"/>
+          </a:effectRef>
+          <a:fontRef idx="minor">
+            <a:schemeClr val="lt1"/>
+          </a:fontRef>
+        </p:style>
+        <p:txBody>
+          <a:bodyPr rtlCol="0" anchor="ctr" wrap="square" lIns="45720" rIns="45720" tIns="18288" bIns="18288"/>
+          <a:lstStyle/>
+          <a:p>
+            <a:pPr algn="l">
+              <a:lnSpc>
+                <a:spcPct val="100000"/>
+              </a:lnSpc>
+              <a:spcAft>
+                <a:spcPts val="0"/>
+              </a:spcAft>
+              <a:defRPr sz="1400" b="0">
+                <a:solidFill>
+                  <a:srgbClr val="222222"/>
+                </a:solidFill>
+                <a:latin typeface="Consolas"/>
+              </a:defRPr>
+            </a:pPr>
+            <a:r>
+              <a:rPr sz="1400" b="0">
+                <a:solidFill>
+                  <a:srgbClr val="222222"/>
+                </a:solidFill>
+                <a:latin typeface="Consolas"/>
+              </a:rPr>
+              <a:t>Both thresholds are measured ABOVE the baseline that was just taken, not as absolute amps:</a:t>
+            </a:r>
+          </a:p>
+          <a:p>
+            <a:pPr algn="l">
+              <a:lnSpc>
+                <a:spcPct val="100000"/>
+              </a:lnSpc>
+              <a:spcAft>
+                <a:spcPts val="0"/>
+              </a:spcAft>
+              <a:defRPr sz="1400" b="0">
+                <a:solidFill>
+                  <a:srgbClr val="222222"/>
+                </a:solidFill>
+                <a:latin typeface="Consolas"/>
+              </a:defRPr>
+            </a:pPr>
+            <a:r>
+              <a:rPr sz="1400" b="0">
+                <a:solidFill>
+                  <a:srgbClr val="222222"/>
+                </a:solidFill>
+                <a:latin typeface="Consolas"/>
+              </a:rPr>
+              <a:t>peak - baseline &gt;= 1.500 A     AND     average - baseline &gt;= 1.000 A</a:t>
+            </a:r>
+          </a:p>
+        </p:txBody>
+      </p:sp>
+      <p:sp>
+        <p:nvSpPr>
+          <p:cNvPr id="41" name="Rounded Rectangle 40"/>
+          <p:cNvSpPr/>
+          <p:nvPr/>
+        </p:nvSpPr>
+        <p:spPr>
+          <a:xfrm>
+            <a:off x="502920" y="5303520"/>
+            <a:ext cx="11185855" cy="960120"/>
+          </a:xfrm>
+          <a:prstGeom prst="roundRect">
+            <a:avLst>
+              <a:gd name="adj" fmla="val 4000"/>
+            </a:avLst>
+          </a:prstGeom>
+          <a:solidFill>
+            <a:srgbClr val="FDF3E3"/>
+          </a:solidFill>
+          <a:ln w="12700">
+            <a:solidFill>
+              <a:srgbClr val="B46A0F"/>
+            </a:solidFill>
+          </a:ln>
+          <a:effectLst/>
+        </p:spPr>
+        <p:style>
+          <a:lnRef idx="1">
+            <a:schemeClr val="accent1"/>
+          </a:lnRef>
+          <a:fillRef idx="3">
+            <a:schemeClr val="accent1"/>
+          </a:fillRef>
+          <a:effectRef idx="2">
+            <a:schemeClr val="accent1"/>
+          </a:effectRef>
+          <a:fontRef idx="minor">
+            <a:schemeClr val="lt1"/>
+          </a:fontRef>
+        </p:style>
+        <p:txBody>
+          <a:bodyPr rtlCol="0" anchor="ctr" wrap="square" lIns="164592" rIns="164592" tIns="73152" bIns="73152"/>
+          <a:lstStyle/>
+          <a:p>
+            <a:pPr algn="l"/>
+            <a:r>
+              <a:rPr sz="1300" b="1">
+                <a:solidFill>
+                  <a:srgbClr val="B46A0F"/>
+                </a:solidFill>
+                <a:latin typeface="Calibri"/>
+              </a:rPr>
+              <a:t>WATCH OUT   </a:t>
+            </a:r>
+            <a:r>
+              <a:rPr sz="1500">
+                <a:solidFill>
+                  <a:srgbClr val="222222"/>
+                </a:solidFill>
+                <a:latin typeface="Calibri"/>
+              </a:rPr>
+              <a:t>Op 11.2 measured a baseline, printed it, then compared against fixed absolutes anyway - so a vehicle idling at half an amp failed every motor. Op 12 fixed it.</a:t>
             </a:r>
           </a:p>
         </p:txBody>
@@ -9787,7 +12993,7 @@
                 </a:solidFill>
                 <a:latin typeface="Calibri"/>
               </a:rPr>
-              <a:t>The self-test as a state machine  (continued)</a:t>
+              <a:t>The self-test as a state machine</a:t>
             </a:r>
           </a:p>
         </p:txBody>
@@ -9941,7 +13147,7 @@
         <p:spPr>
           <a:xfrm>
             <a:off x="502920" y="1188720"/>
-            <a:ext cx="11185855" cy="4023360"/>
+            <a:ext cx="11185855" cy="530352"/>
           </a:xfrm>
           <a:prstGeom prst="rect">
             <a:avLst/>
@@ -9959,6 +13165,54 @@
                 <a:spcPct val="100000"/>
               </a:lnSpc>
               <a:spcAft>
+                <a:spcPts val="600"/>
+              </a:spcAft>
+              <a:defRPr sz="1900" b="1">
+                <a:solidFill>
+                  <a:srgbClr val="0E7C86"/>
+                </a:solidFill>
+                <a:latin typeface="Calibri"/>
+              </a:defRPr>
+            </a:pPr>
+            <a:r>
+              <a:rPr sz="1900" b="1">
+                <a:solidFill>
+                  <a:srgbClr val="0E7C86"/>
+                </a:solidFill>
+                <a:latin typeface="Calibri"/>
+              </a:rPr>
+              <a:t>Five states, no blocking</a:t>
+            </a:r>
+          </a:p>
+        </p:txBody>
+      </p:sp>
+      <p:sp>
+        <p:nvSpPr>
+          <p:cNvPr id="7" name="TextBox 6"/>
+          <p:cNvSpPr txBox="1"/>
+          <p:nvPr/>
+        </p:nvSpPr>
+        <p:spPr>
+          <a:xfrm>
+            <a:off x="502920" y="1755648"/>
+            <a:ext cx="11185855" cy="4507992"/>
+          </a:xfrm>
+          <a:prstGeom prst="rect">
+            <a:avLst/>
+          </a:prstGeom>
+          <a:noFill/>
+        </p:spPr>
+        <p:txBody>
+          <a:bodyPr wrap="square" lIns="0" tIns="0" rIns="0" bIns="0">
+            <a:spAutoFit/>
+          </a:bodyPr>
+          <a:lstStyle/>
+          <a:p>
+            <a:pPr algn="l">
+              <a:lnSpc>
+                <a:spcPct val="100000"/>
+              </a:lnSpc>
+              <a:spcAft>
                 <a:spcPts val="900"/>
               </a:spcAft>
               <a:defRPr sz="1800" b="0">
@@ -9968,6 +13222,15 @@
                 <a:latin typeface="Calibri"/>
               </a:defRPr>
             </a:pPr>
+            <a:r>
+              <a:rPr sz="1800" b="0">
+                <a:solidFill>
+                  <a:srgbClr val="222222"/>
+                </a:solidFill>
+                <a:latin typeface="Calibri"/>
+              </a:rPr>
+              <a:t>Jumper GPIO 34 high at boot. Each motor is driven forward then reverse while the current sensor watches.</a:t>
+            </a:r>
           </a:p>
           <a:p>
             <a:pPr algn="l">
@@ -9984,6 +13247,22 @@
                 <a:latin typeface="Calibri"/>
               </a:defRPr>
             </a:pPr>
+          </a:p>
+          <a:p>
+            <a:pPr lvl="1" algn="l">
+              <a:lnSpc>
+                <a:spcPct val="100000"/>
+              </a:lnSpc>
+              <a:spcAft>
+                <a:spcPts val="900"/>
+              </a:spcAft>
+              <a:defRPr sz="1800" b="0">
+                <a:solidFill>
+                  <a:srgbClr val="222222"/>
+                </a:solidFill>
+                <a:latin typeface="Calibri"/>
+              </a:defRPr>
+            </a:pPr>
             <a:r>
               <a:rPr sz="1800" b="0">
                 <a:solidFill>
@@ -9991,11 +13270,11 @@
                 </a:solidFill>
                 <a:latin typeface="Calibri"/>
               </a:rPr>
-              <a:t>It is a state machine driven from loop(), not a blocking routine. So the LEDs keep animating and the serial console keeps responding throughout - and any button press clears the result screen.</a:t>
-            </a:r>
-          </a:p>
-          <a:p>
-            <a:pPr algn="l">
+              <a:t>CHECK_TRIGGER   wait for the pin to settle, then decide</a:t>
+            </a:r>
+          </a:p>
+          <a:p>
+            <a:pPr lvl="1" algn="l">
               <a:lnSpc>
                 <a:spcPct val="100000"/>
               </a:lnSpc>
@@ -10009,9 +13288,18 @@
                 <a:latin typeface="Calibri"/>
               </a:defRPr>
             </a:pPr>
-          </a:p>
-          <a:p>
-            <a:pPr algn="l">
+            <a:r>
+              <a:rPr sz="1800" b="0">
+                <a:solidFill>
+                  <a:srgbClr val="222222"/>
+                </a:solidFill>
+                <a:latin typeface="Calibri"/>
+              </a:rPr>
+              <a:t>BASELINE_CURRENT  measure the resting draw, motors off</a:t>
+            </a:r>
+          </a:p>
+          <a:p>
+            <a:pPr lvl="1" algn="l">
               <a:lnSpc>
                 <a:spcPct val="100000"/>
               </a:lnSpc>
@@ -10032,73 +13320,57 @@
                 </a:solidFill>
                 <a:latin typeface="Calibri"/>
               </a:rPr>
-              <a:t>Note GPIO 34 is input-only and has NO internal pull resistors. The board carries an external pull-down. Read a floating input-only pin and you get whatever the room's electrical noise suggests.</a:t>
-            </a:r>
-          </a:p>
-        </p:txBody>
-      </p:sp>
-      <p:sp>
-        <p:nvSpPr>
-          <p:cNvPr id="7" name="Rounded Rectangle 6"/>
-          <p:cNvSpPr/>
-          <p:nvPr/>
-        </p:nvSpPr>
-        <p:spPr>
-          <a:xfrm>
-            <a:off x="502920" y="5303520"/>
-            <a:ext cx="11185855" cy="960120"/>
-          </a:xfrm>
-          <a:prstGeom prst="roundRect">
-            <a:avLst>
-              <a:gd name="adj" fmla="val 4000"/>
-            </a:avLst>
-          </a:prstGeom>
-          <a:solidFill>
-            <a:srgbClr val="EEF3F8"/>
-          </a:solidFill>
-          <a:ln w="12700">
-            <a:solidFill>
-              <a:srgbClr val="0E7C86"/>
-            </a:solidFill>
-          </a:ln>
-          <a:effectLst/>
-        </p:spPr>
-        <p:style>
-          <a:lnRef idx="1">
-            <a:schemeClr val="accent1"/>
-          </a:lnRef>
-          <a:fillRef idx="3">
-            <a:schemeClr val="accent1"/>
-          </a:fillRef>
-          <a:effectRef idx="2">
-            <a:schemeClr val="accent1"/>
-          </a:effectRef>
-          <a:fontRef idx="minor">
-            <a:schemeClr val="lt1"/>
-          </a:fontRef>
-        </p:style>
-        <p:txBody>
-          <a:bodyPr rtlCol="0" anchor="ctr" wrap="square" lIns="164592" rIns="164592" tIns="73152" bIns="73152"/>
-          <a:lstStyle/>
-          <a:p>
-            <a:pPr algn="l"/>
-            <a:r>
-              <a:rPr sz="1300" b="1">
-                <a:solidFill>
-                  <a:srgbClr val="0E7C86"/>
-                </a:solidFill>
-                <a:latin typeface="Calibri"/>
-              </a:rPr>
-              <a:t>KEY POINT   </a:t>
-            </a:r>
-            <a:r>
-              <a:rPr sz="1500">
-                <a:solidFill>
-                  <a:srgbClr val="222222"/>
-                </a:solidFill>
-                <a:latin typeface="Calibri"/>
-              </a:rPr>
-              <a:t>A test that freezes the machine while it runs is a test nobody will leave enabled.</a:t>
+              <a:t>RUNNING_TESTS     eight steps: four motors, two directions</a:t>
+            </a:r>
+          </a:p>
+          <a:p>
+            <a:pPr lvl="1" algn="l">
+              <a:lnSpc>
+                <a:spcPct val="100000"/>
+              </a:lnSpc>
+              <a:spcAft>
+                <a:spcPts val="900"/>
+              </a:spcAft>
+              <a:defRPr sz="1800" b="0">
+                <a:solidFill>
+                  <a:srgbClr val="222222"/>
+                </a:solidFill>
+                <a:latin typeface="Calibri"/>
+              </a:defRPr>
+            </a:pPr>
+            <a:r>
+              <a:rPr sz="1800" b="0">
+                <a:solidFill>
+                  <a:srgbClr val="222222"/>
+                </a:solidFill>
+                <a:latin typeface="Calibri"/>
+              </a:rPr>
+              <a:t>TEST_RESULT       green blinks for pass, red for fail</a:t>
+            </a:r>
+          </a:p>
+          <a:p>
+            <a:pPr lvl="1" algn="l">
+              <a:lnSpc>
+                <a:spcPct val="100000"/>
+              </a:lnSpc>
+              <a:spcAft>
+                <a:spcPts val="900"/>
+              </a:spcAft>
+              <a:defRPr sz="1800" b="0">
+                <a:solidFill>
+                  <a:srgbClr val="222222"/>
+                </a:solidFill>
+                <a:latin typeface="Calibri"/>
+              </a:defRPr>
+            </a:pPr>
+            <a:r>
+              <a:rPr sz="1800" b="0">
+                <a:solidFill>
+                  <a:srgbClr val="222222"/>
+                </a:solidFill>
+                <a:latin typeface="Calibri"/>
+              </a:rPr>
+              <a:t>TEST_DISABLED     hand over to normal driving</a:t>
             </a:r>
           </a:p>
         </p:txBody>
@@ -10162,7 +13434,7 @@
                 </a:solidFill>
                 <a:latin typeface="Calibri"/>
               </a:rPr>
-              <a:t>Diagnostics, and the battery maths you can now do</a:t>
+              <a:t>The self-test as a state machine  (continued)</a:t>
             </a:r>
           </a:p>
         </p:txBody>
@@ -10316,7 +13588,7 @@
         <p:spPr>
           <a:xfrm>
             <a:off x="502920" y="1188720"/>
-            <a:ext cx="5364327" cy="457200"/>
+            <a:ext cx="11185855" cy="4023360"/>
           </a:xfrm>
           <a:prstGeom prst="rect">
             <a:avLst/>
@@ -10334,415 +13606,146 @@
                 <a:spcPct val="100000"/>
               </a:lnSpc>
               <a:spcAft>
-                <a:spcPts val="600"/>
-              </a:spcAft>
-              <a:defRPr sz="1800" b="1">
+                <a:spcPts val="900"/>
+              </a:spcAft>
+              <a:defRPr sz="1800" b="0">
+                <a:solidFill>
+                  <a:srgbClr val="222222"/>
+                </a:solidFill>
+                <a:latin typeface="Calibri"/>
+              </a:defRPr>
+            </a:pPr>
+          </a:p>
+          <a:p>
+            <a:pPr algn="l">
+              <a:lnSpc>
+                <a:spcPct val="100000"/>
+              </a:lnSpc>
+              <a:spcAft>
+                <a:spcPts val="900"/>
+              </a:spcAft>
+              <a:defRPr sz="1800" b="0">
+                <a:solidFill>
+                  <a:srgbClr val="222222"/>
+                </a:solidFill>
+                <a:latin typeface="Calibri"/>
+              </a:defRPr>
+            </a:pPr>
+            <a:r>
+              <a:rPr sz="1800" b="0">
+                <a:solidFill>
+                  <a:srgbClr val="222222"/>
+                </a:solidFill>
+                <a:latin typeface="Calibri"/>
+              </a:rPr>
+              <a:t>It is a state machine driven from loop(), not a blocking routine. So the LEDs keep animating and the serial console keeps responding throughout - and any button press clears the result screen.</a:t>
+            </a:r>
+          </a:p>
+          <a:p>
+            <a:pPr algn="l">
+              <a:lnSpc>
+                <a:spcPct val="100000"/>
+              </a:lnSpc>
+              <a:spcAft>
+                <a:spcPts val="900"/>
+              </a:spcAft>
+              <a:defRPr sz="1800" b="0">
+                <a:solidFill>
+                  <a:srgbClr val="222222"/>
+                </a:solidFill>
+                <a:latin typeface="Calibri"/>
+              </a:defRPr>
+            </a:pPr>
+          </a:p>
+          <a:p>
+            <a:pPr algn="l">
+              <a:lnSpc>
+                <a:spcPct val="100000"/>
+              </a:lnSpc>
+              <a:spcAft>
+                <a:spcPts val="900"/>
+              </a:spcAft>
+              <a:defRPr sz="1800" b="0">
+                <a:solidFill>
+                  <a:srgbClr val="222222"/>
+                </a:solidFill>
+                <a:latin typeface="Calibri"/>
+              </a:defRPr>
+            </a:pPr>
+            <a:r>
+              <a:rPr sz="1800" b="0">
+                <a:solidFill>
+                  <a:srgbClr val="222222"/>
+                </a:solidFill>
+                <a:latin typeface="Calibri"/>
+              </a:rPr>
+              <a:t>Note GPIO 34 is input-only and has NO internal pull resistors. The board carries an external pull-down. Read a floating input-only pin and you get whatever the room's electrical noise suggests.</a:t>
+            </a:r>
+          </a:p>
+        </p:txBody>
+      </p:sp>
+      <p:sp>
+        <p:nvSpPr>
+          <p:cNvPr id="7" name="Rounded Rectangle 6"/>
+          <p:cNvSpPr/>
+          <p:nvPr/>
+        </p:nvSpPr>
+        <p:spPr>
+          <a:xfrm>
+            <a:off x="502920" y="5303520"/>
+            <a:ext cx="11185855" cy="960120"/>
+          </a:xfrm>
+          <a:prstGeom prst="roundRect">
+            <a:avLst>
+              <a:gd name="adj" fmla="val 4000"/>
+            </a:avLst>
+          </a:prstGeom>
+          <a:solidFill>
+            <a:srgbClr val="EEF3F8"/>
+          </a:solidFill>
+          <a:ln w="12700">
+            <a:solidFill>
+              <a:srgbClr val="0E7C86"/>
+            </a:solidFill>
+          </a:ln>
+          <a:effectLst/>
+        </p:spPr>
+        <p:style>
+          <a:lnRef idx="1">
+            <a:schemeClr val="accent1"/>
+          </a:lnRef>
+          <a:fillRef idx="3">
+            <a:schemeClr val="accent1"/>
+          </a:fillRef>
+          <a:effectRef idx="2">
+            <a:schemeClr val="accent1"/>
+          </a:effectRef>
+          <a:fontRef idx="minor">
+            <a:schemeClr val="lt1"/>
+          </a:fontRef>
+        </p:style>
+        <p:txBody>
+          <a:bodyPr rtlCol="0" anchor="ctr" wrap="square" lIns="164592" rIns="164592" tIns="73152" bIns="73152"/>
+          <a:lstStyle/>
+          <a:p>
+            <a:pPr algn="l"/>
+            <a:r>
+              <a:rPr sz="1300" b="1">
                 <a:solidFill>
                   <a:srgbClr val="0E7C86"/>
                 </a:solidFill>
                 <a:latin typeface="Calibri"/>
-              </a:defRPr>
-            </a:pPr>
-            <a:r>
-              <a:rPr sz="1800" b="1">
-                <a:solidFill>
-                  <a:srgbClr val="0E7C86"/>
-                </a:solidFill>
-                <a:latin typeface="Calibri"/>
-              </a:rPr>
-              <a:t>What  diag  gives you</a:t>
-            </a:r>
-          </a:p>
-        </p:txBody>
-      </p:sp>
-      <p:sp>
-        <p:nvSpPr>
-          <p:cNvPr id="7" name="TextBox 6"/>
-          <p:cNvSpPr txBox="1"/>
-          <p:nvPr/>
-        </p:nvSpPr>
-        <p:spPr>
-          <a:xfrm>
-            <a:off x="502920" y="1700784"/>
-            <a:ext cx="5364327" cy="4562856"/>
-          </a:xfrm>
-          <a:prstGeom prst="rect">
-            <a:avLst/>
-          </a:prstGeom>
-          <a:noFill/>
-        </p:spPr>
-        <p:txBody>
-          <a:bodyPr wrap="square" lIns="0" tIns="0" rIns="0" bIns="0">
-            <a:spAutoFit/>
-          </a:bodyPr>
-          <a:lstStyle/>
-          <a:p>
-            <a:pPr algn="l">
-              <a:lnSpc>
-                <a:spcPct val="100000"/>
-              </a:lnSpc>
-              <a:spcAft>
-                <a:spcPts val="400"/>
-              </a:spcAft>
-              <a:defRPr sz="1800" b="0">
-                <a:solidFill>
-                  <a:srgbClr val="222222"/>
-                </a:solidFill>
-                <a:latin typeface="Calibri"/>
-              </a:defRPr>
-            </a:pPr>
-            <a:r>
-              <a:rPr sz="1800" b="0">
-                <a:solidFill>
-                  <a:srgbClr val="222222"/>
-                </a:solidFill>
-                <a:latin typeface="Calibri"/>
-              </a:rPr>
-              <a:t>Every five seconds, while it is switched on:</a:t>
-            </a:r>
-          </a:p>
-          <a:p>
-            <a:pPr lvl="1" algn="l">
-              <a:lnSpc>
-                <a:spcPct val="100000"/>
-              </a:lnSpc>
-              <a:spcAft>
-                <a:spcPts val="400"/>
-              </a:spcAft>
-              <a:defRPr sz="1800" b="0">
-                <a:solidFill>
-                  <a:srgbClr val="222222"/>
-                </a:solidFill>
-                <a:latin typeface="Calibri"/>
-              </a:defRPr>
-            </a:pPr>
-            <a:r>
-              <a:rPr sz="1800" b="0">
-                <a:solidFill>
-                  <a:srgbClr val="222222"/>
-                </a:solidFill>
-                <a:latin typeface="Calibri"/>
-              </a:rPr>
-              <a:t>VBat   - bus voltage, straight from the sensor</a:t>
-            </a:r>
-          </a:p>
-          <a:p>
-            <a:pPr lvl="1" algn="l">
-              <a:lnSpc>
-                <a:spcPct val="100000"/>
-              </a:lnSpc>
-              <a:spcAft>
-                <a:spcPts val="400"/>
-              </a:spcAft>
-              <a:defRPr sz="1800" b="0">
-                <a:solidFill>
-                  <a:srgbClr val="222222"/>
-                </a:solidFill>
-                <a:latin typeface="Calibri"/>
-              </a:defRPr>
-            </a:pPr>
-            <a:r>
-              <a:rPr sz="1800" b="0">
-                <a:solidFill>
-                  <a:srgbClr val="222222"/>
-                </a:solidFill>
-                <a:latin typeface="Calibri"/>
-              </a:rPr>
-              <a:t>I-Avg  - mean current since the last report</a:t>
-            </a:r>
-          </a:p>
-          <a:p>
-            <a:pPr lvl="1" algn="l">
-              <a:lnSpc>
-                <a:spcPct val="100000"/>
-              </a:lnSpc>
-              <a:spcAft>
-                <a:spcPts val="400"/>
-              </a:spcAft>
-              <a:defRPr sz="1800" b="0">
-                <a:solidFill>
-                  <a:srgbClr val="222222"/>
-                </a:solidFill>
-                <a:latin typeface="Calibri"/>
-              </a:defRPr>
-            </a:pPr>
-            <a:r>
-              <a:rPr sz="1800" b="0">
-                <a:solidFill>
-                  <a:srgbClr val="222222"/>
-                </a:solidFill>
-                <a:latin typeface="Calibri"/>
-              </a:rPr>
-              <a:t>I-Max  - the largest positive spike</a:t>
-            </a:r>
-          </a:p>
-          <a:p>
-            <a:pPr lvl="1" algn="l">
-              <a:lnSpc>
-                <a:spcPct val="100000"/>
-              </a:lnSpc>
-              <a:spcAft>
-                <a:spcPts val="400"/>
-              </a:spcAft>
-              <a:defRPr sz="1800" b="0">
-                <a:solidFill>
-                  <a:srgbClr val="222222"/>
-                </a:solidFill>
-                <a:latin typeface="Calibri"/>
-              </a:defRPr>
-            </a:pPr>
-            <a:r>
-              <a:rPr sz="1800" b="0">
-                <a:solidFill>
-                  <a:srgbClr val="222222"/>
-                </a:solidFill>
-                <a:latin typeface="Calibri"/>
-              </a:rPr>
-              <a:t>I-Min  - the largest negative excursion</a:t>
-            </a:r>
-          </a:p>
-        </p:txBody>
-      </p:sp>
-      <p:sp>
-        <p:nvSpPr>
-          <p:cNvPr id="8" name="TextBox 7"/>
-          <p:cNvSpPr txBox="1"/>
-          <p:nvPr/>
-        </p:nvSpPr>
-        <p:spPr>
-          <a:xfrm>
-            <a:off x="6324447" y="1188720"/>
-            <a:ext cx="5364327" cy="457200"/>
-          </a:xfrm>
-          <a:prstGeom prst="rect">
-            <a:avLst/>
-          </a:prstGeom>
-          <a:noFill/>
-        </p:spPr>
-        <p:txBody>
-          <a:bodyPr wrap="square" lIns="0" tIns="0" rIns="0" bIns="0">
-            <a:spAutoFit/>
-          </a:bodyPr>
-          <a:lstStyle/>
-          <a:p>
-            <a:pPr algn="l">
-              <a:lnSpc>
-                <a:spcPct val="100000"/>
-              </a:lnSpc>
-              <a:spcAft>
-                <a:spcPts val="600"/>
-              </a:spcAft>
-              <a:defRPr sz="1800" b="1">
-                <a:solidFill>
-                  <a:srgbClr val="0E7C86"/>
-                </a:solidFill>
-                <a:latin typeface="Calibri"/>
-              </a:defRPr>
-            </a:pPr>
-            <a:r>
-              <a:rPr sz="1800" b="1">
-                <a:solidFill>
-                  <a:srgbClr val="0E7C86"/>
-                </a:solidFill>
-                <a:latin typeface="Calibri"/>
-              </a:rPr>
-              <a:t>Work it out for your vehicle</a:t>
-            </a:r>
-          </a:p>
-        </p:txBody>
-      </p:sp>
-      <p:sp>
-        <p:nvSpPr>
-          <p:cNvPr id="9" name="TextBox 8"/>
-          <p:cNvSpPr txBox="1"/>
-          <p:nvPr/>
-        </p:nvSpPr>
-        <p:spPr>
-          <a:xfrm>
-            <a:off x="6324447" y="1700784"/>
-            <a:ext cx="5364327" cy="4562856"/>
-          </a:xfrm>
-          <a:prstGeom prst="rect">
-            <a:avLst/>
-          </a:prstGeom>
-          <a:noFill/>
-        </p:spPr>
-        <p:txBody>
-          <a:bodyPr wrap="square" lIns="0" tIns="0" rIns="0" bIns="0">
-            <a:spAutoFit/>
-          </a:bodyPr>
-          <a:lstStyle/>
-          <a:p>
-            <a:pPr algn="l">
-              <a:lnSpc>
-                <a:spcPct val="100000"/>
-              </a:lnSpc>
-              <a:spcAft>
-                <a:spcPts val="400"/>
-              </a:spcAft>
-              <a:defRPr sz="1800" b="0">
-                <a:solidFill>
-                  <a:srgbClr val="222222"/>
-                </a:solidFill>
-                <a:latin typeface="Calibri"/>
-              </a:defRPr>
-            </a:pPr>
-            <a:r>
-              <a:rPr sz="1800" b="0">
-                <a:solidFill>
-                  <a:srgbClr val="222222"/>
-                </a:solidFill>
-                <a:latin typeface="Calibri"/>
-              </a:rPr>
-              <a:t>A 4S 3300 mAh pack holds 3.3 amp hours.</a:t>
-            </a:r>
-          </a:p>
-          <a:p>
-            <a:pPr algn="l">
-              <a:lnSpc>
-                <a:spcPct val="100000"/>
-              </a:lnSpc>
-              <a:spcAft>
-                <a:spcPts val="400"/>
-              </a:spcAft>
-              <a:defRPr sz="1800" b="0">
-                <a:solidFill>
-                  <a:srgbClr val="222222"/>
-                </a:solidFill>
-                <a:latin typeface="Calibri"/>
-              </a:defRPr>
-            </a:pPr>
-          </a:p>
-          <a:p>
-            <a:pPr lvl="1" algn="l">
-              <a:lnSpc>
-                <a:spcPct val="100000"/>
-              </a:lnSpc>
-              <a:spcAft>
-                <a:spcPts val="400"/>
-              </a:spcAft>
-              <a:defRPr sz="1800" b="0">
-                <a:solidFill>
-                  <a:srgbClr val="222222"/>
-                </a:solidFill>
-                <a:latin typeface="Calibri"/>
-              </a:defRPr>
-            </a:pPr>
-            <a:r>
-              <a:rPr sz="1800" b="0">
-                <a:solidFill>
-                  <a:srgbClr val="222222"/>
-                </a:solidFill>
-                <a:latin typeface="Calibri"/>
-              </a:rPr>
-              <a:t>runtime (hours) = 3.3 / average current in amps</a:t>
-            </a:r>
-          </a:p>
-          <a:p>
-            <a:pPr algn="l">
-              <a:lnSpc>
-                <a:spcPct val="100000"/>
-              </a:lnSpc>
-              <a:spcAft>
-                <a:spcPts val="400"/>
-              </a:spcAft>
-              <a:defRPr sz="1800" b="0">
-                <a:solidFill>
-                  <a:srgbClr val="222222"/>
-                </a:solidFill>
-                <a:latin typeface="Calibri"/>
-              </a:defRPr>
-            </a:pPr>
-          </a:p>
-          <a:p>
-            <a:pPr algn="l">
-              <a:lnSpc>
-                <a:spcPct val="100000"/>
-              </a:lnSpc>
-              <a:spcAft>
-                <a:spcPts val="400"/>
-              </a:spcAft>
-              <a:defRPr sz="1800" b="0">
-                <a:solidFill>
-                  <a:srgbClr val="222222"/>
-                </a:solidFill>
-                <a:latin typeface="Calibri"/>
-              </a:defRPr>
-            </a:pPr>
-            <a:r>
-              <a:rPr sz="1800" b="0">
-                <a:solidFill>
-                  <a:srgbClr val="222222"/>
-                </a:solidFill>
-                <a:latin typeface="Calibri"/>
-              </a:rPr>
-              <a:t>So at a measured 2.0 A average:</a:t>
-            </a:r>
-          </a:p>
-          <a:p>
-            <a:pPr lvl="1" algn="l">
-              <a:lnSpc>
-                <a:spcPct val="100000"/>
-              </a:lnSpc>
-              <a:spcAft>
-                <a:spcPts val="400"/>
-              </a:spcAft>
-              <a:defRPr sz="1800" b="0">
-                <a:solidFill>
-                  <a:srgbClr val="222222"/>
-                </a:solidFill>
-                <a:latin typeface="Calibri"/>
-              </a:defRPr>
-            </a:pPr>
-            <a:r>
-              <a:rPr sz="1800" b="0">
-                <a:solidFill>
-                  <a:srgbClr val="222222"/>
-                </a:solidFill>
-                <a:latin typeface="Calibri"/>
-              </a:rPr>
-              <a:t>3.3 / 2.0 = 1.65 hours, about 99 minutes</a:t>
-            </a:r>
-          </a:p>
-          <a:p>
-            <a:pPr algn="l">
-              <a:lnSpc>
-                <a:spcPct val="100000"/>
-              </a:lnSpc>
-              <a:spcAft>
-                <a:spcPts val="400"/>
-              </a:spcAft>
-              <a:defRPr sz="1800" b="0">
-                <a:solidFill>
-                  <a:srgbClr val="222222"/>
-                </a:solidFill>
-                <a:latin typeface="Calibri"/>
-              </a:defRPr>
-            </a:pPr>
-          </a:p>
-          <a:p>
-            <a:pPr algn="l">
-              <a:lnSpc>
-                <a:spcPct val="100000"/>
-              </a:lnSpc>
-              <a:spcAft>
-                <a:spcPts val="400"/>
-              </a:spcAft>
-              <a:defRPr sz="1800" b="0">
-                <a:solidFill>
-                  <a:srgbClr val="222222"/>
-                </a:solidFill>
-                <a:latin typeface="Calibri"/>
-              </a:defRPr>
-            </a:pPr>
-            <a:r>
-              <a:rPr sz="1800" b="0">
-                <a:solidFill>
-                  <a:srgbClr val="222222"/>
-                </a:solidFill>
-                <a:latin typeface="Calibri"/>
-              </a:rPr>
-              <a:t>At 6.0 A of hard driving:</a:t>
+              </a:rPr>
+              <a:t>KEY POINT   </a:t>
+            </a:r>
+            <a:r>
+              <a:rPr sz="1500">
+                <a:solidFill>
+                  <a:srgbClr val="222222"/>
+                </a:solidFill>
+                <a:latin typeface="Calibri"/>
+              </a:rPr>
+              <a:t>A test that freezes the machine while it runs is a test nobody will leave enabled.</a:t>
             </a:r>
           </a:p>
         </p:txBody>
@@ -10792,7 +13795,7 @@
               <a:spcAft>
                 <a:spcPts val="0"/>
               </a:spcAft>
-              <a:defRPr sz="2700" b="1">
+              <a:defRPr sz="2800" b="1">
                 <a:solidFill>
                   <a:srgbClr val="1F3A5F"/>
                 </a:solidFill>
@@ -10800,13 +13803,13 @@
               </a:defRPr>
             </a:pPr>
             <a:r>
-              <a:rPr sz="2700" b="1">
+              <a:rPr sz="2800" b="1">
                 <a:solidFill>
                   <a:srgbClr val="1F3A5F"/>
                 </a:solidFill>
                 <a:latin typeface="Calibri"/>
               </a:rPr>
-              <a:t>Diagnostics, and the battery maths you can now do  (continued)</a:t>
+              <a:t>Diagnostics, and the battery maths you can now do</a:t>
             </a:r>
           </a:p>
         </p:txBody>
@@ -10994,7 +13997,7 @@
                 </a:solidFill>
                 <a:latin typeface="Calibri"/>
               </a:rPr>
-              <a:t>What  diag  gives you (cont.)</a:t>
+              <a:t>What  diag  gives you</a:t>
             </a:r>
           </a:p>
         </p:txBody>
@@ -11042,11 +14045,11 @@
                 </a:solidFill>
                 <a:latin typeface="Calibri"/>
               </a:rPr>
-              <a:t>Negative current is real. When you cut the throttle, a spinning motor becomes a generator and pushes current BACK. That is why the shunt register is signed.</a:t>
-            </a:r>
-          </a:p>
-          <a:p>
-            <a:pPr algn="l">
+              <a:t>Every five seconds, while it is switched on:</a:t>
+            </a:r>
+          </a:p>
+          <a:p>
+            <a:pPr lvl="1" algn="l">
               <a:lnSpc>
                 <a:spcPct val="100000"/>
               </a:lnSpc>
@@ -11060,9 +14063,18 @@
                 <a:latin typeface="Calibri"/>
               </a:defRPr>
             </a:pPr>
-          </a:p>
-          <a:p>
-            <a:pPr algn="l">
+            <a:r>
+              <a:rPr sz="1800" b="0">
+                <a:solidFill>
+                  <a:srgbClr val="222222"/>
+                </a:solidFill>
+                <a:latin typeface="Calibri"/>
+              </a:rPr>
+              <a:t>VBat   - bus voltage, straight from the sensor</a:t>
+            </a:r>
+          </a:p>
+          <a:p>
+            <a:pPr lvl="1" algn="l">
               <a:lnSpc>
                 <a:spcPct val="100000"/>
               </a:lnSpc>
@@ -11083,7 +14095,57 @@
                 </a:solidFill>
                 <a:latin typeface="Calibri"/>
               </a:rPr>
-              <a:t>The tracking is reset after each report, so each line describes the last five seconds rather than all of time.</a:t>
+              <a:t>I-Avg  - mean current since the last report</a:t>
+            </a:r>
+          </a:p>
+          <a:p>
+            <a:pPr lvl="1" algn="l">
+              <a:lnSpc>
+                <a:spcPct val="100000"/>
+              </a:lnSpc>
+              <a:spcAft>
+                <a:spcPts val="400"/>
+              </a:spcAft>
+              <a:defRPr sz="1800" b="0">
+                <a:solidFill>
+                  <a:srgbClr val="222222"/>
+                </a:solidFill>
+                <a:latin typeface="Calibri"/>
+              </a:defRPr>
+            </a:pPr>
+            <a:r>
+              <a:rPr sz="1800" b="0">
+                <a:solidFill>
+                  <a:srgbClr val="222222"/>
+                </a:solidFill>
+                <a:latin typeface="Calibri"/>
+              </a:rPr>
+              <a:t>I-Max  - the largest positive spike</a:t>
+            </a:r>
+          </a:p>
+          <a:p>
+            <a:pPr lvl="1" algn="l">
+              <a:lnSpc>
+                <a:spcPct val="100000"/>
+              </a:lnSpc>
+              <a:spcAft>
+                <a:spcPts val="400"/>
+              </a:spcAft>
+              <a:defRPr sz="1800" b="0">
+                <a:solidFill>
+                  <a:srgbClr val="222222"/>
+                </a:solidFill>
+                <a:latin typeface="Calibri"/>
+              </a:defRPr>
+            </a:pPr>
+            <a:r>
+              <a:rPr sz="1800" b="0">
+                <a:solidFill>
+                  <a:srgbClr val="222222"/>
+                </a:solidFill>
+                <a:latin typeface="Calibri"/>
+              </a:rPr>
+              <a:t>I-Min  - the largest negative excursion</a:t>
             </a:r>
           </a:p>
         </p:txBody>
@@ -11131,7 +14193,7 @@
                 </a:solidFill>
                 <a:latin typeface="Calibri"/>
               </a:rPr>
-              <a:t>Work it out for your vehicle (cont.)</a:t>
+              <a:t>Work it out for your vehicle</a:t>
             </a:r>
           </a:p>
         </p:txBody>
@@ -11158,6 +14220,47 @@
           </a:bodyPr>
           <a:lstStyle/>
           <a:p>
+            <a:pPr algn="l">
+              <a:lnSpc>
+                <a:spcPct val="100000"/>
+              </a:lnSpc>
+              <a:spcAft>
+                <a:spcPts val="400"/>
+              </a:spcAft>
+              <a:defRPr sz="1800" b="0">
+                <a:solidFill>
+                  <a:srgbClr val="222222"/>
+                </a:solidFill>
+                <a:latin typeface="Calibri"/>
+              </a:defRPr>
+            </a:pPr>
+            <a:r>
+              <a:rPr sz="1800" b="0">
+                <a:solidFill>
+                  <a:srgbClr val="222222"/>
+                </a:solidFill>
+                <a:latin typeface="Calibri"/>
+              </a:rPr>
+              <a:t>A 4S 3300 mAh pack holds 3.3 amp hours.</a:t>
+            </a:r>
+          </a:p>
+          <a:p>
+            <a:pPr algn="l">
+              <a:lnSpc>
+                <a:spcPct val="100000"/>
+              </a:lnSpc>
+              <a:spcAft>
+                <a:spcPts val="400"/>
+              </a:spcAft>
+              <a:defRPr sz="1800" b="0">
+                <a:solidFill>
+                  <a:srgbClr val="222222"/>
+                </a:solidFill>
+                <a:latin typeface="Calibri"/>
+              </a:defRPr>
+            </a:pPr>
+          </a:p>
+          <a:p>
             <a:pPr lvl="1" algn="l">
               <a:lnSpc>
                 <a:spcPct val="100000"/>
@@ -11179,7 +14282,73 @@
                 </a:solidFill>
                 <a:latin typeface="Calibri"/>
               </a:rPr>
-              <a:t>3.3 / 6.0 = 0.55 hours, about 33 minutes</a:t>
+              <a:t>runtime (hours) = 3.3 / average current in amps</a:t>
+            </a:r>
+          </a:p>
+          <a:p>
+            <a:pPr algn="l">
+              <a:lnSpc>
+                <a:spcPct val="100000"/>
+              </a:lnSpc>
+              <a:spcAft>
+                <a:spcPts val="400"/>
+              </a:spcAft>
+              <a:defRPr sz="1800" b="0">
+                <a:solidFill>
+                  <a:srgbClr val="222222"/>
+                </a:solidFill>
+                <a:latin typeface="Calibri"/>
+              </a:defRPr>
+            </a:pPr>
+          </a:p>
+          <a:p>
+            <a:pPr algn="l">
+              <a:lnSpc>
+                <a:spcPct val="100000"/>
+              </a:lnSpc>
+              <a:spcAft>
+                <a:spcPts val="400"/>
+              </a:spcAft>
+              <a:defRPr sz="1800" b="0">
+                <a:solidFill>
+                  <a:srgbClr val="222222"/>
+                </a:solidFill>
+                <a:latin typeface="Calibri"/>
+              </a:defRPr>
+            </a:pPr>
+            <a:r>
+              <a:rPr sz="1800" b="0">
+                <a:solidFill>
+                  <a:srgbClr val="222222"/>
+                </a:solidFill>
+                <a:latin typeface="Calibri"/>
+              </a:rPr>
+              <a:t>So at a measured 2.0 A average:</a:t>
+            </a:r>
+          </a:p>
+          <a:p>
+            <a:pPr lvl="1" algn="l">
+              <a:lnSpc>
+                <a:spcPct val="100000"/>
+              </a:lnSpc>
+              <a:spcAft>
+                <a:spcPts val="400"/>
+              </a:spcAft>
+              <a:defRPr sz="1800" b="0">
+                <a:solidFill>
+                  <a:srgbClr val="222222"/>
+                </a:solidFill>
+                <a:latin typeface="Calibri"/>
+              </a:defRPr>
+            </a:pPr>
+            <a:r>
+              <a:rPr sz="1800" b="0">
+                <a:solidFill>
+                  <a:srgbClr val="222222"/>
+                </a:solidFill>
+                <a:latin typeface="Calibri"/>
+              </a:rPr>
+              <a:t>3.3 / 2.0 = 1.65 hours, about 99 minutes</a:t>
             </a:r>
           </a:p>
         </p:txBody>
@@ -11821,7 +14990,7 @@
         </p:nvSpPr>
         <p:spPr>
           <a:xfrm>
-            <a:off x="6324447" y="1188720"/>
+            <a:off x="502920" y="1188720"/>
             <a:ext cx="5364327" cy="457200"/>
           </a:xfrm>
           <a:prstGeom prst="rect">
@@ -11856,7 +15025,7 @@
                 </a:solidFill>
                 <a:latin typeface="Calibri"/>
               </a:rPr>
-              <a:t>Work it out for your vehicle (cont.)</a:t>
+              <a:t>What  diag  gives you (cont.)</a:t>
             </a:r>
           </a:p>
         </p:txBody>
@@ -11869,7 +15038,7 @@
         </p:nvSpPr>
         <p:spPr>
           <a:xfrm>
-            <a:off x="6324447" y="1700784"/>
+            <a:off x="502920" y="1700784"/>
             <a:ext cx="5364327" cy="3419856"/>
           </a:xfrm>
           <a:prstGeom prst="rect">
@@ -11897,6 +15066,15 @@
                 <a:latin typeface="Calibri"/>
               </a:defRPr>
             </a:pPr>
+            <a:r>
+              <a:rPr sz="1800" b="0">
+                <a:solidFill>
+                  <a:srgbClr val="222222"/>
+                </a:solidFill>
+                <a:latin typeface="Calibri"/>
+              </a:rPr>
+              <a:t>Negative current is real. When you cut the throttle, a spinning motor becomes a generator and pushes current BACK. That is why the shunt register is signed.</a:t>
+            </a:r>
           </a:p>
           <a:p>
             <a:pPr algn="l">
@@ -11913,6 +15091,22 @@
                 <a:latin typeface="Calibri"/>
               </a:defRPr>
             </a:pPr>
+          </a:p>
+          <a:p>
+            <a:pPr algn="l">
+              <a:lnSpc>
+                <a:spcPct val="100000"/>
+              </a:lnSpc>
+              <a:spcAft>
+                <a:spcPts val="400"/>
+              </a:spcAft>
+              <a:defRPr sz="1800" b="0">
+                <a:solidFill>
+                  <a:srgbClr val="222222"/>
+                </a:solidFill>
+                <a:latin typeface="Calibri"/>
+              </a:defRPr>
+            </a:pPr>
             <a:r>
               <a:rPr sz="1800" b="0">
                 <a:solidFill>
@@ -11920,6 +15114,168 @@
                 </a:solidFill>
                 <a:latin typeface="Calibri"/>
               </a:rPr>
+              <a:t>The tracking is reset after each report, so each line describes the last five seconds rather than all of time.</a:t>
+            </a:r>
+          </a:p>
+        </p:txBody>
+      </p:sp>
+      <p:sp>
+        <p:nvSpPr>
+          <p:cNvPr id="8" name="TextBox 7"/>
+          <p:cNvSpPr txBox="1"/>
+          <p:nvPr/>
+        </p:nvSpPr>
+        <p:spPr>
+          <a:xfrm>
+            <a:off x="6324447" y="1188720"/>
+            <a:ext cx="5364327" cy="457200"/>
+          </a:xfrm>
+          <a:prstGeom prst="rect">
+            <a:avLst/>
+          </a:prstGeom>
+          <a:noFill/>
+        </p:spPr>
+        <p:txBody>
+          <a:bodyPr wrap="square" lIns="0" tIns="0" rIns="0" bIns="0">
+            <a:spAutoFit/>
+          </a:bodyPr>
+          <a:lstStyle/>
+          <a:p>
+            <a:pPr algn="l">
+              <a:lnSpc>
+                <a:spcPct val="100000"/>
+              </a:lnSpc>
+              <a:spcAft>
+                <a:spcPts val="600"/>
+              </a:spcAft>
+              <a:defRPr sz="1800" b="1">
+                <a:solidFill>
+                  <a:srgbClr val="0E7C86"/>
+                </a:solidFill>
+                <a:latin typeface="Calibri"/>
+              </a:defRPr>
+            </a:pPr>
+            <a:r>
+              <a:rPr sz="1800" b="1">
+                <a:solidFill>
+                  <a:srgbClr val="0E7C86"/>
+                </a:solidFill>
+                <a:latin typeface="Calibri"/>
+              </a:rPr>
+              <a:t>Work it out for your vehicle (cont.)</a:t>
+            </a:r>
+          </a:p>
+        </p:txBody>
+      </p:sp>
+      <p:sp>
+        <p:nvSpPr>
+          <p:cNvPr id="9" name="TextBox 8"/>
+          <p:cNvSpPr txBox="1"/>
+          <p:nvPr/>
+        </p:nvSpPr>
+        <p:spPr>
+          <a:xfrm>
+            <a:off x="6324447" y="1700784"/>
+            <a:ext cx="5364327" cy="3419856"/>
+          </a:xfrm>
+          <a:prstGeom prst="rect">
+            <a:avLst/>
+          </a:prstGeom>
+          <a:noFill/>
+        </p:spPr>
+        <p:txBody>
+          <a:bodyPr wrap="square" lIns="0" tIns="0" rIns="0" bIns="0">
+            <a:spAutoFit/>
+          </a:bodyPr>
+          <a:lstStyle/>
+          <a:p>
+            <a:pPr algn="l">
+              <a:lnSpc>
+                <a:spcPct val="100000"/>
+              </a:lnSpc>
+              <a:spcAft>
+                <a:spcPts val="400"/>
+              </a:spcAft>
+              <a:defRPr sz="1800" b="0">
+                <a:solidFill>
+                  <a:srgbClr val="222222"/>
+                </a:solidFill>
+                <a:latin typeface="Calibri"/>
+              </a:defRPr>
+            </a:pPr>
+            <a:r>
+              <a:rPr sz="1800" b="0">
+                <a:solidFill>
+                  <a:srgbClr val="222222"/>
+                </a:solidFill>
+                <a:latin typeface="Calibri"/>
+              </a:rPr>
+              <a:t>At 6.0 A of hard driving:</a:t>
+            </a:r>
+          </a:p>
+          <a:p>
+            <a:pPr lvl="1" algn="l">
+              <a:lnSpc>
+                <a:spcPct val="100000"/>
+              </a:lnSpc>
+              <a:spcAft>
+                <a:spcPts val="400"/>
+              </a:spcAft>
+              <a:defRPr sz="1800" b="0">
+                <a:solidFill>
+                  <a:srgbClr val="222222"/>
+                </a:solidFill>
+                <a:latin typeface="Calibri"/>
+              </a:defRPr>
+            </a:pPr>
+            <a:r>
+              <a:rPr sz="1800" b="0">
+                <a:solidFill>
+                  <a:srgbClr val="222222"/>
+                </a:solidFill>
+                <a:latin typeface="Calibri"/>
+              </a:rPr>
+              <a:t>3.3 / 6.0 = 0.55 hours, about 33 minutes</a:t>
+            </a:r>
+          </a:p>
+          <a:p>
+            <a:pPr algn="l">
+              <a:lnSpc>
+                <a:spcPct val="100000"/>
+              </a:lnSpc>
+              <a:spcAft>
+                <a:spcPts val="400"/>
+              </a:spcAft>
+              <a:defRPr sz="1800" b="0">
+                <a:solidFill>
+                  <a:srgbClr val="222222"/>
+                </a:solidFill>
+                <a:latin typeface="Calibri"/>
+              </a:defRPr>
+            </a:pPr>
+          </a:p>
+          <a:p>
+            <a:pPr algn="l">
+              <a:lnSpc>
+                <a:spcPct val="100000"/>
+              </a:lnSpc>
+              <a:spcAft>
+                <a:spcPts val="400"/>
+              </a:spcAft>
+              <a:defRPr sz="1800" b="0">
+                <a:solidFill>
+                  <a:srgbClr val="222222"/>
+                </a:solidFill>
+                <a:latin typeface="Calibri"/>
+              </a:defRPr>
+            </a:pPr>
+            <a:r>
+              <a:rPr sz="1800" b="0">
+                <a:solidFill>
+                  <a:srgbClr val="222222"/>
+                </a:solidFill>
+                <a:latin typeface="Calibri"/>
+              </a:rPr>
               <a:t>Now add the LEDs. 32 pixels at full white is nearly 2 A on its own - and that is a constant drain whether you are moving or not.</a:t>
             </a:r>
           </a:p>
@@ -11968,7 +15324,7 @@
       </p:sp>
       <p:sp>
         <p:nvSpPr>
-          <p:cNvPr id="8" name="Rounded Rectangle 7"/>
+          <p:cNvPr id="10" name="Rounded Rectangle 9"/>
           <p:cNvSpPr/>
           <p:nvPr/>
         </p:nvSpPr>
@@ -12421,106 +15777,6 @@
               <a:t>3.  A setup_rangefinder() called from setup(), after the motors.</a:t>
             </a:r>
           </a:p>
-          <a:p>
-            <a:pPr algn="l">
-              <a:lnSpc>
-                <a:spcPct val="100000"/>
-              </a:lnSpc>
-              <a:spcAft>
-                <a:spcPts val="900"/>
-              </a:spcAft>
-              <a:defRPr sz="1800" b="0">
-                <a:solidFill>
-                  <a:srgbClr val="222222"/>
-                </a:solidFill>
-                <a:latin typeface="Calibri"/>
-              </a:defRPr>
-            </a:pPr>
-            <a:r>
-              <a:rPr sz="1800" b="0">
-                <a:solidFill>
-                  <a:srgbClr val="222222"/>
-                </a:solidFill>
-                <a:latin typeface="Calibri"/>
-              </a:rPr>
-              <a:t>4.  An update_rangefinder(now) called every pass, that returns immediately if it is not time. No delay(), ever.</a:t>
-            </a:r>
-          </a:p>
-          <a:p>
-            <a:pPr algn="l">
-              <a:lnSpc>
-                <a:spcPct val="100000"/>
-              </a:lnSpc>
-              <a:spcAft>
-                <a:spcPts val="900"/>
-              </a:spcAft>
-              <a:defRPr sz="1800" b="0">
-                <a:solidFill>
-                  <a:srgbClr val="222222"/>
-                </a:solidFill>
-                <a:latin typeface="Calibri"/>
-              </a:defRPr>
-            </a:pPr>
-            <a:r>
-              <a:rPr sz="1800" b="0">
-                <a:solidFill>
-                  <a:srgbClr val="222222"/>
-                </a:solidFill>
-                <a:latin typeface="Calibri"/>
-              </a:rPr>
-              <a:t>5.  A capability flag, so a vehicle without the sensor still runs this binary.</a:t>
-            </a:r>
-          </a:p>
-          <a:p>
-            <a:pPr algn="l">
-              <a:lnSpc>
-                <a:spcPct val="100000"/>
-              </a:lnSpc>
-              <a:spcAft>
-                <a:spcPts val="900"/>
-              </a:spcAft>
-              <a:defRPr sz="1800" b="0">
-                <a:solidFill>
-                  <a:srgbClr val="222222"/>
-                </a:solidFill>
-                <a:latin typeface="Calibri"/>
-              </a:defRPr>
-            </a:pPr>
-            <a:r>
-              <a:rPr sz="1800" b="0">
-                <a:solidFill>
-                  <a:srgbClr val="222222"/>
-                </a:solidFill>
-                <a:latin typeface="Calibri"/>
-              </a:rPr>
-              <a:t>6.  A console command, so it can be tested and tuned without recompiling.</a:t>
-            </a:r>
-          </a:p>
-          <a:p>
-            <a:pPr algn="l">
-              <a:lnSpc>
-                <a:spcPct val="100000"/>
-              </a:lnSpc>
-              <a:spcAft>
-                <a:spcPts val="900"/>
-              </a:spcAft>
-              <a:defRPr sz="1800" b="0">
-                <a:solidFill>
-                  <a:srgbClr val="222222"/>
-                </a:solidFill>
-                <a:latin typeface="Calibri"/>
-              </a:defRPr>
-            </a:pPr>
-            <a:r>
-              <a:rPr sz="1800" b="0">
-                <a:solidFill>
-                  <a:srgbClr val="222222"/>
-                </a:solidFill>
-                <a:latin typeface="Calibri"/>
-              </a:rPr>
-              <a:t>7.  Keep its state in static file-scope variables. Expose functions, not variables.</a:t>
-            </a:r>
-          </a:p>
         </p:txBody>
       </p:sp>
     </p:spTree>
@@ -12763,6 +16019,106 @@
                 <a:latin typeface="Calibri"/>
               </a:defRPr>
             </a:pPr>
+            <a:r>
+              <a:rPr sz="1800" b="0">
+                <a:solidFill>
+                  <a:srgbClr val="222222"/>
+                </a:solidFill>
+                <a:latin typeface="Calibri"/>
+              </a:rPr>
+              <a:t>4.  An update_rangefinder(now) called every pass, that returns immediately if it is not time. No delay(), ever.</a:t>
+            </a:r>
+          </a:p>
+          <a:p>
+            <a:pPr algn="l">
+              <a:lnSpc>
+                <a:spcPct val="100000"/>
+              </a:lnSpc>
+              <a:spcAft>
+                <a:spcPts val="900"/>
+              </a:spcAft>
+              <a:defRPr sz="1800" b="0">
+                <a:solidFill>
+                  <a:srgbClr val="222222"/>
+                </a:solidFill>
+                <a:latin typeface="Calibri"/>
+              </a:defRPr>
+            </a:pPr>
+            <a:r>
+              <a:rPr sz="1800" b="0">
+                <a:solidFill>
+                  <a:srgbClr val="222222"/>
+                </a:solidFill>
+                <a:latin typeface="Calibri"/>
+              </a:rPr>
+              <a:t>5.  A capability flag, so a vehicle without the sensor still runs this binary.</a:t>
+            </a:r>
+          </a:p>
+          <a:p>
+            <a:pPr algn="l">
+              <a:lnSpc>
+                <a:spcPct val="100000"/>
+              </a:lnSpc>
+              <a:spcAft>
+                <a:spcPts val="900"/>
+              </a:spcAft>
+              <a:defRPr sz="1800" b="0">
+                <a:solidFill>
+                  <a:srgbClr val="222222"/>
+                </a:solidFill>
+                <a:latin typeface="Calibri"/>
+              </a:defRPr>
+            </a:pPr>
+            <a:r>
+              <a:rPr sz="1800" b="0">
+                <a:solidFill>
+                  <a:srgbClr val="222222"/>
+                </a:solidFill>
+                <a:latin typeface="Calibri"/>
+              </a:rPr>
+              <a:t>6.  A console command, so it can be tested and tuned without recompiling.</a:t>
+            </a:r>
+          </a:p>
+          <a:p>
+            <a:pPr algn="l">
+              <a:lnSpc>
+                <a:spcPct val="100000"/>
+              </a:lnSpc>
+              <a:spcAft>
+                <a:spcPts val="900"/>
+              </a:spcAft>
+              <a:defRPr sz="1800" b="0">
+                <a:solidFill>
+                  <a:srgbClr val="222222"/>
+                </a:solidFill>
+                <a:latin typeface="Calibri"/>
+              </a:defRPr>
+            </a:pPr>
+            <a:r>
+              <a:rPr sz="1800" b="0">
+                <a:solidFill>
+                  <a:srgbClr val="222222"/>
+                </a:solidFill>
+                <a:latin typeface="Calibri"/>
+              </a:rPr>
+              <a:t>7.  Keep its state in static file-scope variables. Expose functions, not variables.</a:t>
+            </a:r>
+          </a:p>
+          <a:p>
+            <a:pPr algn="l">
+              <a:lnSpc>
+                <a:spcPct val="100000"/>
+              </a:lnSpc>
+              <a:spcAft>
+                <a:spcPts val="900"/>
+              </a:spcAft>
+              <a:defRPr sz="1800" b="0">
+                <a:solidFill>
+                  <a:srgbClr val="222222"/>
+                </a:solidFill>
+                <a:latin typeface="Calibri"/>
+              </a:defRPr>
+            </a:pPr>
           </a:p>
           <a:p>
             <a:pPr algn="l">
@@ -13285,47 +16641,6 @@
               <a:t>Everything here is how embedded software is written generally: subsystem separation, non-blocking state machines, defensive loading, capability detection, self-test, and a console.</a:t>
             </a:r>
           </a:p>
-          <a:p>
-            <a:pPr algn="l">
-              <a:lnSpc>
-                <a:spcPct val="100000"/>
-              </a:lnSpc>
-              <a:spcAft>
-                <a:spcPts val="400"/>
-              </a:spcAft>
-              <a:defRPr sz="1800" b="0">
-                <a:solidFill>
-                  <a:srgbClr val="222222"/>
-                </a:solidFill>
-                <a:latin typeface="Calibri"/>
-              </a:defRPr>
-            </a:pPr>
-          </a:p>
-          <a:p>
-            <a:pPr algn="l">
-              <a:lnSpc>
-                <a:spcPct val="100000"/>
-              </a:lnSpc>
-              <a:spcAft>
-                <a:spcPts val="400"/>
-              </a:spcAft>
-              <a:defRPr sz="1800" b="0">
-                <a:solidFill>
-                  <a:srgbClr val="222222"/>
-                </a:solidFill>
-                <a:latin typeface="Calibri"/>
-              </a:defRPr>
-            </a:pPr>
-            <a:r>
-              <a:rPr sz="1800" b="0">
-                <a:solidFill>
-                  <a:srgbClr val="222222"/>
-                </a:solidFill>
-                <a:latin typeface="Calibri"/>
-              </a:rPr>
-              <a:t>The same patterns run cars, medical devices, satellites and industrial controllers.</a:t>
-            </a:r>
-          </a:p>
         </p:txBody>
       </p:sp>
     </p:spTree>
@@ -13623,6 +16938,47 @@
                 </a:solidFill>
                 <a:latin typeface="Calibri"/>
               </a:rPr>
+              <a:t>The same patterns run cars, medical devices, satellites and industrial controllers.</a:t>
+            </a:r>
+          </a:p>
+          <a:p>
+            <a:pPr algn="l">
+              <a:lnSpc>
+                <a:spcPct val="100000"/>
+              </a:lnSpc>
+              <a:spcAft>
+                <a:spcPts val="400"/>
+              </a:spcAft>
+              <a:defRPr sz="1800" b="0">
+                <a:solidFill>
+                  <a:srgbClr val="222222"/>
+                </a:solidFill>
+                <a:latin typeface="Calibri"/>
+              </a:defRPr>
+            </a:pPr>
+          </a:p>
+          <a:p>
+            <a:pPr algn="l">
+              <a:lnSpc>
+                <a:spcPct val="100000"/>
+              </a:lnSpc>
+              <a:spcAft>
+                <a:spcPts val="400"/>
+              </a:spcAft>
+              <a:defRPr sz="1800" b="0">
+                <a:solidFill>
+                  <a:srgbClr val="222222"/>
+                </a:solidFill>
+                <a:latin typeface="Calibri"/>
+              </a:defRPr>
+            </a:pPr>
+            <a:r>
+              <a:rPr sz="1800" b="0">
+                <a:solidFill>
+                  <a:srgbClr val="222222"/>
+                </a:solidFill>
+                <a:latin typeface="Calibri"/>
+              </a:rPr>
               <a:t>Six of the ideas in this course exist because somebody shipped the bug first. That is also how it works in industry.</a:t>
             </a:r>
           </a:p>
@@ -14628,6 +17984,22 @@
                 <a:latin typeface="Calibri"/>
               </a:defRPr>
             </a:pPr>
+          </a:p>
+          <a:p>
+            <a:pPr algn="l">
+              <a:lnSpc>
+                <a:spcPct val="100000"/>
+              </a:lnSpc>
+              <a:spcAft>
+                <a:spcPts val="400"/>
+              </a:spcAft>
+              <a:defRPr sz="1800" b="0">
+                <a:solidFill>
+                  <a:srgbClr val="222222"/>
+                </a:solidFill>
+                <a:latin typeface="Calibri"/>
+              </a:defRPr>
+            </a:pPr>
             <a:r>
               <a:rPr sz="1800" b="0">
                 <a:solidFill>
@@ -14709,6 +18081,22 @@
             <a:spAutoFit/>
           </a:bodyPr>
           <a:lstStyle/>
+          <a:p>
+            <a:pPr algn="l">
+              <a:lnSpc>
+                <a:spcPct val="100000"/>
+              </a:lnSpc>
+              <a:spcAft>
+                <a:spcPts val="400"/>
+              </a:spcAft>
+              <a:defRPr sz="1800" b="0">
+                <a:solidFill>
+                  <a:srgbClr val="222222"/>
+                </a:solidFill>
+                <a:latin typeface="Calibri"/>
+              </a:defRPr>
+            </a:pPr>
+          </a:p>
           <a:p>
             <a:pPr algn="l">
               <a:lnSpc>
@@ -15182,88 +18570,6 @@
               <a:t>STALL DETECTION. You have the current signature logic from the self-test. Apply it while driving: if a motor draws a jammed signature for more than half a second, cut it and say so.</a:t>
             </a:r>
           </a:p>
-          <a:p>
-            <a:pPr algn="l">
-              <a:lnSpc>
-                <a:spcPct val="100000"/>
-              </a:lnSpc>
-              <a:spcAft>
-                <a:spcPts val="900"/>
-              </a:spcAft>
-              <a:defRPr sz="1800" b="0">
-                <a:solidFill>
-                  <a:srgbClr val="222222"/>
-                </a:solidFill>
-                <a:latin typeface="Calibri"/>
-              </a:defRPr>
-            </a:pPr>
-          </a:p>
-          <a:p>
-            <a:pPr algn="l">
-              <a:lnSpc>
-                <a:spcPct val="100000"/>
-              </a:lnSpc>
-              <a:spcAft>
-                <a:spcPts val="900"/>
-              </a:spcAft>
-              <a:defRPr sz="1800" b="0">
-                <a:solidFill>
-                  <a:srgbClr val="222222"/>
-                </a:solidFill>
-                <a:latin typeface="Calibri"/>
-              </a:defRPr>
-            </a:pPr>
-            <a:r>
-              <a:rPr sz="1800" b="0">
-                <a:solidFill>
-                  <a:srgbClr val="222222"/>
-                </a:solidFill>
-                <a:latin typeface="Calibri"/>
-              </a:rPr>
-              <a:t>OBSTACLE STOP. An ultrasonic range finder, a threshold in Config.h, and a rule that overrides the throttle. Think hard about what happens when the sensor gives one bad reading.</a:t>
-            </a:r>
-          </a:p>
-          <a:p>
-            <a:pPr algn="l">
-              <a:lnSpc>
-                <a:spcPct val="100000"/>
-              </a:lnSpc>
-              <a:spcAft>
-                <a:spcPts val="900"/>
-              </a:spcAft>
-              <a:defRPr sz="1800" b="0">
-                <a:solidFill>
-                  <a:srgbClr val="222222"/>
-                </a:solidFill>
-                <a:latin typeface="Calibri"/>
-              </a:defRPr>
-            </a:pPr>
-          </a:p>
-          <a:p>
-            <a:pPr algn="l">
-              <a:lnSpc>
-                <a:spcPct val="100000"/>
-              </a:lnSpc>
-              <a:spcAft>
-                <a:spcPts val="900"/>
-              </a:spcAft>
-              <a:defRPr sz="1800" b="0">
-                <a:solidFill>
-                  <a:srgbClr val="222222"/>
-                </a:solidFill>
-                <a:latin typeface="Calibri"/>
-              </a:defRPr>
-            </a:pPr>
-            <a:r>
-              <a:rPr sz="1800" b="0">
-                <a:solidFill>
-                  <a:srgbClr val="222222"/>
-                </a:solidFill>
-                <a:latin typeface="Calibri"/>
-              </a:rPr>
-              <a:t>TELEMETRY. Stream voltage, current and speed over ESP-NOW to a second ESP32 with its own LED bar.</a:t>
-            </a:r>
-          </a:p>
         </p:txBody>
       </p:sp>
     </p:spTree>
@@ -15491,6 +18797,72 @@
             <a:spAutoFit/>
           </a:bodyPr>
           <a:lstStyle/>
+          <a:p>
+            <a:pPr algn="l">
+              <a:lnSpc>
+                <a:spcPct val="100000"/>
+              </a:lnSpc>
+              <a:spcAft>
+                <a:spcPts val="900"/>
+              </a:spcAft>
+              <a:defRPr sz="1800" b="0">
+                <a:solidFill>
+                  <a:srgbClr val="222222"/>
+                </a:solidFill>
+                <a:latin typeface="Calibri"/>
+              </a:defRPr>
+            </a:pPr>
+            <a:r>
+              <a:rPr sz="1800" b="0">
+                <a:solidFill>
+                  <a:srgbClr val="222222"/>
+                </a:solidFill>
+                <a:latin typeface="Calibri"/>
+              </a:rPr>
+              <a:t>OBSTACLE STOP. An ultrasonic range finder, a threshold in Config.h, and a rule that overrides the throttle. Think hard about what happens when the sensor gives one bad reading.</a:t>
+            </a:r>
+          </a:p>
+          <a:p>
+            <a:pPr algn="l">
+              <a:lnSpc>
+                <a:spcPct val="100000"/>
+              </a:lnSpc>
+              <a:spcAft>
+                <a:spcPts val="900"/>
+              </a:spcAft>
+              <a:defRPr sz="1800" b="0">
+                <a:solidFill>
+                  <a:srgbClr val="222222"/>
+                </a:solidFill>
+                <a:latin typeface="Calibri"/>
+              </a:defRPr>
+            </a:pPr>
+          </a:p>
+          <a:p>
+            <a:pPr algn="l">
+              <a:lnSpc>
+                <a:spcPct val="100000"/>
+              </a:lnSpc>
+              <a:spcAft>
+                <a:spcPts val="900"/>
+              </a:spcAft>
+              <a:defRPr sz="1800" b="0">
+                <a:solidFill>
+                  <a:srgbClr val="222222"/>
+                </a:solidFill>
+                <a:latin typeface="Calibri"/>
+              </a:defRPr>
+            </a:pPr>
+            <a:r>
+              <a:rPr sz="1800" b="0">
+                <a:solidFill>
+                  <a:srgbClr val="222222"/>
+                </a:solidFill>
+                <a:latin typeface="Calibri"/>
+              </a:rPr>
+              <a:t>TELEMETRY. Stream voltage, current and speed over ESP-NOW to a second ESP32 with its own LED bar.</a:t>
+            </a:r>
+          </a:p>
           <a:p>
             <a:pPr algn="l">
               <a:lnSpc>
@@ -17380,6 +20752,22 @@
                 <a:latin typeface="Calibri"/>
               </a:defRPr>
             </a:pPr>
+          </a:p>
+          <a:p>
+            <a:pPr algn="l">
+              <a:lnSpc>
+                <a:spcPct val="100000"/>
+              </a:lnSpc>
+              <a:spcAft>
+                <a:spcPts val="900"/>
+              </a:spcAft>
+              <a:defRPr sz="1800" b="0">
+                <a:solidFill>
+                  <a:srgbClr val="222222"/>
+                </a:solidFill>
+                <a:latin typeface="Calibri"/>
+              </a:defRPr>
+            </a:pPr>
             <a:r>
               <a:rPr sz="1800" b="0">
                 <a:solidFill>
@@ -19040,97 +22428,6 @@
               <a:t>V = 2 A x 0.0025 ohm = 0.005 V,  five millivolts</a:t>
             </a:r>
           </a:p>
-          <a:p>
-            <a:pPr algn="l">
-              <a:lnSpc>
-                <a:spcPct val="100000"/>
-              </a:lnSpc>
-              <a:spcAft>
-                <a:spcPts val="900"/>
-              </a:spcAft>
-              <a:defRPr sz="1800" b="0">
-                <a:solidFill>
-                  <a:srgbClr val="222222"/>
-                </a:solidFill>
-                <a:latin typeface="Calibri"/>
-              </a:defRPr>
-            </a:pPr>
-          </a:p>
-          <a:p>
-            <a:pPr algn="l">
-              <a:lnSpc>
-                <a:spcPct val="100000"/>
-              </a:lnSpc>
-              <a:spcAft>
-                <a:spcPts val="900"/>
-              </a:spcAft>
-              <a:defRPr sz="1800" b="0">
-                <a:solidFill>
-                  <a:srgbClr val="222222"/>
-                </a:solidFill>
-                <a:latin typeface="Calibri"/>
-              </a:defRPr>
-            </a:pPr>
-            <a:r>
-              <a:rPr sz="1800" b="0">
-                <a:solidFill>
-                  <a:srgbClr val="222222"/>
-                </a:solidFill>
-                <a:latin typeface="Calibri"/>
-              </a:rPr>
-              <a:t>That is deliberate. A bigger resistor would be easier to read, but it would waste power and steal voltage from the motors:</a:t>
-            </a:r>
-          </a:p>
-          <a:p>
-            <a:pPr lvl="1" algn="l">
-              <a:lnSpc>
-                <a:spcPct val="100000"/>
-              </a:lnSpc>
-              <a:spcAft>
-                <a:spcPts val="900"/>
-              </a:spcAft>
-              <a:defRPr sz="1800" b="0">
-                <a:solidFill>
-                  <a:srgbClr val="222222"/>
-                </a:solidFill>
-                <a:latin typeface="Calibri"/>
-              </a:defRPr>
-            </a:pPr>
-            <a:r>
-              <a:rPr sz="1800" b="0">
-                <a:solidFill>
-                  <a:srgbClr val="222222"/>
-                </a:solidFill>
-                <a:latin typeface="Calibri"/>
-              </a:rPr>
-              <a:t>P = I^2 x R = 4 x 0.0025 = 0.01 W  at 0.0025 ohm</a:t>
-            </a:r>
-          </a:p>
-          <a:p>
-            <a:pPr lvl="1" algn="l">
-              <a:lnSpc>
-                <a:spcPct val="100000"/>
-              </a:lnSpc>
-              <a:spcAft>
-                <a:spcPts val="900"/>
-              </a:spcAft>
-              <a:defRPr sz="1800" b="0">
-                <a:solidFill>
-                  <a:srgbClr val="222222"/>
-                </a:solidFill>
-                <a:latin typeface="Calibri"/>
-              </a:defRPr>
-            </a:pPr>
-            <a:r>
-              <a:rPr sz="1800" b="0">
-                <a:solidFill>
-                  <a:srgbClr val="222222"/>
-                </a:solidFill>
-                <a:latin typeface="Calibri"/>
-              </a:rPr>
-              <a:t>P = I^2 x R = 4 x 0.1    = 0.4 W   at 0.1 ohm</a:t>
-            </a:r>
-          </a:p>
         </p:txBody>
       </p:sp>
     </p:spTree>
@@ -19358,6 +22655,81 @@
             <a:spAutoFit/>
           </a:bodyPr>
           <a:lstStyle/>
+          <a:p>
+            <a:pPr algn="l">
+              <a:lnSpc>
+                <a:spcPct val="100000"/>
+              </a:lnSpc>
+              <a:spcAft>
+                <a:spcPts val="900"/>
+              </a:spcAft>
+              <a:defRPr sz="1800" b="0">
+                <a:solidFill>
+                  <a:srgbClr val="222222"/>
+                </a:solidFill>
+                <a:latin typeface="Calibri"/>
+              </a:defRPr>
+            </a:pPr>
+            <a:r>
+              <a:rPr sz="1800" b="0">
+                <a:solidFill>
+                  <a:srgbClr val="222222"/>
+                </a:solidFill>
+                <a:latin typeface="Calibri"/>
+              </a:rPr>
+              <a:t>That is deliberate. A bigger resistor would be easier to read, but it would waste power and steal voltage from the motors:</a:t>
+            </a:r>
+          </a:p>
+          <a:p>
+            <a:pPr lvl="1" algn="l">
+              <a:lnSpc>
+                <a:spcPct val="100000"/>
+              </a:lnSpc>
+              <a:spcAft>
+                <a:spcPts val="900"/>
+              </a:spcAft>
+              <a:defRPr sz="1800" b="0">
+                <a:solidFill>
+                  <a:srgbClr val="222222"/>
+                </a:solidFill>
+                <a:latin typeface="Calibri"/>
+              </a:defRPr>
+            </a:pPr>
+            <a:r>
+              <a:rPr sz="1800" b="0">
+                <a:solidFill>
+                  <a:srgbClr val="222222"/>
+                </a:solidFill>
+                <a:latin typeface="Calibri"/>
+              </a:rPr>
+              <a:t>P = I^2 x R = 4 x 0.0025 = 0.01 W  at 0.0025 ohm</a:t>
+            </a:r>
+          </a:p>
+          <a:p>
+            <a:pPr lvl="1" algn="l">
+              <a:lnSpc>
+                <a:spcPct val="100000"/>
+              </a:lnSpc>
+              <a:spcAft>
+                <a:spcPts val="900"/>
+              </a:spcAft>
+              <a:defRPr sz="1800" b="0">
+                <a:solidFill>
+                  <a:srgbClr val="222222"/>
+                </a:solidFill>
+                <a:latin typeface="Calibri"/>
+              </a:defRPr>
+            </a:pPr>
+            <a:r>
+              <a:rPr sz="1800" b="0">
+                <a:solidFill>
+                  <a:srgbClr val="222222"/>
+                </a:solidFill>
+                <a:latin typeface="Calibri"/>
+              </a:rPr>
+              <a:t>P = I^2 x R = 4 x 0.1    = 0.4 W   at 0.1 ohm</a:t>
+            </a:r>
+          </a:p>
           <a:p>
             <a:pPr algn="l">
               <a:lnSpc>
@@ -19727,4 +23099,324 @@
   </a:objectDefaults>
   <a:extraClrSchemeLst/>
 </a:theme>
+</file>
+
+<file path=ppt/theme/theme2.xml><?xml version="1.0" encoding="utf-8"?>
+<a:theme xmlns:a="http://schemas.openxmlformats.org/drawingml/2006/main" name="Office Theme">
+  <a:themeElements>
+    <a:clrScheme name="Office">
+      <a:dk1>
+        <a:sysClr val="windowText" lastClr="000000"/>
+      </a:dk1>
+      <a:lt1>
+        <a:sysClr val="window" lastClr="FFFFFF"/>
+      </a:lt1>
+      <a:dk2>
+        <a:srgbClr val="1F497D"/>
+      </a:dk2>
+      <a:lt2>
+        <a:srgbClr val="EEECE1"/>
+      </a:lt2>
+      <a:accent1>
+        <a:srgbClr val="4F81BD"/>
+      </a:accent1>
+      <a:accent2>
+        <a:srgbClr val="C0504D"/>
+      </a:accent2>
+      <a:accent3>
+        <a:srgbClr val="9BBB59"/>
+      </a:accent3>
+      <a:accent4>
+        <a:srgbClr val="8064A2"/>
+      </a:accent4>
+      <a:accent5>
+        <a:srgbClr val="4BACC6"/>
+      </a:accent5>
+      <a:accent6>
+        <a:srgbClr val="F79646"/>
+      </a:accent6>
+      <a:hlink>
+        <a:srgbClr val="0000FF"/>
+      </a:hlink>
+      <a:folHlink>
+        <a:srgbClr val="800080"/>
+      </a:folHlink>
+    </a:clrScheme>
+    <a:fontScheme name="Office">
+      <a:majorFont>
+        <a:latin typeface="Calibri"/>
+        <a:ea typeface=""/>
+        <a:cs typeface=""/>
+        <a:font script="Jpan" typeface="ＭＳ Ｐゴシック"/>
+        <a:font script="Hang" typeface="맑은 고딕"/>
+        <a:font script="Hans" typeface="宋体"/>
+        <a:font script="Hant" typeface="新細明體"/>
+        <a:font script="Arab" typeface="Times New Roman"/>
+        <a:font script="Hebr" typeface="Times New Roman"/>
+        <a:font script="Thai" typeface="Angsana New"/>
+        <a:font script="Ethi" typeface="Nyala"/>
+        <a:font script="Beng" typeface="Vrinda"/>
+        <a:font script="Gujr" typeface="Shruti"/>
+        <a:font script="Khmr" typeface="MoolBoran"/>
+        <a:font script="Knda" typeface="Tunga"/>
+        <a:font script="Guru" typeface="Raavi"/>
+        <a:font script="Cans" typeface="Euphemia"/>
+        <a:font script="Cher" typeface="Plantagenet Cherokee"/>
+        <a:font script="Yiii" typeface="Microsoft Yi Baiti"/>
+        <a:font script="Tibt" typeface="Microsoft Himalaya"/>
+        <a:font script="Thaa" typeface="MV Boli"/>
+        <a:font script="Deva" typeface="Mangal"/>
+        <a:font script="Telu" typeface="Gautami"/>
+        <a:font script="Taml" typeface="Latha"/>
+        <a:font script="Syrc" typeface="Estrangelo Edessa"/>
+        <a:font script="Orya" typeface="Kalinga"/>
+        <a:font script="Mlym" typeface="Kartika"/>
+        <a:font script="Laoo" typeface="DokChampa"/>
+        <a:font script="Sinh" typeface="Iskoola Pota"/>
+        <a:font script="Mong" typeface="Mongolian Baiti"/>
+        <a:font script="Viet" typeface="Times New Roman"/>
+        <a:font script="Uigh" typeface="Microsoft Uighur"/>
+        <a:font script="Geor" typeface="Sylfaen"/>
+      </a:majorFont>
+      <a:minorFont>
+        <a:latin typeface="Calibri"/>
+        <a:ea typeface=""/>
+        <a:cs typeface=""/>
+        <a:font script="Jpan" typeface="ＭＳ Ｐゴシック"/>
+        <a:font script="Hang" typeface="맑은 고딕"/>
+        <a:font script="Hans" typeface="宋体"/>
+        <a:font script="Hant" typeface="新細明體"/>
+        <a:font script="Arab" typeface="Arial"/>
+        <a:font script="Hebr" typeface="Arial"/>
+        <a:font script="Thai" typeface="Cordia New"/>
+        <a:font script="Ethi" typeface="Nyala"/>
+        <a:font script="Beng" typeface="Vrinda"/>
+        <a:font script="Gujr" typeface="Shruti"/>
+        <a:font script="Khmr" typeface="DaunPenh"/>
+        <a:font script="Knda" typeface="Tunga"/>
+        <a:font script="Guru" typeface="Raavi"/>
+        <a:font script="Cans" typeface="Euphemia"/>
+        <a:font script="Cher" typeface="Plantagenet Cherokee"/>
+        <a:font script="Yiii" typeface="Microsoft Yi Baiti"/>
+        <a:font script="Tibt" typeface="Microsoft Himalaya"/>
+        <a:font script="Thaa" typeface="MV Boli"/>
+        <a:font script="Deva" typeface="Mangal"/>
+        <a:font script="Telu" typeface="Gautami"/>
+        <a:font script="Taml" typeface="Latha"/>
+        <a:font script="Syrc" typeface="Estrangelo Edessa"/>
+        <a:font script="Orya" typeface="Kalinga"/>
+        <a:font script="Mlym" typeface="Kartika"/>
+        <a:font script="Laoo" typeface="DokChampa"/>
+        <a:font script="Sinh" typeface="Iskoola Pota"/>
+        <a:font script="Mong" typeface="Mongolian Baiti"/>
+        <a:font script="Viet" typeface="Arial"/>
+        <a:font script="Uigh" typeface="Microsoft Uighur"/>
+        <a:font script="Geor" typeface="Sylfaen"/>
+      </a:minorFont>
+    </a:fontScheme>
+    <a:fmtScheme name="Office">
+      <a:fillStyleLst>
+        <a:solidFill>
+          <a:schemeClr val="phClr"/>
+        </a:solidFill>
+        <a:gradFill rotWithShape="1">
+          <a:gsLst>
+            <a:gs pos="0">
+              <a:schemeClr val="phClr">
+                <a:tint val="50000"/>
+                <a:satMod val="300000"/>
+              </a:schemeClr>
+            </a:gs>
+            <a:gs pos="35000">
+              <a:schemeClr val="phClr">
+                <a:tint val="37000"/>
+                <a:satMod val="300000"/>
+              </a:schemeClr>
+            </a:gs>
+            <a:gs pos="100000">
+              <a:schemeClr val="phClr">
+                <a:tint val="15000"/>
+                <a:satMod val="350000"/>
+              </a:schemeClr>
+            </a:gs>
+          </a:gsLst>
+          <a:lin ang="16200000" scaled="1"/>
+        </a:gradFill>
+        <a:gradFill rotWithShape="1">
+          <a:gsLst>
+            <a:gs pos="0">
+              <a:schemeClr val="phClr">
+                <a:tint val="100000"/>
+                <a:shade val="100000"/>
+                <a:satMod val="130000"/>
+              </a:schemeClr>
+            </a:gs>
+            <a:gs pos="100000">
+              <a:schemeClr val="phClr">
+                <a:tint val="50000"/>
+                <a:shade val="100000"/>
+                <a:satMod val="350000"/>
+              </a:schemeClr>
+            </a:gs>
+          </a:gsLst>
+          <a:lin ang="16200000" scaled="0"/>
+        </a:gradFill>
+      </a:fillStyleLst>
+      <a:lnStyleLst>
+        <a:ln w="9525" cap="flat" cmpd="sng" algn="ctr">
+          <a:solidFill>
+            <a:schemeClr val="phClr">
+              <a:shade val="95000"/>
+              <a:satMod val="105000"/>
+            </a:schemeClr>
+          </a:solidFill>
+          <a:prstDash val="solid"/>
+        </a:ln>
+        <a:ln w="25400" cap="flat" cmpd="sng" algn="ctr">
+          <a:solidFill>
+            <a:schemeClr val="phClr"/>
+          </a:solidFill>
+          <a:prstDash val="solid"/>
+        </a:ln>
+        <a:ln w="38100" cap="flat" cmpd="sng" algn="ctr">
+          <a:solidFill>
+            <a:schemeClr val="phClr"/>
+          </a:solidFill>
+          <a:prstDash val="solid"/>
+        </a:ln>
+      </a:lnStyleLst>
+      <a:effectStyleLst>
+        <a:effectStyle>
+          <a:effectLst>
+            <a:outerShdw blurRad="40000" dist="20000" dir="5400000" rotWithShape="0">
+              <a:srgbClr val="000000">
+                <a:alpha val="38000"/>
+              </a:srgbClr>
+            </a:outerShdw>
+          </a:effectLst>
+        </a:effectStyle>
+        <a:effectStyle>
+          <a:effectLst>
+            <a:outerShdw blurRad="40000" dist="23000" dir="5400000" rotWithShape="0">
+              <a:srgbClr val="000000">
+                <a:alpha val="35000"/>
+              </a:srgbClr>
+            </a:outerShdw>
+          </a:effectLst>
+        </a:effectStyle>
+        <a:effectStyle>
+          <a:effectLst>
+            <a:outerShdw blurRad="40000" dist="23000" dir="5400000" rotWithShape="0">
+              <a:srgbClr val="000000">
+                <a:alpha val="35000"/>
+              </a:srgbClr>
+            </a:outerShdw>
+          </a:effectLst>
+          <a:scene3d>
+            <a:camera prst="orthographicFront">
+              <a:rot lat="0" lon="0" rev="0"/>
+            </a:camera>
+            <a:lightRig rig="threePt" dir="t">
+              <a:rot lat="0" lon="0" rev="1200000"/>
+            </a:lightRig>
+          </a:scene3d>
+          <a:sp3d>
+            <a:bevelT w="63500" h="25400"/>
+          </a:sp3d>
+        </a:effectStyle>
+      </a:effectStyleLst>
+      <a:bgFillStyleLst>
+        <a:solidFill>
+          <a:schemeClr val="phClr"/>
+        </a:solidFill>
+        <a:gradFill rotWithShape="1">
+          <a:gsLst>
+            <a:gs pos="0">
+              <a:schemeClr val="phClr">
+                <a:tint val="40000"/>
+                <a:satMod val="350000"/>
+              </a:schemeClr>
+            </a:gs>
+            <a:gs pos="40000">
+              <a:schemeClr val="phClr">
+                <a:tint val="45000"/>
+                <a:shade val="99000"/>
+                <a:satMod val="350000"/>
+              </a:schemeClr>
+            </a:gs>
+            <a:gs pos="100000">
+              <a:schemeClr val="phClr">
+                <a:shade val="20000"/>
+                <a:satMod val="255000"/>
+              </a:schemeClr>
+            </a:gs>
+          </a:gsLst>
+          <a:path path="circle">
+            <a:fillToRect l="50000" t="-80000" r="50000" b="180000"/>
+          </a:path>
+        </a:gradFill>
+        <a:gradFill rotWithShape="1">
+          <a:gsLst>
+            <a:gs pos="0">
+              <a:schemeClr val="phClr">
+                <a:tint val="80000"/>
+                <a:satMod val="300000"/>
+              </a:schemeClr>
+            </a:gs>
+            <a:gs pos="100000">
+              <a:schemeClr val="phClr">
+                <a:shade val="30000"/>
+                <a:satMod val="200000"/>
+              </a:schemeClr>
+            </a:gs>
+          </a:gsLst>
+          <a:path path="circle">
+            <a:fillToRect l="50000" t="50000" r="50000" b="50000"/>
+          </a:path>
+        </a:gradFill>
+      </a:bgFillStyleLst>
+    </a:fmtScheme>
+  </a:themeElements>
+  <a:objectDefaults>
+    <a:spDef>
+      <a:spPr/>
+      <a:bodyPr/>
+      <a:lstStyle/>
+      <a:style>
+        <a:lnRef idx="1">
+          <a:schemeClr val="accent1"/>
+        </a:lnRef>
+        <a:fillRef idx="3">
+          <a:schemeClr val="accent1"/>
+        </a:fillRef>
+        <a:effectRef idx="2">
+          <a:schemeClr val="accent1"/>
+        </a:effectRef>
+        <a:fontRef idx="minor">
+          <a:schemeClr val="lt1"/>
+        </a:fontRef>
+      </a:style>
+    </a:spDef>
+    <a:lnDef>
+      <a:spPr/>
+      <a:bodyPr/>
+      <a:lstStyle/>
+      <a:style>
+        <a:lnRef idx="2">
+          <a:schemeClr val="accent1"/>
+        </a:lnRef>
+        <a:fillRef idx="0">
+          <a:schemeClr val="accent1"/>
+        </a:fillRef>
+        <a:effectRef idx="1">
+          <a:schemeClr val="accent1"/>
+        </a:effectRef>
+        <a:fontRef idx="minor">
+          <a:schemeClr val="tx1"/>
+        </a:fontRef>
+      </a:style>
+    </a:lnDef>
+  </a:objectDefaults>
+  <a:extraClrSchemeLst/>
+</a:theme>
 </file>
--- a/ground-vehicle/docs/courses/advanced/l5_sensors_and_self_test.pptx
+++ b/ground-vehicle/docs/courses/advanced/l5_sensors_and_self_test.pptx
@@ -11874,7 +11874,7 @@
                 </a:solidFill>
                 <a:latin typeface="Calibri"/>
               </a:rPr>
-              <a:t>Diagnostics, and the battery maths you can now do</a:t>
+              <a:t>Diagnostics, and the battery math you can now do</a:t>
             </a:r>
           </a:p>
         </p:txBody>
@@ -12463,7 +12463,7 @@
               <a:spcAft>
                 <a:spcPts val="0"/>
               </a:spcAft>
-              <a:defRPr sz="2700" b="1">
+              <a:defRPr sz="2800" b="1">
                 <a:solidFill>
                   <a:srgbClr val="1F3A5F"/>
                 </a:solidFill>
@@ -12471,13 +12471,13 @@
               </a:defRPr>
             </a:pPr>
             <a:r>
-              <a:rPr sz="2700" b="1">
+              <a:rPr sz="2800" b="1">
                 <a:solidFill>
                   <a:srgbClr val="1F3A5F"/>
                 </a:solidFill>
                 <a:latin typeface="Calibri"/>
               </a:rPr>
-              <a:t>Diagnostics, and the battery maths you can now do  (continued)</a:t>
+              <a:t>Diagnostics, and the battery math you can now do  (continued)</a:t>
             </a:r>
           </a:p>
         </p:txBody>
@@ -19891,7 +19891,7 @@
                 </a:solidFill>
                 <a:latin typeface="Calibri"/>
               </a:rPr>
-              <a:t>Reading five millivolts accurately is the sensor's entire job. The shunt register reports in units of 10 microvolts, which is where the 0.01 in the maths comes from.</a:t>
+              <a:t>Reading five millivolts accurately is the sensor's entire job. The shunt register reports in units of 10 microvolts, which is where the 0.01 in the math comes from.</a:t>
             </a:r>
           </a:p>
         </p:txBody>

--- a/ground-vehicle/docs/courses/advanced/l5_sensors_and_self_test.pptx
+++ b/ground-vehicle/docs/courses/advanced/l5_sensors_and_self_test.pptx
@@ -8029,7 +8029,7 @@
         <p:spPr>
           <a:xfrm>
             <a:off x="502920" y="1901952"/>
-            <a:ext cx="5387187" cy="4361688"/>
+            <a:ext cx="6249137" cy="4361688"/>
           </a:xfrm>
           <a:prstGeom prst="rect">
             <a:avLst/>
@@ -8126,8 +8126,8 @@
         </p:nvSpPr>
         <p:spPr>
           <a:xfrm>
-            <a:off x="6301587" y="1901952"/>
-            <a:ext cx="5387187" cy="365760"/>
+            <a:off x="7163537" y="1901952"/>
+            <a:ext cx="4525238" cy="365760"/>
           </a:xfrm>
           <a:prstGeom prst="rect">
             <a:avLst/>
@@ -8174,8 +8174,8 @@
         </p:nvSpPr>
         <p:spPr>
           <a:xfrm>
-            <a:off x="6301587" y="2304288"/>
-            <a:ext cx="5387187" cy="1778508"/>
+            <a:off x="7163537" y="2304288"/>
+            <a:ext cx="4525238" cy="1903830"/>
           </a:xfrm>
           <a:prstGeom prst="rect">
             <a:avLst/>
@@ -8195,15 +8195,15 @@
               <a:spcAft>
                 <a:spcPts val="300"/>
               </a:spcAft>
-              <a:defRPr sz="2400" b="0">
-                <a:solidFill>
-                  <a:srgbClr val="222222"/>
-                </a:solidFill>
-                <a:latin typeface="Calibri"/>
-              </a:defRPr>
-            </a:pPr>
-            <a:r>
-              <a:rPr sz="2400" b="0">
+              <a:defRPr sz="2300" b="0">
+                <a:solidFill>
+                  <a:srgbClr val="222222"/>
+                </a:solidFill>
+                <a:latin typeface="Calibri"/>
+              </a:defRPr>
+            </a:pPr>
+            <a:r>
+              <a:rPr sz="2300" b="0">
                 <a:solidFill>
                   <a:srgbClr val="222222"/>
                 </a:solidFill>
@@ -8222,8 +8222,8 @@
         </p:nvSpPr>
         <p:spPr>
           <a:xfrm>
-            <a:off x="6301587" y="4119372"/>
-            <a:ext cx="5387187" cy="365760"/>
+            <a:off x="7163537" y="4281270"/>
+            <a:ext cx="4525238" cy="365760"/>
           </a:xfrm>
           <a:prstGeom prst="rect">
             <a:avLst/>
@@ -8270,8 +8270,8 @@
         </p:nvSpPr>
         <p:spPr>
           <a:xfrm>
-            <a:off x="6301587" y="4521708"/>
-            <a:ext cx="5387187" cy="1778508"/>
+            <a:off x="7163537" y="4683606"/>
+            <a:ext cx="4525238" cy="1580033"/>
           </a:xfrm>
           <a:prstGeom prst="rect">
             <a:avLst/>
@@ -8291,15 +8291,15 @@
               <a:spcAft>
                 <a:spcPts val="300"/>
               </a:spcAft>
-              <a:defRPr sz="2600" b="0">
-                <a:solidFill>
-                  <a:srgbClr val="222222"/>
-                </a:solidFill>
-                <a:latin typeface="Calibri"/>
-              </a:defRPr>
-            </a:pPr>
-            <a:r>
-              <a:rPr sz="2600" b="0">
+              <a:defRPr sz="2300" b="0">
+                <a:solidFill>
+                  <a:srgbClr val="222222"/>
+                </a:solidFill>
+                <a:latin typeface="Calibri"/>
+              </a:defRPr>
+            </a:pPr>
+            <a:r>
+              <a:rPr sz="2300" b="0">
                 <a:solidFill>
                   <a:srgbClr val="222222"/>
                 </a:solidFill>
@@ -8316,15 +8316,15 @@
               <a:spcAft>
                 <a:spcPts val="300"/>
               </a:spcAft>
-              <a:defRPr sz="2600" b="0">
-                <a:solidFill>
-                  <a:srgbClr val="222222"/>
-                </a:solidFill>
-                <a:latin typeface="Calibri"/>
-              </a:defRPr>
-            </a:pPr>
-            <a:r>
-              <a:rPr sz="2600" b="0">
+              <a:defRPr sz="2300" b="0">
+                <a:solidFill>
+                  <a:srgbClr val="222222"/>
+                </a:solidFill>
+                <a:latin typeface="Calibri"/>
+              </a:defRPr>
+            </a:pPr>
+            <a:r>
+              <a:rPr sz="2300" b="0">
                 <a:solidFill>
                   <a:srgbClr val="222222"/>
                 </a:solidFill>
@@ -8612,7 +8612,7 @@
         <p:spPr>
           <a:xfrm>
             <a:off x="502920" y="1901952"/>
-            <a:ext cx="11185855" cy="3172968"/>
+            <a:ext cx="11185855" cy="3273552"/>
           </a:xfrm>
           <a:prstGeom prst="rect">
             <a:avLst/>
@@ -19010,7 +19010,7 @@
         <p:spPr>
           <a:xfrm>
             <a:off x="502920" y="1901952"/>
-            <a:ext cx="5387187" cy="4361688"/>
+            <a:ext cx="6249137" cy="4361688"/>
           </a:xfrm>
           <a:prstGeom prst="rect">
             <a:avLst/>
@@ -19030,15 +19030,15 @@
               <a:spcAft>
                 <a:spcPts val="800"/>
               </a:spcAft>
-              <a:defRPr sz="1800" b="0">
-                <a:solidFill>
-                  <a:srgbClr val="222222"/>
-                </a:solidFill>
-                <a:latin typeface="Calibri"/>
-              </a:defRPr>
-            </a:pPr>
-            <a:r>
-              <a:rPr sz="1800" b="0">
+              <a:defRPr sz="1900" b="0">
+                <a:solidFill>
+                  <a:srgbClr val="222222"/>
+                </a:solidFill>
+                <a:latin typeface="Calibri"/>
+              </a:defRPr>
+            </a:pPr>
+            <a:r>
+              <a:rPr sz="1900" b="0">
                 <a:solidFill>
                   <a:srgbClr val="222222"/>
                 </a:solidFill>
@@ -19055,15 +19055,15 @@
               <a:spcAft>
                 <a:spcPts val="800"/>
               </a:spcAft>
-              <a:defRPr sz="1800" b="0">
-                <a:solidFill>
-                  <a:srgbClr val="222222"/>
-                </a:solidFill>
-                <a:latin typeface="Calibri"/>
-              </a:defRPr>
-            </a:pPr>
-            <a:r>
-              <a:rPr sz="1800" b="0">
+              <a:defRPr sz="1900" b="0">
+                <a:solidFill>
+                  <a:srgbClr val="222222"/>
+                </a:solidFill>
+                <a:latin typeface="Calibri"/>
+              </a:defRPr>
+            </a:pPr>
+            <a:r>
+              <a:rPr sz="1900" b="0">
                 <a:solidFill>
                   <a:srgbClr val="222222"/>
                 </a:solidFill>
@@ -19080,15 +19080,15 @@
               <a:spcAft>
                 <a:spcPts val="800"/>
               </a:spcAft>
-              <a:defRPr sz="1800" b="0">
-                <a:solidFill>
-                  <a:srgbClr val="222222"/>
-                </a:solidFill>
-                <a:latin typeface="Calibri"/>
-              </a:defRPr>
-            </a:pPr>
-            <a:r>
-              <a:rPr sz="1800" b="0">
+              <a:defRPr sz="1900" b="0">
+                <a:solidFill>
+                  <a:srgbClr val="222222"/>
+                </a:solidFill>
+                <a:latin typeface="Calibri"/>
+              </a:defRPr>
+            </a:pPr>
+            <a:r>
+              <a:rPr sz="1900" b="0">
                 <a:solidFill>
                   <a:srgbClr val="222222"/>
                 </a:solidFill>
@@ -19105,15 +19105,15 @@
               <a:spcAft>
                 <a:spcPts val="800"/>
               </a:spcAft>
-              <a:defRPr sz="1800" b="0">
-                <a:solidFill>
-                  <a:srgbClr val="222222"/>
-                </a:solidFill>
-                <a:latin typeface="Calibri"/>
-              </a:defRPr>
-            </a:pPr>
-            <a:r>
-              <a:rPr sz="1800" b="0">
+              <a:defRPr sz="1900" b="0">
+                <a:solidFill>
+                  <a:srgbClr val="222222"/>
+                </a:solidFill>
+                <a:latin typeface="Calibri"/>
+              </a:defRPr>
+            </a:pPr>
+            <a:r>
+              <a:rPr sz="1900" b="0">
                 <a:solidFill>
                   <a:srgbClr val="222222"/>
                 </a:solidFill>
@@ -19130,15 +19130,15 @@
               <a:spcAft>
                 <a:spcPts val="800"/>
               </a:spcAft>
-              <a:defRPr sz="1800" b="0">
-                <a:solidFill>
-                  <a:srgbClr val="222222"/>
-                </a:solidFill>
-                <a:latin typeface="Calibri"/>
-              </a:defRPr>
-            </a:pPr>
-            <a:r>
-              <a:rPr sz="1800" b="0">
+              <a:defRPr sz="1900" b="0">
+                <a:solidFill>
+                  <a:srgbClr val="222222"/>
+                </a:solidFill>
+                <a:latin typeface="Calibri"/>
+              </a:defRPr>
+            </a:pPr>
+            <a:r>
+              <a:rPr sz="1900" b="0">
                 <a:solidFill>
                   <a:srgbClr val="222222"/>
                 </a:solidFill>
@@ -19155,15 +19155,15 @@
               <a:spcAft>
                 <a:spcPts val="800"/>
               </a:spcAft>
-              <a:defRPr sz="1800" b="0">
-                <a:solidFill>
-                  <a:srgbClr val="222222"/>
-                </a:solidFill>
-                <a:latin typeface="Calibri"/>
-              </a:defRPr>
-            </a:pPr>
-            <a:r>
-              <a:rPr sz="1800" b="0">
+              <a:defRPr sz="1900" b="0">
+                <a:solidFill>
+                  <a:srgbClr val="222222"/>
+                </a:solidFill>
+                <a:latin typeface="Calibri"/>
+              </a:defRPr>
+            </a:pPr>
+            <a:r>
+              <a:rPr sz="1900" b="0">
                 <a:solidFill>
                   <a:srgbClr val="222222"/>
                 </a:solidFill>
@@ -19182,8 +19182,8 @@
         </p:nvSpPr>
         <p:spPr>
           <a:xfrm>
-            <a:off x="6301587" y="1901952"/>
-            <a:ext cx="5387187" cy="365760"/>
+            <a:off x="7163537" y="1901952"/>
+            <a:ext cx="4525238" cy="365760"/>
           </a:xfrm>
           <a:prstGeom prst="rect">
             <a:avLst/>
@@ -19230,8 +19230,8 @@
         </p:nvSpPr>
         <p:spPr>
           <a:xfrm>
-            <a:off x="6301587" y="2304288"/>
-            <a:ext cx="5387187" cy="1778508"/>
+            <a:off x="7163537" y="2304288"/>
+            <a:ext cx="4525238" cy="1741932"/>
           </a:xfrm>
           <a:prstGeom prst="rect">
             <a:avLst/>
@@ -19249,17 +19249,17 @@
                 <a:spcPct val="100000"/>
               </a:lnSpc>
               <a:spcAft>
-                <a:spcPts val="600"/>
-              </a:spcAft>
-              <a:defRPr sz="2800" b="0">
-                <a:solidFill>
-                  <a:srgbClr val="222222"/>
-                </a:solidFill>
-                <a:latin typeface="Calibri"/>
-              </a:defRPr>
-            </a:pPr>
-            <a:r>
-              <a:rPr sz="2800" b="0">
+                <a:spcPts val="300"/>
+              </a:spcAft>
+              <a:defRPr sz="2600" b="0">
+                <a:solidFill>
+                  <a:srgbClr val="222222"/>
+                </a:solidFill>
+                <a:latin typeface="Calibri"/>
+              </a:defRPr>
+            </a:pPr>
+            <a:r>
+              <a:rPr sz="2600" b="0">
                 <a:solidFill>
                   <a:srgbClr val="222222"/>
                 </a:solidFill>
@@ -19278,8 +19278,8 @@
         </p:nvSpPr>
         <p:spPr>
           <a:xfrm>
-            <a:off x="6301587" y="4119372"/>
-            <a:ext cx="5387187" cy="365760"/>
+            <a:off x="7163537" y="4119372"/>
+            <a:ext cx="4525238" cy="365760"/>
           </a:xfrm>
           <a:prstGeom prst="rect">
             <a:avLst/>
@@ -19326,8 +19326,8 @@
         </p:nvSpPr>
         <p:spPr>
           <a:xfrm>
-            <a:off x="6301587" y="4521708"/>
-            <a:ext cx="5387187" cy="1778508"/>
+            <a:off x="7163537" y="4521708"/>
+            <a:ext cx="4525238" cy="1741932"/>
           </a:xfrm>
           <a:prstGeom prst="rect">
             <a:avLst/>

--- a/ground-vehicle/docs/courses/advanced/l5_sensors_and_self_test.pptx
+++ b/ground-vehicle/docs/courses/advanced/l5_sensors_and_self_test.pptx
@@ -6143,6 +6143,22 @@
               <a:spcAft>
                 <a:spcPts val="100"/>
               </a:spcAft>
+              <a:defRPr sz="600" b="0">
+                <a:solidFill>
+                  <a:srgbClr val="666666"/>
+                </a:solidFill>
+                <a:latin typeface="Calibri"/>
+              </a:defRPr>
+            </a:pPr>
+          </a:p>
+          <a:p>
+            <a:pPr algn="l">
+              <a:lnSpc>
+                <a:spcPct val="100000"/>
+              </a:lnSpc>
+              <a:spcAft>
+                <a:spcPts val="100"/>
+              </a:spcAft>
               <a:defRPr sz="1200" b="0">
                 <a:solidFill>
                   <a:srgbClr val="666666"/>
@@ -6150,6 +6166,15 @@
                 <a:latin typeface="Calibri"/>
               </a:defRPr>
             </a:pPr>
+            <a:r>
+              <a:rPr sz="1200" b="0">
+                <a:solidFill>
+                  <a:srgbClr val="666666"/>
+                </a:solidFill>
+                <a:latin typeface="Calibri"/>
+              </a:rPr>
+              <a:t>Kevin Bowen, President  -  kbowen6@icloud.com</a:t>
+            </a:r>
           </a:p>
           <a:p>
             <a:pPr algn="l">
@@ -6173,7 +6198,7 @@
                 </a:solidFill>
                 <a:latin typeface="Calibri"/>
               </a:rPr>
-              <a:t>Kevin Bowen, President  -  kbowen6@icloud.com</a:t>
+              <a:t>Malcom Graham, VP Education      Louis Parker, VP Technology</a:t>
             </a:r>
           </a:p>
           <a:p>
@@ -6198,7 +6223,7 @@
                 </a:solidFill>
                 <a:latin typeface="Calibri"/>
               </a:rPr>
-              <a:t>Malcom Graham, VP Education      Louis Parker, VP Technology</a:t>
+              <a:t>Valen Farre, System Engineer      Gary Howland, Animation</a:t>
             </a:r>
           </a:p>
           <a:p>
@@ -6223,7 +6248,7 @@
                 </a:solidFill>
                 <a:latin typeface="Calibri"/>
               </a:rPr>
-              <a:t>Valen Farre, System Engineer      Gary Howland, Animation</a:t>
+              <a:t>Eddie Revollo, Artificial Intelligence</a:t>
             </a:r>
           </a:p>
           <a:p>
@@ -6248,7 +6273,7 @@
                 </a:solidFill>
                 <a:latin typeface="Calibri"/>
               </a:rPr>
-              <a:t>Eddie Revollo, Artificial Intelligence</a:t>
+              <a:t>Interns: Oscar Canazales, Krishnansh Vemulapalli, Soham Gangal, Erik Olsen</a:t>
             </a:r>
           </a:p>
           <a:p>
@@ -6259,32 +6284,7 @@
               <a:spcAft>
                 <a:spcPts val="100"/>
               </a:spcAft>
-              <a:defRPr sz="1200" b="0">
-                <a:solidFill>
-                  <a:srgbClr val="666666"/>
-                </a:solidFill>
-                <a:latin typeface="Calibri"/>
-              </a:defRPr>
-            </a:pPr>
-            <a:r>
-              <a:rPr sz="1200" b="0">
-                <a:solidFill>
-                  <a:srgbClr val="666666"/>
-                </a:solidFill>
-                <a:latin typeface="Calibri"/>
-              </a:rPr>
-              <a:t>Interns: Oscar Canazales, Krishnansh Vemulapalli, Soham Gangal, Erik Olsen</a:t>
-            </a:r>
-          </a:p>
-          <a:p>
-            <a:pPr algn="l">
-              <a:lnSpc>
-                <a:spcPct val="100000"/>
-              </a:lnSpc>
-              <a:spcAft>
-                <a:spcPts val="100"/>
-              </a:spcAft>
-              <a:defRPr sz="1200" b="0">
+              <a:defRPr sz="600" b="0">
                 <a:solidFill>
                   <a:srgbClr val="666666"/>
                 </a:solidFill>
@@ -9511,7 +9511,7 @@
               <a:spcAft>
                 <a:spcPts val="600"/>
               </a:spcAft>
-              <a:defRPr sz="800" b="0">
+              <a:defRPr sz="400" b="0">
                 <a:solidFill>
                   <a:srgbClr val="222222"/>
                 </a:solidFill>
@@ -9971,7 +9971,7 @@
               <a:spcAft>
                 <a:spcPts val="600"/>
               </a:spcAft>
-              <a:defRPr sz="800" b="0">
+              <a:defRPr sz="400" b="0">
                 <a:solidFill>
                   <a:srgbClr val="222222"/>
                 </a:solidFill>
@@ -10406,7 +10406,7 @@
               <a:spcAft>
                 <a:spcPts val="600"/>
               </a:spcAft>
-              <a:defRPr sz="800" b="0">
+              <a:defRPr sz="400" b="0">
                 <a:solidFill>
                   <a:srgbClr val="222222"/>
                 </a:solidFill>
@@ -11305,7 +11305,7 @@
               <a:spcAft>
                 <a:spcPts val="900"/>
               </a:spcAft>
-              <a:defRPr sz="2900" b="0">
+              <a:defRPr sz="1450" b="0">
                 <a:solidFill>
                   <a:srgbClr val="222222"/>
                 </a:solidFill>
@@ -11673,6 +11673,22 @@
               <a:spcAft>
                 <a:spcPts val="600"/>
               </a:spcAft>
+              <a:defRPr sz="1350" b="0">
+                <a:solidFill>
+                  <a:srgbClr val="222222"/>
+                </a:solidFill>
+                <a:latin typeface="Calibri"/>
+              </a:defRPr>
+            </a:pPr>
+          </a:p>
+          <a:p>
+            <a:pPr algn="l">
+              <a:lnSpc>
+                <a:spcPct val="100000"/>
+              </a:lnSpc>
+              <a:spcAft>
+                <a:spcPts val="600"/>
+              </a:spcAft>
               <a:defRPr sz="2700" b="0">
                 <a:solidFill>
                   <a:srgbClr val="222222"/>
@@ -11680,6 +11696,15 @@
                 <a:latin typeface="Calibri"/>
               </a:defRPr>
             </a:pPr>
+            <a:r>
+              <a:rPr sz="2700" b="0">
+                <a:solidFill>
+                  <a:srgbClr val="222222"/>
+                </a:solidFill>
+                <a:latin typeface="Calibri"/>
+              </a:rPr>
+              <a:t>It is a state machine driven from loop(), not a blocking routine. So the LEDs keep animating and the serial console keeps responding throughout - and any button press clears the result screen.</a:t>
+            </a:r>
           </a:p>
           <a:p>
             <a:pPr algn="l">
@@ -11689,32 +11714,7 @@
               <a:spcAft>
                 <a:spcPts val="600"/>
               </a:spcAft>
-              <a:defRPr sz="2700" b="0">
-                <a:solidFill>
-                  <a:srgbClr val="222222"/>
-                </a:solidFill>
-                <a:latin typeface="Calibri"/>
-              </a:defRPr>
-            </a:pPr>
-            <a:r>
-              <a:rPr sz="2700" b="0">
-                <a:solidFill>
-                  <a:srgbClr val="222222"/>
-                </a:solidFill>
-                <a:latin typeface="Calibri"/>
-              </a:rPr>
-              <a:t>It is a state machine driven from loop(), not a blocking routine. So the LEDs keep animating and the serial console keeps responding throughout - and any button press clears the result screen.</a:t>
-            </a:r>
-          </a:p>
-          <a:p>
-            <a:pPr algn="l">
-              <a:lnSpc>
-                <a:spcPct val="100000"/>
-              </a:lnSpc>
-              <a:spcAft>
-                <a:spcPts val="600"/>
-              </a:spcAft>
-              <a:defRPr sz="2700" b="0">
+              <a:defRPr sz="1350" b="0">
                 <a:solidFill>
                   <a:srgbClr val="222222"/>
                 </a:solidFill>
@@ -12317,6 +12317,22 @@
               <a:spcAft>
                 <a:spcPts val="800"/>
               </a:spcAft>
+              <a:defRPr sz="900" b="0">
+                <a:solidFill>
+                  <a:srgbClr val="222222"/>
+                </a:solidFill>
+                <a:latin typeface="Calibri"/>
+              </a:defRPr>
+            </a:pPr>
+          </a:p>
+          <a:p>
+            <a:pPr lvl="1" algn="l">
+              <a:lnSpc>
+                <a:spcPct val="100000"/>
+              </a:lnSpc>
+              <a:spcAft>
+                <a:spcPts val="800"/>
+              </a:spcAft>
               <a:defRPr sz="1800" b="0">
                 <a:solidFill>
                   <a:srgbClr val="222222"/>
@@ -12324,6 +12340,56 @@
                 <a:latin typeface="Calibri"/>
               </a:defRPr>
             </a:pPr>
+            <a:r>
+              <a:rPr sz="1800" b="0">
+                <a:solidFill>
+                  <a:srgbClr val="222222"/>
+                </a:solidFill>
+                <a:latin typeface="Calibri"/>
+              </a:rPr>
+              <a:t>runtime (hours) = 3.3 / average current in amps</a:t>
+            </a:r>
+          </a:p>
+          <a:p>
+            <a:pPr algn="l">
+              <a:lnSpc>
+                <a:spcPct val="100000"/>
+              </a:lnSpc>
+              <a:spcAft>
+                <a:spcPts val="800"/>
+              </a:spcAft>
+              <a:defRPr sz="900" b="0">
+                <a:solidFill>
+                  <a:srgbClr val="222222"/>
+                </a:solidFill>
+                <a:latin typeface="Calibri"/>
+              </a:defRPr>
+            </a:pPr>
+          </a:p>
+          <a:p>
+            <a:pPr algn="l">
+              <a:lnSpc>
+                <a:spcPct val="100000"/>
+              </a:lnSpc>
+              <a:spcAft>
+                <a:spcPts val="800"/>
+              </a:spcAft>
+              <a:defRPr sz="1800" b="0">
+                <a:solidFill>
+                  <a:srgbClr val="222222"/>
+                </a:solidFill>
+                <a:latin typeface="Calibri"/>
+              </a:defRPr>
+            </a:pPr>
+            <a:r>
+              <a:rPr sz="1800" b="0">
+                <a:solidFill>
+                  <a:srgbClr val="222222"/>
+                </a:solidFill>
+                <a:latin typeface="Calibri"/>
+              </a:rPr>
+              <a:t>So at a measured 2.0 A average:</a:t>
+            </a:r>
           </a:p>
           <a:p>
             <a:pPr lvl="1" algn="l">
@@ -12347,7 +12413,7 @@
                 </a:solidFill>
                 <a:latin typeface="Calibri"/>
               </a:rPr>
-              <a:t>runtime (hours) = 3.3 / average current in amps</a:t>
+              <a:t>3.3 / 2.0 = 1.65 hours, about 99 minutes</a:t>
             </a:r>
           </a:p>
           <a:p>
@@ -12358,6 +12424,22 @@
               <a:spcAft>
                 <a:spcPts val="800"/>
               </a:spcAft>
+              <a:defRPr sz="900" b="0">
+                <a:solidFill>
+                  <a:srgbClr val="222222"/>
+                </a:solidFill>
+                <a:latin typeface="Calibri"/>
+              </a:defRPr>
+            </a:pPr>
+          </a:p>
+          <a:p>
+            <a:pPr algn="l">
+              <a:lnSpc>
+                <a:spcPct val="100000"/>
+              </a:lnSpc>
+              <a:spcAft>
+                <a:spcPts val="800"/>
+              </a:spcAft>
               <a:defRPr sz="1800" b="0">
                 <a:solidFill>
                   <a:srgbClr val="222222"/>
@@ -12365,9 +12447,18 @@
                 <a:latin typeface="Calibri"/>
               </a:defRPr>
             </a:pPr>
-          </a:p>
-          <a:p>
-            <a:pPr algn="l">
+            <a:r>
+              <a:rPr sz="1800" b="0">
+                <a:solidFill>
+                  <a:srgbClr val="222222"/>
+                </a:solidFill>
+                <a:latin typeface="Calibri"/>
+              </a:rPr>
+              <a:t>At 6.0 A of hard driving:</a:t>
+            </a:r>
+          </a:p>
+          <a:p>
+            <a:pPr lvl="1" algn="l">
               <a:lnSpc>
                 <a:spcPct val="100000"/>
               </a:lnSpc>
@@ -12388,32 +12479,7 @@
                 </a:solidFill>
                 <a:latin typeface="Calibri"/>
               </a:rPr>
-              <a:t>So at a measured 2.0 A average:</a:t>
-            </a:r>
-          </a:p>
-          <a:p>
-            <a:pPr lvl="1" algn="l">
-              <a:lnSpc>
-                <a:spcPct val="100000"/>
-              </a:lnSpc>
-              <a:spcAft>
-                <a:spcPts val="800"/>
-              </a:spcAft>
-              <a:defRPr sz="1800" b="0">
-                <a:solidFill>
-                  <a:srgbClr val="222222"/>
-                </a:solidFill>
-                <a:latin typeface="Calibri"/>
-              </a:defRPr>
-            </a:pPr>
-            <a:r>
-              <a:rPr sz="1800" b="0">
-                <a:solidFill>
-                  <a:srgbClr val="222222"/>
-                </a:solidFill>
-                <a:latin typeface="Calibri"/>
-              </a:rPr>
-              <a:t>3.3 / 2.0 = 1.65 hours, about 99 minutes</a:t>
+              <a:t>3.3 / 6.0 = 0.55 hours, about 33 minutes</a:t>
             </a:r>
           </a:p>
         </p:txBody>
@@ -12724,7 +12790,7 @@
               <a:spcAft>
                 <a:spcPts val="800"/>
               </a:spcAft>
-              <a:defRPr sz="1800" b="0">
+              <a:defRPr sz="900" b="0">
                 <a:solidFill>
                   <a:srgbClr val="222222"/>
                 </a:solidFill>
@@ -12836,6 +12902,22 @@
               <a:spcAft>
                 <a:spcPts val="800"/>
               </a:spcAft>
+              <a:defRPr sz="900" b="0">
+                <a:solidFill>
+                  <a:srgbClr val="222222"/>
+                </a:solidFill>
+                <a:latin typeface="Calibri"/>
+              </a:defRPr>
+            </a:pPr>
+          </a:p>
+          <a:p>
+            <a:pPr algn="l">
+              <a:lnSpc>
+                <a:spcPct val="100000"/>
+              </a:lnSpc>
+              <a:spcAft>
+                <a:spcPts val="800"/>
+              </a:spcAft>
               <a:defRPr sz="1800" b="0">
                 <a:solidFill>
                   <a:srgbClr val="222222"/>
@@ -12850,84 +12932,18 @@
                 </a:solidFill>
                 <a:latin typeface="Calibri"/>
               </a:rPr>
-              <a:t>At 6.0 A of hard driving:</a:t>
-            </a:r>
-          </a:p>
-          <a:p>
-            <a:pPr lvl="1" algn="l">
+              <a:t>Now add the LEDs. 32 pixels at full white is nearly 2 A on its own - and that is a constant drain whether you are moving or not.</a:t>
+            </a:r>
+          </a:p>
+          <a:p>
+            <a:pPr algn="l">
               <a:lnSpc>
                 <a:spcPct val="100000"/>
               </a:lnSpc>
               <a:spcAft>
                 <a:spcPts val="800"/>
               </a:spcAft>
-              <a:defRPr sz="1800" b="0">
-                <a:solidFill>
-                  <a:srgbClr val="222222"/>
-                </a:solidFill>
-                <a:latin typeface="Calibri"/>
-              </a:defRPr>
-            </a:pPr>
-            <a:r>
-              <a:rPr sz="1800" b="0">
-                <a:solidFill>
-                  <a:srgbClr val="222222"/>
-                </a:solidFill>
-                <a:latin typeface="Calibri"/>
-              </a:rPr>
-              <a:t>3.3 / 6.0 = 0.55 hours, about 33 minutes</a:t>
-            </a:r>
-          </a:p>
-          <a:p>
-            <a:pPr algn="l">
-              <a:lnSpc>
-                <a:spcPct val="100000"/>
-              </a:lnSpc>
-              <a:spcAft>
-                <a:spcPts val="800"/>
-              </a:spcAft>
-              <a:defRPr sz="1800" b="0">
-                <a:solidFill>
-                  <a:srgbClr val="222222"/>
-                </a:solidFill>
-                <a:latin typeface="Calibri"/>
-              </a:defRPr>
-            </a:pPr>
-          </a:p>
-          <a:p>
-            <a:pPr algn="l">
-              <a:lnSpc>
-                <a:spcPct val="100000"/>
-              </a:lnSpc>
-              <a:spcAft>
-                <a:spcPts val="800"/>
-              </a:spcAft>
-              <a:defRPr sz="1800" b="0">
-                <a:solidFill>
-                  <a:srgbClr val="222222"/>
-                </a:solidFill>
-                <a:latin typeface="Calibri"/>
-              </a:defRPr>
-            </a:pPr>
-            <a:r>
-              <a:rPr sz="1800" b="0">
-                <a:solidFill>
-                  <a:srgbClr val="222222"/>
-                </a:solidFill>
-                <a:latin typeface="Calibri"/>
-              </a:rPr>
-              <a:t>Now add the LEDs. 32 pixels at full white is nearly 2 A on its own - and that is a constant drain whether you are moving or not.</a:t>
-            </a:r>
-          </a:p>
-          <a:p>
-            <a:pPr algn="l">
-              <a:lnSpc>
-                <a:spcPct val="100000"/>
-              </a:lnSpc>
-              <a:spcAft>
-                <a:spcPts val="800"/>
-              </a:spcAft>
-              <a:defRPr sz="1800" b="0">
+              <a:defRPr sz="900" b="0">
                 <a:solidFill>
                   <a:srgbClr val="222222"/>
                 </a:solidFill>
@@ -13734,15 +13750,15 @@
               <a:spcAft>
                 <a:spcPts val="900"/>
               </a:spcAft>
-              <a:defRPr sz="1900" b="0">
-                <a:solidFill>
-                  <a:srgbClr val="222222"/>
-                </a:solidFill>
-                <a:latin typeface="Calibri"/>
-              </a:defRPr>
-            </a:pPr>
-            <a:r>
-              <a:rPr sz="1900" b="0">
+              <a:defRPr sz="2000" b="0">
+                <a:solidFill>
+                  <a:srgbClr val="222222"/>
+                </a:solidFill>
+                <a:latin typeface="Calibri"/>
+              </a:defRPr>
+            </a:pPr>
+            <a:r>
+              <a:rPr sz="2000" b="0">
                 <a:solidFill>
                   <a:srgbClr val="222222"/>
                 </a:solidFill>
@@ -13759,7 +13775,7 @@
               <a:spcAft>
                 <a:spcPts val="900"/>
               </a:spcAft>
-              <a:defRPr sz="1900" b="0">
+              <a:defRPr sz="1000" b="0">
                 <a:solidFill>
                   <a:srgbClr val="222222"/>
                 </a:solidFill>
@@ -13775,15 +13791,15 @@
               <a:spcAft>
                 <a:spcPts val="900"/>
               </a:spcAft>
-              <a:defRPr sz="1900" b="0">
-                <a:solidFill>
-                  <a:srgbClr val="222222"/>
-                </a:solidFill>
-                <a:latin typeface="Calibri"/>
-              </a:defRPr>
-            </a:pPr>
-            <a:r>
-              <a:rPr sz="1900" b="0">
+              <a:defRPr sz="2000" b="0">
+                <a:solidFill>
+                  <a:srgbClr val="222222"/>
+                </a:solidFill>
+                <a:latin typeface="Calibri"/>
+              </a:defRPr>
+            </a:pPr>
+            <a:r>
+              <a:rPr sz="2000" b="0">
                 <a:solidFill>
                   <a:srgbClr val="222222"/>
                 </a:solidFill>
@@ -13800,15 +13816,15 @@
               <a:spcAft>
                 <a:spcPts val="900"/>
               </a:spcAft>
-              <a:defRPr sz="1900" b="0">
-                <a:solidFill>
-                  <a:srgbClr val="222222"/>
-                </a:solidFill>
-                <a:latin typeface="Calibri"/>
-              </a:defRPr>
-            </a:pPr>
-            <a:r>
-              <a:rPr sz="1900" b="0">
+              <a:defRPr sz="2000" b="0">
+                <a:solidFill>
+                  <a:srgbClr val="222222"/>
+                </a:solidFill>
+                <a:latin typeface="Calibri"/>
+              </a:defRPr>
+            </a:pPr>
+            <a:r>
+              <a:rPr sz="2000" b="0">
                 <a:solidFill>
                   <a:srgbClr val="222222"/>
                 </a:solidFill>
@@ -13825,15 +13841,15 @@
               <a:spcAft>
                 <a:spcPts val="900"/>
               </a:spcAft>
-              <a:defRPr sz="1900" b="0">
-                <a:solidFill>
-                  <a:srgbClr val="222222"/>
-                </a:solidFill>
-                <a:latin typeface="Calibri"/>
-              </a:defRPr>
-            </a:pPr>
-            <a:r>
-              <a:rPr sz="1900" b="0">
+              <a:defRPr sz="2000" b="0">
+                <a:solidFill>
+                  <a:srgbClr val="222222"/>
+                </a:solidFill>
+                <a:latin typeface="Calibri"/>
+              </a:defRPr>
+            </a:pPr>
+            <a:r>
+              <a:rPr sz="2000" b="0">
                 <a:solidFill>
                   <a:srgbClr val="222222"/>
                 </a:solidFill>
@@ -13873,15 +13889,15 @@
               <a:spcAft>
                 <a:spcPts val="900"/>
               </a:spcAft>
-              <a:defRPr sz="1800" b="0">
-                <a:solidFill>
-                  <a:srgbClr val="222222"/>
-                </a:solidFill>
-                <a:latin typeface="Calibri"/>
-              </a:defRPr>
-            </a:pPr>
-            <a:r>
-              <a:rPr sz="1800" b="0">
+              <a:defRPr sz="1900" b="0">
+                <a:solidFill>
+                  <a:srgbClr val="222222"/>
+                </a:solidFill>
+                <a:latin typeface="Calibri"/>
+              </a:defRPr>
+            </a:pPr>
+            <a:r>
+              <a:rPr sz="1900" b="0">
                 <a:solidFill>
                   <a:srgbClr val="222222"/>
                 </a:solidFill>
@@ -13898,15 +13914,15 @@
               <a:spcAft>
                 <a:spcPts val="900"/>
               </a:spcAft>
-              <a:defRPr sz="1800" b="0">
-                <a:solidFill>
-                  <a:srgbClr val="222222"/>
-                </a:solidFill>
-                <a:latin typeface="Calibri"/>
-              </a:defRPr>
-            </a:pPr>
-            <a:r>
-              <a:rPr sz="1800" b="0">
+              <a:defRPr sz="1900" b="0">
+                <a:solidFill>
+                  <a:srgbClr val="222222"/>
+                </a:solidFill>
+                <a:latin typeface="Calibri"/>
+              </a:defRPr>
+            </a:pPr>
+            <a:r>
+              <a:rPr sz="1900" b="0">
                 <a:solidFill>
                   <a:srgbClr val="222222"/>
                 </a:solidFill>
@@ -13923,15 +13939,15 @@
               <a:spcAft>
                 <a:spcPts val="900"/>
               </a:spcAft>
-              <a:defRPr sz="1800" b="0">
-                <a:solidFill>
-                  <a:srgbClr val="222222"/>
-                </a:solidFill>
-                <a:latin typeface="Calibri"/>
-              </a:defRPr>
-            </a:pPr>
-            <a:r>
-              <a:rPr sz="1800" b="0">
+              <a:defRPr sz="1900" b="0">
+                <a:solidFill>
+                  <a:srgbClr val="222222"/>
+                </a:solidFill>
+                <a:latin typeface="Calibri"/>
+              </a:defRPr>
+            </a:pPr>
+            <a:r>
+              <a:rPr sz="1900" b="0">
                 <a:solidFill>
                   <a:srgbClr val="222222"/>
                 </a:solidFill>
@@ -13948,15 +13964,15 @@
               <a:spcAft>
                 <a:spcPts val="900"/>
               </a:spcAft>
-              <a:defRPr sz="1800" b="0">
-                <a:solidFill>
-                  <a:srgbClr val="222222"/>
-                </a:solidFill>
-                <a:latin typeface="Calibri"/>
-              </a:defRPr>
-            </a:pPr>
-            <a:r>
-              <a:rPr sz="1800" b="0">
+              <a:defRPr sz="1900" b="0">
+                <a:solidFill>
+                  <a:srgbClr val="222222"/>
+                </a:solidFill>
+                <a:latin typeface="Calibri"/>
+              </a:defRPr>
+            </a:pPr>
+            <a:r>
+              <a:rPr sz="1900" b="0">
                 <a:solidFill>
                   <a:srgbClr val="222222"/>
                 </a:solidFill>
@@ -13973,7 +13989,7 @@
               <a:spcAft>
                 <a:spcPts val="900"/>
               </a:spcAft>
-              <a:defRPr sz="1800" b="0">
+              <a:defRPr sz="950" b="0">
                 <a:solidFill>
                   <a:srgbClr val="222222"/>
                 </a:solidFill>
@@ -13989,15 +14005,15 @@
               <a:spcAft>
                 <a:spcPts val="900"/>
               </a:spcAft>
-              <a:defRPr sz="1800" b="0">
-                <a:solidFill>
-                  <a:srgbClr val="222222"/>
-                </a:solidFill>
-                <a:latin typeface="Calibri"/>
-              </a:defRPr>
-            </a:pPr>
-            <a:r>
-              <a:rPr sz="1800" b="0">
+              <a:defRPr sz="1900" b="0">
+                <a:solidFill>
+                  <a:srgbClr val="222222"/>
+                </a:solidFill>
+                <a:latin typeface="Calibri"/>
+              </a:defRPr>
+            </a:pPr>
+            <a:r>
+              <a:rPr sz="1900" b="0">
                 <a:solidFill>
                   <a:srgbClr val="222222"/>
                 </a:solidFill>
@@ -14483,7 +14499,7 @@
                 <a:spcPct val="100000"/>
               </a:lnSpc>
               <a:spcAft>
-                <a:spcPts val="400"/>
+                <a:spcPts val="800"/>
               </a:spcAft>
               <a:defRPr sz="1800" b="0">
                 <a:solidFill>
@@ -14508,7 +14524,23 @@
                 <a:spcPct val="100000"/>
               </a:lnSpc>
               <a:spcAft>
-                <a:spcPts val="400"/>
+                <a:spcPts val="800"/>
+              </a:spcAft>
+              <a:defRPr sz="900" b="0">
+                <a:solidFill>
+                  <a:srgbClr val="222222"/>
+                </a:solidFill>
+                <a:latin typeface="Calibri"/>
+              </a:defRPr>
+            </a:pPr>
+          </a:p>
+          <a:p>
+            <a:pPr algn="l">
+              <a:lnSpc>
+                <a:spcPct val="100000"/>
+              </a:lnSpc>
+              <a:spcAft>
+                <a:spcPts val="800"/>
               </a:spcAft>
               <a:defRPr sz="1800" b="0">
                 <a:solidFill>
@@ -14517,6 +14549,15 @@
                 <a:latin typeface="Calibri"/>
               </a:defRPr>
             </a:pPr>
+            <a:r>
+              <a:rPr sz="1800" b="0">
+                <a:solidFill>
+                  <a:srgbClr val="222222"/>
+                </a:solidFill>
+                <a:latin typeface="Calibri"/>
+              </a:rPr>
+              <a:t>The same patterns run cars, medical devices, satellites and industrial controllers.</a:t>
+            </a:r>
           </a:p>
           <a:p>
             <a:pPr algn="l">
@@ -14524,24 +14565,15 @@
                 <a:spcPct val="100000"/>
               </a:lnSpc>
               <a:spcAft>
-                <a:spcPts val="400"/>
-              </a:spcAft>
-              <a:defRPr sz="1800" b="0">
-                <a:solidFill>
-                  <a:srgbClr val="222222"/>
-                </a:solidFill>
-                <a:latin typeface="Calibri"/>
-              </a:defRPr>
-            </a:pPr>
-            <a:r>
-              <a:rPr sz="1800" b="0">
-                <a:solidFill>
-                  <a:srgbClr val="222222"/>
-                </a:solidFill>
-                <a:latin typeface="Calibri"/>
-              </a:rPr>
-              <a:t>The same patterns run cars, medical devices, satellites and industrial controllers.</a:t>
-            </a:r>
+                <a:spcPts val="800"/>
+              </a:spcAft>
+              <a:defRPr sz="900" b="0">
+                <a:solidFill>
+                  <a:srgbClr val="222222"/>
+                </a:solidFill>
+                <a:latin typeface="Calibri"/>
+              </a:defRPr>
+            </a:pPr>
           </a:p>
           <a:p>
             <a:pPr algn="l">
@@ -14549,23 +14581,7 @@
                 <a:spcPct val="100000"/>
               </a:lnSpc>
               <a:spcAft>
-                <a:spcPts val="400"/>
-              </a:spcAft>
-              <a:defRPr sz="1800" b="0">
-                <a:solidFill>
-                  <a:srgbClr val="222222"/>
-                </a:solidFill>
-                <a:latin typeface="Calibri"/>
-              </a:defRPr>
-            </a:pPr>
-          </a:p>
-          <a:p>
-            <a:pPr algn="l">
-              <a:lnSpc>
-                <a:spcPct val="100000"/>
-              </a:lnSpc>
-              <a:spcAft>
-                <a:spcPts val="400"/>
+                <a:spcPts val="800"/>
               </a:spcAft>
               <a:defRPr sz="1800" b="0">
                 <a:solidFill>
@@ -15108,7 +15124,7 @@
               <a:spcAft>
                 <a:spcPts val="800"/>
               </a:spcAft>
-              <a:defRPr sz="1800" b="0">
+              <a:defRPr sz="900" b="0">
                 <a:solidFill>
                   <a:srgbClr val="222222"/>
                 </a:solidFill>
@@ -15620,7 +15636,7 @@
               <a:spcAft>
                 <a:spcPts val="800"/>
               </a:spcAft>
-              <a:defRPr sz="1800" b="0">
+              <a:defRPr sz="900" b="0">
                 <a:solidFill>
                   <a:srgbClr val="222222"/>
                 </a:solidFill>
@@ -15982,7 +15998,7 @@
         <p:spPr>
           <a:xfrm>
             <a:off x="502920" y="1755648"/>
-            <a:ext cx="5364327" cy="4507992"/>
+            <a:ext cx="11185855" cy="4507992"/>
           </a:xfrm>
           <a:prstGeom prst="rect">
             <a:avLst/>
@@ -16000,7 +16016,7 @@
                 <a:spcPct val="100000"/>
               </a:lnSpc>
               <a:spcAft>
-                <a:spcPts val="900"/>
+                <a:spcPts val="600"/>
               </a:spcAft>
               <a:defRPr sz="1800" b="0">
                 <a:solidFill>
@@ -16025,7 +16041,23 @@
                 <a:spcPct val="100000"/>
               </a:lnSpc>
               <a:spcAft>
-                <a:spcPts val="900"/>
+                <a:spcPts val="600"/>
+              </a:spcAft>
+              <a:defRPr sz="900" b="0">
+                <a:solidFill>
+                  <a:srgbClr val="222222"/>
+                </a:solidFill>
+                <a:latin typeface="Calibri"/>
+              </a:defRPr>
+            </a:pPr>
+          </a:p>
+          <a:p>
+            <a:pPr algn="l">
+              <a:lnSpc>
+                <a:spcPct val="100000"/>
+              </a:lnSpc>
+              <a:spcAft>
+                <a:spcPts val="600"/>
               </a:spcAft>
               <a:defRPr sz="1800" b="0">
                 <a:solidFill>
@@ -16034,6 +16066,15 @@
                 <a:latin typeface="Calibri"/>
               </a:defRPr>
             </a:pPr>
+            <a:r>
+              <a:rPr sz="1800" b="0">
+                <a:solidFill>
+                  <a:srgbClr val="222222"/>
+                </a:solidFill>
+                <a:latin typeface="Calibri"/>
+              </a:rPr>
+              <a:t>LOW BATTERY WARNING. The vehicle already knows its voltage. Flash amber below 12 V, red below 10 V, and make it a lighting mode rather than something bolted on the side.</a:t>
+            </a:r>
           </a:p>
           <a:p>
             <a:pPr algn="l">
@@ -16041,7 +16082,23 @@
                 <a:spcPct val="100000"/>
               </a:lnSpc>
               <a:spcAft>
-                <a:spcPts val="900"/>
+                <a:spcPts val="600"/>
+              </a:spcAft>
+              <a:defRPr sz="900" b="0">
+                <a:solidFill>
+                  <a:srgbClr val="222222"/>
+                </a:solidFill>
+                <a:latin typeface="Calibri"/>
+              </a:defRPr>
+            </a:pPr>
+          </a:p>
+          <a:p>
+            <a:pPr algn="l">
+              <a:lnSpc>
+                <a:spcPct val="100000"/>
+              </a:lnSpc>
+              <a:spcAft>
+                <a:spcPts val="600"/>
               </a:spcAft>
               <a:defRPr sz="1800" b="0">
                 <a:solidFill>
@@ -16057,7 +16114,7 @@
                 </a:solidFill>
                 <a:latin typeface="Calibri"/>
               </a:rPr>
-              <a:t>LOW BATTERY WARNING. The vehicle already knows its voltage. Flash amber below 12 V, red below 10 V, and make it a lighting mode rather than something bolted on the side.</a:t>
+              <a:t>STALL DETECTION. You have the current signature logic from the self-test. Apply it while driving: if a motor draws a jammed signature for more than half a second, cut it and say so.</a:t>
             </a:r>
           </a:p>
           <a:p>
@@ -16066,7 +16123,23 @@
                 <a:spcPct val="100000"/>
               </a:lnSpc>
               <a:spcAft>
-                <a:spcPts val="900"/>
+                <a:spcPts val="600"/>
+              </a:spcAft>
+              <a:defRPr sz="900" b="0">
+                <a:solidFill>
+                  <a:srgbClr val="222222"/>
+                </a:solidFill>
+                <a:latin typeface="Calibri"/>
+              </a:defRPr>
+            </a:pPr>
+          </a:p>
+          <a:p>
+            <a:pPr algn="l">
+              <a:lnSpc>
+                <a:spcPct val="100000"/>
+              </a:lnSpc>
+              <a:spcAft>
+                <a:spcPts val="600"/>
               </a:spcAft>
               <a:defRPr sz="1800" b="0">
                 <a:solidFill>
@@ -16075,6 +16148,15 @@
                 <a:latin typeface="Calibri"/>
               </a:defRPr>
             </a:pPr>
+            <a:r>
+              <a:rPr sz="1800" b="0">
+                <a:solidFill>
+                  <a:srgbClr val="222222"/>
+                </a:solidFill>
+                <a:latin typeface="Calibri"/>
+              </a:rPr>
+              <a:t>OBSTACLE STOP. An ultrasonic range finder, a threshold in Config.h, and a rule that overrides the throttle. Think hard about what happens when the sensor gives one bad reading.</a:t>
+            </a:r>
           </a:p>
           <a:p>
             <a:pPr algn="l">
@@ -16082,7 +16164,23 @@
                 <a:spcPct val="100000"/>
               </a:lnSpc>
               <a:spcAft>
-                <a:spcPts val="900"/>
+                <a:spcPts val="600"/>
+              </a:spcAft>
+              <a:defRPr sz="900" b="0">
+                <a:solidFill>
+                  <a:srgbClr val="222222"/>
+                </a:solidFill>
+                <a:latin typeface="Calibri"/>
+              </a:defRPr>
+            </a:pPr>
+          </a:p>
+          <a:p>
+            <a:pPr algn="l">
+              <a:lnSpc>
+                <a:spcPct val="100000"/>
+              </a:lnSpc>
+              <a:spcAft>
+                <a:spcPts val="600"/>
               </a:spcAft>
               <a:defRPr sz="1800" b="0">
                 <a:solidFill>
@@ -16098,56 +16196,24 @@
                 </a:solidFill>
                 <a:latin typeface="Calibri"/>
               </a:rPr>
-              <a:t>STALL DETECTION. You have the current signature logic from the self-test. Apply it while driving: if a motor draws a jammed signature for more than half a second, cut it and say so.</a:t>
-            </a:r>
-          </a:p>
-        </p:txBody>
-      </p:sp>
-      <p:sp>
-        <p:nvSpPr>
-          <p:cNvPr id="8" name="TextBox 7"/>
-          <p:cNvSpPr txBox="1"/>
-          <p:nvPr/>
-        </p:nvSpPr>
-        <p:spPr>
-          <a:xfrm>
-            <a:off x="6324447" y="1755648"/>
-            <a:ext cx="5364327" cy="4507992"/>
-          </a:xfrm>
-          <a:prstGeom prst="rect">
-            <a:avLst/>
-          </a:prstGeom>
-          <a:noFill/>
-        </p:spPr>
-        <p:txBody>
-          <a:bodyPr wrap="square" lIns="0" tIns="0" rIns="0" bIns="0">
-            <a:spAutoFit/>
-          </a:bodyPr>
-          <a:lstStyle/>
+              <a:t>TELEMETRY. Stream voltage, current and speed over ESP-NOW to a second ESP32 with its own LED bar.</a:t>
+            </a:r>
+          </a:p>
           <a:p>
             <a:pPr algn="l">
               <a:lnSpc>
                 <a:spcPct val="100000"/>
               </a:lnSpc>
               <a:spcAft>
-                <a:spcPts val="900"/>
-              </a:spcAft>
-              <a:defRPr sz="1800" b="0">
-                <a:solidFill>
-                  <a:srgbClr val="222222"/>
-                </a:solidFill>
-                <a:latin typeface="Calibri"/>
-              </a:defRPr>
-            </a:pPr>
-            <a:r>
-              <a:rPr sz="1800" b="0">
-                <a:solidFill>
-                  <a:srgbClr val="222222"/>
-                </a:solidFill>
-                <a:latin typeface="Calibri"/>
-              </a:rPr>
-              <a:t>OBSTACLE STOP. An ultrasonic range finder, a threshold in Config.h, and a rule that overrides the throttle. Think hard about what happens when the sensor gives one bad reading.</a:t>
-            </a:r>
+                <a:spcPts val="600"/>
+              </a:spcAft>
+              <a:defRPr sz="900" b="0">
+                <a:solidFill>
+                  <a:srgbClr val="222222"/>
+                </a:solidFill>
+                <a:latin typeface="Calibri"/>
+              </a:defRPr>
+            </a:pPr>
           </a:p>
           <a:p>
             <a:pPr algn="l">
@@ -16155,64 +16221,7 @@
                 <a:spcPct val="100000"/>
               </a:lnSpc>
               <a:spcAft>
-                <a:spcPts val="900"/>
-              </a:spcAft>
-              <a:defRPr sz="1800" b="0">
-                <a:solidFill>
-                  <a:srgbClr val="222222"/>
-                </a:solidFill>
-                <a:latin typeface="Calibri"/>
-              </a:defRPr>
-            </a:pPr>
-          </a:p>
-          <a:p>
-            <a:pPr algn="l">
-              <a:lnSpc>
-                <a:spcPct val="100000"/>
-              </a:lnSpc>
-              <a:spcAft>
-                <a:spcPts val="900"/>
-              </a:spcAft>
-              <a:defRPr sz="1800" b="0">
-                <a:solidFill>
-                  <a:srgbClr val="222222"/>
-                </a:solidFill>
-                <a:latin typeface="Calibri"/>
-              </a:defRPr>
-            </a:pPr>
-            <a:r>
-              <a:rPr sz="1800" b="0">
-                <a:solidFill>
-                  <a:srgbClr val="222222"/>
-                </a:solidFill>
-                <a:latin typeface="Calibri"/>
-              </a:rPr>
-              <a:t>TELEMETRY. Stream voltage, current and speed over ESP-NOW to a second ESP32 with its own LED bar.</a:t>
-            </a:r>
-          </a:p>
-          <a:p>
-            <a:pPr algn="l">
-              <a:lnSpc>
-                <a:spcPct val="100000"/>
-              </a:lnSpc>
-              <a:spcAft>
-                <a:spcPts val="900"/>
-              </a:spcAft>
-              <a:defRPr sz="1800" b="0">
-                <a:solidFill>
-                  <a:srgbClr val="222222"/>
-                </a:solidFill>
-                <a:latin typeface="Calibri"/>
-              </a:defRPr>
-            </a:pPr>
-          </a:p>
-          <a:p>
-            <a:pPr algn="l">
-              <a:lnSpc>
-                <a:spcPct val="100000"/>
-              </a:lnSpc>
-              <a:spcAft>
-                <a:spcPts val="900"/>
+                <a:spcPts val="600"/>
               </a:spcAft>
               <a:defRPr sz="1800" b="0">
                 <a:solidFill>
@@ -17702,17 +17711,17 @@
                 <a:spcPct val="100000"/>
               </a:lnSpc>
               <a:spcAft>
-                <a:spcPts val="600"/>
-              </a:spcAft>
-              <a:defRPr sz="2700" b="0">
-                <a:solidFill>
-                  <a:srgbClr val="222222"/>
-                </a:solidFill>
-                <a:latin typeface="Calibri"/>
-              </a:defRPr>
-            </a:pPr>
-            <a:r>
-              <a:rPr sz="2700" b="0">
+                <a:spcPts val="900"/>
+              </a:spcAft>
+              <a:defRPr sz="2800" b="0">
+                <a:solidFill>
+                  <a:srgbClr val="222222"/>
+                </a:solidFill>
+                <a:latin typeface="Calibri"/>
+              </a:defRPr>
+            </a:pPr>
+            <a:r>
+              <a:rPr sz="2800" b="0">
                 <a:solidFill>
                   <a:srgbClr val="222222"/>
                 </a:solidFill>
@@ -17727,17 +17736,17 @@
                 <a:spcPct val="100000"/>
               </a:lnSpc>
               <a:spcAft>
-                <a:spcPts val="600"/>
-              </a:spcAft>
-              <a:defRPr sz="2700" b="0">
-                <a:solidFill>
-                  <a:srgbClr val="222222"/>
-                </a:solidFill>
-                <a:latin typeface="Calibri"/>
-              </a:defRPr>
-            </a:pPr>
-            <a:r>
-              <a:rPr sz="2700" b="0">
+                <a:spcPts val="900"/>
+              </a:spcAft>
+              <a:defRPr sz="2800" b="0">
+                <a:solidFill>
+                  <a:srgbClr val="222222"/>
+                </a:solidFill>
+                <a:latin typeface="Calibri"/>
+              </a:defRPr>
+            </a:pPr>
+            <a:r>
+              <a:rPr sz="2800" b="0">
                 <a:solidFill>
                   <a:srgbClr val="222222"/>
                 </a:solidFill>
@@ -17752,9 +17761,9 @@
                 <a:spcPct val="100000"/>
               </a:lnSpc>
               <a:spcAft>
-                <a:spcPts val="600"/>
-              </a:spcAft>
-              <a:defRPr sz="2700" b="0">
+                <a:spcPts val="900"/>
+              </a:spcAft>
+              <a:defRPr sz="1400" b="0">
                 <a:solidFill>
                   <a:srgbClr val="222222"/>
                 </a:solidFill>
@@ -17768,17 +17777,17 @@
                 <a:spcPct val="100000"/>
               </a:lnSpc>
               <a:spcAft>
-                <a:spcPts val="600"/>
-              </a:spcAft>
-              <a:defRPr sz="2700" b="0">
-                <a:solidFill>
-                  <a:srgbClr val="222222"/>
-                </a:solidFill>
-                <a:latin typeface="Calibri"/>
-              </a:defRPr>
-            </a:pPr>
-            <a:r>
-              <a:rPr sz="2700" b="0">
+                <a:spcPts val="900"/>
+              </a:spcAft>
+              <a:defRPr sz="2800" b="0">
+                <a:solidFill>
+                  <a:srgbClr val="222222"/>
+                </a:solidFill>
+                <a:latin typeface="Calibri"/>
+              </a:defRPr>
+            </a:pPr>
+            <a:r>
+              <a:rPr sz="2800" b="0">
                 <a:solidFill>
                   <a:srgbClr val="222222"/>
                 </a:solidFill>
@@ -17793,17 +17802,17 @@
                 <a:spcPct val="100000"/>
               </a:lnSpc>
               <a:spcAft>
-                <a:spcPts val="600"/>
-              </a:spcAft>
-              <a:defRPr sz="2700" b="0">
-                <a:solidFill>
-                  <a:srgbClr val="222222"/>
-                </a:solidFill>
-                <a:latin typeface="Calibri"/>
-              </a:defRPr>
-            </a:pPr>
-            <a:r>
-              <a:rPr sz="2700" b="0">
+                <a:spcPts val="900"/>
+              </a:spcAft>
+              <a:defRPr sz="2800" b="0">
+                <a:solidFill>
+                  <a:srgbClr val="222222"/>
+                </a:solidFill>
+                <a:latin typeface="Calibri"/>
+              </a:defRPr>
+            </a:pPr>
+            <a:r>
+              <a:rPr sz="2800" b="0">
                 <a:solidFill>
                   <a:srgbClr val="222222"/>
                 </a:solidFill>
@@ -17818,17 +17827,17 @@
                 <a:spcPct val="100000"/>
               </a:lnSpc>
               <a:spcAft>
-                <a:spcPts val="600"/>
-              </a:spcAft>
-              <a:defRPr sz="2700" b="0">
-                <a:solidFill>
-                  <a:srgbClr val="222222"/>
-                </a:solidFill>
-                <a:latin typeface="Calibri"/>
-              </a:defRPr>
-            </a:pPr>
-            <a:r>
-              <a:rPr sz="2700" b="0">
+                <a:spcPts val="900"/>
+              </a:spcAft>
+              <a:defRPr sz="2800" b="0">
+                <a:solidFill>
+                  <a:srgbClr val="222222"/>
+                </a:solidFill>
+                <a:latin typeface="Calibri"/>
+              </a:defRPr>
+            </a:pPr>
+            <a:r>
+              <a:rPr sz="2800" b="0">
                 <a:solidFill>
                   <a:srgbClr val="222222"/>
                 </a:solidFill>
@@ -18072,7 +18081,7 @@
               <a:spcAft>
                 <a:spcPts val="600"/>
               </a:spcAft>
-              <a:defRPr sz="2600" b="0">
+              <a:defRPr sz="1350" b="0">
                 <a:solidFill>
                   <a:srgbClr val="222222"/>
                 </a:solidFill>
@@ -18088,15 +18097,15 @@
               <a:spcAft>
                 <a:spcPts val="600"/>
               </a:spcAft>
-              <a:defRPr sz="2600" b="0">
-                <a:solidFill>
-                  <a:srgbClr val="222222"/>
-                </a:solidFill>
-                <a:latin typeface="Calibri"/>
-              </a:defRPr>
-            </a:pPr>
-            <a:r>
-              <a:rPr sz="2600" b="0">
+              <a:defRPr sz="2700" b="0">
+                <a:solidFill>
+                  <a:srgbClr val="222222"/>
+                </a:solidFill>
+                <a:latin typeface="Calibri"/>
+              </a:defRPr>
+            </a:pPr>
+            <a:r>
+              <a:rPr sz="2700" b="0">
                 <a:solidFill>
                   <a:srgbClr val="222222"/>
                 </a:solidFill>
@@ -18113,7 +18122,7 @@
               <a:spcAft>
                 <a:spcPts val="600"/>
               </a:spcAft>
-              <a:defRPr sz="2600" b="0">
+              <a:defRPr sz="1350" b="0">
                 <a:solidFill>
                   <a:srgbClr val="222222"/>
                 </a:solidFill>
@@ -18129,15 +18138,15 @@
               <a:spcAft>
                 <a:spcPts val="600"/>
               </a:spcAft>
-              <a:defRPr sz="2600" b="0">
-                <a:solidFill>
-                  <a:srgbClr val="222222"/>
-                </a:solidFill>
-                <a:latin typeface="Calibri"/>
-              </a:defRPr>
-            </a:pPr>
-            <a:r>
-              <a:rPr sz="2600" b="0">
+              <a:defRPr sz="2700" b="0">
+                <a:solidFill>
+                  <a:srgbClr val="222222"/>
+                </a:solidFill>
+                <a:latin typeface="Calibri"/>
+              </a:defRPr>
+            </a:pPr>
+            <a:r>
+              <a:rPr sz="2700" b="0">
                 <a:solidFill>
                   <a:srgbClr val="222222"/>
                 </a:solidFill>
@@ -19627,7 +19636,7 @@
         <p:spPr>
           <a:xfrm>
             <a:off x="502920" y="1755648"/>
-            <a:ext cx="5364327" cy="4507992"/>
+            <a:ext cx="11185855" cy="4507992"/>
           </a:xfrm>
           <a:prstGeom prst="rect">
             <a:avLst/>
@@ -19645,17 +19654,17 @@
                 <a:spcPct val="100000"/>
               </a:lnSpc>
               <a:spcAft>
-                <a:spcPts val="900"/>
-              </a:spcAft>
-              <a:defRPr sz="2000" b="0">
-                <a:solidFill>
-                  <a:srgbClr val="222222"/>
-                </a:solidFill>
-                <a:latin typeface="Calibri"/>
-              </a:defRPr>
-            </a:pPr>
-            <a:r>
-              <a:rPr sz="2000" b="0">
+                <a:spcPts val="600"/>
+              </a:spcAft>
+              <a:defRPr sz="1800" b="0">
+                <a:solidFill>
+                  <a:srgbClr val="222222"/>
+                </a:solidFill>
+                <a:latin typeface="Calibri"/>
+              </a:defRPr>
+            </a:pPr>
+            <a:r>
+              <a:rPr sz="1800" b="0">
                 <a:solidFill>
                   <a:srgbClr val="222222"/>
                 </a:solidFill>
@@ -19670,17 +19679,17 @@
                 <a:spcPct val="100000"/>
               </a:lnSpc>
               <a:spcAft>
-                <a:spcPts val="900"/>
-              </a:spcAft>
-              <a:defRPr sz="2000" b="0">
-                <a:solidFill>
-                  <a:srgbClr val="222222"/>
-                </a:solidFill>
-                <a:latin typeface="Calibri"/>
-              </a:defRPr>
-            </a:pPr>
-            <a:r>
-              <a:rPr sz="2000" b="0">
+                <a:spcPts val="600"/>
+              </a:spcAft>
+              <a:defRPr sz="1800" b="0">
+                <a:solidFill>
+                  <a:srgbClr val="222222"/>
+                </a:solidFill>
+                <a:latin typeface="Calibri"/>
+              </a:defRPr>
+            </a:pPr>
+            <a:r>
+              <a:rPr sz="1800" b="0">
                 <a:solidFill>
                   <a:srgbClr val="222222"/>
                 </a:solidFill>
@@ -19695,9 +19704,9 @@
                 <a:spcPct val="100000"/>
               </a:lnSpc>
               <a:spcAft>
-                <a:spcPts val="900"/>
-              </a:spcAft>
-              <a:defRPr sz="2000" b="0">
+                <a:spcPts val="600"/>
+              </a:spcAft>
+              <a:defRPr sz="900" b="0">
                 <a:solidFill>
                   <a:srgbClr val="222222"/>
                 </a:solidFill>
@@ -19711,17 +19720,17 @@
                 <a:spcPct val="100000"/>
               </a:lnSpc>
               <a:spcAft>
-                <a:spcPts val="900"/>
-              </a:spcAft>
-              <a:defRPr sz="2000" b="0">
-                <a:solidFill>
-                  <a:srgbClr val="222222"/>
-                </a:solidFill>
-                <a:latin typeface="Calibri"/>
-              </a:defRPr>
-            </a:pPr>
-            <a:r>
-              <a:rPr sz="2000" b="0">
+                <a:spcPts val="600"/>
+              </a:spcAft>
+              <a:defRPr sz="1800" b="0">
+                <a:solidFill>
+                  <a:srgbClr val="222222"/>
+                </a:solidFill>
+                <a:latin typeface="Calibri"/>
+              </a:defRPr>
+            </a:pPr>
+            <a:r>
+              <a:rPr sz="1800" b="0">
                 <a:solidFill>
                   <a:srgbClr val="222222"/>
                 </a:solidFill>
@@ -19736,17 +19745,17 @@
                 <a:spcPct val="100000"/>
               </a:lnSpc>
               <a:spcAft>
-                <a:spcPts val="900"/>
-              </a:spcAft>
-              <a:defRPr sz="2000" b="0">
-                <a:solidFill>
-                  <a:srgbClr val="222222"/>
-                </a:solidFill>
-                <a:latin typeface="Calibri"/>
-              </a:defRPr>
-            </a:pPr>
-            <a:r>
-              <a:rPr sz="2000" b="0">
+                <a:spcPts val="600"/>
+              </a:spcAft>
+              <a:defRPr sz="1800" b="0">
+                <a:solidFill>
+                  <a:srgbClr val="222222"/>
+                </a:solidFill>
+                <a:latin typeface="Calibri"/>
+              </a:defRPr>
+            </a:pPr>
+            <a:r>
+              <a:rPr sz="1800" b="0">
                 <a:solidFill>
                   <a:srgbClr val="222222"/>
                 </a:solidFill>
@@ -19755,46 +19764,39 @@
               <a:t>V = 2 A x 0.0025 ohm = 0.005 V,  five millivolts</a:t>
             </a:r>
           </a:p>
-        </p:txBody>
-      </p:sp>
-      <p:sp>
-        <p:nvSpPr>
-          <p:cNvPr id="8" name="TextBox 7"/>
-          <p:cNvSpPr txBox="1"/>
-          <p:nvPr/>
-        </p:nvSpPr>
-        <p:spPr>
-          <a:xfrm>
-            <a:off x="6324447" y="1755648"/>
-            <a:ext cx="5364327" cy="4507992"/>
-          </a:xfrm>
-          <a:prstGeom prst="rect">
-            <a:avLst/>
-          </a:prstGeom>
-          <a:noFill/>
-        </p:spPr>
-        <p:txBody>
-          <a:bodyPr wrap="square" lIns="0" tIns="0" rIns="0" bIns="0">
-            <a:spAutoFit/>
-          </a:bodyPr>
-          <a:lstStyle/>
           <a:p>
             <a:pPr algn="l">
               <a:lnSpc>
                 <a:spcPct val="100000"/>
               </a:lnSpc>
               <a:spcAft>
-                <a:spcPts val="900"/>
-              </a:spcAft>
-              <a:defRPr sz="2000" b="0">
-                <a:solidFill>
-                  <a:srgbClr val="222222"/>
-                </a:solidFill>
-                <a:latin typeface="Calibri"/>
-              </a:defRPr>
-            </a:pPr>
-            <a:r>
-              <a:rPr sz="2000" b="0">
+                <a:spcPts val="600"/>
+              </a:spcAft>
+              <a:defRPr sz="900" b="0">
+                <a:solidFill>
+                  <a:srgbClr val="222222"/>
+                </a:solidFill>
+                <a:latin typeface="Calibri"/>
+              </a:defRPr>
+            </a:pPr>
+          </a:p>
+          <a:p>
+            <a:pPr algn="l">
+              <a:lnSpc>
+                <a:spcPct val="100000"/>
+              </a:lnSpc>
+              <a:spcAft>
+                <a:spcPts val="600"/>
+              </a:spcAft>
+              <a:defRPr sz="1800" b="0">
+                <a:solidFill>
+                  <a:srgbClr val="222222"/>
+                </a:solidFill>
+                <a:latin typeface="Calibri"/>
+              </a:defRPr>
+            </a:pPr>
+            <a:r>
+              <a:rPr sz="1800" b="0">
                 <a:solidFill>
                   <a:srgbClr val="222222"/>
                 </a:solidFill>
@@ -19809,17 +19811,17 @@
                 <a:spcPct val="100000"/>
               </a:lnSpc>
               <a:spcAft>
-                <a:spcPts val="900"/>
-              </a:spcAft>
-              <a:defRPr sz="2000" b="0">
-                <a:solidFill>
-                  <a:srgbClr val="222222"/>
-                </a:solidFill>
-                <a:latin typeface="Calibri"/>
-              </a:defRPr>
-            </a:pPr>
-            <a:r>
-              <a:rPr sz="2000" b="0">
+                <a:spcPts val="600"/>
+              </a:spcAft>
+              <a:defRPr sz="1800" b="0">
+                <a:solidFill>
+                  <a:srgbClr val="222222"/>
+                </a:solidFill>
+                <a:latin typeface="Calibri"/>
+              </a:defRPr>
+            </a:pPr>
+            <a:r>
+              <a:rPr sz="1800" b="0">
                 <a:solidFill>
                   <a:srgbClr val="222222"/>
                 </a:solidFill>
@@ -19834,17 +19836,17 @@
                 <a:spcPct val="100000"/>
               </a:lnSpc>
               <a:spcAft>
-                <a:spcPts val="900"/>
-              </a:spcAft>
-              <a:defRPr sz="2000" b="0">
-                <a:solidFill>
-                  <a:srgbClr val="222222"/>
-                </a:solidFill>
-                <a:latin typeface="Calibri"/>
-              </a:defRPr>
-            </a:pPr>
-            <a:r>
-              <a:rPr sz="2000" b="0">
+                <a:spcPts val="600"/>
+              </a:spcAft>
+              <a:defRPr sz="1800" b="0">
+                <a:solidFill>
+                  <a:srgbClr val="222222"/>
+                </a:solidFill>
+                <a:latin typeface="Calibri"/>
+              </a:defRPr>
+            </a:pPr>
+            <a:r>
+              <a:rPr sz="1800" b="0">
                 <a:solidFill>
                   <a:srgbClr val="222222"/>
                 </a:solidFill>
@@ -19859,9 +19861,9 @@
                 <a:spcPct val="100000"/>
               </a:lnSpc>
               <a:spcAft>
-                <a:spcPts val="900"/>
-              </a:spcAft>
-              <a:defRPr sz="2000" b="0">
+                <a:spcPts val="600"/>
+              </a:spcAft>
+              <a:defRPr sz="900" b="0">
                 <a:solidFill>
                   <a:srgbClr val="222222"/>
                 </a:solidFill>
@@ -19875,17 +19877,17 @@
                 <a:spcPct val="100000"/>
               </a:lnSpc>
               <a:spcAft>
-                <a:spcPts val="900"/>
-              </a:spcAft>
-              <a:defRPr sz="2000" b="0">
-                <a:solidFill>
-                  <a:srgbClr val="222222"/>
-                </a:solidFill>
-                <a:latin typeface="Calibri"/>
-              </a:defRPr>
-            </a:pPr>
-            <a:r>
-              <a:rPr sz="2000" b="0">
+                <a:spcPts val="600"/>
+              </a:spcAft>
+              <a:defRPr sz="1800" b="0">
+                <a:solidFill>
+                  <a:srgbClr val="222222"/>
+                </a:solidFill>
+                <a:latin typeface="Calibri"/>
+              </a:defRPr>
+            </a:pPr>
+            <a:r>
+              <a:rPr sz="1800" b="0">
                 <a:solidFill>
                   <a:srgbClr val="222222"/>
                 </a:solidFill>
@@ -20197,7 +20199,7 @@
               <a:spcAft>
                 <a:spcPts val="200"/>
               </a:spcAft>
-              <a:defRPr sz="1800" b="0">
+              <a:defRPr sz="900" b="0">
                 <a:solidFill>
                   <a:srgbClr val="222222"/>
                 </a:solidFill>
@@ -20649,7 +20651,7 @@
               <a:spcAft>
                 <a:spcPts val="200"/>
               </a:spcAft>
-              <a:defRPr sz="1800" b="0">
+              <a:defRPr sz="900" b="0">
                 <a:solidFill>
                   <a:srgbClr val="222222"/>
                 </a:solidFill>
@@ -21103,6 +21105,22 @@
               <a:spcAft>
                 <a:spcPts val="0"/>
               </a:spcAft>
+              <a:defRPr sz="900" b="0">
+                <a:solidFill>
+                  <a:srgbClr val="222222"/>
+                </a:solidFill>
+                <a:latin typeface="Calibri"/>
+              </a:defRPr>
+            </a:pPr>
+          </a:p>
+          <a:p>
+            <a:pPr algn="ctr">
+              <a:lnSpc>
+                <a:spcPct val="100000"/>
+              </a:lnSpc>
+              <a:spcAft>
+                <a:spcPts val="0"/>
+              </a:spcAft>
               <a:defRPr sz="1800" b="0">
                 <a:solidFill>
                   <a:srgbClr val="222222"/>
@@ -21110,6 +21128,15 @@
                 <a:latin typeface="Calibri"/>
               </a:defRPr>
             </a:pPr>
+            <a:r>
+              <a:rPr sz="1800" b="0">
+                <a:solidFill>
+                  <a:srgbClr val="222222"/>
+                </a:solidFill>
+                <a:latin typeface="Calibri"/>
+              </a:rPr>
+              <a:t>3 LEDs x 20 mA</a:t>
+            </a:r>
           </a:p>
           <a:p>
             <a:pPr algn="ctr">
@@ -21133,7 +21160,7 @@
                 </a:solidFill>
                 <a:latin typeface="Calibri"/>
               </a:rPr>
-              <a:t>3 LEDs x 20 mA</a:t>
+              <a:t>= 60 mA</a:t>
             </a:r>
           </a:p>
           <a:p>
@@ -21144,6 +21171,22 @@
               <a:spcAft>
                 <a:spcPts val="0"/>
               </a:spcAft>
+              <a:defRPr sz="900" b="0">
+                <a:solidFill>
+                  <a:srgbClr val="222222"/>
+                </a:solidFill>
+                <a:latin typeface="Calibri"/>
+              </a:defRPr>
+            </a:pPr>
+          </a:p>
+          <a:p>
+            <a:pPr algn="ctr">
+              <a:lnSpc>
+                <a:spcPct val="100000"/>
+              </a:lnSpc>
+              <a:spcAft>
+                <a:spcPts val="0"/>
+              </a:spcAft>
               <a:defRPr sz="1800" b="0">
                 <a:solidFill>
                   <a:srgbClr val="222222"/>
@@ -21158,7 +21201,7 @@
                 </a:solidFill>
                 <a:latin typeface="Calibri"/>
               </a:rPr>
-              <a:t>= 60 mA</a:t>
+              <a:t>P = I x V</a:t>
             </a:r>
           </a:p>
           <a:p>
@@ -21176,6 +21219,15 @@
                 <a:latin typeface="Calibri"/>
               </a:defRPr>
             </a:pPr>
+            <a:r>
+              <a:rPr sz="1800" b="0">
+                <a:solidFill>
+                  <a:srgbClr val="222222"/>
+                </a:solidFill>
+                <a:latin typeface="Calibri"/>
+              </a:rPr>
+              <a:t>= 0.06 x 5</a:t>
+            </a:r>
           </a:p>
           <a:p>
             <a:pPr algn="ctr">
@@ -21199,7 +21251,7 @@
                 </a:solidFill>
                 <a:latin typeface="Calibri"/>
               </a:rPr>
-              <a:t>P = I x V</a:t>
+              <a:t>= 0.3 W</a:t>
             </a:r>
           </a:p>
           <a:p>
@@ -21210,57 +21262,7 @@
               <a:spcAft>
                 <a:spcPts val="0"/>
               </a:spcAft>
-              <a:defRPr sz="1800" b="0">
-                <a:solidFill>
-                  <a:srgbClr val="222222"/>
-                </a:solidFill>
-                <a:latin typeface="Calibri"/>
-              </a:defRPr>
-            </a:pPr>
-            <a:r>
-              <a:rPr sz="1800" b="0">
-                <a:solidFill>
-                  <a:srgbClr val="222222"/>
-                </a:solidFill>
-                <a:latin typeface="Calibri"/>
-              </a:rPr>
-              <a:t>= 0.06 x 5</a:t>
-            </a:r>
-          </a:p>
-          <a:p>
-            <a:pPr algn="ctr">
-              <a:lnSpc>
-                <a:spcPct val="100000"/>
-              </a:lnSpc>
-              <a:spcAft>
-                <a:spcPts val="0"/>
-              </a:spcAft>
-              <a:defRPr sz="1800" b="0">
-                <a:solidFill>
-                  <a:srgbClr val="222222"/>
-                </a:solidFill>
-                <a:latin typeface="Calibri"/>
-              </a:defRPr>
-            </a:pPr>
-            <a:r>
-              <a:rPr sz="1800" b="0">
-                <a:solidFill>
-                  <a:srgbClr val="222222"/>
-                </a:solidFill>
-                <a:latin typeface="Calibri"/>
-              </a:rPr>
-              <a:t>= 0.3 W</a:t>
-            </a:r>
-          </a:p>
-          <a:p>
-            <a:pPr algn="ctr">
-              <a:lnSpc>
-                <a:spcPct val="100000"/>
-              </a:lnSpc>
-              <a:spcAft>
-                <a:spcPts val="0"/>
-              </a:spcAft>
-              <a:defRPr sz="1800" b="0">
+              <a:defRPr sz="900" b="0">
                 <a:solidFill>
                   <a:srgbClr val="222222"/>
                 </a:solidFill>

--- a/ground-vehicle/docs/courses/advanced/l5_sensors_and_self_test.pptx
+++ b/ground-vehicle/docs/courses/advanced/l5_sensors_and_self_test.pptx
@@ -5900,22 +5900,24 @@
       <p:grpSpPr/>
       <p:sp>
         <p:nvSpPr>
-          <p:cNvPr id="2" name="Title 1"/>
-          <p:cNvSpPr>
-            <a:spLocks noGrp="1"/>
-          </p:cNvSpPr>
-          <p:nvPr>
-            <p:ph type="title"/>
-          </p:nvPr>
-        </p:nvSpPr>
-        <p:spPr>
-          <a:xfrm>
-            <a:off x="502920" y="274320"/>
-            <a:ext cx="11185855" cy="777240"/>
-          </a:xfrm>
-        </p:spPr>
-        <p:txBody>
-          <a:bodyPr wrap="square" anchor="b"/>
+          <p:cNvPr id="2" name="TextBox 1"/>
+          <p:cNvSpPr txBox="1"/>
+          <p:nvPr/>
+        </p:nvSpPr>
+        <p:spPr>
+          <a:xfrm>
+            <a:off x="502920" y="6382512"/>
+            <a:ext cx="10545775" cy="274320"/>
+          </a:xfrm>
+          <a:prstGeom prst="rect">
+            <a:avLst/>
+          </a:prstGeom>
+          <a:noFill/>
+        </p:spPr>
+        <p:txBody>
+          <a:bodyPr wrap="square" lIns="0" tIns="0">
+            <a:spAutoFit/>
+          </a:bodyPr>
           <a:lstStyle/>
           <a:p>
             <a:pPr algn="l">
@@ -5925,41 +5927,89 @@
               <a:spcAft>
                 <a:spcPts val="0"/>
               </a:spcAft>
-              <a:defRPr sz="2800" b="1">
-                <a:solidFill>
-                  <a:srgbClr val="1F3A5F"/>
-                </a:solidFill>
-                <a:latin typeface="Calibri"/>
-              </a:defRPr>
-            </a:pPr>
-            <a:r>
-              <a:rPr sz="2800" b="1">
-                <a:solidFill>
-                  <a:srgbClr val="1F3A5F"/>
-                </a:solidFill>
-                <a:latin typeface="Calibri"/>
-              </a:rPr>
-              <a:t>Where we are</a:t>
-            </a:r>
-          </a:p>
-        </p:txBody>
-      </p:sp>
-      <p:sp>
-        <p:nvSpPr>
-          <p:cNvPr id="3" name="Rectangle 2"/>
+              <a:defRPr sz="1000" b="0">
+                <a:solidFill>
+                  <a:srgbClr val="666666"/>
+                </a:solidFill>
+                <a:latin typeface="Calibri"/>
+              </a:defRPr>
+            </a:pPr>
+            <a:r>
+              <a:rPr sz="1000" b="0">
+                <a:solidFill>
+                  <a:srgbClr val="666666"/>
+                </a:solidFill>
+                <a:latin typeface="Calibri"/>
+              </a:rPr>
+              <a:t>Pathfinder Advanced - Op Program 12  |  Lesson 5</a:t>
+            </a:r>
+          </a:p>
+        </p:txBody>
+      </p:sp>
+      <p:sp>
+        <p:nvSpPr>
+          <p:cNvPr id="3" name="TextBox 2"/>
+          <p:cNvSpPr txBox="1"/>
+          <p:nvPr/>
+        </p:nvSpPr>
+        <p:spPr>
+          <a:xfrm>
+            <a:off x="11231575" y="6382512"/>
+            <a:ext cx="457200" cy="274320"/>
+          </a:xfrm>
+          <a:prstGeom prst="rect">
+            <a:avLst/>
+          </a:prstGeom>
+          <a:noFill/>
+        </p:spPr>
+        <p:txBody>
+          <a:bodyPr wrap="square" lIns="0" tIns="0">
+            <a:spAutoFit/>
+          </a:bodyPr>
+          <a:lstStyle/>
+          <a:p>
+            <a:pPr algn="r">
+              <a:lnSpc>
+                <a:spcPct val="100000"/>
+              </a:lnSpc>
+              <a:spcAft>
+                <a:spcPts val="0"/>
+              </a:spcAft>
+              <a:defRPr sz="1000" b="0">
+                <a:solidFill>
+                  <a:srgbClr val="666666"/>
+                </a:solidFill>
+                <a:latin typeface="Calibri"/>
+              </a:defRPr>
+            </a:pPr>
+            <a:r>
+              <a:rPr sz="1000" b="0">
+                <a:solidFill>
+                  <a:srgbClr val="666666"/>
+                </a:solidFill>
+                <a:latin typeface="Calibri"/>
+              </a:rPr>
+              <a:t>9</a:t>
+            </a:r>
+          </a:p>
+        </p:txBody>
+      </p:sp>
+      <p:sp>
+        <p:nvSpPr>
+          <p:cNvPr id="4" name="Rectangle 3"/>
           <p:cNvSpPr/>
           <p:nvPr/>
         </p:nvSpPr>
         <p:spPr>
           <a:xfrm>
-            <a:off x="502920" y="1097280"/>
-            <a:ext cx="11185855" cy="19050"/>
+            <a:off x="0" y="1234440"/>
+            <a:ext cx="256032" cy="1554480"/>
           </a:xfrm>
           <a:prstGeom prst="rect">
             <a:avLst/>
           </a:prstGeom>
           <a:solidFill>
-            <a:srgbClr val="C8D2DE"/>
+            <a:srgbClr val="0E7C86"/>
           </a:solidFill>
           <a:ln>
             <a:noFill/>
@@ -5990,14 +6040,14 @@
       </p:sp>
       <p:sp>
         <p:nvSpPr>
-          <p:cNvPr id="4" name="TextBox 3"/>
+          <p:cNvPr id="5" name="TextBox 4"/>
           <p:cNvSpPr txBox="1"/>
           <p:nvPr/>
         </p:nvSpPr>
         <p:spPr>
           <a:xfrm>
-            <a:off x="502920" y="6382512"/>
-            <a:ext cx="10545775" cy="274320"/>
+            <a:off x="777240" y="1325880"/>
+            <a:ext cx="10515600" cy="1051560"/>
           </a:xfrm>
           <a:prstGeom prst="rect">
             <a:avLst/>
@@ -6005,7 +6055,7 @@
           <a:noFill/>
         </p:spPr>
         <p:txBody>
-          <a:bodyPr wrap="square" lIns="0" tIns="0">
+          <a:bodyPr wrap="square" lIns="0" tIns="0" rIns="0" bIns="0">
             <a:spAutoFit/>
           </a:bodyPr>
           <a:lstStyle/>
@@ -6017,35 +6067,35 @@
               <a:spcAft>
                 <a:spcPts val="0"/>
               </a:spcAft>
-              <a:defRPr sz="1000" b="0">
-                <a:solidFill>
-                  <a:srgbClr val="666666"/>
-                </a:solidFill>
-                <a:latin typeface="Calibri"/>
-              </a:defRPr>
-            </a:pPr>
-            <a:r>
-              <a:rPr sz="1000" b="0">
-                <a:solidFill>
-                  <a:srgbClr val="666666"/>
-                </a:solidFill>
-                <a:latin typeface="Calibri"/>
-              </a:rPr>
-              <a:t>Pathfinder Advanced - Op Program 12  |  Lesson 5</a:t>
-            </a:r>
-          </a:p>
-        </p:txBody>
-      </p:sp>
-      <p:sp>
-        <p:nvSpPr>
-          <p:cNvPr id="5" name="TextBox 4"/>
+              <a:defRPr sz="3600" b="1">
+                <a:solidFill>
+                  <a:srgbClr val="1F3A5F"/>
+                </a:solidFill>
+                <a:latin typeface="Calibri"/>
+              </a:defRPr>
+            </a:pPr>
+            <a:r>
+              <a:rPr sz="3600" b="1">
+                <a:solidFill>
+                  <a:srgbClr val="1F3A5F"/>
+                </a:solidFill>
+                <a:latin typeface="Calibri"/>
+              </a:rPr>
+              <a:t>Measuring a motor</a:t>
+            </a:r>
+          </a:p>
+        </p:txBody>
+      </p:sp>
+      <p:sp>
+        <p:nvSpPr>
+          <p:cNvPr id="6" name="TextBox 5"/>
           <p:cNvSpPr txBox="1"/>
           <p:nvPr/>
         </p:nvSpPr>
         <p:spPr>
           <a:xfrm>
-            <a:off x="11231575" y="6382512"/>
-            <a:ext cx="457200" cy="274320"/>
+            <a:off x="777240" y="2423160"/>
+            <a:ext cx="10515600" cy="685800"/>
           </a:xfrm>
           <a:prstGeom prst="rect">
             <a:avLst/>
@@ -6053,19 +6103,19 @@
           <a:noFill/>
         </p:spPr>
         <p:txBody>
-          <a:bodyPr wrap="square" lIns="0" tIns="0">
+          <a:bodyPr wrap="square" lIns="0" tIns="0" rIns="0" bIns="0">
             <a:spAutoFit/>
           </a:bodyPr>
           <a:lstStyle/>
           <a:p>
-            <a:pPr algn="r">
-              <a:lnSpc>
-                <a:spcPct val="100000"/>
-              </a:lnSpc>
-              <a:spcAft>
-                <a:spcPts val="0"/>
-              </a:spcAft>
-              <a:defRPr sz="1000" b="0">
+            <a:pPr algn="l">
+              <a:lnSpc>
+                <a:spcPct val="100000"/>
+              </a:lnSpc>
+              <a:spcAft>
+                <a:spcPts val="400"/>
+              </a:spcAft>
+              <a:defRPr sz="1600" b="0">
                 <a:solidFill>
                   <a:srgbClr val="666666"/>
                 </a:solidFill>
@@ -6073,27 +6123,27 @@
               </a:defRPr>
             </a:pPr>
             <a:r>
-              <a:rPr sz="1000" b="0">
+              <a:rPr sz="1600" b="0">
                 <a:solidFill>
                   <a:srgbClr val="666666"/>
                 </a:solidFill>
                 <a:latin typeface="Calibri"/>
               </a:rPr>
-              <a:t>9</a:t>
-            </a:r>
-          </a:p>
-        </p:txBody>
-      </p:sp>
-      <p:sp>
-        <p:nvSpPr>
-          <p:cNvPr id="6" name="Rounded Rectangle 5"/>
+              <a:t>About 35 minutes</a:t>
+            </a:r>
+          </a:p>
+        </p:txBody>
+      </p:sp>
+      <p:sp>
+        <p:nvSpPr>
+          <p:cNvPr id="7" name="Rounded Rectangle 6"/>
           <p:cNvSpPr/>
           <p:nvPr/>
         </p:nvSpPr>
         <p:spPr>
           <a:xfrm>
-            <a:off x="502920" y="2240280"/>
-            <a:ext cx="3631082" cy="1737360"/>
+            <a:off x="502920" y="3886200"/>
+            <a:ext cx="3631082" cy="1325880"/>
           </a:xfrm>
           <a:prstGeom prst="roundRect">
             <a:avLst>
@@ -6156,14 +6206,14 @@
       </p:sp>
       <p:sp>
         <p:nvSpPr>
-          <p:cNvPr id="7" name="TextBox 6"/>
+          <p:cNvPr id="8" name="TextBox 7"/>
           <p:cNvSpPr txBox="1"/>
           <p:nvPr/>
         </p:nvSpPr>
         <p:spPr>
           <a:xfrm>
-            <a:off x="502920" y="1856232"/>
-            <a:ext cx="3631082" cy="347472"/>
+            <a:off x="502920" y="3520440"/>
+            <a:ext cx="3631082" cy="310896"/>
           </a:xfrm>
           <a:prstGeom prst="rect">
             <a:avLst/>
@@ -6181,9 +6231,9 @@
                 <a:spcPct val="100000"/>
               </a:lnSpc>
               <a:spcAft>
-                <a:spcPts val="600"/>
-              </a:spcAft>
-              <a:defRPr sz="1200" b="1">
+                <a:spcPts val="200"/>
+              </a:spcAft>
+              <a:defRPr sz="1100" b="1">
                 <a:solidFill>
                   <a:srgbClr val="0E7C86"/>
                 </a:solidFill>
@@ -6191,7 +6241,7 @@
               </a:defRPr>
             </a:pPr>
             <a:r>
-              <a:rPr sz="1200" b="1">
+              <a:rPr sz="1100" b="1">
                 <a:solidFill>
                   <a:srgbClr val="0E7C86"/>
                 </a:solidFill>
@@ -6204,14 +6254,14 @@
       </p:sp>
       <p:sp>
         <p:nvSpPr>
-          <p:cNvPr id="8" name="Rounded Rectangle 7"/>
+          <p:cNvPr id="9" name="Rounded Rectangle 8"/>
           <p:cNvSpPr/>
           <p:nvPr/>
         </p:nvSpPr>
         <p:spPr>
           <a:xfrm>
-            <a:off x="4280306" y="2240280"/>
-            <a:ext cx="3631082" cy="1737360"/>
+            <a:off x="4280306" y="3886200"/>
+            <a:ext cx="3631082" cy="1325880"/>
           </a:xfrm>
           <a:prstGeom prst="roundRect">
             <a:avLst>
@@ -6274,14 +6324,14 @@
       </p:sp>
       <p:sp>
         <p:nvSpPr>
-          <p:cNvPr id="9" name="TextBox 8"/>
+          <p:cNvPr id="10" name="TextBox 9"/>
           <p:cNvSpPr txBox="1"/>
           <p:nvPr/>
         </p:nvSpPr>
         <p:spPr>
           <a:xfrm>
-            <a:off x="4280306" y="1856232"/>
-            <a:ext cx="3631082" cy="347472"/>
+            <a:off x="4280306" y="3520440"/>
+            <a:ext cx="3631082" cy="310896"/>
           </a:xfrm>
           <a:prstGeom prst="rect">
             <a:avLst/>
@@ -6299,9 +6349,9 @@
                 <a:spcPct val="100000"/>
               </a:lnSpc>
               <a:spcAft>
-                <a:spcPts val="600"/>
-              </a:spcAft>
-              <a:defRPr sz="1200" b="1">
+                <a:spcPts val="200"/>
+              </a:spcAft>
+              <a:defRPr sz="1100" b="1">
                 <a:solidFill>
                   <a:srgbClr val="0E7C86"/>
                 </a:solidFill>
@@ -6309,7 +6359,7 @@
               </a:defRPr>
             </a:pPr>
             <a:r>
-              <a:rPr sz="1200" b="1">
+              <a:rPr sz="1100" b="1">
                 <a:solidFill>
                   <a:srgbClr val="0E7C86"/>
                 </a:solidFill>
@@ -6322,14 +6372,14 @@
       </p:sp>
       <p:sp>
         <p:nvSpPr>
-          <p:cNvPr id="10" name="Rounded Rectangle 9"/>
+          <p:cNvPr id="11" name="Rounded Rectangle 10"/>
           <p:cNvSpPr/>
           <p:nvPr/>
         </p:nvSpPr>
         <p:spPr>
           <a:xfrm>
-            <a:off x="8057692" y="2240280"/>
-            <a:ext cx="3631082" cy="1737360"/>
+            <a:off x="8057692" y="3886200"/>
+            <a:ext cx="3631082" cy="1325880"/>
           </a:xfrm>
           <a:prstGeom prst="roundRect">
             <a:avLst>
@@ -6392,14 +6442,14 @@
       </p:sp>
       <p:sp>
         <p:nvSpPr>
-          <p:cNvPr id="11" name="TextBox 10"/>
+          <p:cNvPr id="12" name="TextBox 11"/>
           <p:cNvSpPr txBox="1"/>
           <p:nvPr/>
         </p:nvSpPr>
         <p:spPr>
           <a:xfrm>
-            <a:off x="8057692" y="1856232"/>
-            <a:ext cx="3631082" cy="347472"/>
+            <a:off x="8057692" y="3520440"/>
+            <a:ext cx="3631082" cy="310896"/>
           </a:xfrm>
           <a:prstGeom prst="rect">
             <a:avLst/>
@@ -6417,9 +6467,9 @@
                 <a:spcPct val="100000"/>
               </a:lnSpc>
               <a:spcAft>
-                <a:spcPts val="600"/>
-              </a:spcAft>
-              <a:defRPr sz="1200" b="1">
+                <a:spcPts val="200"/>
+              </a:spcAft>
+              <a:defRPr sz="1100" b="1">
                 <a:solidFill>
                   <a:srgbClr val="0E7C86"/>
                 </a:solidFill>
@@ -6427,7 +6477,7 @@
               </a:defRPr>
             </a:pPr>
             <a:r>
-              <a:rPr sz="1200" b="1">
+              <a:rPr sz="1100" b="1">
                 <a:solidFill>
                   <a:srgbClr val="0E7C86"/>
                 </a:solidFill>
@@ -15152,22 +15202,24 @@
       <p:grpSpPr/>
       <p:sp>
         <p:nvSpPr>
-          <p:cNvPr id="2" name="Title 1"/>
-          <p:cNvSpPr>
-            <a:spLocks noGrp="1"/>
-          </p:cNvSpPr>
-          <p:nvPr>
-            <p:ph type="title"/>
-          </p:nvPr>
-        </p:nvSpPr>
-        <p:spPr>
-          <a:xfrm>
-            <a:off x="502920" y="274320"/>
-            <a:ext cx="11185855" cy="777240"/>
-          </a:xfrm>
-        </p:spPr>
-        <p:txBody>
-          <a:bodyPr wrap="square" anchor="b"/>
+          <p:cNvPr id="2" name="TextBox 1"/>
+          <p:cNvSpPr txBox="1"/>
+          <p:nvPr/>
+        </p:nvSpPr>
+        <p:spPr>
+          <a:xfrm>
+            <a:off x="502920" y="6382512"/>
+            <a:ext cx="10545775" cy="274320"/>
+          </a:xfrm>
+          <a:prstGeom prst="rect">
+            <a:avLst/>
+          </a:prstGeom>
+          <a:noFill/>
+        </p:spPr>
+        <p:txBody>
+          <a:bodyPr wrap="square" lIns="0" tIns="0">
+            <a:spAutoFit/>
+          </a:bodyPr>
           <a:lstStyle/>
           <a:p>
             <a:pPr algn="l">
@@ -15177,41 +15229,89 @@
               <a:spcAft>
                 <a:spcPts val="0"/>
               </a:spcAft>
-              <a:defRPr sz="2800" b="1">
-                <a:solidFill>
-                  <a:srgbClr val="1F3A5F"/>
-                </a:solidFill>
-                <a:latin typeface="Calibri"/>
-              </a:defRPr>
-            </a:pPr>
-            <a:r>
-              <a:rPr sz="2800" b="1">
-                <a:solidFill>
-                  <a:srgbClr val="1F3A5F"/>
-                </a:solidFill>
-                <a:latin typeface="Calibri"/>
-              </a:rPr>
-              <a:t>Where we are</a:t>
-            </a:r>
-          </a:p>
-        </p:txBody>
-      </p:sp>
-      <p:sp>
-        <p:nvSpPr>
-          <p:cNvPr id="3" name="Rectangle 2"/>
+              <a:defRPr sz="1000" b="0">
+                <a:solidFill>
+                  <a:srgbClr val="666666"/>
+                </a:solidFill>
+                <a:latin typeface="Calibri"/>
+              </a:defRPr>
+            </a:pPr>
+            <a:r>
+              <a:rPr sz="1000" b="0">
+                <a:solidFill>
+                  <a:srgbClr val="666666"/>
+                </a:solidFill>
+                <a:latin typeface="Calibri"/>
+              </a:rPr>
+              <a:t>Pathfinder Advanced - Op Program 12  |  Lesson 5</a:t>
+            </a:r>
+          </a:p>
+        </p:txBody>
+      </p:sp>
+      <p:sp>
+        <p:nvSpPr>
+          <p:cNvPr id="3" name="TextBox 2"/>
+          <p:cNvSpPr txBox="1"/>
+          <p:nvPr/>
+        </p:nvSpPr>
+        <p:spPr>
+          <a:xfrm>
+            <a:off x="11231575" y="6382512"/>
+            <a:ext cx="457200" cy="274320"/>
+          </a:xfrm>
+          <a:prstGeom prst="rect">
+            <a:avLst/>
+          </a:prstGeom>
+          <a:noFill/>
+        </p:spPr>
+        <p:txBody>
+          <a:bodyPr wrap="square" lIns="0" tIns="0">
+            <a:spAutoFit/>
+          </a:bodyPr>
+          <a:lstStyle/>
+          <a:p>
+            <a:pPr algn="r">
+              <a:lnSpc>
+                <a:spcPct val="100000"/>
+              </a:lnSpc>
+              <a:spcAft>
+                <a:spcPts val="0"/>
+              </a:spcAft>
+              <a:defRPr sz="1000" b="0">
+                <a:solidFill>
+                  <a:srgbClr val="666666"/>
+                </a:solidFill>
+                <a:latin typeface="Calibri"/>
+              </a:defRPr>
+            </a:pPr>
+            <a:r>
+              <a:rPr sz="1000" b="0">
+                <a:solidFill>
+                  <a:srgbClr val="666666"/>
+                </a:solidFill>
+                <a:latin typeface="Calibri"/>
+              </a:rPr>
+              <a:t>4</a:t>
+            </a:r>
+          </a:p>
+        </p:txBody>
+      </p:sp>
+      <p:sp>
+        <p:nvSpPr>
+          <p:cNvPr id="4" name="Rectangle 3"/>
           <p:cNvSpPr/>
           <p:nvPr/>
         </p:nvSpPr>
         <p:spPr>
           <a:xfrm>
-            <a:off x="502920" y="1097280"/>
-            <a:ext cx="11185855" cy="19050"/>
+            <a:off x="0" y="1234440"/>
+            <a:ext cx="256032" cy="1554480"/>
           </a:xfrm>
           <a:prstGeom prst="rect">
             <a:avLst/>
           </a:prstGeom>
           <a:solidFill>
-            <a:srgbClr val="C8D2DE"/>
+            <a:srgbClr val="0E7C86"/>
           </a:solidFill>
           <a:ln>
             <a:noFill/>
@@ -15242,14 +15342,14 @@
       </p:sp>
       <p:sp>
         <p:nvSpPr>
-          <p:cNvPr id="4" name="TextBox 3"/>
+          <p:cNvPr id="5" name="TextBox 4"/>
           <p:cNvSpPr txBox="1"/>
           <p:nvPr/>
         </p:nvSpPr>
         <p:spPr>
           <a:xfrm>
-            <a:off x="502920" y="6382512"/>
-            <a:ext cx="10545775" cy="274320"/>
+            <a:off x="777240" y="1325880"/>
+            <a:ext cx="10515600" cy="1051560"/>
           </a:xfrm>
           <a:prstGeom prst="rect">
             <a:avLst/>
@@ -15257,7 +15357,7 @@
           <a:noFill/>
         </p:spPr>
         <p:txBody>
-          <a:bodyPr wrap="square" lIns="0" tIns="0">
+          <a:bodyPr wrap="square" lIns="0" tIns="0" rIns="0" bIns="0">
             <a:spAutoFit/>
           </a:bodyPr>
           <a:lstStyle/>
@@ -15269,35 +15369,35 @@
               <a:spcAft>
                 <a:spcPts val="0"/>
               </a:spcAft>
-              <a:defRPr sz="1000" b="0">
-                <a:solidFill>
-                  <a:srgbClr val="666666"/>
-                </a:solidFill>
-                <a:latin typeface="Calibri"/>
-              </a:defRPr>
-            </a:pPr>
-            <a:r>
-              <a:rPr sz="1000" b="0">
-                <a:solidFill>
-                  <a:srgbClr val="666666"/>
-                </a:solidFill>
-                <a:latin typeface="Calibri"/>
-              </a:rPr>
-              <a:t>Pathfinder Advanced - Op Program 12  |  Lesson 5</a:t>
-            </a:r>
-          </a:p>
-        </p:txBody>
-      </p:sp>
-      <p:sp>
-        <p:nvSpPr>
-          <p:cNvPr id="5" name="TextBox 4"/>
+              <a:defRPr sz="3600" b="1">
+                <a:solidFill>
+                  <a:srgbClr val="1F3A5F"/>
+                </a:solidFill>
+                <a:latin typeface="Calibri"/>
+              </a:defRPr>
+            </a:pPr>
+            <a:r>
+              <a:rPr sz="3600" b="1">
+                <a:solidFill>
+                  <a:srgbClr val="1F3A5F"/>
+                </a:solidFill>
+                <a:latin typeface="Calibri"/>
+              </a:rPr>
+              <a:t>Finding the sensor</a:t>
+            </a:r>
+          </a:p>
+        </p:txBody>
+      </p:sp>
+      <p:sp>
+        <p:nvSpPr>
+          <p:cNvPr id="6" name="TextBox 5"/>
           <p:cNvSpPr txBox="1"/>
           <p:nvPr/>
         </p:nvSpPr>
         <p:spPr>
           <a:xfrm>
-            <a:off x="11231575" y="6382512"/>
-            <a:ext cx="457200" cy="274320"/>
+            <a:off x="777240" y="2423160"/>
+            <a:ext cx="10515600" cy="685800"/>
           </a:xfrm>
           <a:prstGeom prst="rect">
             <a:avLst/>
@@ -15305,19 +15405,19 @@
           <a:noFill/>
         </p:spPr>
         <p:txBody>
-          <a:bodyPr wrap="square" lIns="0" tIns="0">
+          <a:bodyPr wrap="square" lIns="0" tIns="0" rIns="0" bIns="0">
             <a:spAutoFit/>
           </a:bodyPr>
           <a:lstStyle/>
           <a:p>
-            <a:pPr algn="r">
-              <a:lnSpc>
-                <a:spcPct val="100000"/>
-              </a:lnSpc>
-              <a:spcAft>
-                <a:spcPts val="0"/>
-              </a:spcAft>
-              <a:defRPr sz="1000" b="0">
+            <a:pPr algn="l">
+              <a:lnSpc>
+                <a:spcPct val="100000"/>
+              </a:lnSpc>
+              <a:spcAft>
+                <a:spcPts val="400"/>
+              </a:spcAft>
+              <a:defRPr sz="1600" b="0">
                 <a:solidFill>
                   <a:srgbClr val="666666"/>
                 </a:solidFill>
@@ -15325,27 +15425,27 @@
               </a:defRPr>
             </a:pPr>
             <a:r>
-              <a:rPr sz="1000" b="0">
+              <a:rPr sz="1600" b="0">
                 <a:solidFill>
                   <a:srgbClr val="666666"/>
                 </a:solidFill>
                 <a:latin typeface="Calibri"/>
               </a:rPr>
-              <a:t>4</a:t>
-            </a:r>
-          </a:p>
-        </p:txBody>
-      </p:sp>
-      <p:sp>
-        <p:nvSpPr>
-          <p:cNvPr id="6" name="Rounded Rectangle 5"/>
+              <a:t>About 25 minutes</a:t>
+            </a:r>
+          </a:p>
+        </p:txBody>
+      </p:sp>
+      <p:sp>
+        <p:nvSpPr>
+          <p:cNvPr id="7" name="Rounded Rectangle 6"/>
           <p:cNvSpPr/>
           <p:nvPr/>
         </p:nvSpPr>
         <p:spPr>
           <a:xfrm>
-            <a:off x="502920" y="2240280"/>
-            <a:ext cx="3631082" cy="1737360"/>
+            <a:off x="502920" y="3886200"/>
+            <a:ext cx="3631082" cy="1325880"/>
           </a:xfrm>
           <a:prstGeom prst="roundRect">
             <a:avLst>
@@ -15408,14 +15508,14 @@
       </p:sp>
       <p:sp>
         <p:nvSpPr>
-          <p:cNvPr id="7" name="TextBox 6"/>
+          <p:cNvPr id="8" name="TextBox 7"/>
           <p:cNvSpPr txBox="1"/>
           <p:nvPr/>
         </p:nvSpPr>
         <p:spPr>
           <a:xfrm>
-            <a:off x="502920" y="1856232"/>
-            <a:ext cx="3631082" cy="347472"/>
+            <a:off x="502920" y="3520440"/>
+            <a:ext cx="3631082" cy="310896"/>
           </a:xfrm>
           <a:prstGeom prst="rect">
             <a:avLst/>
@@ -15433,9 +15533,9 @@
                 <a:spcPct val="100000"/>
               </a:lnSpc>
               <a:spcAft>
-                <a:spcPts val="600"/>
-              </a:spcAft>
-              <a:defRPr sz="1200" b="1">
+                <a:spcPts val="200"/>
+              </a:spcAft>
+              <a:defRPr sz="1100" b="1">
                 <a:solidFill>
                   <a:srgbClr val="0E7C86"/>
                 </a:solidFill>
@@ -15443,7 +15543,7 @@
               </a:defRPr>
             </a:pPr>
             <a:r>
-              <a:rPr sz="1200" b="1">
+              <a:rPr sz="1100" b="1">
                 <a:solidFill>
                   <a:srgbClr val="0E7C86"/>
                 </a:solidFill>
@@ -15456,14 +15556,14 @@
       </p:sp>
       <p:sp>
         <p:nvSpPr>
-          <p:cNvPr id="8" name="Rounded Rectangle 7"/>
+          <p:cNvPr id="9" name="Rounded Rectangle 8"/>
           <p:cNvSpPr/>
           <p:nvPr/>
         </p:nvSpPr>
         <p:spPr>
           <a:xfrm>
-            <a:off x="4280306" y="2240280"/>
-            <a:ext cx="3631082" cy="1737360"/>
+            <a:off x="4280306" y="3886200"/>
+            <a:ext cx="3631082" cy="1325880"/>
           </a:xfrm>
           <a:prstGeom prst="roundRect">
             <a:avLst>
@@ -15526,14 +15626,14 @@
       </p:sp>
       <p:sp>
         <p:nvSpPr>
-          <p:cNvPr id="9" name="TextBox 8"/>
+          <p:cNvPr id="10" name="TextBox 9"/>
           <p:cNvSpPr txBox="1"/>
           <p:nvPr/>
         </p:nvSpPr>
         <p:spPr>
           <a:xfrm>
-            <a:off x="4280306" y="1856232"/>
-            <a:ext cx="3631082" cy="347472"/>
+            <a:off x="4280306" y="3520440"/>
+            <a:ext cx="3631082" cy="310896"/>
           </a:xfrm>
           <a:prstGeom prst="rect">
             <a:avLst/>
@@ -15551,9 +15651,9 @@
                 <a:spcPct val="100000"/>
               </a:lnSpc>
               <a:spcAft>
-                <a:spcPts val="600"/>
-              </a:spcAft>
-              <a:defRPr sz="1200" b="1">
+                <a:spcPts val="200"/>
+              </a:spcAft>
+              <a:defRPr sz="1100" b="1">
                 <a:solidFill>
                   <a:srgbClr val="0E7C86"/>
                 </a:solidFill>
@@ -15561,7 +15661,7 @@
               </a:defRPr>
             </a:pPr>
             <a:r>
-              <a:rPr sz="1200" b="1">
+              <a:rPr sz="1100" b="1">
                 <a:solidFill>
                   <a:srgbClr val="0E7C86"/>
                 </a:solidFill>
@@ -15574,14 +15674,14 @@
       </p:sp>
       <p:sp>
         <p:nvSpPr>
-          <p:cNvPr id="10" name="Rounded Rectangle 9"/>
+          <p:cNvPr id="11" name="Rounded Rectangle 10"/>
           <p:cNvSpPr/>
           <p:nvPr/>
         </p:nvSpPr>
         <p:spPr>
           <a:xfrm>
-            <a:off x="8057692" y="2240280"/>
-            <a:ext cx="3631082" cy="1737360"/>
+            <a:off x="8057692" y="3886200"/>
+            <a:ext cx="3631082" cy="1325880"/>
           </a:xfrm>
           <a:prstGeom prst="roundRect">
             <a:avLst>

--- a/ground-vehicle/docs/courses/advanced/l5_sensors_and_self_test.pptx
+++ b/ground-vehicle/docs/courses/advanced/l5_sensors_and_self_test.pptx
@@ -613,7 +613,31 @@
               <a:rPr sz="1200">
                 <a:latin typeface="Calibri"/>
               </a:rPr>
-              <a:t>Twenty seconds. Second activity.</a:t>
+              <a:t>No library. Two functions and a datasheet. That is the point of the slide.</a:t>
+            </a:r>
+          </a:p>
+          <a:p>
+            <a:r>
+              <a:rPr sz="1200">
+                <a:latin typeface="Calibri"/>
+              </a:rPr>
+              <a:t>The repeated start matters: a full stop would let another master grab the bus between writing the register number and reading the answer.</a:t>
+            </a:r>
+          </a:p>
+          <a:p>
+            <a:r>
+              <a:rPr sz="1200">
+                <a:latin typeface="Calibri"/>
+              </a:rPr>
+              <a:t>The signed read is the trap. Read the shunt register unsigned and every regenerative spike comes back as a huge positive number.</a:t>
+            </a:r>
+          </a:p>
+          <a:p>
+            <a:r>
+              <a:rPr sz="1200">
+                <a:latin typeface="Calibri"/>
+              </a:rPr>
+              <a:t>The bus voltage register keeps flags in the bottom three bits, which is why it shifts right by three. That is normal for register maps, and reading a datasheet is a skill worth naming.</a:t>
             </a:r>
           </a:p>
         </p:txBody>
@@ -2117,31 +2141,7 @@
               <a:rPr sz="1200">
                 <a:latin typeface="Calibri"/>
               </a:rPr>
-              <a:t>You cannot measure current directly. Say that first - it is the reason the whole shunt idea exists.</a:t>
-            </a:r>
-          </a:p>
-          <a:p>
-            <a:r>
-              <a:rPr sz="1200">
-                <a:latin typeface="Calibri"/>
-              </a:rPr>
-              <a:t>Do both power calculations on the board. 0.01 W against 0.4 W is the whole argument for a tiny resistor.</a:t>
-            </a:r>
-          </a:p>
-          <a:p>
-            <a:r>
-              <a:rPr sz="1200">
-                <a:latin typeface="Calibri"/>
-              </a:rPr>
-              <a:t>Five millivolts at two amps. Reading that accurately is the sensor's entire job, and it is why an INA219 exists rather than an analog input.</a:t>
-            </a:r>
-          </a:p>
-          <a:p>
-            <a:r>
-              <a:rPr sz="1200">
-                <a:latin typeface="Calibri"/>
-              </a:rPr>
-              <a:t>This is Ohm's law from the beginner course doing real work. Point back at it.</a:t>
+              <a:t>Twenty seconds. Second activity.</a:t>
             </a:r>
           </a:p>
         </p:txBody>
@@ -2214,7 +2214,7 @@
               <a:rPr sz="1200">
                 <a:latin typeface="Calibri"/>
               </a:rPr>
-              <a:t>Two relationships, and between them they explain every resistor and every current budget on this vehicle.</a:t>
+              <a:t>You cannot measure current directly. Say that first - it is the reason the whole shunt idea exists.</a:t>
             </a:r>
           </a:p>
           <a:p>
@@ -2222,7 +2222,7 @@
               <a:rPr sz="1200">
                 <a:latin typeface="Calibri"/>
               </a:rPr>
-              <a:t>Do one worked example on the board before they look at the slide, and make them tell you which quantity is the unknown.</a:t>
+              <a:t>Do both power calculations on the board. 0.01 W against 0.4 W is the whole argument for a tiny resistor.</a:t>
             </a:r>
           </a:p>
           <a:p>
@@ -2230,7 +2230,7 @@
               <a:rPr sz="1200">
                 <a:latin typeface="Calibri"/>
               </a:rPr>
-              <a:t>Units matter more than the algebra here. Volts, amps, ohms, watts - keep saying them.</a:t>
+              <a:t>Five millivolts at two amps. Reading that accurately is the sensor's entire job, and it is why an INA219 exists rather than an analog input.</a:t>
             </a:r>
           </a:p>
           <a:p>
@@ -2238,7 +2238,7 @@
               <a:rPr sz="1200">
                 <a:latin typeface="Calibri"/>
               </a:rPr>
-              <a:t>The reason this is in a robotics course: the LED resistor and the 32-LED current budget are both this, and getting them wrong smells of hot plastic.</a:t>
+              <a:t>This is Ohm's law from the beginner course doing real work. Point back at it.</a:t>
             </a:r>
           </a:p>
         </p:txBody>
@@ -2311,7 +2311,7 @@
               <a:rPr sz="1200">
                 <a:latin typeface="Calibri"/>
               </a:rPr>
-              <a:t>No library. Two functions and a datasheet. That is the point of the slide.</a:t>
+              <a:t>Two relationships, and between them they explain every resistor and every current budget on this vehicle.</a:t>
             </a:r>
           </a:p>
           <a:p>
@@ -2319,7 +2319,7 @@
               <a:rPr sz="1200">
                 <a:latin typeface="Calibri"/>
               </a:rPr>
-              <a:t>The repeated start matters: a full stop would let another master grab the bus between writing the register number and reading the answer.</a:t>
+              <a:t>Do one worked example on the board before they look at the slide, and make them tell you which quantity is the unknown.</a:t>
             </a:r>
           </a:p>
           <a:p>
@@ -2327,7 +2327,7 @@
               <a:rPr sz="1200">
                 <a:latin typeface="Calibri"/>
               </a:rPr>
-              <a:t>The signed read is the trap. Read the shunt register unsigned and every regenerative spike comes back as a huge positive number.</a:t>
+              <a:t>Units matter more than the algebra here. Volts, amps, ohms, watts - keep saying them.</a:t>
             </a:r>
           </a:p>
           <a:p>
@@ -2335,7 +2335,7 @@
               <a:rPr sz="1200">
                 <a:latin typeface="Calibri"/>
               </a:rPr>
-              <a:t>The bus voltage register keeps flags in the bottom three bits, which is why it shifts right by three. That is normal for register maps, and reading a datasheet is a skill worth naming.</a:t>
+              <a:t>The reason this is in a robotics course: the LED resistor and the 32-LED current budget are both this, and getting them wrong smells of hot plastic.</a:t>
             </a:r>
           </a:p>
         </p:txBody>
@@ -5900,24 +5900,22 @@
       <p:grpSpPr/>
       <p:sp>
         <p:nvSpPr>
-          <p:cNvPr id="2" name="TextBox 1"/>
-          <p:cNvSpPr txBox="1"/>
-          <p:nvPr/>
-        </p:nvSpPr>
-        <p:spPr>
-          <a:xfrm>
-            <a:off x="502920" y="6382512"/>
-            <a:ext cx="10545775" cy="274320"/>
-          </a:xfrm>
-          <a:prstGeom prst="rect">
-            <a:avLst/>
-          </a:prstGeom>
-          <a:noFill/>
-        </p:spPr>
-        <p:txBody>
-          <a:bodyPr wrap="square" lIns="0" tIns="0">
-            <a:spAutoFit/>
-          </a:bodyPr>
+          <p:cNvPr id="2" name="Title 1"/>
+          <p:cNvSpPr>
+            <a:spLocks noGrp="1"/>
+          </p:cNvSpPr>
+          <p:nvPr>
+            <p:ph type="title"/>
+          </p:nvPr>
+        </p:nvSpPr>
+        <p:spPr>
+          <a:xfrm>
+            <a:off x="502920" y="274320"/>
+            <a:ext cx="11185855" cy="777240"/>
+          </a:xfrm>
+        </p:spPr>
+        <p:txBody>
+          <a:bodyPr wrap="square" anchor="b"/>
           <a:lstStyle/>
           <a:p>
             <a:pPr algn="l">
@@ -5927,89 +5925,41 @@
               <a:spcAft>
                 <a:spcPts val="0"/>
               </a:spcAft>
-              <a:defRPr sz="1000" b="0">
-                <a:solidFill>
-                  <a:srgbClr val="666666"/>
-                </a:solidFill>
-                <a:latin typeface="Calibri"/>
-              </a:defRPr>
-            </a:pPr>
-            <a:r>
-              <a:rPr sz="1000" b="0">
-                <a:solidFill>
-                  <a:srgbClr val="666666"/>
-                </a:solidFill>
-                <a:latin typeface="Calibri"/>
-              </a:rPr>
-              <a:t>Pathfinder Advanced - Op Program 12  |  Lesson 5</a:t>
-            </a:r>
-          </a:p>
-        </p:txBody>
-      </p:sp>
-      <p:sp>
-        <p:nvSpPr>
-          <p:cNvPr id="3" name="TextBox 2"/>
-          <p:cNvSpPr txBox="1"/>
-          <p:nvPr/>
-        </p:nvSpPr>
-        <p:spPr>
-          <a:xfrm>
-            <a:off x="11231575" y="6382512"/>
-            <a:ext cx="457200" cy="274320"/>
-          </a:xfrm>
-          <a:prstGeom prst="rect">
-            <a:avLst/>
-          </a:prstGeom>
-          <a:noFill/>
-        </p:spPr>
-        <p:txBody>
-          <a:bodyPr wrap="square" lIns="0" tIns="0">
-            <a:spAutoFit/>
-          </a:bodyPr>
-          <a:lstStyle/>
-          <a:p>
-            <a:pPr algn="r">
-              <a:lnSpc>
-                <a:spcPct val="100000"/>
-              </a:lnSpc>
-              <a:spcAft>
-                <a:spcPts val="0"/>
-              </a:spcAft>
-              <a:defRPr sz="1000" b="0">
-                <a:solidFill>
-                  <a:srgbClr val="666666"/>
-                </a:solidFill>
-                <a:latin typeface="Calibri"/>
-              </a:defRPr>
-            </a:pPr>
-            <a:r>
-              <a:rPr sz="1000" b="0">
-                <a:solidFill>
-                  <a:srgbClr val="666666"/>
-                </a:solidFill>
-                <a:latin typeface="Calibri"/>
-              </a:rPr>
-              <a:t>9</a:t>
-            </a:r>
-          </a:p>
-        </p:txBody>
-      </p:sp>
-      <p:sp>
-        <p:nvSpPr>
-          <p:cNvPr id="4" name="Rectangle 3"/>
+              <a:defRPr sz="2800" b="1">
+                <a:solidFill>
+                  <a:srgbClr val="1F3A5F"/>
+                </a:solidFill>
+                <a:latin typeface="Calibri"/>
+              </a:defRPr>
+            </a:pPr>
+            <a:r>
+              <a:rPr sz="2800" b="1">
+                <a:solidFill>
+                  <a:srgbClr val="1F3A5F"/>
+                </a:solidFill>
+                <a:latin typeface="Calibri"/>
+              </a:rPr>
+              <a:t>Driving a chip with no library</a:t>
+            </a:r>
+          </a:p>
+        </p:txBody>
+      </p:sp>
+      <p:sp>
+        <p:nvSpPr>
+          <p:cNvPr id="3" name="Rectangle 2"/>
           <p:cNvSpPr/>
           <p:nvPr/>
         </p:nvSpPr>
         <p:spPr>
           <a:xfrm>
-            <a:off x="0" y="1234440"/>
-            <a:ext cx="256032" cy="1554480"/>
+            <a:off x="502920" y="1097280"/>
+            <a:ext cx="11185855" cy="19050"/>
           </a:xfrm>
           <a:prstGeom prst="rect">
             <a:avLst/>
           </a:prstGeom>
           <a:solidFill>
-            <a:srgbClr val="0E7C86"/>
+            <a:srgbClr val="C8D2DE"/>
           </a:solidFill>
           <a:ln>
             <a:noFill/>
@@ -6040,14 +5990,14 @@
       </p:sp>
       <p:sp>
         <p:nvSpPr>
-          <p:cNvPr id="5" name="TextBox 4"/>
+          <p:cNvPr id="4" name="TextBox 3"/>
           <p:cNvSpPr txBox="1"/>
           <p:nvPr/>
         </p:nvSpPr>
         <p:spPr>
           <a:xfrm>
-            <a:off x="777240" y="1325880"/>
-            <a:ext cx="10515600" cy="1051560"/>
+            <a:off x="502920" y="6382512"/>
+            <a:ext cx="10545775" cy="274320"/>
           </a:xfrm>
           <a:prstGeom prst="rect">
             <a:avLst/>
@@ -6055,7 +6005,7 @@
           <a:noFill/>
         </p:spPr>
         <p:txBody>
-          <a:bodyPr wrap="square" lIns="0" tIns="0" rIns="0" bIns="0">
+          <a:bodyPr wrap="square" lIns="0" tIns="0">
             <a:spAutoFit/>
           </a:bodyPr>
           <a:lstStyle/>
@@ -6067,35 +6017,35 @@
               <a:spcAft>
                 <a:spcPts val="0"/>
               </a:spcAft>
-              <a:defRPr sz="3600" b="1">
-                <a:solidFill>
-                  <a:srgbClr val="1F3A5F"/>
-                </a:solidFill>
-                <a:latin typeface="Calibri"/>
-              </a:defRPr>
-            </a:pPr>
-            <a:r>
-              <a:rPr sz="3600" b="1">
-                <a:solidFill>
-                  <a:srgbClr val="1F3A5F"/>
-                </a:solidFill>
-                <a:latin typeface="Calibri"/>
-              </a:rPr>
-              <a:t>Measuring a motor</a:t>
-            </a:r>
-          </a:p>
-        </p:txBody>
-      </p:sp>
-      <p:sp>
-        <p:nvSpPr>
-          <p:cNvPr id="6" name="TextBox 5"/>
+              <a:defRPr sz="1000" b="0">
+                <a:solidFill>
+                  <a:srgbClr val="666666"/>
+                </a:solidFill>
+                <a:latin typeface="Calibri"/>
+              </a:defRPr>
+            </a:pPr>
+            <a:r>
+              <a:rPr sz="1000" b="0">
+                <a:solidFill>
+                  <a:srgbClr val="666666"/>
+                </a:solidFill>
+                <a:latin typeface="Calibri"/>
+              </a:rPr>
+              <a:t>Pathfinder Advanced - Op Program 12  |  Lesson 5</a:t>
+            </a:r>
+          </a:p>
+        </p:txBody>
+      </p:sp>
+      <p:sp>
+        <p:nvSpPr>
+          <p:cNvPr id="5" name="TextBox 4"/>
           <p:cNvSpPr txBox="1"/>
           <p:nvPr/>
         </p:nvSpPr>
         <p:spPr>
           <a:xfrm>
-            <a:off x="777240" y="2423160"/>
-            <a:ext cx="10515600" cy="685800"/>
+            <a:off x="11231575" y="6382512"/>
+            <a:ext cx="457200" cy="274320"/>
           </a:xfrm>
           <a:prstGeom prst="rect">
             <a:avLst/>
@@ -6103,6 +6053,54 @@
           <a:noFill/>
         </p:spPr>
         <p:txBody>
+          <a:bodyPr wrap="square" lIns="0" tIns="0">
+            <a:spAutoFit/>
+          </a:bodyPr>
+          <a:lstStyle/>
+          <a:p>
+            <a:pPr algn="r">
+              <a:lnSpc>
+                <a:spcPct val="100000"/>
+              </a:lnSpc>
+              <a:spcAft>
+                <a:spcPts val="0"/>
+              </a:spcAft>
+              <a:defRPr sz="1000" b="0">
+                <a:solidFill>
+                  <a:srgbClr val="666666"/>
+                </a:solidFill>
+                <a:latin typeface="Calibri"/>
+              </a:defRPr>
+            </a:pPr>
+            <a:r>
+              <a:rPr sz="1000" b="0">
+                <a:solidFill>
+                  <a:srgbClr val="666666"/>
+                </a:solidFill>
+                <a:latin typeface="Calibri"/>
+              </a:rPr>
+              <a:t>9</a:t>
+            </a:r>
+          </a:p>
+        </p:txBody>
+      </p:sp>
+      <p:sp>
+        <p:nvSpPr>
+          <p:cNvPr id="6" name="TextBox 5"/>
+          <p:cNvSpPr txBox="1"/>
+          <p:nvPr/>
+        </p:nvSpPr>
+        <p:spPr>
+          <a:xfrm>
+            <a:off x="502920" y="1188720"/>
+            <a:ext cx="7047088" cy="274320"/>
+          </a:xfrm>
+          <a:prstGeom prst="rect">
+            <a:avLst/>
+          </a:prstGeom>
+          <a:noFill/>
+        </p:spPr>
+        <p:txBody>
           <a:bodyPr wrap="square" lIns="0" tIns="0" rIns="0" bIns="0">
             <a:spAutoFit/>
           </a:bodyPr>
@@ -6113,49 +6111,49 @@
                 <a:spcPct val="100000"/>
               </a:lnSpc>
               <a:spcAft>
-                <a:spcPts val="400"/>
-              </a:spcAft>
-              <a:defRPr sz="1600" b="0">
-                <a:solidFill>
-                  <a:srgbClr val="666666"/>
-                </a:solidFill>
-                <a:latin typeface="Calibri"/>
-              </a:defRPr>
-            </a:pPr>
-            <a:r>
-              <a:rPr sz="1600" b="0">
-                <a:solidFill>
-                  <a:srgbClr val="666666"/>
-                </a:solidFill>
-                <a:latin typeface="Calibri"/>
-              </a:rPr>
-              <a:t>About 35 minutes</a:t>
-            </a:r>
-          </a:p>
-        </p:txBody>
-      </p:sp>
-      <p:sp>
-        <p:nvSpPr>
-          <p:cNvPr id="7" name="Rounded Rectangle 6"/>
+                <a:spcPts val="200"/>
+              </a:spcAft>
+              <a:defRPr sz="1200" b="1">
+                <a:solidFill>
+                  <a:srgbClr val="0E7C86"/>
+                </a:solidFill>
+                <a:latin typeface="Consolas"/>
+              </a:defRPr>
+            </a:pPr>
+            <a:r>
+              <a:rPr sz="1200" b="1">
+                <a:solidFill>
+                  <a:srgbClr val="0E7C86"/>
+                </a:solidFill>
+                <a:latin typeface="Consolas"/>
+              </a:rPr>
+              <a:t>Sensors.ino</a:t>
+            </a:r>
+          </a:p>
+        </p:txBody>
+      </p:sp>
+      <p:sp>
+        <p:nvSpPr>
+          <p:cNvPr id="7" name="CODE_PANEL"/>
           <p:cNvSpPr/>
           <p:nvPr/>
         </p:nvSpPr>
         <p:spPr>
           <a:xfrm>
-            <a:off x="502920" y="3886200"/>
-            <a:ext cx="3631082" cy="1325880"/>
+            <a:off x="502920" y="1517904"/>
+            <a:ext cx="7047088" cy="4745736"/>
           </a:xfrm>
           <a:prstGeom prst="roundRect">
             <a:avLst>
-              <a:gd name="adj" fmla="val 8000"/>
+              <a:gd name="adj" fmla="val 4000"/>
             </a:avLst>
           </a:prstGeom>
           <a:solidFill>
-            <a:srgbClr val="EEF3F8"/>
+            <a:srgbClr val="F4F6F8"/>
           </a:solidFill>
           <a:ln w="12700">
             <a:solidFill>
-              <a:srgbClr val="0E7C86"/>
+              <a:srgbClr val="C8D2DE"/>
             </a:solidFill>
           </a:ln>
           <a:effectLst/>
@@ -6175,31 +6173,380 @@
           </a:fontRef>
         </p:style>
         <p:txBody>
-          <a:bodyPr rtlCol="0" anchor="ctr" wrap="square" lIns="73152" rIns="73152"/>
-          <a:lstStyle/>
-          <a:p>
-            <a:pPr algn="ctr">
+          <a:bodyPr rtlCol="0" anchor="t" wrap="square" lIns="146304" tIns="91440" bIns="73152"/>
+          <a:lstStyle/>
+          <a:p>
+            <a:pPr algn="l">
               <a:lnSpc>
                 <a:spcPct val="100000"/>
               </a:lnSpc>
               <a:spcAft>
                 <a:spcPts val="0"/>
               </a:spcAft>
-              <a:defRPr sz="1700" b="0">
-                <a:solidFill>
-                  <a:srgbClr val="1F3A5F"/>
-                </a:solidFill>
-                <a:latin typeface="Calibri"/>
-              </a:defRPr>
-            </a:pPr>
-            <a:r>
-              <a:rPr sz="1700" b="0">
-                <a:solidFill>
-                  <a:srgbClr val="1F3A5F"/>
-                </a:solidFill>
-                <a:latin typeface="Calibri"/>
-              </a:rPr>
-              <a:t>I2C</a:t>
+              <a:defRPr sz="1400">
+                <a:latin typeface="Consolas"/>
+              </a:defRPr>
+            </a:pPr>
+            <a:r>
+              <a:rPr sz="1400">
+                <a:solidFill>
+                  <a:srgbClr val="222222"/>
+                </a:solidFill>
+                <a:latin typeface="Consolas"/>
+              </a:rPr>
+              <a:t>uint16_t ina219_read16(uint8_t reg) {</a:t>
+            </a:r>
+          </a:p>
+          <a:p>
+            <a:pPr algn="l">
+              <a:lnSpc>
+                <a:spcPct val="100000"/>
+              </a:lnSpc>
+              <a:spcAft>
+                <a:spcPts val="0"/>
+              </a:spcAft>
+              <a:defRPr sz="1400">
+                <a:latin typeface="Consolas"/>
+              </a:defRPr>
+            </a:pPr>
+            <a:r>
+              <a:rPr sz="1400">
+                <a:solidFill>
+                  <a:srgbClr val="222222"/>
+                </a:solidFill>
+                <a:latin typeface="Consolas"/>
+              </a:rPr>
+              <a:t>  Wire.beginTransmission(INA219_I2C_ADDR);</a:t>
+            </a:r>
+          </a:p>
+          <a:p>
+            <a:pPr algn="l">
+              <a:lnSpc>
+                <a:spcPct val="100000"/>
+              </a:lnSpc>
+              <a:spcAft>
+                <a:spcPts val="0"/>
+              </a:spcAft>
+              <a:defRPr sz="1400">
+                <a:latin typeface="Consolas"/>
+              </a:defRPr>
+            </a:pPr>
+            <a:r>
+              <a:rPr sz="1400">
+                <a:solidFill>
+                  <a:srgbClr val="222222"/>
+                </a:solidFill>
+                <a:latin typeface="Consolas"/>
+              </a:rPr>
+              <a:t>  Wire.write(reg);</a:t>
+            </a:r>
+          </a:p>
+          <a:p>
+            <a:pPr algn="l">
+              <a:lnSpc>
+                <a:spcPct val="100000"/>
+              </a:lnSpc>
+              <a:spcAft>
+                <a:spcPts val="0"/>
+              </a:spcAft>
+              <a:defRPr sz="1400">
+                <a:latin typeface="Consolas"/>
+              </a:defRPr>
+            </a:pPr>
+            <a:r>
+              <a:rPr sz="1400" b="1">
+                <a:solidFill>
+                  <a:srgbClr val="0E7C86"/>
+                </a:solidFill>
+                <a:latin typeface="Consolas"/>
+              </a:rPr>
+              <a:t>  Wire.endTransmission(false);   // REPEATED START, keep the bus</a:t>
+            </a:r>
+          </a:p>
+          <a:p>
+            <a:pPr algn="l">
+              <a:lnSpc>
+                <a:spcPct val="100000"/>
+              </a:lnSpc>
+              <a:spcAft>
+                <a:spcPts val="0"/>
+              </a:spcAft>
+              <a:defRPr sz="1400">
+                <a:latin typeface="Consolas"/>
+              </a:defRPr>
+            </a:pPr>
+            <a:r>
+              <a:rPr sz="1400">
+                <a:solidFill>
+                  <a:srgbClr val="222222"/>
+                </a:solidFill>
+                <a:latin typeface="Consolas"/>
+              </a:rPr>
+              <a:t>  Wire.requestFrom((uint8_t)INA219_I2C_ADDR, (uint8_t)2);</a:t>
+            </a:r>
+          </a:p>
+          <a:p>
+            <a:pPr algn="l">
+              <a:lnSpc>
+                <a:spcPct val="100000"/>
+              </a:lnSpc>
+              <a:spcAft>
+                <a:spcPts val="0"/>
+              </a:spcAft>
+              <a:defRPr sz="1400">
+                <a:latin typeface="Consolas"/>
+              </a:defRPr>
+            </a:pPr>
+            <a:r>
+              <a:rPr sz="1400">
+                <a:solidFill>
+                  <a:srgbClr val="222222"/>
+                </a:solidFill>
+                <a:latin typeface="Consolas"/>
+              </a:rPr>
+              <a:t>  return Wire.available() &gt;= 2 ? (Wire.read() &lt;&lt; 8) | Wire.read() : 0;</a:t>
+            </a:r>
+          </a:p>
+          <a:p>
+            <a:pPr algn="l">
+              <a:lnSpc>
+                <a:spcPct val="100000"/>
+              </a:lnSpc>
+              <a:spcAft>
+                <a:spcPts val="0"/>
+              </a:spcAft>
+              <a:defRPr sz="1400">
+                <a:latin typeface="Consolas"/>
+              </a:defRPr>
+            </a:pPr>
+            <a:r>
+              <a:rPr sz="1400">
+                <a:solidFill>
+                  <a:srgbClr val="222222"/>
+                </a:solidFill>
+                <a:latin typeface="Consolas"/>
+              </a:rPr>
+              <a:t>}</a:t>
+            </a:r>
+          </a:p>
+          <a:p>
+            <a:pPr algn="l">
+              <a:lnSpc>
+                <a:spcPct val="100000"/>
+              </a:lnSpc>
+              <a:spcAft>
+                <a:spcPts val="0"/>
+              </a:spcAft>
+              <a:defRPr sz="1400">
+                <a:latin typeface="Consolas"/>
+              </a:defRPr>
+            </a:pPr>
+            <a:r>
+              <a:rPr sz="1400">
+                <a:solidFill>
+                  <a:srgbClr val="222222"/>
+                </a:solidFill>
+                <a:latin typeface="Consolas"/>
+              </a:rPr>
+              <a:t> </a:t>
+            </a:r>
+          </a:p>
+          <a:p>
+            <a:pPr algn="l">
+              <a:lnSpc>
+                <a:spcPct val="100000"/>
+              </a:lnSpc>
+              <a:spcAft>
+                <a:spcPts val="0"/>
+              </a:spcAft>
+              <a:defRPr sz="1400">
+                <a:latin typeface="Consolas"/>
+              </a:defRPr>
+            </a:pPr>
+            <a:r>
+              <a:rPr sz="1400">
+                <a:solidFill>
+                  <a:srgbClr val="222222"/>
+                </a:solidFill>
+                <a:latin typeface="Consolas"/>
+              </a:rPr>
+              <a:t>float readCurrentAmps() {</a:t>
+            </a:r>
+          </a:p>
+          <a:p>
+            <a:pPr algn="l">
+              <a:lnSpc>
+                <a:spcPct val="100000"/>
+              </a:lnSpc>
+              <a:spcAft>
+                <a:spcPts val="0"/>
+              </a:spcAft>
+              <a:defRPr sz="1400">
+                <a:latin typeface="Consolas"/>
+              </a:defRPr>
+            </a:pPr>
+            <a:r>
+              <a:rPr sz="1400" b="1">
+                <a:solidFill>
+                  <a:srgbClr val="0E7C86"/>
+                </a:solidFill>
+                <a:latin typeface="Consolas"/>
+              </a:rPr>
+              <a:t>  int16_t raw = (int16_t)ina219_read16(0x01);   // shunt reg, SIGNED</a:t>
+            </a:r>
+          </a:p>
+          <a:p>
+            <a:pPr algn="l">
+              <a:lnSpc>
+                <a:spcPct val="100000"/>
+              </a:lnSpc>
+              <a:spcAft>
+                <a:spcPts val="0"/>
+              </a:spcAft>
+              <a:defRPr sz="1400">
+                <a:latin typeface="Consolas"/>
+              </a:defRPr>
+            </a:pPr>
+            <a:r>
+              <a:rPr sz="1400">
+                <a:solidFill>
+                  <a:srgbClr val="222222"/>
+                </a:solidFill>
+                <a:latin typeface="Consolas"/>
+              </a:rPr>
+              <a:t>  return (raw * 0.01f) / (SHUNT_RESISTOR_OHMS * 1000.0f);</a:t>
+            </a:r>
+          </a:p>
+          <a:p>
+            <a:pPr algn="l">
+              <a:lnSpc>
+                <a:spcPct val="100000"/>
+              </a:lnSpc>
+              <a:spcAft>
+                <a:spcPts val="0"/>
+              </a:spcAft>
+              <a:defRPr sz="1400">
+                <a:latin typeface="Consolas"/>
+              </a:defRPr>
+            </a:pPr>
+            <a:r>
+              <a:rPr sz="1400">
+                <a:solidFill>
+                  <a:srgbClr val="222222"/>
+                </a:solidFill>
+                <a:latin typeface="Consolas"/>
+              </a:rPr>
+              <a:t>}</a:t>
+            </a:r>
+          </a:p>
+          <a:p>
+            <a:pPr algn="l">
+              <a:lnSpc>
+                <a:spcPct val="100000"/>
+              </a:lnSpc>
+              <a:spcAft>
+                <a:spcPts val="0"/>
+              </a:spcAft>
+              <a:defRPr sz="1400">
+                <a:latin typeface="Consolas"/>
+              </a:defRPr>
+            </a:pPr>
+            <a:r>
+              <a:rPr sz="1400">
+                <a:solidFill>
+                  <a:srgbClr val="222222"/>
+                </a:solidFill>
+                <a:latin typeface="Consolas"/>
+              </a:rPr>
+              <a:t> </a:t>
+            </a:r>
+          </a:p>
+          <a:p>
+            <a:pPr algn="l">
+              <a:lnSpc>
+                <a:spcPct val="100000"/>
+              </a:lnSpc>
+              <a:spcAft>
+                <a:spcPts val="0"/>
+              </a:spcAft>
+              <a:defRPr sz="1400">
+                <a:latin typeface="Consolas"/>
+              </a:defRPr>
+            </a:pPr>
+            <a:r>
+              <a:rPr sz="1400">
+                <a:solidFill>
+                  <a:srgbClr val="222222"/>
+                </a:solidFill>
+                <a:latin typeface="Consolas"/>
+              </a:rPr>
+              <a:t>float readBusVolts() {</a:t>
+            </a:r>
+          </a:p>
+          <a:p>
+            <a:pPr algn="l">
+              <a:lnSpc>
+                <a:spcPct val="100000"/>
+              </a:lnSpc>
+              <a:spcAft>
+                <a:spcPts val="0"/>
+              </a:spcAft>
+              <a:defRPr sz="1400">
+                <a:latin typeface="Consolas"/>
+              </a:defRPr>
+            </a:pPr>
+            <a:r>
+              <a:rPr sz="1400">
+                <a:solidFill>
+                  <a:srgbClr val="222222"/>
+                </a:solidFill>
+                <a:latin typeface="Consolas"/>
+              </a:rPr>
+              <a:t>  uint16_t value = ina219_read16(0x02);</a:t>
+            </a:r>
+          </a:p>
+          <a:p>
+            <a:pPr algn="l">
+              <a:lnSpc>
+                <a:spcPct val="100000"/>
+              </a:lnSpc>
+              <a:spcAft>
+                <a:spcPts val="0"/>
+              </a:spcAft>
+              <a:defRPr sz="1400">
+                <a:latin typeface="Consolas"/>
+              </a:defRPr>
+            </a:pPr>
+            <a:r>
+              <a:rPr sz="1400">
+                <a:solidFill>
+                  <a:srgbClr val="222222"/>
+                </a:solidFill>
+                <a:latin typeface="Consolas"/>
+              </a:rPr>
+              <a:t>  return (float)((value &gt;&gt; 3) * 4) * 0.001f;   // top 13 bits, 4 mV/count</a:t>
+            </a:r>
+          </a:p>
+          <a:p>
+            <a:pPr algn="l">
+              <a:lnSpc>
+                <a:spcPct val="100000"/>
+              </a:lnSpc>
+              <a:spcAft>
+                <a:spcPts val="0"/>
+              </a:spcAft>
+              <a:defRPr sz="1400">
+                <a:latin typeface="Consolas"/>
+              </a:defRPr>
+            </a:pPr>
+            <a:r>
+              <a:rPr sz="1400">
+                <a:solidFill>
+                  <a:srgbClr val="222222"/>
+                </a:solidFill>
+                <a:latin typeface="Consolas"/>
+              </a:rPr>
+              <a:t>}</a:t>
             </a:r>
           </a:p>
         </p:txBody>
@@ -6212,8 +6559,8 @@
         </p:nvSpPr>
         <p:spPr>
           <a:xfrm>
-            <a:off x="502920" y="3520440"/>
-            <a:ext cx="3631082" cy="310896"/>
+            <a:off x="7870048" y="1517904"/>
+            <a:ext cx="3818727" cy="4745736"/>
           </a:xfrm>
           <a:prstGeom prst="rect">
             <a:avLst/>
@@ -6226,264 +6573,103 @@
           </a:bodyPr>
           <a:lstStyle/>
           <a:p>
-            <a:pPr algn="ctr">
-              <a:lnSpc>
-                <a:spcPct val="100000"/>
-              </a:lnSpc>
-              <a:spcAft>
-                <a:spcPts val="200"/>
-              </a:spcAft>
-              <a:defRPr sz="1100" b="1">
-                <a:solidFill>
-                  <a:srgbClr val="0E7C86"/>
-                </a:solidFill>
-                <a:latin typeface="Calibri"/>
-              </a:defRPr>
-            </a:pPr>
-            <a:r>
-              <a:rPr sz="1100" b="1">
-                <a:solidFill>
-                  <a:srgbClr val="0E7C86"/>
-                </a:solidFill>
-                <a:latin typeface="Calibri"/>
-              </a:rPr>
-              <a:t>done</a:t>
-            </a:r>
-          </a:p>
-        </p:txBody>
-      </p:sp>
-      <p:sp>
-        <p:nvSpPr>
-          <p:cNvPr id="9" name="Rounded Rectangle 8"/>
-          <p:cNvSpPr/>
-          <p:nvPr/>
-        </p:nvSpPr>
-        <p:spPr>
-          <a:xfrm>
-            <a:off x="4280306" y="3886200"/>
-            <a:ext cx="3631082" cy="1325880"/>
-          </a:xfrm>
-          <a:prstGeom prst="roundRect">
-            <a:avLst>
-              <a:gd name="adj" fmla="val 8000"/>
-            </a:avLst>
-          </a:prstGeom>
-          <a:solidFill>
-            <a:srgbClr val="EEF3F8"/>
-          </a:solidFill>
-          <a:ln w="12700">
-            <a:solidFill>
-              <a:srgbClr val="0E7C86"/>
-            </a:solidFill>
-          </a:ln>
-          <a:effectLst/>
-        </p:spPr>
-        <p:style>
-          <a:lnRef idx="1">
-            <a:schemeClr val="accent1"/>
-          </a:lnRef>
-          <a:fillRef idx="3">
-            <a:schemeClr val="accent1"/>
-          </a:fillRef>
-          <a:effectRef idx="2">
-            <a:schemeClr val="accent1"/>
-          </a:effectRef>
-          <a:fontRef idx="minor">
-            <a:schemeClr val="lt1"/>
-          </a:fontRef>
-        </p:style>
-        <p:txBody>
-          <a:bodyPr rtlCol="0" anchor="ctr" wrap="square" lIns="73152" rIns="73152"/>
-          <a:lstStyle/>
-          <a:p>
-            <a:pPr algn="ctr">
-              <a:lnSpc>
-                <a:spcPct val="100000"/>
-              </a:lnSpc>
-              <a:spcAft>
-                <a:spcPts val="0"/>
-              </a:spcAft>
-              <a:defRPr sz="1700" b="0">
-                <a:solidFill>
-                  <a:srgbClr val="1F3A5F"/>
-                </a:solidFill>
-                <a:latin typeface="Calibri"/>
-              </a:defRPr>
-            </a:pPr>
-            <a:r>
-              <a:rPr sz="1700" b="0">
-                <a:solidFill>
-                  <a:srgbClr val="1F3A5F"/>
-                </a:solidFill>
-                <a:latin typeface="Calibri"/>
-              </a:rPr>
-              <a:t>Finding the sensor</a:t>
-            </a:r>
-          </a:p>
-        </p:txBody>
-      </p:sp>
-      <p:sp>
-        <p:nvSpPr>
-          <p:cNvPr id="10" name="TextBox 9"/>
-          <p:cNvSpPr txBox="1"/>
-          <p:nvPr/>
-        </p:nvSpPr>
-        <p:spPr>
-          <a:xfrm>
-            <a:off x="4280306" y="3520440"/>
-            <a:ext cx="3631082" cy="310896"/>
-          </a:xfrm>
-          <a:prstGeom prst="rect">
-            <a:avLst/>
-          </a:prstGeom>
-          <a:noFill/>
-        </p:spPr>
-        <p:txBody>
-          <a:bodyPr wrap="square" lIns="0" tIns="0" rIns="0" bIns="0">
-            <a:spAutoFit/>
-          </a:bodyPr>
-          <a:lstStyle/>
-          <a:p>
-            <a:pPr algn="ctr">
-              <a:lnSpc>
-                <a:spcPct val="100000"/>
-              </a:lnSpc>
-              <a:spcAft>
-                <a:spcPts val="200"/>
-              </a:spcAft>
-              <a:defRPr sz="1100" b="1">
-                <a:solidFill>
-                  <a:srgbClr val="0E7C86"/>
-                </a:solidFill>
-                <a:latin typeface="Calibri"/>
-              </a:defRPr>
-            </a:pPr>
-            <a:r>
-              <a:rPr sz="1100" b="1">
-                <a:solidFill>
-                  <a:srgbClr val="0E7C86"/>
-                </a:solidFill>
-                <a:latin typeface="Calibri"/>
-              </a:rPr>
-              <a:t>done</a:t>
-            </a:r>
-          </a:p>
-        </p:txBody>
-      </p:sp>
-      <p:sp>
-        <p:nvSpPr>
-          <p:cNvPr id="11" name="Rounded Rectangle 10"/>
-          <p:cNvSpPr/>
-          <p:nvPr/>
-        </p:nvSpPr>
-        <p:spPr>
-          <a:xfrm>
-            <a:off x="8057692" y="3886200"/>
-            <a:ext cx="3631082" cy="1325880"/>
-          </a:xfrm>
-          <a:prstGeom prst="roundRect">
-            <a:avLst>
-              <a:gd name="adj" fmla="val 8000"/>
-            </a:avLst>
-          </a:prstGeom>
-          <a:solidFill>
-            <a:srgbClr val="D6ECEE"/>
-          </a:solidFill>
-          <a:ln w="25400">
-            <a:solidFill>
-              <a:srgbClr val="0E7C86"/>
-            </a:solidFill>
-          </a:ln>
-          <a:effectLst/>
-        </p:spPr>
-        <p:style>
-          <a:lnRef idx="1">
-            <a:schemeClr val="accent1"/>
-          </a:lnRef>
-          <a:fillRef idx="3">
-            <a:schemeClr val="accent1"/>
-          </a:fillRef>
-          <a:effectRef idx="2">
-            <a:schemeClr val="accent1"/>
-          </a:effectRef>
-          <a:fontRef idx="minor">
-            <a:schemeClr val="lt1"/>
-          </a:fontRef>
-        </p:style>
-        <p:txBody>
-          <a:bodyPr rtlCol="0" anchor="ctr" wrap="square" lIns="73152" rIns="73152"/>
-          <a:lstStyle/>
-          <a:p>
-            <a:pPr algn="ctr">
-              <a:lnSpc>
-                <a:spcPct val="100000"/>
-              </a:lnSpc>
-              <a:spcAft>
-                <a:spcPts val="0"/>
-              </a:spcAft>
-              <a:defRPr sz="1700" b="1">
-                <a:solidFill>
-                  <a:srgbClr val="1F3A5F"/>
-                </a:solidFill>
-                <a:latin typeface="Calibri"/>
-              </a:defRPr>
-            </a:pPr>
-            <a:r>
-              <a:rPr sz="1700" b="1">
-                <a:solidFill>
-                  <a:srgbClr val="1F3A5F"/>
-                </a:solidFill>
-                <a:latin typeface="Calibri"/>
-              </a:rPr>
-              <a:t>Measuring a motor</a:t>
-            </a:r>
-          </a:p>
-        </p:txBody>
-      </p:sp>
-      <p:sp>
-        <p:nvSpPr>
-          <p:cNvPr id="12" name="TextBox 11"/>
-          <p:cNvSpPr txBox="1"/>
-          <p:nvPr/>
-        </p:nvSpPr>
-        <p:spPr>
-          <a:xfrm>
-            <a:off x="8057692" y="3520440"/>
-            <a:ext cx="3631082" cy="310896"/>
-          </a:xfrm>
-          <a:prstGeom prst="rect">
-            <a:avLst/>
-          </a:prstGeom>
-          <a:noFill/>
-        </p:spPr>
-        <p:txBody>
-          <a:bodyPr wrap="square" lIns="0" tIns="0" rIns="0" bIns="0">
-            <a:spAutoFit/>
-          </a:bodyPr>
-          <a:lstStyle/>
-          <a:p>
-            <a:pPr algn="ctr">
-              <a:lnSpc>
-                <a:spcPct val="100000"/>
-              </a:lnSpc>
-              <a:spcAft>
-                <a:spcPts val="200"/>
-              </a:spcAft>
-              <a:defRPr sz="1100" b="1">
-                <a:solidFill>
-                  <a:srgbClr val="0E7C86"/>
-                </a:solidFill>
-                <a:latin typeface="Calibri"/>
-              </a:defRPr>
-            </a:pPr>
-            <a:r>
-              <a:rPr sz="1100" b="1">
-                <a:solidFill>
-                  <a:srgbClr val="0E7C86"/>
-                </a:solidFill>
-                <a:latin typeface="Calibri"/>
-              </a:rPr>
-              <a:t>NOW</a:t>
+            <a:pPr algn="l">
+              <a:lnSpc>
+                <a:spcPct val="100000"/>
+              </a:lnSpc>
+              <a:spcAft>
+                <a:spcPts val="700"/>
+              </a:spcAft>
+              <a:defRPr sz="2100" b="0">
+                <a:solidFill>
+                  <a:srgbClr val="222222"/>
+                </a:solidFill>
+                <a:latin typeface="Calibri"/>
+              </a:defRPr>
+            </a:pPr>
+            <a:r>
+              <a:rPr sz="2100" b="0">
+                <a:solidFill>
+                  <a:srgbClr val="222222"/>
+                </a:solidFill>
+                <a:latin typeface="Calibri"/>
+              </a:rPr>
+              <a:t>endTransmission(FALSE) is a repeated start. A full stop would let another master grab the bus mid-read.</a:t>
+            </a:r>
+          </a:p>
+          <a:p>
+            <a:pPr algn="l">
+              <a:lnSpc>
+                <a:spcPct val="100000"/>
+              </a:lnSpc>
+              <a:spcAft>
+                <a:spcPts val="700"/>
+              </a:spcAft>
+              <a:defRPr sz="2100" b="0">
+                <a:solidFill>
+                  <a:srgbClr val="222222"/>
+                </a:solidFill>
+                <a:latin typeface="Calibri"/>
+              </a:defRPr>
+            </a:pPr>
+            <a:r>
+              <a:rPr sz="2100" b="0">
+                <a:solidFill>
+                  <a:srgbClr val="222222"/>
+                </a:solidFill>
+                <a:latin typeface="Calibri"/>
+              </a:rPr>
+              <a:t>The shunt register is SIGNED. Read it unsigned and every braking current becomes a huge positive number.</a:t>
+            </a:r>
+          </a:p>
+          <a:p>
+            <a:pPr algn="l">
+              <a:lnSpc>
+                <a:spcPct val="100000"/>
+              </a:lnSpc>
+              <a:spcAft>
+                <a:spcPts val="700"/>
+              </a:spcAft>
+              <a:defRPr sz="2100" b="0">
+                <a:solidFill>
+                  <a:srgbClr val="222222"/>
+                </a:solidFill>
+                <a:latin typeface="Calibri"/>
+              </a:defRPr>
+            </a:pPr>
+            <a:r>
+              <a:rPr sz="2100" b="0">
+                <a:solidFill>
+                  <a:srgbClr val="222222"/>
+                </a:solidFill>
+                <a:latin typeface="Calibri"/>
+              </a:rPr>
+              <a:t>Bus voltage sits in the top 13 bits, so it is shifted down.</a:t>
+            </a:r>
+          </a:p>
+          <a:p>
+            <a:pPr algn="l">
+              <a:lnSpc>
+                <a:spcPct val="100000"/>
+              </a:lnSpc>
+              <a:spcAft>
+                <a:spcPts val="700"/>
+              </a:spcAft>
+              <a:defRPr sz="2100" b="0">
+                <a:solidFill>
+                  <a:srgbClr val="222222"/>
+                </a:solidFill>
+                <a:latin typeface="Calibri"/>
+              </a:defRPr>
+            </a:pPr>
+            <a:r>
+              <a:rPr sz="2100" b="0">
+                <a:solidFill>
+                  <a:srgbClr val="222222"/>
+                </a:solidFill>
+                <a:latin typeface="Calibri"/>
+              </a:rPr>
+              <a:t>Forty lines of your own beats a library you cannot read.</a:t>
             </a:r>
           </a:p>
         </p:txBody>
@@ -16404,22 +16590,24 @@
       <p:grpSpPr/>
       <p:sp>
         <p:nvSpPr>
-          <p:cNvPr id="2" name="Title 1"/>
-          <p:cNvSpPr>
-            <a:spLocks noGrp="1"/>
-          </p:cNvSpPr>
-          <p:nvPr>
-            <p:ph type="title"/>
-          </p:nvPr>
-        </p:nvSpPr>
-        <p:spPr>
-          <a:xfrm>
-            <a:off x="502920" y="274320"/>
-            <a:ext cx="11185855" cy="777240"/>
-          </a:xfrm>
-        </p:spPr>
-        <p:txBody>
-          <a:bodyPr wrap="square" anchor="b"/>
+          <p:cNvPr id="2" name="TextBox 1"/>
+          <p:cNvSpPr txBox="1"/>
+          <p:nvPr/>
+        </p:nvSpPr>
+        <p:spPr>
+          <a:xfrm>
+            <a:off x="502920" y="6382512"/>
+            <a:ext cx="10545775" cy="274320"/>
+          </a:xfrm>
+          <a:prstGeom prst="rect">
+            <a:avLst/>
+          </a:prstGeom>
+          <a:noFill/>
+        </p:spPr>
+        <p:txBody>
+          <a:bodyPr wrap="square" lIns="0" tIns="0">
+            <a:spAutoFit/>
+          </a:bodyPr>
           <a:lstStyle/>
           <a:p>
             <a:pPr algn="l">
@@ -16429,41 +16617,89 @@
               <a:spcAft>
                 <a:spcPts val="0"/>
               </a:spcAft>
-              <a:defRPr sz="2800" b="1">
-                <a:solidFill>
-                  <a:srgbClr val="1F3A5F"/>
-                </a:solidFill>
-                <a:latin typeface="Calibri"/>
-              </a:defRPr>
-            </a:pPr>
-            <a:r>
-              <a:rPr sz="2800" b="1">
-                <a:solidFill>
-                  <a:srgbClr val="1F3A5F"/>
-                </a:solidFill>
-                <a:latin typeface="Calibri"/>
-              </a:rPr>
-              <a:t>Measuring current without getting in the way of it</a:t>
-            </a:r>
-          </a:p>
-        </p:txBody>
-      </p:sp>
-      <p:sp>
-        <p:nvSpPr>
-          <p:cNvPr id="3" name="Rectangle 2"/>
+              <a:defRPr sz="1000" b="0">
+                <a:solidFill>
+                  <a:srgbClr val="666666"/>
+                </a:solidFill>
+                <a:latin typeface="Calibri"/>
+              </a:defRPr>
+            </a:pPr>
+            <a:r>
+              <a:rPr sz="1000" b="0">
+                <a:solidFill>
+                  <a:srgbClr val="666666"/>
+                </a:solidFill>
+                <a:latin typeface="Calibri"/>
+              </a:rPr>
+              <a:t>Pathfinder Advanced - Op Program 12  |  Lesson 5</a:t>
+            </a:r>
+          </a:p>
+        </p:txBody>
+      </p:sp>
+      <p:sp>
+        <p:nvSpPr>
+          <p:cNvPr id="3" name="TextBox 2"/>
+          <p:cNvSpPr txBox="1"/>
+          <p:nvPr/>
+        </p:nvSpPr>
+        <p:spPr>
+          <a:xfrm>
+            <a:off x="11231575" y="6382512"/>
+            <a:ext cx="457200" cy="274320"/>
+          </a:xfrm>
+          <a:prstGeom prst="rect">
+            <a:avLst/>
+          </a:prstGeom>
+          <a:noFill/>
+        </p:spPr>
+        <p:txBody>
+          <a:bodyPr wrap="square" lIns="0" tIns="0">
+            <a:spAutoFit/>
+          </a:bodyPr>
+          <a:lstStyle/>
+          <a:p>
+            <a:pPr algn="r">
+              <a:lnSpc>
+                <a:spcPct val="100000"/>
+              </a:lnSpc>
+              <a:spcAft>
+                <a:spcPts val="0"/>
+              </a:spcAft>
+              <a:defRPr sz="1000" b="0">
+                <a:solidFill>
+                  <a:srgbClr val="666666"/>
+                </a:solidFill>
+                <a:latin typeface="Calibri"/>
+              </a:defRPr>
+            </a:pPr>
+            <a:r>
+              <a:rPr sz="1000" b="0">
+                <a:solidFill>
+                  <a:srgbClr val="666666"/>
+                </a:solidFill>
+                <a:latin typeface="Calibri"/>
+              </a:rPr>
+              <a:t>6</a:t>
+            </a:r>
+          </a:p>
+        </p:txBody>
+      </p:sp>
+      <p:sp>
+        <p:nvSpPr>
+          <p:cNvPr id="4" name="Rectangle 3"/>
           <p:cNvSpPr/>
           <p:nvPr/>
         </p:nvSpPr>
         <p:spPr>
           <a:xfrm>
-            <a:off x="502920" y="1097280"/>
-            <a:ext cx="11185855" cy="19050"/>
+            <a:off x="0" y="1234440"/>
+            <a:ext cx="256032" cy="1554480"/>
           </a:xfrm>
           <a:prstGeom prst="rect">
             <a:avLst/>
           </a:prstGeom>
           <a:solidFill>
-            <a:srgbClr val="C8D2DE"/>
+            <a:srgbClr val="0E7C86"/>
           </a:solidFill>
           <a:ln>
             <a:noFill/>
@@ -16494,14 +16730,14 @@
       </p:sp>
       <p:sp>
         <p:nvSpPr>
-          <p:cNvPr id="4" name="TextBox 3"/>
+          <p:cNvPr id="5" name="TextBox 4"/>
           <p:cNvSpPr txBox="1"/>
           <p:nvPr/>
         </p:nvSpPr>
         <p:spPr>
           <a:xfrm>
-            <a:off x="502920" y="6382512"/>
-            <a:ext cx="10545775" cy="274320"/>
+            <a:off x="777240" y="1325880"/>
+            <a:ext cx="10515600" cy="1051560"/>
           </a:xfrm>
           <a:prstGeom prst="rect">
             <a:avLst/>
@@ -16509,7 +16745,7 @@
           <a:noFill/>
         </p:spPr>
         <p:txBody>
-          <a:bodyPr wrap="square" lIns="0" tIns="0">
+          <a:bodyPr wrap="square" lIns="0" tIns="0" rIns="0" bIns="0">
             <a:spAutoFit/>
           </a:bodyPr>
           <a:lstStyle/>
@@ -16521,35 +16757,35 @@
               <a:spcAft>
                 <a:spcPts val="0"/>
               </a:spcAft>
-              <a:defRPr sz="1000" b="0">
-                <a:solidFill>
-                  <a:srgbClr val="666666"/>
-                </a:solidFill>
-                <a:latin typeface="Calibri"/>
-              </a:defRPr>
-            </a:pPr>
-            <a:r>
-              <a:rPr sz="1000" b="0">
-                <a:solidFill>
-                  <a:srgbClr val="666666"/>
-                </a:solidFill>
-                <a:latin typeface="Calibri"/>
-              </a:rPr>
-              <a:t>Pathfinder Advanced - Op Program 12  |  Lesson 5</a:t>
-            </a:r>
-          </a:p>
-        </p:txBody>
-      </p:sp>
-      <p:sp>
-        <p:nvSpPr>
-          <p:cNvPr id="5" name="TextBox 4"/>
+              <a:defRPr sz="3600" b="1">
+                <a:solidFill>
+                  <a:srgbClr val="1F3A5F"/>
+                </a:solidFill>
+                <a:latin typeface="Calibri"/>
+              </a:defRPr>
+            </a:pPr>
+            <a:r>
+              <a:rPr sz="3600" b="1">
+                <a:solidFill>
+                  <a:srgbClr val="1F3A5F"/>
+                </a:solidFill>
+                <a:latin typeface="Calibri"/>
+              </a:rPr>
+              <a:t>Measuring a motor</a:t>
+            </a:r>
+          </a:p>
+        </p:txBody>
+      </p:sp>
+      <p:sp>
+        <p:nvSpPr>
+          <p:cNvPr id="6" name="TextBox 5"/>
           <p:cNvSpPr txBox="1"/>
           <p:nvPr/>
         </p:nvSpPr>
         <p:spPr>
           <a:xfrm>
-            <a:off x="11231575" y="6382512"/>
-            <a:ext cx="457200" cy="274320"/>
+            <a:off x="777240" y="2423160"/>
+            <a:ext cx="10515600" cy="685800"/>
           </a:xfrm>
           <a:prstGeom prst="rect">
             <a:avLst/>
@@ -16557,47 +16793,117 @@
           <a:noFill/>
         </p:spPr>
         <p:txBody>
-          <a:bodyPr wrap="square" lIns="0" tIns="0">
+          <a:bodyPr wrap="square" lIns="0" tIns="0" rIns="0" bIns="0">
             <a:spAutoFit/>
           </a:bodyPr>
           <a:lstStyle/>
           <a:p>
-            <a:pPr algn="r">
+            <a:pPr algn="l">
+              <a:lnSpc>
+                <a:spcPct val="100000"/>
+              </a:lnSpc>
+              <a:spcAft>
+                <a:spcPts val="400"/>
+              </a:spcAft>
+              <a:defRPr sz="1600" b="0">
+                <a:solidFill>
+                  <a:srgbClr val="666666"/>
+                </a:solidFill>
+                <a:latin typeface="Calibri"/>
+              </a:defRPr>
+            </a:pPr>
+            <a:r>
+              <a:rPr sz="1600" b="0">
+                <a:solidFill>
+                  <a:srgbClr val="666666"/>
+                </a:solidFill>
+                <a:latin typeface="Calibri"/>
+              </a:rPr>
+              <a:t>About 80 minutes</a:t>
+            </a:r>
+          </a:p>
+        </p:txBody>
+      </p:sp>
+      <p:sp>
+        <p:nvSpPr>
+          <p:cNvPr id="7" name="Rounded Rectangle 6"/>
+          <p:cNvSpPr/>
+          <p:nvPr/>
+        </p:nvSpPr>
+        <p:spPr>
+          <a:xfrm>
+            <a:off x="502920" y="3886200"/>
+            <a:ext cx="3631082" cy="1325880"/>
+          </a:xfrm>
+          <a:prstGeom prst="roundRect">
+            <a:avLst>
+              <a:gd name="adj" fmla="val 8000"/>
+            </a:avLst>
+          </a:prstGeom>
+          <a:solidFill>
+            <a:srgbClr val="EEF3F8"/>
+          </a:solidFill>
+          <a:ln w="12700">
+            <a:solidFill>
+              <a:srgbClr val="0E7C86"/>
+            </a:solidFill>
+          </a:ln>
+          <a:effectLst/>
+        </p:spPr>
+        <p:style>
+          <a:lnRef idx="1">
+            <a:schemeClr val="accent1"/>
+          </a:lnRef>
+          <a:fillRef idx="3">
+            <a:schemeClr val="accent1"/>
+          </a:fillRef>
+          <a:effectRef idx="2">
+            <a:schemeClr val="accent1"/>
+          </a:effectRef>
+          <a:fontRef idx="minor">
+            <a:schemeClr val="lt1"/>
+          </a:fontRef>
+        </p:style>
+        <p:txBody>
+          <a:bodyPr rtlCol="0" anchor="ctr" wrap="square" lIns="73152" rIns="73152"/>
+          <a:lstStyle/>
+          <a:p>
+            <a:pPr algn="ctr">
               <a:lnSpc>
                 <a:spcPct val="100000"/>
               </a:lnSpc>
               <a:spcAft>
                 <a:spcPts val="0"/>
               </a:spcAft>
-              <a:defRPr sz="1000" b="0">
-                <a:solidFill>
-                  <a:srgbClr val="666666"/>
-                </a:solidFill>
-                <a:latin typeface="Calibri"/>
-              </a:defRPr>
-            </a:pPr>
-            <a:r>
-              <a:rPr sz="1000" b="0">
-                <a:solidFill>
-                  <a:srgbClr val="666666"/>
-                </a:solidFill>
-                <a:latin typeface="Calibri"/>
-              </a:rPr>
-              <a:t>6</a:t>
-            </a:r>
-          </a:p>
-        </p:txBody>
-      </p:sp>
-      <p:sp>
-        <p:nvSpPr>
-          <p:cNvPr id="6" name="TextBox 5"/>
+              <a:defRPr sz="1700" b="0">
+                <a:solidFill>
+                  <a:srgbClr val="1F3A5F"/>
+                </a:solidFill>
+                <a:latin typeface="Calibri"/>
+              </a:defRPr>
+            </a:pPr>
+            <a:r>
+              <a:rPr sz="1700" b="0">
+                <a:solidFill>
+                  <a:srgbClr val="1F3A5F"/>
+                </a:solidFill>
+                <a:latin typeface="Calibri"/>
+              </a:rPr>
+              <a:t>I2C</a:t>
+            </a:r>
+          </a:p>
+        </p:txBody>
+      </p:sp>
+      <p:sp>
+        <p:nvSpPr>
+          <p:cNvPr id="8" name="TextBox 7"/>
           <p:cNvSpPr txBox="1"/>
           <p:nvPr/>
         </p:nvSpPr>
         <p:spPr>
           <a:xfrm>
-            <a:off x="502920" y="1188720"/>
-            <a:ext cx="11185855" cy="530352"/>
+            <a:off x="502920" y="3520440"/>
+            <a:ext cx="3631082" cy="310896"/>
           </a:xfrm>
           <a:prstGeom prst="rect">
             <a:avLst/>
@@ -16610,14 +16916,14 @@
           </a:bodyPr>
           <a:lstStyle/>
           <a:p>
-            <a:pPr algn="l">
-              <a:lnSpc>
-                <a:spcPct val="100000"/>
-              </a:lnSpc>
-              <a:spcAft>
-                <a:spcPts val="600"/>
-              </a:spcAft>
-              <a:defRPr sz="1900" b="1">
+            <a:pPr algn="ctr">
+              <a:lnSpc>
+                <a:spcPct val="100000"/>
+              </a:lnSpc>
+              <a:spcAft>
+                <a:spcPts val="200"/>
+              </a:spcAft>
+              <a:defRPr sz="1100" b="1">
                 <a:solidFill>
                   <a:srgbClr val="0E7C86"/>
                 </a:solidFill>
@@ -16625,27 +16931,97 @@
               </a:defRPr>
             </a:pPr>
             <a:r>
-              <a:rPr sz="1900" b="1">
+              <a:rPr sz="1100" b="1">
                 <a:solidFill>
                   <a:srgbClr val="0E7C86"/>
                 </a:solidFill>
                 <a:latin typeface="Calibri"/>
               </a:rPr>
-              <a:t>A tiny resistor, and Ohm's law</a:t>
-            </a:r>
-          </a:p>
-        </p:txBody>
-      </p:sp>
-      <p:sp>
-        <p:nvSpPr>
-          <p:cNvPr id="7" name="TextBox 6"/>
+              <a:t>done</a:t>
+            </a:r>
+          </a:p>
+        </p:txBody>
+      </p:sp>
+      <p:sp>
+        <p:nvSpPr>
+          <p:cNvPr id="9" name="Rounded Rectangle 8"/>
+          <p:cNvSpPr/>
+          <p:nvPr/>
+        </p:nvSpPr>
+        <p:spPr>
+          <a:xfrm>
+            <a:off x="4280306" y="3886200"/>
+            <a:ext cx="3631082" cy="1325880"/>
+          </a:xfrm>
+          <a:prstGeom prst="roundRect">
+            <a:avLst>
+              <a:gd name="adj" fmla="val 8000"/>
+            </a:avLst>
+          </a:prstGeom>
+          <a:solidFill>
+            <a:srgbClr val="EEF3F8"/>
+          </a:solidFill>
+          <a:ln w="12700">
+            <a:solidFill>
+              <a:srgbClr val="0E7C86"/>
+            </a:solidFill>
+          </a:ln>
+          <a:effectLst/>
+        </p:spPr>
+        <p:style>
+          <a:lnRef idx="1">
+            <a:schemeClr val="accent1"/>
+          </a:lnRef>
+          <a:fillRef idx="3">
+            <a:schemeClr val="accent1"/>
+          </a:fillRef>
+          <a:effectRef idx="2">
+            <a:schemeClr val="accent1"/>
+          </a:effectRef>
+          <a:fontRef idx="minor">
+            <a:schemeClr val="lt1"/>
+          </a:fontRef>
+        </p:style>
+        <p:txBody>
+          <a:bodyPr rtlCol="0" anchor="ctr" wrap="square" lIns="73152" rIns="73152"/>
+          <a:lstStyle/>
+          <a:p>
+            <a:pPr algn="ctr">
+              <a:lnSpc>
+                <a:spcPct val="100000"/>
+              </a:lnSpc>
+              <a:spcAft>
+                <a:spcPts val="0"/>
+              </a:spcAft>
+              <a:defRPr sz="1700" b="0">
+                <a:solidFill>
+                  <a:srgbClr val="1F3A5F"/>
+                </a:solidFill>
+                <a:latin typeface="Calibri"/>
+              </a:defRPr>
+            </a:pPr>
+            <a:r>
+              <a:rPr sz="1700" b="0">
+                <a:solidFill>
+                  <a:srgbClr val="1F3A5F"/>
+                </a:solidFill>
+                <a:latin typeface="Calibri"/>
+              </a:rPr>
+              <a:t>Finding the sensor</a:t>
+            </a:r>
+          </a:p>
+        </p:txBody>
+      </p:sp>
+      <p:sp>
+        <p:nvSpPr>
+          <p:cNvPr id="10" name="TextBox 9"/>
           <p:cNvSpPr txBox="1"/>
           <p:nvPr/>
         </p:nvSpPr>
         <p:spPr>
           <a:xfrm>
-            <a:off x="502920" y="1755648"/>
-            <a:ext cx="11185855" cy="4507992"/>
+            <a:off x="4280306" y="3520440"/>
+            <a:ext cx="3631082" cy="310896"/>
           </a:xfrm>
           <a:prstGeom prst="rect">
             <a:avLst/>
@@ -16658,251 +17034,146 @@
           </a:bodyPr>
           <a:lstStyle/>
           <a:p>
-            <a:pPr algn="l">
-              <a:lnSpc>
-                <a:spcPct val="100000"/>
-              </a:lnSpc>
-              <a:spcAft>
-                <a:spcPts val="600"/>
-              </a:spcAft>
-              <a:defRPr sz="1800" b="0">
-                <a:solidFill>
-                  <a:srgbClr val="222222"/>
-                </a:solidFill>
-                <a:latin typeface="Calibri"/>
-              </a:defRPr>
-            </a:pPr>
-            <a:r>
-              <a:rPr sz="1800" b="0">
-                <a:solidFill>
-                  <a:srgbClr val="222222"/>
-                </a:solidFill>
-                <a:latin typeface="Calibri"/>
-              </a:rPr>
-              <a:t>You cannot measure current directly. What the INA219 does is put a very small known resistor - a SHUNT - in the path and measure the voltage across it. Ohm's law does the rest:</a:t>
-            </a:r>
-          </a:p>
-          <a:p>
-            <a:pPr lvl="1" algn="l">
-              <a:lnSpc>
-                <a:spcPct val="100000"/>
-              </a:lnSpc>
-              <a:spcAft>
-                <a:spcPts val="600"/>
-              </a:spcAft>
-              <a:defRPr sz="1800" b="0">
-                <a:solidFill>
-                  <a:srgbClr val="222222"/>
-                </a:solidFill>
-                <a:latin typeface="Calibri"/>
-              </a:defRPr>
-            </a:pPr>
-            <a:r>
-              <a:rPr sz="1800" b="0">
-                <a:solidFill>
-                  <a:srgbClr val="222222"/>
-                </a:solidFill>
-                <a:latin typeface="Calibri"/>
-              </a:rPr>
-              <a:t>I = V / R</a:t>
-            </a:r>
-          </a:p>
-          <a:p>
-            <a:pPr algn="l">
-              <a:lnSpc>
-                <a:spcPct val="100000"/>
-              </a:lnSpc>
-              <a:spcAft>
-                <a:spcPts val="600"/>
-              </a:spcAft>
-              <a:defRPr sz="900" b="0">
-                <a:solidFill>
-                  <a:srgbClr val="222222"/>
-                </a:solidFill>
-                <a:latin typeface="Calibri"/>
-              </a:defRPr>
-            </a:pPr>
-          </a:p>
-          <a:p>
-            <a:pPr algn="l">
-              <a:lnSpc>
-                <a:spcPct val="100000"/>
-              </a:lnSpc>
-              <a:spcAft>
-                <a:spcPts val="600"/>
-              </a:spcAft>
-              <a:defRPr sz="1800" b="0">
-                <a:solidFill>
-                  <a:srgbClr val="222222"/>
-                </a:solidFill>
-                <a:latin typeface="Calibri"/>
-              </a:defRPr>
-            </a:pPr>
-            <a:r>
-              <a:rPr sz="1800" b="0">
-                <a:solidFill>
-                  <a:srgbClr val="222222"/>
-                </a:solidFill>
-                <a:latin typeface="Calibri"/>
-              </a:rPr>
-              <a:t>The shunt on this board is 0.0025 ohms. So two amps drops:</a:t>
-            </a:r>
-          </a:p>
-          <a:p>
-            <a:pPr lvl="1" algn="l">
-              <a:lnSpc>
-                <a:spcPct val="100000"/>
-              </a:lnSpc>
-              <a:spcAft>
-                <a:spcPts val="600"/>
-              </a:spcAft>
-              <a:defRPr sz="1800" b="0">
-                <a:solidFill>
-                  <a:srgbClr val="222222"/>
-                </a:solidFill>
-                <a:latin typeface="Calibri"/>
-              </a:defRPr>
-            </a:pPr>
-            <a:r>
-              <a:rPr sz="1800" b="0">
-                <a:solidFill>
-                  <a:srgbClr val="222222"/>
-                </a:solidFill>
-                <a:latin typeface="Calibri"/>
-              </a:rPr>
-              <a:t>V = 2 A x 0.0025 ohm = 0.005 V,  five millivolts</a:t>
-            </a:r>
-          </a:p>
-          <a:p>
-            <a:pPr algn="l">
-              <a:lnSpc>
-                <a:spcPct val="100000"/>
-              </a:lnSpc>
-              <a:spcAft>
-                <a:spcPts val="600"/>
-              </a:spcAft>
-              <a:defRPr sz="900" b="0">
-                <a:solidFill>
-                  <a:srgbClr val="222222"/>
-                </a:solidFill>
-                <a:latin typeface="Calibri"/>
-              </a:defRPr>
-            </a:pPr>
-          </a:p>
-          <a:p>
-            <a:pPr algn="l">
-              <a:lnSpc>
-                <a:spcPct val="100000"/>
-              </a:lnSpc>
-              <a:spcAft>
-                <a:spcPts val="600"/>
-              </a:spcAft>
-              <a:defRPr sz="1800" b="0">
-                <a:solidFill>
-                  <a:srgbClr val="222222"/>
-                </a:solidFill>
-                <a:latin typeface="Calibri"/>
-              </a:defRPr>
-            </a:pPr>
-            <a:r>
-              <a:rPr sz="1800" b="0">
-                <a:solidFill>
-                  <a:srgbClr val="222222"/>
-                </a:solidFill>
-                <a:latin typeface="Calibri"/>
-              </a:rPr>
-              <a:t>That is deliberate. A bigger resistor would be easier to read, but it would waste power and steal voltage from the motors:</a:t>
-            </a:r>
-          </a:p>
-          <a:p>
-            <a:pPr lvl="1" algn="l">
-              <a:lnSpc>
-                <a:spcPct val="100000"/>
-              </a:lnSpc>
-              <a:spcAft>
-                <a:spcPts val="600"/>
-              </a:spcAft>
-              <a:defRPr sz="1800" b="0">
-                <a:solidFill>
-                  <a:srgbClr val="222222"/>
-                </a:solidFill>
-                <a:latin typeface="Calibri"/>
-              </a:defRPr>
-            </a:pPr>
-            <a:r>
-              <a:rPr sz="1800" b="0">
-                <a:solidFill>
-                  <a:srgbClr val="222222"/>
-                </a:solidFill>
-                <a:latin typeface="Calibri"/>
-              </a:rPr>
-              <a:t>P = I^2 x R = 4 x 0.0025 = 0.01 W  at 0.0025 ohm</a:t>
-            </a:r>
-          </a:p>
-          <a:p>
-            <a:pPr lvl="1" algn="l">
-              <a:lnSpc>
-                <a:spcPct val="100000"/>
-              </a:lnSpc>
-              <a:spcAft>
-                <a:spcPts val="600"/>
-              </a:spcAft>
-              <a:defRPr sz="1800" b="0">
-                <a:solidFill>
-                  <a:srgbClr val="222222"/>
-                </a:solidFill>
-                <a:latin typeface="Calibri"/>
-              </a:defRPr>
-            </a:pPr>
-            <a:r>
-              <a:rPr sz="1800" b="0">
-                <a:solidFill>
-                  <a:srgbClr val="222222"/>
-                </a:solidFill>
-                <a:latin typeface="Calibri"/>
-              </a:rPr>
-              <a:t>P = I^2 x R = 4 x 0.1    = 0.4 W   at 0.1 ohm</a:t>
-            </a:r>
-          </a:p>
-          <a:p>
-            <a:pPr algn="l">
-              <a:lnSpc>
-                <a:spcPct val="100000"/>
-              </a:lnSpc>
-              <a:spcAft>
-                <a:spcPts val="600"/>
-              </a:spcAft>
-              <a:defRPr sz="900" b="0">
-                <a:solidFill>
-                  <a:srgbClr val="222222"/>
-                </a:solidFill>
-                <a:latin typeface="Calibri"/>
-              </a:defRPr>
-            </a:pPr>
-          </a:p>
-          <a:p>
-            <a:pPr algn="l">
-              <a:lnSpc>
-                <a:spcPct val="100000"/>
-              </a:lnSpc>
-              <a:spcAft>
-                <a:spcPts val="600"/>
-              </a:spcAft>
-              <a:defRPr sz="1800" b="0">
-                <a:solidFill>
-                  <a:srgbClr val="222222"/>
-                </a:solidFill>
-                <a:latin typeface="Calibri"/>
-              </a:defRPr>
-            </a:pPr>
-            <a:r>
-              <a:rPr sz="1800" b="0">
-                <a:solidFill>
-                  <a:srgbClr val="222222"/>
-                </a:solidFill>
-                <a:latin typeface="Calibri"/>
-              </a:rPr>
-              <a:t>Reading five millivolts accurately is the sensor's entire job. The shunt register reports in units of 10 microvolts, which is where the 0.01 in the math comes from.</a:t>
+            <a:pPr algn="ctr">
+              <a:lnSpc>
+                <a:spcPct val="100000"/>
+              </a:lnSpc>
+              <a:spcAft>
+                <a:spcPts val="200"/>
+              </a:spcAft>
+              <a:defRPr sz="1100" b="1">
+                <a:solidFill>
+                  <a:srgbClr val="0E7C86"/>
+                </a:solidFill>
+                <a:latin typeface="Calibri"/>
+              </a:defRPr>
+            </a:pPr>
+            <a:r>
+              <a:rPr sz="1100" b="1">
+                <a:solidFill>
+                  <a:srgbClr val="0E7C86"/>
+                </a:solidFill>
+                <a:latin typeface="Calibri"/>
+              </a:rPr>
+              <a:t>done</a:t>
+            </a:r>
+          </a:p>
+        </p:txBody>
+      </p:sp>
+      <p:sp>
+        <p:nvSpPr>
+          <p:cNvPr id="11" name="Rounded Rectangle 10"/>
+          <p:cNvSpPr/>
+          <p:nvPr/>
+        </p:nvSpPr>
+        <p:spPr>
+          <a:xfrm>
+            <a:off x="8057692" y="3886200"/>
+            <a:ext cx="3631082" cy="1325880"/>
+          </a:xfrm>
+          <a:prstGeom prst="roundRect">
+            <a:avLst>
+              <a:gd name="adj" fmla="val 8000"/>
+            </a:avLst>
+          </a:prstGeom>
+          <a:solidFill>
+            <a:srgbClr val="D6ECEE"/>
+          </a:solidFill>
+          <a:ln w="25400">
+            <a:solidFill>
+              <a:srgbClr val="0E7C86"/>
+            </a:solidFill>
+          </a:ln>
+          <a:effectLst/>
+        </p:spPr>
+        <p:style>
+          <a:lnRef idx="1">
+            <a:schemeClr val="accent1"/>
+          </a:lnRef>
+          <a:fillRef idx="3">
+            <a:schemeClr val="accent1"/>
+          </a:fillRef>
+          <a:effectRef idx="2">
+            <a:schemeClr val="accent1"/>
+          </a:effectRef>
+          <a:fontRef idx="minor">
+            <a:schemeClr val="lt1"/>
+          </a:fontRef>
+        </p:style>
+        <p:txBody>
+          <a:bodyPr rtlCol="0" anchor="ctr" wrap="square" lIns="73152" rIns="73152"/>
+          <a:lstStyle/>
+          <a:p>
+            <a:pPr algn="ctr">
+              <a:lnSpc>
+                <a:spcPct val="100000"/>
+              </a:lnSpc>
+              <a:spcAft>
+                <a:spcPts val="0"/>
+              </a:spcAft>
+              <a:defRPr sz="1700" b="1">
+                <a:solidFill>
+                  <a:srgbClr val="1F3A5F"/>
+                </a:solidFill>
+                <a:latin typeface="Calibri"/>
+              </a:defRPr>
+            </a:pPr>
+            <a:r>
+              <a:rPr sz="1700" b="1">
+                <a:solidFill>
+                  <a:srgbClr val="1F3A5F"/>
+                </a:solidFill>
+                <a:latin typeface="Calibri"/>
+              </a:rPr>
+              <a:t>Measuring a motor</a:t>
+            </a:r>
+          </a:p>
+        </p:txBody>
+      </p:sp>
+      <p:sp>
+        <p:nvSpPr>
+          <p:cNvPr id="12" name="TextBox 11"/>
+          <p:cNvSpPr txBox="1"/>
+          <p:nvPr/>
+        </p:nvSpPr>
+        <p:spPr>
+          <a:xfrm>
+            <a:off x="8057692" y="3520440"/>
+            <a:ext cx="3631082" cy="310896"/>
+          </a:xfrm>
+          <a:prstGeom prst="rect">
+            <a:avLst/>
+          </a:prstGeom>
+          <a:noFill/>
+        </p:spPr>
+        <p:txBody>
+          <a:bodyPr wrap="square" lIns="0" tIns="0" rIns="0" bIns="0">
+            <a:spAutoFit/>
+          </a:bodyPr>
+          <a:lstStyle/>
+          <a:p>
+            <a:pPr algn="ctr">
+              <a:lnSpc>
+                <a:spcPct val="100000"/>
+              </a:lnSpc>
+              <a:spcAft>
+                <a:spcPts val="200"/>
+              </a:spcAft>
+              <a:defRPr sz="1100" b="1">
+                <a:solidFill>
+                  <a:srgbClr val="0E7C86"/>
+                </a:solidFill>
+                <a:latin typeface="Calibri"/>
+              </a:defRPr>
+            </a:pPr>
+            <a:r>
+              <a:rPr sz="1100" b="1">
+                <a:solidFill>
+                  <a:srgbClr val="0E7C86"/>
+                </a:solidFill>
+                <a:latin typeface="Calibri"/>
+              </a:rPr>
+              <a:t>NOW</a:t>
             </a:r>
           </a:p>
         </p:txBody>
@@ -16966,7 +17237,7 @@
                 </a:solidFill>
                 <a:latin typeface="Calibri"/>
               </a:rPr>
-              <a:t>The two relationships the whole lesson rests on</a:t>
+              <a:t>Measuring current without getting in the way of it</a:t>
             </a:r>
           </a:p>
         </p:txBody>
@@ -17119,8 +17390,8 @@
         </p:nvSpPr>
         <p:spPr>
           <a:xfrm>
-            <a:off x="1143000" y="1124712"/>
-            <a:ext cx="2743200" cy="367792"/>
+            <a:off x="502920" y="1188720"/>
+            <a:ext cx="11185855" cy="530352"/>
           </a:xfrm>
           <a:prstGeom prst="rect">
             <a:avLst/>
@@ -17133,14 +17404,14 @@
           </a:bodyPr>
           <a:lstStyle/>
           <a:p>
-            <a:pPr algn="ctr">
-              <a:lnSpc>
-                <a:spcPct val="100000"/>
-              </a:lnSpc>
-              <a:spcAft>
-                <a:spcPts val="0"/>
-              </a:spcAft>
-              <a:defRPr sz="1800" b="1">
+            <a:pPr algn="l">
+              <a:lnSpc>
+                <a:spcPct val="100000"/>
+              </a:lnSpc>
+              <a:spcAft>
+                <a:spcPts val="600"/>
+              </a:spcAft>
+              <a:defRPr sz="1900" b="1">
                 <a:solidFill>
                   <a:srgbClr val="0E7C86"/>
                 </a:solidFill>
@@ -17148,121 +17419,27 @@
               </a:defRPr>
             </a:pPr>
             <a:r>
-              <a:rPr sz="1800" b="1">
+              <a:rPr sz="1900" b="1">
                 <a:solidFill>
                   <a:srgbClr val="0E7C86"/>
                 </a:solidFill>
                 <a:latin typeface="Calibri"/>
               </a:rPr>
-              <a:t>OHM'S LAW</a:t>
-            </a:r>
-          </a:p>
-        </p:txBody>
-      </p:sp>
-      <p:sp>
-        <p:nvSpPr>
-          <p:cNvPr id="7" name="Isosceles Triangle 6"/>
-          <p:cNvSpPr/>
-          <p:nvPr/>
-        </p:nvSpPr>
-        <p:spPr>
-          <a:xfrm>
-            <a:off x="1143000" y="1508760"/>
-            <a:ext cx="2743200" cy="2011680"/>
-          </a:xfrm>
-          <a:prstGeom prst="triangle">
-            <a:avLst/>
-          </a:prstGeom>
-          <a:solidFill>
-            <a:srgbClr val="D6ECEE"/>
-          </a:solidFill>
-          <a:ln w="19050">
-            <a:solidFill>
-              <a:srgbClr val="0E7C86"/>
-            </a:solidFill>
-          </a:ln>
-          <a:effectLst/>
-        </p:spPr>
-        <p:style>
-          <a:lnRef idx="1">
-            <a:schemeClr val="accent1"/>
-          </a:lnRef>
-          <a:fillRef idx="3">
-            <a:schemeClr val="accent1"/>
-          </a:fillRef>
-          <a:effectRef idx="2">
-            <a:schemeClr val="accent1"/>
-          </a:effectRef>
-          <a:fontRef idx="minor">
-            <a:schemeClr val="lt1"/>
-          </a:fontRef>
-        </p:style>
-        <p:txBody>
-          <a:bodyPr rtlCol="0" anchor="ctr" wrap="square"/>
-          <a:lstStyle/>
-          <a:p>
-            <a:pPr algn="l">
-              <a:lnSpc>
-                <a:spcPct val="100000"/>
-              </a:lnSpc>
-              <a:spcAft>
-                <a:spcPts val="200"/>
-              </a:spcAft>
-              <a:defRPr sz="900" b="0">
-                <a:solidFill>
-                  <a:srgbClr val="222222"/>
-                </a:solidFill>
-                <a:latin typeface="Calibri"/>
-              </a:defRPr>
-            </a:pPr>
-          </a:p>
-        </p:txBody>
-      </p:sp>
-      <p:cxnSp>
-        <p:nvCxnSpPr>
-          <p:cNvPr id="8" name="Connector 7"/>
-          <p:cNvCxnSpPr/>
-          <p:nvPr/>
-        </p:nvCxnSpPr>
-        <p:spPr>
-          <a:xfrm>
-            <a:off x="1709928" y="2635300"/>
-            <a:ext cx="1609344" cy="0"/>
-          </a:xfrm>
-          <a:prstGeom prst="line">
-            <a:avLst/>
-          </a:prstGeom>
-          <a:ln w="22225">
-            <a:solidFill>
-              <a:srgbClr val="0E7C86"/>
-            </a:solidFill>
-          </a:ln>
-        </p:spPr>
-        <p:style>
-          <a:lnRef idx="2">
-            <a:schemeClr val="accent1"/>
-          </a:lnRef>
-          <a:fillRef idx="0">
-            <a:schemeClr val="accent1"/>
-          </a:fillRef>
-          <a:effectRef idx="1">
-            <a:schemeClr val="accent1"/>
-          </a:effectRef>
-          <a:fontRef idx="minor">
-            <a:schemeClr val="tx1"/>
-          </a:fontRef>
-        </p:style>
-      </p:cxnSp>
-      <p:sp>
-        <p:nvSpPr>
-          <p:cNvPr id="9" name="TextBox 8"/>
+              <a:t>A tiny resistor, and Ohm's law</a:t>
+            </a:r>
+          </a:p>
+        </p:txBody>
+      </p:sp>
+      <p:sp>
+        <p:nvSpPr>
+          <p:cNvPr id="7" name="TextBox 6"/>
           <p:cNvSpPr txBox="1"/>
           <p:nvPr/>
         </p:nvSpPr>
         <p:spPr>
           <a:xfrm>
-            <a:off x="1143000" y="1892808"/>
-            <a:ext cx="2743200" cy="491744"/>
+            <a:off x="502920" y="1755648"/>
+            <a:ext cx="11185855" cy="4507992"/>
           </a:xfrm>
           <a:prstGeom prst="rect">
             <a:avLst/>
@@ -17275,278 +17452,82 @@
           </a:bodyPr>
           <a:lstStyle/>
           <a:p>
-            <a:pPr algn="ctr">
-              <a:lnSpc>
-                <a:spcPct val="100000"/>
-              </a:lnSpc>
-              <a:spcAft>
-                <a:spcPts val="100"/>
-              </a:spcAft>
-              <a:defRPr sz="2600" b="1">
-                <a:solidFill>
-                  <a:srgbClr val="1F3A5F"/>
-                </a:solidFill>
-                <a:latin typeface="Calibri"/>
-              </a:defRPr>
-            </a:pPr>
-            <a:r>
-              <a:rPr sz="2600" b="1">
-                <a:solidFill>
-                  <a:srgbClr val="1F3A5F"/>
-                </a:solidFill>
-                <a:latin typeface="Calibri"/>
-              </a:rPr>
-              <a:t>V</a:t>
-            </a:r>
-          </a:p>
-        </p:txBody>
-      </p:sp>
-      <p:sp>
-        <p:nvSpPr>
-          <p:cNvPr id="10" name="TextBox 9"/>
-          <p:cNvSpPr txBox="1"/>
-          <p:nvPr/>
-        </p:nvSpPr>
-        <p:spPr>
-          <a:xfrm>
-            <a:off x="1463040" y="2909620"/>
-            <a:ext cx="822960" cy="429768"/>
-          </a:xfrm>
-          <a:prstGeom prst="rect">
-            <a:avLst/>
-          </a:prstGeom>
-          <a:noFill/>
-        </p:spPr>
-        <p:txBody>
-          <a:bodyPr wrap="square" lIns="0" tIns="0" rIns="0" bIns="0">
-            <a:spAutoFit/>
-          </a:bodyPr>
-          <a:lstStyle/>
-          <a:p>
-            <a:pPr algn="ctr">
-              <a:lnSpc>
-                <a:spcPct val="100000"/>
-              </a:lnSpc>
-              <a:spcAft>
-                <a:spcPts val="100"/>
-              </a:spcAft>
-              <a:defRPr sz="2200" b="1">
-                <a:solidFill>
-                  <a:srgbClr val="1F3A5F"/>
-                </a:solidFill>
-                <a:latin typeface="Calibri"/>
-              </a:defRPr>
-            </a:pPr>
-            <a:r>
-              <a:rPr sz="2200" b="1">
-                <a:solidFill>
-                  <a:srgbClr val="1F3A5F"/>
-                </a:solidFill>
-                <a:latin typeface="Calibri"/>
-              </a:rPr>
-              <a:t>I</a:t>
-            </a:r>
-          </a:p>
-        </p:txBody>
-      </p:sp>
-      <p:sp>
-        <p:nvSpPr>
-          <p:cNvPr id="11" name="TextBox 10"/>
-          <p:cNvSpPr txBox="1"/>
-          <p:nvPr/>
-        </p:nvSpPr>
-        <p:spPr>
-          <a:xfrm>
-            <a:off x="2743200" y="2909620"/>
-            <a:ext cx="822960" cy="429768"/>
-          </a:xfrm>
-          <a:prstGeom prst="rect">
-            <a:avLst/>
-          </a:prstGeom>
-          <a:noFill/>
-        </p:spPr>
-        <p:txBody>
-          <a:bodyPr wrap="square" lIns="0" tIns="0" rIns="0" bIns="0">
-            <a:spAutoFit/>
-          </a:bodyPr>
-          <a:lstStyle/>
-          <a:p>
-            <a:pPr algn="ctr">
-              <a:lnSpc>
-                <a:spcPct val="100000"/>
-              </a:lnSpc>
-              <a:spcAft>
-                <a:spcPts val="100"/>
-              </a:spcAft>
-              <a:defRPr sz="2200" b="1">
-                <a:solidFill>
-                  <a:srgbClr val="1F3A5F"/>
-                </a:solidFill>
-                <a:latin typeface="Calibri"/>
-              </a:defRPr>
-            </a:pPr>
-            <a:r>
-              <a:rPr sz="2200" b="1">
-                <a:solidFill>
-                  <a:srgbClr val="1F3A5F"/>
-                </a:solidFill>
-                <a:latin typeface="Calibri"/>
-              </a:rPr>
-              <a:t>R</a:t>
-            </a:r>
-          </a:p>
-        </p:txBody>
-      </p:sp>
-      <p:sp>
-        <p:nvSpPr>
-          <p:cNvPr id="12" name="Rectangle 11"/>
-          <p:cNvSpPr/>
-          <p:nvPr/>
-        </p:nvSpPr>
-        <p:spPr>
-          <a:xfrm>
-            <a:off x="1005840" y="3794760"/>
-            <a:ext cx="3017520" cy="914400"/>
-          </a:xfrm>
-          <a:prstGeom prst="rect">
-            <a:avLst/>
-          </a:prstGeom>
-          <a:solidFill>
-            <a:srgbClr val="F4F6F8"/>
-          </a:solidFill>
-          <a:ln w="9525">
-            <a:solidFill>
-              <a:srgbClr val="C8D2DE"/>
-            </a:solidFill>
-          </a:ln>
-          <a:effectLst/>
-        </p:spPr>
-        <p:style>
-          <a:lnRef idx="1">
-            <a:schemeClr val="accent1"/>
-          </a:lnRef>
-          <a:fillRef idx="3">
-            <a:schemeClr val="accent1"/>
-          </a:fillRef>
-          <a:effectRef idx="2">
-            <a:schemeClr val="accent1"/>
-          </a:effectRef>
-          <a:fontRef idx="minor">
-            <a:schemeClr val="lt1"/>
-          </a:fontRef>
-        </p:style>
-        <p:txBody>
-          <a:bodyPr rtlCol="0" anchor="ctr" wrap="square" lIns="45720" rIns="45720" tIns="18288" bIns="18288"/>
-          <a:lstStyle/>
-          <a:p>
-            <a:pPr algn="ctr">
-              <a:lnSpc>
-                <a:spcPct val="100000"/>
-              </a:lnSpc>
-              <a:spcAft>
-                <a:spcPts val="0"/>
-              </a:spcAft>
-              <a:defRPr sz="1400" b="0">
-                <a:solidFill>
-                  <a:srgbClr val="222222"/>
-                </a:solidFill>
-                <a:latin typeface="Consolas"/>
-              </a:defRPr>
-            </a:pPr>
-            <a:r>
-              <a:rPr sz="1400" b="0">
-                <a:solidFill>
-                  <a:srgbClr val="222222"/>
-                </a:solidFill>
-                <a:latin typeface="Consolas"/>
-              </a:rPr>
-              <a:t>V = I x R</a:t>
-            </a:r>
-          </a:p>
-          <a:p>
-            <a:pPr algn="ctr">
-              <a:lnSpc>
-                <a:spcPct val="100000"/>
-              </a:lnSpc>
-              <a:spcAft>
-                <a:spcPts val="0"/>
-              </a:spcAft>
-              <a:defRPr sz="1400" b="0">
-                <a:solidFill>
-                  <a:srgbClr val="222222"/>
-                </a:solidFill>
-                <a:latin typeface="Consolas"/>
-              </a:defRPr>
-            </a:pPr>
-            <a:r>
-              <a:rPr sz="1400" b="0">
-                <a:solidFill>
-                  <a:srgbClr val="222222"/>
-                </a:solidFill>
-                <a:latin typeface="Consolas"/>
+            <a:pPr algn="l">
+              <a:lnSpc>
+                <a:spcPct val="100000"/>
+              </a:lnSpc>
+              <a:spcAft>
+                <a:spcPts val="600"/>
+              </a:spcAft>
+              <a:defRPr sz="1800" b="0">
+                <a:solidFill>
+                  <a:srgbClr val="222222"/>
+                </a:solidFill>
+                <a:latin typeface="Calibri"/>
+              </a:defRPr>
+            </a:pPr>
+            <a:r>
+              <a:rPr sz="1800" b="0">
+                <a:solidFill>
+                  <a:srgbClr val="222222"/>
+                </a:solidFill>
+                <a:latin typeface="Calibri"/>
+              </a:rPr>
+              <a:t>You cannot measure current directly. What the INA219 does is put a very small known resistor - a SHUNT - in the path and measure the voltage across it. Ohm's law does the rest:</a:t>
+            </a:r>
+          </a:p>
+          <a:p>
+            <a:pPr lvl="1" algn="l">
+              <a:lnSpc>
+                <a:spcPct val="100000"/>
+              </a:lnSpc>
+              <a:spcAft>
+                <a:spcPts val="600"/>
+              </a:spcAft>
+              <a:defRPr sz="1800" b="0">
+                <a:solidFill>
+                  <a:srgbClr val="222222"/>
+                </a:solidFill>
+                <a:latin typeface="Calibri"/>
+              </a:defRPr>
+            </a:pPr>
+            <a:r>
+              <a:rPr sz="1800" b="0">
+                <a:solidFill>
+                  <a:srgbClr val="222222"/>
+                </a:solidFill>
+                <a:latin typeface="Calibri"/>
               </a:rPr>
               <a:t>I = V / R</a:t>
             </a:r>
           </a:p>
           <a:p>
-            <a:pPr algn="ctr">
-              <a:lnSpc>
-                <a:spcPct val="100000"/>
-              </a:lnSpc>
-              <a:spcAft>
-                <a:spcPts val="0"/>
-              </a:spcAft>
-              <a:defRPr sz="1400" b="0">
-                <a:solidFill>
-                  <a:srgbClr val="222222"/>
-                </a:solidFill>
-                <a:latin typeface="Consolas"/>
-              </a:defRPr>
-            </a:pPr>
-            <a:r>
-              <a:rPr sz="1400" b="0">
-                <a:solidFill>
-                  <a:srgbClr val="222222"/>
-                </a:solidFill>
-                <a:latin typeface="Consolas"/>
-              </a:rPr>
-              <a:t>R = V / I</a:t>
-            </a:r>
-          </a:p>
-        </p:txBody>
-      </p:sp>
-      <p:sp>
-        <p:nvSpPr>
-          <p:cNvPr id="13" name="TextBox 12"/>
-          <p:cNvSpPr txBox="1"/>
-          <p:nvPr/>
-        </p:nvSpPr>
-        <p:spPr>
-          <a:xfrm>
-            <a:off x="1005840" y="4818888"/>
-            <a:ext cx="3017520" cy="646684"/>
-          </a:xfrm>
-          <a:prstGeom prst="rect">
-            <a:avLst/>
-          </a:prstGeom>
-          <a:noFill/>
-        </p:spPr>
-        <p:txBody>
-          <a:bodyPr wrap="square" lIns="0" tIns="0" rIns="0" bIns="0">
-            <a:spAutoFit/>
-          </a:bodyPr>
-          <a:lstStyle/>
-          <a:p>
-            <a:pPr algn="ctr">
-              <a:lnSpc>
-                <a:spcPct val="100000"/>
-              </a:lnSpc>
-              <a:spcAft>
-                <a:spcPts val="0"/>
+            <a:pPr algn="l">
+              <a:lnSpc>
+                <a:spcPct val="100000"/>
+              </a:lnSpc>
+              <a:spcAft>
+                <a:spcPts val="600"/>
+              </a:spcAft>
+              <a:defRPr sz="900" b="0">
+                <a:solidFill>
+                  <a:srgbClr val="222222"/>
+                </a:solidFill>
+                <a:latin typeface="Calibri"/>
+              </a:defRPr>
+            </a:pPr>
+          </a:p>
+          <a:p>
+            <a:pPr algn="l">
+              <a:lnSpc>
+                <a:spcPct val="100000"/>
+              </a:lnSpc>
+              <a:spcAft>
+                <a:spcPts val="600"/>
               </a:spcAft>
               <a:defRPr sz="1800" b="0">
                 <a:solidFill>
-                  <a:srgbClr val="666666"/>
+                  <a:srgbClr val="222222"/>
                 </a:solidFill>
                 <a:latin typeface="Calibri"/>
               </a:defRPr>
@@ -17554,111 +17535,45 @@
             <a:r>
               <a:rPr sz="1800" b="0">
                 <a:solidFill>
-                  <a:srgbClr val="666666"/>
-                </a:solidFill>
-                <a:latin typeface="Calibri"/>
-              </a:rPr>
-              <a:t>V  volts     I  amps     R  ohms</a:t>
-            </a:r>
-          </a:p>
-        </p:txBody>
-      </p:sp>
-      <p:sp>
-        <p:nvSpPr>
-          <p:cNvPr id="14" name="TextBox 13"/>
-          <p:cNvSpPr txBox="1"/>
-          <p:nvPr/>
-        </p:nvSpPr>
-        <p:spPr>
-          <a:xfrm>
-            <a:off x="6812280" y="1124712"/>
-            <a:ext cx="2743200" cy="367792"/>
-          </a:xfrm>
-          <a:prstGeom prst="rect">
-            <a:avLst/>
-          </a:prstGeom>
-          <a:noFill/>
-        </p:spPr>
-        <p:txBody>
-          <a:bodyPr wrap="square" lIns="0" tIns="0" rIns="0" bIns="0">
-            <a:spAutoFit/>
-          </a:bodyPr>
-          <a:lstStyle/>
-          <a:p>
-            <a:pPr algn="ctr">
-              <a:lnSpc>
-                <a:spcPct val="100000"/>
-              </a:lnSpc>
-              <a:spcAft>
-                <a:spcPts val="0"/>
-              </a:spcAft>
-              <a:defRPr sz="1800" b="1">
-                <a:solidFill>
-                  <a:srgbClr val="B46A0F"/>
-                </a:solidFill>
-                <a:latin typeface="Calibri"/>
-              </a:defRPr>
-            </a:pPr>
-            <a:r>
-              <a:rPr sz="1800" b="1">
-                <a:solidFill>
-                  <a:srgbClr val="B46A0F"/>
-                </a:solidFill>
-                <a:latin typeface="Calibri"/>
-              </a:rPr>
-              <a:t>POWER LAW</a:t>
-            </a:r>
-          </a:p>
-        </p:txBody>
-      </p:sp>
-      <p:sp>
-        <p:nvSpPr>
-          <p:cNvPr id="15" name="Isosceles Triangle 14"/>
-          <p:cNvSpPr/>
-          <p:nvPr/>
-        </p:nvSpPr>
-        <p:spPr>
-          <a:xfrm>
-            <a:off x="6812280" y="1508760"/>
-            <a:ext cx="2743200" cy="2011680"/>
-          </a:xfrm>
-          <a:prstGeom prst="triangle">
-            <a:avLst/>
-          </a:prstGeom>
-          <a:solidFill>
-            <a:srgbClr val="FAE6C8"/>
-          </a:solidFill>
-          <a:ln w="19050">
-            <a:solidFill>
-              <a:srgbClr val="B46A0F"/>
-            </a:solidFill>
-          </a:ln>
-          <a:effectLst/>
-        </p:spPr>
-        <p:style>
-          <a:lnRef idx="1">
-            <a:schemeClr val="accent1"/>
-          </a:lnRef>
-          <a:fillRef idx="3">
-            <a:schemeClr val="accent1"/>
-          </a:fillRef>
-          <a:effectRef idx="2">
-            <a:schemeClr val="accent1"/>
-          </a:effectRef>
-          <a:fontRef idx="minor">
-            <a:schemeClr val="lt1"/>
-          </a:fontRef>
-        </p:style>
-        <p:txBody>
-          <a:bodyPr rtlCol="0" anchor="ctr" wrap="square"/>
-          <a:lstStyle/>
+                  <a:srgbClr val="222222"/>
+                </a:solidFill>
+                <a:latin typeface="Calibri"/>
+              </a:rPr>
+              <a:t>The shunt on this board is 0.0025 ohms. So two amps drops:</a:t>
+            </a:r>
+          </a:p>
+          <a:p>
+            <a:pPr lvl="1" algn="l">
+              <a:lnSpc>
+                <a:spcPct val="100000"/>
+              </a:lnSpc>
+              <a:spcAft>
+                <a:spcPts val="600"/>
+              </a:spcAft>
+              <a:defRPr sz="1800" b="0">
+                <a:solidFill>
+                  <a:srgbClr val="222222"/>
+                </a:solidFill>
+                <a:latin typeface="Calibri"/>
+              </a:defRPr>
+            </a:pPr>
+            <a:r>
+              <a:rPr sz="1800" b="0">
+                <a:solidFill>
+                  <a:srgbClr val="222222"/>
+                </a:solidFill>
+                <a:latin typeface="Calibri"/>
+              </a:rPr>
+              <a:t>V = 2 A x 0.0025 ohm = 0.005 V,  five millivolts</a:t>
+            </a:r>
+          </a:p>
           <a:p>
             <a:pPr algn="l">
               <a:lnSpc>
                 <a:spcPct val="100000"/>
               </a:lnSpc>
               <a:spcAft>
-                <a:spcPts val="200"/>
+                <a:spcPts val="600"/>
               </a:spcAft>
               <a:defRPr sz="900" b="0">
                 <a:solidFill>
@@ -17668,337 +17583,17 @@
               </a:defRPr>
             </a:pPr>
           </a:p>
-        </p:txBody>
-      </p:sp>
-      <p:cxnSp>
-        <p:nvCxnSpPr>
-          <p:cNvPr id="16" name="Connector 15"/>
-          <p:cNvCxnSpPr/>
-          <p:nvPr/>
-        </p:nvCxnSpPr>
-        <p:spPr>
-          <a:xfrm>
-            <a:off x="7379208" y="2635300"/>
-            <a:ext cx="1609344" cy="0"/>
-          </a:xfrm>
-          <a:prstGeom prst="line">
-            <a:avLst/>
-          </a:prstGeom>
-          <a:ln w="22225">
-            <a:solidFill>
-              <a:srgbClr val="B46A0F"/>
-            </a:solidFill>
-          </a:ln>
-        </p:spPr>
-        <p:style>
-          <a:lnRef idx="2">
-            <a:schemeClr val="accent1"/>
-          </a:lnRef>
-          <a:fillRef idx="0">
-            <a:schemeClr val="accent1"/>
-          </a:fillRef>
-          <a:effectRef idx="1">
-            <a:schemeClr val="accent1"/>
-          </a:effectRef>
-          <a:fontRef idx="minor">
-            <a:schemeClr val="tx1"/>
-          </a:fontRef>
-        </p:style>
-      </p:cxnSp>
-      <p:sp>
-        <p:nvSpPr>
-          <p:cNvPr id="17" name="TextBox 16"/>
-          <p:cNvSpPr txBox="1"/>
-          <p:nvPr/>
-        </p:nvSpPr>
-        <p:spPr>
-          <a:xfrm>
-            <a:off x="6812280" y="1892808"/>
-            <a:ext cx="2743200" cy="491744"/>
-          </a:xfrm>
-          <a:prstGeom prst="rect">
-            <a:avLst/>
-          </a:prstGeom>
-          <a:noFill/>
-        </p:spPr>
-        <p:txBody>
-          <a:bodyPr wrap="square" lIns="0" tIns="0" rIns="0" bIns="0">
-            <a:spAutoFit/>
-          </a:bodyPr>
-          <a:lstStyle/>
-          <a:p>
-            <a:pPr algn="ctr">
-              <a:lnSpc>
-                <a:spcPct val="100000"/>
-              </a:lnSpc>
-              <a:spcAft>
-                <a:spcPts val="100"/>
-              </a:spcAft>
-              <a:defRPr sz="2600" b="1">
-                <a:solidFill>
-                  <a:srgbClr val="1F3A5F"/>
-                </a:solidFill>
-                <a:latin typeface="Calibri"/>
-              </a:defRPr>
-            </a:pPr>
-            <a:r>
-              <a:rPr sz="2600" b="1">
-                <a:solidFill>
-                  <a:srgbClr val="1F3A5F"/>
-                </a:solidFill>
-                <a:latin typeface="Calibri"/>
-              </a:rPr>
-              <a:t>P</a:t>
-            </a:r>
-          </a:p>
-        </p:txBody>
-      </p:sp>
-      <p:sp>
-        <p:nvSpPr>
-          <p:cNvPr id="18" name="TextBox 17"/>
-          <p:cNvSpPr txBox="1"/>
-          <p:nvPr/>
-        </p:nvSpPr>
-        <p:spPr>
-          <a:xfrm>
-            <a:off x="7132320" y="2909620"/>
-            <a:ext cx="822960" cy="429768"/>
-          </a:xfrm>
-          <a:prstGeom prst="rect">
-            <a:avLst/>
-          </a:prstGeom>
-          <a:noFill/>
-        </p:spPr>
-        <p:txBody>
-          <a:bodyPr wrap="square" lIns="0" tIns="0" rIns="0" bIns="0">
-            <a:spAutoFit/>
-          </a:bodyPr>
-          <a:lstStyle/>
-          <a:p>
-            <a:pPr algn="ctr">
-              <a:lnSpc>
-                <a:spcPct val="100000"/>
-              </a:lnSpc>
-              <a:spcAft>
-                <a:spcPts val="100"/>
-              </a:spcAft>
-              <a:defRPr sz="2200" b="1">
-                <a:solidFill>
-                  <a:srgbClr val="1F3A5F"/>
-                </a:solidFill>
-                <a:latin typeface="Calibri"/>
-              </a:defRPr>
-            </a:pPr>
-            <a:r>
-              <a:rPr sz="2200" b="1">
-                <a:solidFill>
-                  <a:srgbClr val="1F3A5F"/>
-                </a:solidFill>
-                <a:latin typeface="Calibri"/>
-              </a:rPr>
-              <a:t>I</a:t>
-            </a:r>
-          </a:p>
-        </p:txBody>
-      </p:sp>
-      <p:sp>
-        <p:nvSpPr>
-          <p:cNvPr id="19" name="TextBox 18"/>
-          <p:cNvSpPr txBox="1"/>
-          <p:nvPr/>
-        </p:nvSpPr>
-        <p:spPr>
-          <a:xfrm>
-            <a:off x="8412480" y="2909620"/>
-            <a:ext cx="822960" cy="429768"/>
-          </a:xfrm>
-          <a:prstGeom prst="rect">
-            <a:avLst/>
-          </a:prstGeom>
-          <a:noFill/>
-        </p:spPr>
-        <p:txBody>
-          <a:bodyPr wrap="square" lIns="0" tIns="0" rIns="0" bIns="0">
-            <a:spAutoFit/>
-          </a:bodyPr>
-          <a:lstStyle/>
-          <a:p>
-            <a:pPr algn="ctr">
-              <a:lnSpc>
-                <a:spcPct val="100000"/>
-              </a:lnSpc>
-              <a:spcAft>
-                <a:spcPts val="100"/>
-              </a:spcAft>
-              <a:defRPr sz="2200" b="1">
-                <a:solidFill>
-                  <a:srgbClr val="1F3A5F"/>
-                </a:solidFill>
-                <a:latin typeface="Calibri"/>
-              </a:defRPr>
-            </a:pPr>
-            <a:r>
-              <a:rPr sz="2200" b="1">
-                <a:solidFill>
-                  <a:srgbClr val="1F3A5F"/>
-                </a:solidFill>
-                <a:latin typeface="Calibri"/>
-              </a:rPr>
-              <a:t>V</a:t>
-            </a:r>
-          </a:p>
-        </p:txBody>
-      </p:sp>
-      <p:sp>
-        <p:nvSpPr>
-          <p:cNvPr id="20" name="Rectangle 19"/>
-          <p:cNvSpPr/>
-          <p:nvPr/>
-        </p:nvSpPr>
-        <p:spPr>
-          <a:xfrm>
-            <a:off x="6675120" y="3794760"/>
-            <a:ext cx="3017520" cy="914400"/>
-          </a:xfrm>
-          <a:prstGeom prst="rect">
-            <a:avLst/>
-          </a:prstGeom>
-          <a:solidFill>
-            <a:srgbClr val="F4F6F8"/>
-          </a:solidFill>
-          <a:ln w="9525">
-            <a:solidFill>
-              <a:srgbClr val="C8D2DE"/>
-            </a:solidFill>
-          </a:ln>
-          <a:effectLst/>
-        </p:spPr>
-        <p:style>
-          <a:lnRef idx="1">
-            <a:schemeClr val="accent1"/>
-          </a:lnRef>
-          <a:fillRef idx="3">
-            <a:schemeClr val="accent1"/>
-          </a:fillRef>
-          <a:effectRef idx="2">
-            <a:schemeClr val="accent1"/>
-          </a:effectRef>
-          <a:fontRef idx="minor">
-            <a:schemeClr val="lt1"/>
-          </a:fontRef>
-        </p:style>
-        <p:txBody>
-          <a:bodyPr rtlCol="0" anchor="ctr" wrap="square" lIns="45720" rIns="45720" tIns="18288" bIns="18288"/>
-          <a:lstStyle/>
-          <a:p>
-            <a:pPr algn="ctr">
-              <a:lnSpc>
-                <a:spcPct val="100000"/>
-              </a:lnSpc>
-              <a:spcAft>
-                <a:spcPts val="0"/>
-              </a:spcAft>
-              <a:defRPr sz="1400" b="0">
-                <a:solidFill>
-                  <a:srgbClr val="222222"/>
-                </a:solidFill>
-                <a:latin typeface="Consolas"/>
-              </a:defRPr>
-            </a:pPr>
-            <a:r>
-              <a:rPr sz="1400" b="0">
-                <a:solidFill>
-                  <a:srgbClr val="222222"/>
-                </a:solidFill>
-                <a:latin typeface="Consolas"/>
-              </a:rPr>
-              <a:t>P = I x V</a:t>
-            </a:r>
-          </a:p>
-          <a:p>
-            <a:pPr algn="ctr">
-              <a:lnSpc>
-                <a:spcPct val="100000"/>
-              </a:lnSpc>
-              <a:spcAft>
-                <a:spcPts val="0"/>
-              </a:spcAft>
-              <a:defRPr sz="1400" b="0">
-                <a:solidFill>
-                  <a:srgbClr val="222222"/>
-                </a:solidFill>
-                <a:latin typeface="Consolas"/>
-              </a:defRPr>
-            </a:pPr>
-            <a:r>
-              <a:rPr sz="1400" b="0">
-                <a:solidFill>
-                  <a:srgbClr val="222222"/>
-                </a:solidFill>
-                <a:latin typeface="Consolas"/>
-              </a:rPr>
-              <a:t>I = P / V</a:t>
-            </a:r>
-          </a:p>
-          <a:p>
-            <a:pPr algn="ctr">
-              <a:lnSpc>
-                <a:spcPct val="100000"/>
-              </a:lnSpc>
-              <a:spcAft>
-                <a:spcPts val="0"/>
-              </a:spcAft>
-              <a:defRPr sz="1400" b="0">
-                <a:solidFill>
-                  <a:srgbClr val="222222"/>
-                </a:solidFill>
-                <a:latin typeface="Consolas"/>
-              </a:defRPr>
-            </a:pPr>
-            <a:r>
-              <a:rPr sz="1400" b="0">
-                <a:solidFill>
-                  <a:srgbClr val="222222"/>
-                </a:solidFill>
-                <a:latin typeface="Consolas"/>
-              </a:rPr>
-              <a:t>V = P / I</a:t>
-            </a:r>
-          </a:p>
-        </p:txBody>
-      </p:sp>
-      <p:sp>
-        <p:nvSpPr>
-          <p:cNvPr id="21" name="TextBox 20"/>
-          <p:cNvSpPr txBox="1"/>
-          <p:nvPr/>
-        </p:nvSpPr>
-        <p:spPr>
-          <a:xfrm>
-            <a:off x="6675120" y="4818888"/>
-            <a:ext cx="3017520" cy="646684"/>
-          </a:xfrm>
-          <a:prstGeom prst="rect">
-            <a:avLst/>
-          </a:prstGeom>
-          <a:noFill/>
-        </p:spPr>
-        <p:txBody>
-          <a:bodyPr wrap="square" lIns="0" tIns="0" rIns="0" bIns="0">
-            <a:spAutoFit/>
-          </a:bodyPr>
-          <a:lstStyle/>
-          <a:p>
-            <a:pPr algn="ctr">
-              <a:lnSpc>
-                <a:spcPct val="100000"/>
-              </a:lnSpc>
-              <a:spcAft>
-                <a:spcPts val="0"/>
+          <a:p>
+            <a:pPr algn="l">
+              <a:lnSpc>
+                <a:spcPct val="100000"/>
+              </a:lnSpc>
+              <a:spcAft>
+                <a:spcPts val="600"/>
               </a:spcAft>
               <a:defRPr sz="1800" b="0">
                 <a:solidFill>
-                  <a:srgbClr val="666666"/>
+                  <a:srgbClr val="222222"/>
                 </a:solidFill>
                 <a:latin typeface="Calibri"/>
               </a:defRPr>
@@ -18006,63 +17601,20 @@
             <a:r>
               <a:rPr sz="1800" b="0">
                 <a:solidFill>
-                  <a:srgbClr val="666666"/>
-                </a:solidFill>
-                <a:latin typeface="Calibri"/>
-              </a:rPr>
-              <a:t>P  watts     I  amps     V  volts</a:t>
-            </a:r>
-          </a:p>
-        </p:txBody>
-      </p:sp>
-      <p:sp>
-        <p:nvSpPr>
-          <p:cNvPr id="22" name="Rectangle 21"/>
-          <p:cNvSpPr/>
-          <p:nvPr/>
-        </p:nvSpPr>
-        <p:spPr>
-          <a:xfrm>
-            <a:off x="4297680" y="1325880"/>
-            <a:ext cx="2194560" cy="3657600"/>
-          </a:xfrm>
-          <a:prstGeom prst="rect">
-            <a:avLst/>
-          </a:prstGeom>
-          <a:solidFill>
-            <a:srgbClr val="EEF3F8"/>
-          </a:solidFill>
-          <a:ln w="12700">
-            <a:solidFill>
-              <a:srgbClr val="0E7C86"/>
-            </a:solidFill>
-          </a:ln>
-          <a:effectLst/>
-        </p:spPr>
-        <p:style>
-          <a:lnRef idx="1">
-            <a:schemeClr val="accent1"/>
-          </a:lnRef>
-          <a:fillRef idx="3">
-            <a:schemeClr val="accent1"/>
-          </a:fillRef>
-          <a:effectRef idx="2">
-            <a:schemeClr val="accent1"/>
-          </a:effectRef>
-          <a:fontRef idx="minor">
-            <a:schemeClr val="lt1"/>
-          </a:fontRef>
-        </p:style>
-        <p:txBody>
-          <a:bodyPr rtlCol="0" anchor="ctr" wrap="square" lIns="45720" rIns="45720" tIns="18288" bIns="18288"/>
-          <a:lstStyle/>
-          <a:p>
-            <a:pPr algn="ctr">
-              <a:lnSpc>
-                <a:spcPct val="100000"/>
-              </a:lnSpc>
-              <a:spcAft>
-                <a:spcPts val="0"/>
+                  <a:srgbClr val="222222"/>
+                </a:solidFill>
+                <a:latin typeface="Calibri"/>
+              </a:rPr>
+              <a:t>That is deliberate. A bigger resistor would be easier to read, but it would waste power and steal voltage from the motors:</a:t>
+            </a:r>
+          </a:p>
+          <a:p>
+            <a:pPr lvl="1" algn="l">
+              <a:lnSpc>
+                <a:spcPct val="100000"/>
+              </a:lnSpc>
+              <a:spcAft>
+                <a:spcPts val="600"/>
               </a:spcAft>
               <a:defRPr sz="1800" b="0">
                 <a:solidFill>
@@ -18078,16 +17630,16 @@
                 </a:solidFill>
                 <a:latin typeface="Calibri"/>
               </a:rPr>
-              <a:t>ONE NEOPIXEL</a:t>
-            </a:r>
-          </a:p>
-          <a:p>
-            <a:pPr algn="ctr">
-              <a:lnSpc>
-                <a:spcPct val="100000"/>
-              </a:lnSpc>
-              <a:spcAft>
-                <a:spcPts val="0"/>
+              <a:t>P = I^2 x R = 4 x 0.0025 = 0.01 W  at 0.0025 ohm</a:t>
+            </a:r>
+          </a:p>
+          <a:p>
+            <a:pPr lvl="1" algn="l">
+              <a:lnSpc>
+                <a:spcPct val="100000"/>
+              </a:lnSpc>
+              <a:spcAft>
+                <a:spcPts val="600"/>
               </a:spcAft>
               <a:defRPr sz="1800" b="0">
                 <a:solidFill>
@@ -18103,16 +17655,16 @@
                 </a:solidFill>
                 <a:latin typeface="Calibri"/>
               </a:rPr>
-              <a:t>at full white</a:t>
-            </a:r>
-          </a:p>
-          <a:p>
-            <a:pPr algn="ctr">
-              <a:lnSpc>
-                <a:spcPct val="100000"/>
-              </a:lnSpc>
-              <a:spcAft>
-                <a:spcPts val="0"/>
+              <a:t>P = I^2 x R = 4 x 0.1    = 0.4 W   at 0.1 ohm</a:t>
+            </a:r>
+          </a:p>
+          <a:p>
+            <a:pPr algn="l">
+              <a:lnSpc>
+                <a:spcPct val="100000"/>
+              </a:lnSpc>
+              <a:spcAft>
+                <a:spcPts val="600"/>
               </a:spcAft>
               <a:defRPr sz="900" b="0">
                 <a:solidFill>
@@ -18123,12 +17675,12 @@
             </a:pPr>
           </a:p>
           <a:p>
-            <a:pPr algn="ctr">
-              <a:lnSpc>
-                <a:spcPct val="100000"/>
-              </a:lnSpc>
-              <a:spcAft>
-                <a:spcPts val="0"/>
+            <a:pPr algn="l">
+              <a:lnSpc>
+                <a:spcPct val="100000"/>
+              </a:lnSpc>
+              <a:spcAft>
+                <a:spcPts val="600"/>
               </a:spcAft>
               <a:defRPr sz="1800" b="0">
                 <a:solidFill>
@@ -18144,280 +17696,7 @@
                 </a:solidFill>
                 <a:latin typeface="Calibri"/>
               </a:rPr>
-              <a:t>3 LEDs x 20 mA</a:t>
-            </a:r>
-          </a:p>
-          <a:p>
-            <a:pPr algn="ctr">
-              <a:lnSpc>
-                <a:spcPct val="100000"/>
-              </a:lnSpc>
-              <a:spcAft>
-                <a:spcPts val="0"/>
-              </a:spcAft>
-              <a:defRPr sz="1800" b="0">
-                <a:solidFill>
-                  <a:srgbClr val="222222"/>
-                </a:solidFill>
-                <a:latin typeface="Calibri"/>
-              </a:defRPr>
-            </a:pPr>
-            <a:r>
-              <a:rPr sz="1800" b="0">
-                <a:solidFill>
-                  <a:srgbClr val="222222"/>
-                </a:solidFill>
-                <a:latin typeface="Calibri"/>
-              </a:rPr>
-              <a:t>= 60 mA</a:t>
-            </a:r>
-          </a:p>
-          <a:p>
-            <a:pPr algn="ctr">
-              <a:lnSpc>
-                <a:spcPct val="100000"/>
-              </a:lnSpc>
-              <a:spcAft>
-                <a:spcPts val="0"/>
-              </a:spcAft>
-              <a:defRPr sz="900" b="0">
-                <a:solidFill>
-                  <a:srgbClr val="222222"/>
-                </a:solidFill>
-                <a:latin typeface="Calibri"/>
-              </a:defRPr>
-            </a:pPr>
-          </a:p>
-          <a:p>
-            <a:pPr algn="ctr">
-              <a:lnSpc>
-                <a:spcPct val="100000"/>
-              </a:lnSpc>
-              <a:spcAft>
-                <a:spcPts val="0"/>
-              </a:spcAft>
-              <a:defRPr sz="1800" b="0">
-                <a:solidFill>
-                  <a:srgbClr val="222222"/>
-                </a:solidFill>
-                <a:latin typeface="Calibri"/>
-              </a:defRPr>
-            </a:pPr>
-            <a:r>
-              <a:rPr sz="1800" b="0">
-                <a:solidFill>
-                  <a:srgbClr val="222222"/>
-                </a:solidFill>
-                <a:latin typeface="Calibri"/>
-              </a:rPr>
-              <a:t>P = I x V</a:t>
-            </a:r>
-          </a:p>
-          <a:p>
-            <a:pPr algn="ctr">
-              <a:lnSpc>
-                <a:spcPct val="100000"/>
-              </a:lnSpc>
-              <a:spcAft>
-                <a:spcPts val="0"/>
-              </a:spcAft>
-              <a:defRPr sz="1800" b="0">
-                <a:solidFill>
-                  <a:srgbClr val="222222"/>
-                </a:solidFill>
-                <a:latin typeface="Calibri"/>
-              </a:defRPr>
-            </a:pPr>
-            <a:r>
-              <a:rPr sz="1800" b="0">
-                <a:solidFill>
-                  <a:srgbClr val="222222"/>
-                </a:solidFill>
-                <a:latin typeface="Calibri"/>
-              </a:rPr>
-              <a:t>= 0.06 x 5</a:t>
-            </a:r>
-          </a:p>
-          <a:p>
-            <a:pPr algn="ctr">
-              <a:lnSpc>
-                <a:spcPct val="100000"/>
-              </a:lnSpc>
-              <a:spcAft>
-                <a:spcPts val="0"/>
-              </a:spcAft>
-              <a:defRPr sz="1800" b="0">
-                <a:solidFill>
-                  <a:srgbClr val="222222"/>
-                </a:solidFill>
-                <a:latin typeface="Calibri"/>
-              </a:defRPr>
-            </a:pPr>
-            <a:r>
-              <a:rPr sz="1800" b="0">
-                <a:solidFill>
-                  <a:srgbClr val="222222"/>
-                </a:solidFill>
-                <a:latin typeface="Calibri"/>
-              </a:rPr>
-              <a:t>= 0.3 W</a:t>
-            </a:r>
-          </a:p>
-          <a:p>
-            <a:pPr algn="ctr">
-              <a:lnSpc>
-                <a:spcPct val="100000"/>
-              </a:lnSpc>
-              <a:spcAft>
-                <a:spcPts val="0"/>
-              </a:spcAft>
-              <a:defRPr sz="900" b="0">
-                <a:solidFill>
-                  <a:srgbClr val="222222"/>
-                </a:solidFill>
-                <a:latin typeface="Calibri"/>
-              </a:defRPr>
-            </a:pPr>
-          </a:p>
-          <a:p>
-            <a:pPr algn="ctr">
-              <a:lnSpc>
-                <a:spcPct val="100000"/>
-              </a:lnSpc>
-              <a:spcAft>
-                <a:spcPts val="0"/>
-              </a:spcAft>
-              <a:defRPr sz="1800" b="0">
-                <a:solidFill>
-                  <a:srgbClr val="222222"/>
-                </a:solidFill>
-                <a:latin typeface="Calibri"/>
-              </a:defRPr>
-            </a:pPr>
-            <a:r>
-              <a:rPr sz="1800" b="0">
-                <a:solidFill>
-                  <a:srgbClr val="222222"/>
-                </a:solidFill>
-                <a:latin typeface="Calibri"/>
-              </a:rPr>
-              <a:t>x 32 pixels</a:t>
-            </a:r>
-          </a:p>
-          <a:p>
-            <a:pPr algn="ctr">
-              <a:lnSpc>
-                <a:spcPct val="100000"/>
-              </a:lnSpc>
-              <a:spcAft>
-                <a:spcPts val="0"/>
-              </a:spcAft>
-              <a:defRPr sz="1800" b="0">
-                <a:solidFill>
-                  <a:srgbClr val="222222"/>
-                </a:solidFill>
-                <a:latin typeface="Calibri"/>
-              </a:defRPr>
-            </a:pPr>
-            <a:r>
-              <a:rPr sz="1800" b="0">
-                <a:solidFill>
-                  <a:srgbClr val="222222"/>
-                </a:solidFill>
-                <a:latin typeface="Calibri"/>
-              </a:rPr>
-              <a:t>= 1.92 A</a:t>
-            </a:r>
-          </a:p>
-          <a:p>
-            <a:pPr algn="ctr">
-              <a:lnSpc>
-                <a:spcPct val="100000"/>
-              </a:lnSpc>
-              <a:spcAft>
-                <a:spcPts val="0"/>
-              </a:spcAft>
-              <a:defRPr sz="1800" b="0">
-                <a:solidFill>
-                  <a:srgbClr val="222222"/>
-                </a:solidFill>
-                <a:latin typeface="Calibri"/>
-              </a:defRPr>
-            </a:pPr>
-            <a:r>
-              <a:rPr sz="1800" b="0">
-                <a:solidFill>
-                  <a:srgbClr val="222222"/>
-                </a:solidFill>
-                <a:latin typeface="Calibri"/>
-              </a:rPr>
-              <a:t>= 9.6 W</a:t>
-            </a:r>
-          </a:p>
-        </p:txBody>
-      </p:sp>
-      <p:sp>
-        <p:nvSpPr>
-          <p:cNvPr id="23" name="Rounded Rectangle 22"/>
-          <p:cNvSpPr/>
-          <p:nvPr/>
-        </p:nvSpPr>
-        <p:spPr>
-          <a:xfrm>
-            <a:off x="502920" y="5303520"/>
-            <a:ext cx="11185855" cy="960120"/>
-          </a:xfrm>
-          <a:prstGeom prst="roundRect">
-            <a:avLst>
-              <a:gd name="adj" fmla="val 4000"/>
-            </a:avLst>
-          </a:prstGeom>
-          <a:solidFill>
-            <a:srgbClr val="EEF3F8"/>
-          </a:solidFill>
-          <a:ln w="12700">
-            <a:solidFill>
-              <a:srgbClr val="0E7C86"/>
-            </a:solidFill>
-          </a:ln>
-          <a:effectLst/>
-        </p:spPr>
-        <p:style>
-          <a:lnRef idx="1">
-            <a:schemeClr val="accent1"/>
-          </a:lnRef>
-          <a:fillRef idx="3">
-            <a:schemeClr val="accent1"/>
-          </a:fillRef>
-          <a:effectRef idx="2">
-            <a:schemeClr val="accent1"/>
-          </a:effectRef>
-          <a:fontRef idx="minor">
-            <a:schemeClr val="lt1"/>
-          </a:fontRef>
-        </p:style>
-        <p:txBody>
-          <a:bodyPr rtlCol="0" anchor="ctr" wrap="square" lIns="164592" rIns="164592" tIns="73152" bIns="73152"/>
-          <a:lstStyle/>
-          <a:p>
-            <a:pPr algn="l"/>
-            <a:r>
-              <a:rPr sz="1300" b="1">
-                <a:solidFill>
-                  <a:srgbClr val="0E7C86"/>
-                </a:solidFill>
-                <a:latin typeface="Calibri"/>
-              </a:rPr>
-              <a:t>KEY POINT   </a:t>
-            </a:r>
-            <a:r>
-              <a:rPr sz="1500">
-                <a:solidFill>
-                  <a:srgbClr val="222222"/>
-                </a:solidFill>
-                <a:latin typeface="Calibri"/>
-              </a:rPr>
-              <a:t>Cover the quantity you want with your thumb and the triangle shows you the sum. These two turn up again in the LED budget, the shunt resistor, and how long your battery lasts.</a:t>
+              <a:t>Reading five millivolts accurately is the sensor's entire job. The shunt register reports in units of 10 microvolts, which is where the 0.01 in the math comes from.</a:t>
             </a:r>
           </a:p>
         </p:txBody>
@@ -18481,7 +17760,7 @@
                 </a:solidFill>
                 <a:latin typeface="Calibri"/>
               </a:rPr>
-              <a:t>Driving a chip with no library</a:t>
+              <a:t>The two relationships the whole lesson rests on</a:t>
             </a:r>
           </a:p>
         </p:txBody>
@@ -18634,8 +17913,8 @@
         </p:nvSpPr>
         <p:spPr>
           <a:xfrm>
-            <a:off x="502920" y="1188720"/>
-            <a:ext cx="7047088" cy="274320"/>
+            <a:off x="1143000" y="1124712"/>
+            <a:ext cx="2743200" cy="367792"/>
           </a:xfrm>
           <a:prstGeom prst="rect">
             <a:avLst/>
@@ -18648,42 +17927,1239 @@
           </a:bodyPr>
           <a:lstStyle/>
           <a:p>
-            <a:pPr algn="l">
-              <a:lnSpc>
-                <a:spcPct val="100000"/>
-              </a:lnSpc>
-              <a:spcAft>
-                <a:spcPts val="200"/>
-              </a:spcAft>
-              <a:defRPr sz="1200" b="1">
+            <a:pPr algn="ctr">
+              <a:lnSpc>
+                <a:spcPct val="100000"/>
+              </a:lnSpc>
+              <a:spcAft>
+                <a:spcPts val="0"/>
+              </a:spcAft>
+              <a:defRPr sz="1800" b="1">
                 <a:solidFill>
                   <a:srgbClr val="0E7C86"/>
                 </a:solidFill>
-                <a:latin typeface="Consolas"/>
-              </a:defRPr>
-            </a:pPr>
-            <a:r>
-              <a:rPr sz="1200" b="1">
+                <a:latin typeface="Calibri"/>
+              </a:defRPr>
+            </a:pPr>
+            <a:r>
+              <a:rPr sz="1800" b="1">
                 <a:solidFill>
                   <a:srgbClr val="0E7C86"/>
                 </a:solidFill>
-                <a:latin typeface="Consolas"/>
-              </a:rPr>
-              <a:t>Sensors.ino</a:t>
-            </a:r>
-          </a:p>
-        </p:txBody>
-      </p:sp>
-      <p:sp>
-        <p:nvSpPr>
-          <p:cNvPr id="7" name="CODE_PANEL"/>
+                <a:latin typeface="Calibri"/>
+              </a:rPr>
+              <a:t>OHM'S LAW</a:t>
+            </a:r>
+          </a:p>
+        </p:txBody>
+      </p:sp>
+      <p:sp>
+        <p:nvSpPr>
+          <p:cNvPr id="7" name="Isosceles Triangle 6"/>
           <p:cNvSpPr/>
           <p:nvPr/>
         </p:nvSpPr>
         <p:spPr>
           <a:xfrm>
-            <a:off x="502920" y="1517904"/>
-            <a:ext cx="7047088" cy="4745736"/>
+            <a:off x="1143000" y="1508760"/>
+            <a:ext cx="2743200" cy="2011680"/>
+          </a:xfrm>
+          <a:prstGeom prst="triangle">
+            <a:avLst/>
+          </a:prstGeom>
+          <a:solidFill>
+            <a:srgbClr val="D6ECEE"/>
+          </a:solidFill>
+          <a:ln w="19050">
+            <a:solidFill>
+              <a:srgbClr val="0E7C86"/>
+            </a:solidFill>
+          </a:ln>
+          <a:effectLst/>
+        </p:spPr>
+        <p:style>
+          <a:lnRef idx="1">
+            <a:schemeClr val="accent1"/>
+          </a:lnRef>
+          <a:fillRef idx="3">
+            <a:schemeClr val="accent1"/>
+          </a:fillRef>
+          <a:effectRef idx="2">
+            <a:schemeClr val="accent1"/>
+          </a:effectRef>
+          <a:fontRef idx="minor">
+            <a:schemeClr val="lt1"/>
+          </a:fontRef>
+        </p:style>
+        <p:txBody>
+          <a:bodyPr rtlCol="0" anchor="ctr" wrap="square"/>
+          <a:lstStyle/>
+          <a:p>
+            <a:pPr algn="l">
+              <a:lnSpc>
+                <a:spcPct val="100000"/>
+              </a:lnSpc>
+              <a:spcAft>
+                <a:spcPts val="200"/>
+              </a:spcAft>
+              <a:defRPr sz="900" b="0">
+                <a:solidFill>
+                  <a:srgbClr val="222222"/>
+                </a:solidFill>
+                <a:latin typeface="Calibri"/>
+              </a:defRPr>
+            </a:pPr>
+          </a:p>
+        </p:txBody>
+      </p:sp>
+      <p:cxnSp>
+        <p:nvCxnSpPr>
+          <p:cNvPr id="8" name="Connector 7"/>
+          <p:cNvCxnSpPr/>
+          <p:nvPr/>
+        </p:nvCxnSpPr>
+        <p:spPr>
+          <a:xfrm>
+            <a:off x="1709928" y="2635300"/>
+            <a:ext cx="1609344" cy="0"/>
+          </a:xfrm>
+          <a:prstGeom prst="line">
+            <a:avLst/>
+          </a:prstGeom>
+          <a:ln w="22225">
+            <a:solidFill>
+              <a:srgbClr val="0E7C86"/>
+            </a:solidFill>
+          </a:ln>
+        </p:spPr>
+        <p:style>
+          <a:lnRef idx="2">
+            <a:schemeClr val="accent1"/>
+          </a:lnRef>
+          <a:fillRef idx="0">
+            <a:schemeClr val="accent1"/>
+          </a:fillRef>
+          <a:effectRef idx="1">
+            <a:schemeClr val="accent1"/>
+          </a:effectRef>
+          <a:fontRef idx="minor">
+            <a:schemeClr val="tx1"/>
+          </a:fontRef>
+        </p:style>
+      </p:cxnSp>
+      <p:sp>
+        <p:nvSpPr>
+          <p:cNvPr id="9" name="TextBox 8"/>
+          <p:cNvSpPr txBox="1"/>
+          <p:nvPr/>
+        </p:nvSpPr>
+        <p:spPr>
+          <a:xfrm>
+            <a:off x="1143000" y="1892808"/>
+            <a:ext cx="2743200" cy="491744"/>
+          </a:xfrm>
+          <a:prstGeom prst="rect">
+            <a:avLst/>
+          </a:prstGeom>
+          <a:noFill/>
+        </p:spPr>
+        <p:txBody>
+          <a:bodyPr wrap="square" lIns="0" tIns="0" rIns="0" bIns="0">
+            <a:spAutoFit/>
+          </a:bodyPr>
+          <a:lstStyle/>
+          <a:p>
+            <a:pPr algn="ctr">
+              <a:lnSpc>
+                <a:spcPct val="100000"/>
+              </a:lnSpc>
+              <a:spcAft>
+                <a:spcPts val="100"/>
+              </a:spcAft>
+              <a:defRPr sz="2600" b="1">
+                <a:solidFill>
+                  <a:srgbClr val="1F3A5F"/>
+                </a:solidFill>
+                <a:latin typeface="Calibri"/>
+              </a:defRPr>
+            </a:pPr>
+            <a:r>
+              <a:rPr sz="2600" b="1">
+                <a:solidFill>
+                  <a:srgbClr val="1F3A5F"/>
+                </a:solidFill>
+                <a:latin typeface="Calibri"/>
+              </a:rPr>
+              <a:t>V</a:t>
+            </a:r>
+          </a:p>
+        </p:txBody>
+      </p:sp>
+      <p:sp>
+        <p:nvSpPr>
+          <p:cNvPr id="10" name="TextBox 9"/>
+          <p:cNvSpPr txBox="1"/>
+          <p:nvPr/>
+        </p:nvSpPr>
+        <p:spPr>
+          <a:xfrm>
+            <a:off x="1463040" y="2909620"/>
+            <a:ext cx="822960" cy="429768"/>
+          </a:xfrm>
+          <a:prstGeom prst="rect">
+            <a:avLst/>
+          </a:prstGeom>
+          <a:noFill/>
+        </p:spPr>
+        <p:txBody>
+          <a:bodyPr wrap="square" lIns="0" tIns="0" rIns="0" bIns="0">
+            <a:spAutoFit/>
+          </a:bodyPr>
+          <a:lstStyle/>
+          <a:p>
+            <a:pPr algn="ctr">
+              <a:lnSpc>
+                <a:spcPct val="100000"/>
+              </a:lnSpc>
+              <a:spcAft>
+                <a:spcPts val="100"/>
+              </a:spcAft>
+              <a:defRPr sz="2200" b="1">
+                <a:solidFill>
+                  <a:srgbClr val="1F3A5F"/>
+                </a:solidFill>
+                <a:latin typeface="Calibri"/>
+              </a:defRPr>
+            </a:pPr>
+            <a:r>
+              <a:rPr sz="2200" b="1">
+                <a:solidFill>
+                  <a:srgbClr val="1F3A5F"/>
+                </a:solidFill>
+                <a:latin typeface="Calibri"/>
+              </a:rPr>
+              <a:t>I</a:t>
+            </a:r>
+          </a:p>
+        </p:txBody>
+      </p:sp>
+      <p:sp>
+        <p:nvSpPr>
+          <p:cNvPr id="11" name="TextBox 10"/>
+          <p:cNvSpPr txBox="1"/>
+          <p:nvPr/>
+        </p:nvSpPr>
+        <p:spPr>
+          <a:xfrm>
+            <a:off x="2743200" y="2909620"/>
+            <a:ext cx="822960" cy="429768"/>
+          </a:xfrm>
+          <a:prstGeom prst="rect">
+            <a:avLst/>
+          </a:prstGeom>
+          <a:noFill/>
+        </p:spPr>
+        <p:txBody>
+          <a:bodyPr wrap="square" lIns="0" tIns="0" rIns="0" bIns="0">
+            <a:spAutoFit/>
+          </a:bodyPr>
+          <a:lstStyle/>
+          <a:p>
+            <a:pPr algn="ctr">
+              <a:lnSpc>
+                <a:spcPct val="100000"/>
+              </a:lnSpc>
+              <a:spcAft>
+                <a:spcPts val="100"/>
+              </a:spcAft>
+              <a:defRPr sz="2200" b="1">
+                <a:solidFill>
+                  <a:srgbClr val="1F3A5F"/>
+                </a:solidFill>
+                <a:latin typeface="Calibri"/>
+              </a:defRPr>
+            </a:pPr>
+            <a:r>
+              <a:rPr sz="2200" b="1">
+                <a:solidFill>
+                  <a:srgbClr val="1F3A5F"/>
+                </a:solidFill>
+                <a:latin typeface="Calibri"/>
+              </a:rPr>
+              <a:t>R</a:t>
+            </a:r>
+          </a:p>
+        </p:txBody>
+      </p:sp>
+      <p:sp>
+        <p:nvSpPr>
+          <p:cNvPr id="12" name="Rectangle 11"/>
+          <p:cNvSpPr/>
+          <p:nvPr/>
+        </p:nvSpPr>
+        <p:spPr>
+          <a:xfrm>
+            <a:off x="1005840" y="3794760"/>
+            <a:ext cx="3017520" cy="914400"/>
+          </a:xfrm>
+          <a:prstGeom prst="rect">
+            <a:avLst/>
+          </a:prstGeom>
+          <a:solidFill>
+            <a:srgbClr val="F4F6F8"/>
+          </a:solidFill>
+          <a:ln w="9525">
+            <a:solidFill>
+              <a:srgbClr val="C8D2DE"/>
+            </a:solidFill>
+          </a:ln>
+          <a:effectLst/>
+        </p:spPr>
+        <p:style>
+          <a:lnRef idx="1">
+            <a:schemeClr val="accent1"/>
+          </a:lnRef>
+          <a:fillRef idx="3">
+            <a:schemeClr val="accent1"/>
+          </a:fillRef>
+          <a:effectRef idx="2">
+            <a:schemeClr val="accent1"/>
+          </a:effectRef>
+          <a:fontRef idx="minor">
+            <a:schemeClr val="lt1"/>
+          </a:fontRef>
+        </p:style>
+        <p:txBody>
+          <a:bodyPr rtlCol="0" anchor="ctr" wrap="square" lIns="45720" rIns="45720" tIns="18288" bIns="18288"/>
+          <a:lstStyle/>
+          <a:p>
+            <a:pPr algn="ctr">
+              <a:lnSpc>
+                <a:spcPct val="100000"/>
+              </a:lnSpc>
+              <a:spcAft>
+                <a:spcPts val="0"/>
+              </a:spcAft>
+              <a:defRPr sz="1400" b="0">
+                <a:solidFill>
+                  <a:srgbClr val="222222"/>
+                </a:solidFill>
+                <a:latin typeface="Consolas"/>
+              </a:defRPr>
+            </a:pPr>
+            <a:r>
+              <a:rPr sz="1400" b="0">
+                <a:solidFill>
+                  <a:srgbClr val="222222"/>
+                </a:solidFill>
+                <a:latin typeface="Consolas"/>
+              </a:rPr>
+              <a:t>V = I x R</a:t>
+            </a:r>
+          </a:p>
+          <a:p>
+            <a:pPr algn="ctr">
+              <a:lnSpc>
+                <a:spcPct val="100000"/>
+              </a:lnSpc>
+              <a:spcAft>
+                <a:spcPts val="0"/>
+              </a:spcAft>
+              <a:defRPr sz="1400" b="0">
+                <a:solidFill>
+                  <a:srgbClr val="222222"/>
+                </a:solidFill>
+                <a:latin typeface="Consolas"/>
+              </a:defRPr>
+            </a:pPr>
+            <a:r>
+              <a:rPr sz="1400" b="0">
+                <a:solidFill>
+                  <a:srgbClr val="222222"/>
+                </a:solidFill>
+                <a:latin typeface="Consolas"/>
+              </a:rPr>
+              <a:t>I = V / R</a:t>
+            </a:r>
+          </a:p>
+          <a:p>
+            <a:pPr algn="ctr">
+              <a:lnSpc>
+                <a:spcPct val="100000"/>
+              </a:lnSpc>
+              <a:spcAft>
+                <a:spcPts val="0"/>
+              </a:spcAft>
+              <a:defRPr sz="1400" b="0">
+                <a:solidFill>
+                  <a:srgbClr val="222222"/>
+                </a:solidFill>
+                <a:latin typeface="Consolas"/>
+              </a:defRPr>
+            </a:pPr>
+            <a:r>
+              <a:rPr sz="1400" b="0">
+                <a:solidFill>
+                  <a:srgbClr val="222222"/>
+                </a:solidFill>
+                <a:latin typeface="Consolas"/>
+              </a:rPr>
+              <a:t>R = V / I</a:t>
+            </a:r>
+          </a:p>
+        </p:txBody>
+      </p:sp>
+      <p:sp>
+        <p:nvSpPr>
+          <p:cNvPr id="13" name="TextBox 12"/>
+          <p:cNvSpPr txBox="1"/>
+          <p:nvPr/>
+        </p:nvSpPr>
+        <p:spPr>
+          <a:xfrm>
+            <a:off x="1005840" y="4818888"/>
+            <a:ext cx="3017520" cy="646684"/>
+          </a:xfrm>
+          <a:prstGeom prst="rect">
+            <a:avLst/>
+          </a:prstGeom>
+          <a:noFill/>
+        </p:spPr>
+        <p:txBody>
+          <a:bodyPr wrap="square" lIns="0" tIns="0" rIns="0" bIns="0">
+            <a:spAutoFit/>
+          </a:bodyPr>
+          <a:lstStyle/>
+          <a:p>
+            <a:pPr algn="ctr">
+              <a:lnSpc>
+                <a:spcPct val="100000"/>
+              </a:lnSpc>
+              <a:spcAft>
+                <a:spcPts val="0"/>
+              </a:spcAft>
+              <a:defRPr sz="1800" b="0">
+                <a:solidFill>
+                  <a:srgbClr val="666666"/>
+                </a:solidFill>
+                <a:latin typeface="Calibri"/>
+              </a:defRPr>
+            </a:pPr>
+            <a:r>
+              <a:rPr sz="1800" b="0">
+                <a:solidFill>
+                  <a:srgbClr val="666666"/>
+                </a:solidFill>
+                <a:latin typeface="Calibri"/>
+              </a:rPr>
+              <a:t>V  volts     I  amps     R  ohms</a:t>
+            </a:r>
+          </a:p>
+        </p:txBody>
+      </p:sp>
+      <p:sp>
+        <p:nvSpPr>
+          <p:cNvPr id="14" name="TextBox 13"/>
+          <p:cNvSpPr txBox="1"/>
+          <p:nvPr/>
+        </p:nvSpPr>
+        <p:spPr>
+          <a:xfrm>
+            <a:off x="6812280" y="1124712"/>
+            <a:ext cx="2743200" cy="367792"/>
+          </a:xfrm>
+          <a:prstGeom prst="rect">
+            <a:avLst/>
+          </a:prstGeom>
+          <a:noFill/>
+        </p:spPr>
+        <p:txBody>
+          <a:bodyPr wrap="square" lIns="0" tIns="0" rIns="0" bIns="0">
+            <a:spAutoFit/>
+          </a:bodyPr>
+          <a:lstStyle/>
+          <a:p>
+            <a:pPr algn="ctr">
+              <a:lnSpc>
+                <a:spcPct val="100000"/>
+              </a:lnSpc>
+              <a:spcAft>
+                <a:spcPts val="0"/>
+              </a:spcAft>
+              <a:defRPr sz="1800" b="1">
+                <a:solidFill>
+                  <a:srgbClr val="B46A0F"/>
+                </a:solidFill>
+                <a:latin typeface="Calibri"/>
+              </a:defRPr>
+            </a:pPr>
+            <a:r>
+              <a:rPr sz="1800" b="1">
+                <a:solidFill>
+                  <a:srgbClr val="B46A0F"/>
+                </a:solidFill>
+                <a:latin typeface="Calibri"/>
+              </a:rPr>
+              <a:t>POWER LAW</a:t>
+            </a:r>
+          </a:p>
+        </p:txBody>
+      </p:sp>
+      <p:sp>
+        <p:nvSpPr>
+          <p:cNvPr id="15" name="Isosceles Triangle 14"/>
+          <p:cNvSpPr/>
+          <p:nvPr/>
+        </p:nvSpPr>
+        <p:spPr>
+          <a:xfrm>
+            <a:off x="6812280" y="1508760"/>
+            <a:ext cx="2743200" cy="2011680"/>
+          </a:xfrm>
+          <a:prstGeom prst="triangle">
+            <a:avLst/>
+          </a:prstGeom>
+          <a:solidFill>
+            <a:srgbClr val="FAE6C8"/>
+          </a:solidFill>
+          <a:ln w="19050">
+            <a:solidFill>
+              <a:srgbClr val="B46A0F"/>
+            </a:solidFill>
+          </a:ln>
+          <a:effectLst/>
+        </p:spPr>
+        <p:style>
+          <a:lnRef idx="1">
+            <a:schemeClr val="accent1"/>
+          </a:lnRef>
+          <a:fillRef idx="3">
+            <a:schemeClr val="accent1"/>
+          </a:fillRef>
+          <a:effectRef idx="2">
+            <a:schemeClr val="accent1"/>
+          </a:effectRef>
+          <a:fontRef idx="minor">
+            <a:schemeClr val="lt1"/>
+          </a:fontRef>
+        </p:style>
+        <p:txBody>
+          <a:bodyPr rtlCol="0" anchor="ctr" wrap="square"/>
+          <a:lstStyle/>
+          <a:p>
+            <a:pPr algn="l">
+              <a:lnSpc>
+                <a:spcPct val="100000"/>
+              </a:lnSpc>
+              <a:spcAft>
+                <a:spcPts val="200"/>
+              </a:spcAft>
+              <a:defRPr sz="900" b="0">
+                <a:solidFill>
+                  <a:srgbClr val="222222"/>
+                </a:solidFill>
+                <a:latin typeface="Calibri"/>
+              </a:defRPr>
+            </a:pPr>
+          </a:p>
+        </p:txBody>
+      </p:sp>
+      <p:cxnSp>
+        <p:nvCxnSpPr>
+          <p:cNvPr id="16" name="Connector 15"/>
+          <p:cNvCxnSpPr/>
+          <p:nvPr/>
+        </p:nvCxnSpPr>
+        <p:spPr>
+          <a:xfrm>
+            <a:off x="7379208" y="2635300"/>
+            <a:ext cx="1609344" cy="0"/>
+          </a:xfrm>
+          <a:prstGeom prst="line">
+            <a:avLst/>
+          </a:prstGeom>
+          <a:ln w="22225">
+            <a:solidFill>
+              <a:srgbClr val="B46A0F"/>
+            </a:solidFill>
+          </a:ln>
+        </p:spPr>
+        <p:style>
+          <a:lnRef idx="2">
+            <a:schemeClr val="accent1"/>
+          </a:lnRef>
+          <a:fillRef idx="0">
+            <a:schemeClr val="accent1"/>
+          </a:fillRef>
+          <a:effectRef idx="1">
+            <a:schemeClr val="accent1"/>
+          </a:effectRef>
+          <a:fontRef idx="minor">
+            <a:schemeClr val="tx1"/>
+          </a:fontRef>
+        </p:style>
+      </p:cxnSp>
+      <p:sp>
+        <p:nvSpPr>
+          <p:cNvPr id="17" name="TextBox 16"/>
+          <p:cNvSpPr txBox="1"/>
+          <p:nvPr/>
+        </p:nvSpPr>
+        <p:spPr>
+          <a:xfrm>
+            <a:off x="6812280" y="1892808"/>
+            <a:ext cx="2743200" cy="491744"/>
+          </a:xfrm>
+          <a:prstGeom prst="rect">
+            <a:avLst/>
+          </a:prstGeom>
+          <a:noFill/>
+        </p:spPr>
+        <p:txBody>
+          <a:bodyPr wrap="square" lIns="0" tIns="0" rIns="0" bIns="0">
+            <a:spAutoFit/>
+          </a:bodyPr>
+          <a:lstStyle/>
+          <a:p>
+            <a:pPr algn="ctr">
+              <a:lnSpc>
+                <a:spcPct val="100000"/>
+              </a:lnSpc>
+              <a:spcAft>
+                <a:spcPts val="100"/>
+              </a:spcAft>
+              <a:defRPr sz="2600" b="1">
+                <a:solidFill>
+                  <a:srgbClr val="1F3A5F"/>
+                </a:solidFill>
+                <a:latin typeface="Calibri"/>
+              </a:defRPr>
+            </a:pPr>
+            <a:r>
+              <a:rPr sz="2600" b="1">
+                <a:solidFill>
+                  <a:srgbClr val="1F3A5F"/>
+                </a:solidFill>
+                <a:latin typeface="Calibri"/>
+              </a:rPr>
+              <a:t>P</a:t>
+            </a:r>
+          </a:p>
+        </p:txBody>
+      </p:sp>
+      <p:sp>
+        <p:nvSpPr>
+          <p:cNvPr id="18" name="TextBox 17"/>
+          <p:cNvSpPr txBox="1"/>
+          <p:nvPr/>
+        </p:nvSpPr>
+        <p:spPr>
+          <a:xfrm>
+            <a:off x="7132320" y="2909620"/>
+            <a:ext cx="822960" cy="429768"/>
+          </a:xfrm>
+          <a:prstGeom prst="rect">
+            <a:avLst/>
+          </a:prstGeom>
+          <a:noFill/>
+        </p:spPr>
+        <p:txBody>
+          <a:bodyPr wrap="square" lIns="0" tIns="0" rIns="0" bIns="0">
+            <a:spAutoFit/>
+          </a:bodyPr>
+          <a:lstStyle/>
+          <a:p>
+            <a:pPr algn="ctr">
+              <a:lnSpc>
+                <a:spcPct val="100000"/>
+              </a:lnSpc>
+              <a:spcAft>
+                <a:spcPts val="100"/>
+              </a:spcAft>
+              <a:defRPr sz="2200" b="1">
+                <a:solidFill>
+                  <a:srgbClr val="1F3A5F"/>
+                </a:solidFill>
+                <a:latin typeface="Calibri"/>
+              </a:defRPr>
+            </a:pPr>
+            <a:r>
+              <a:rPr sz="2200" b="1">
+                <a:solidFill>
+                  <a:srgbClr val="1F3A5F"/>
+                </a:solidFill>
+                <a:latin typeface="Calibri"/>
+              </a:rPr>
+              <a:t>I</a:t>
+            </a:r>
+          </a:p>
+        </p:txBody>
+      </p:sp>
+      <p:sp>
+        <p:nvSpPr>
+          <p:cNvPr id="19" name="TextBox 18"/>
+          <p:cNvSpPr txBox="1"/>
+          <p:nvPr/>
+        </p:nvSpPr>
+        <p:spPr>
+          <a:xfrm>
+            <a:off x="8412480" y="2909620"/>
+            <a:ext cx="822960" cy="429768"/>
+          </a:xfrm>
+          <a:prstGeom prst="rect">
+            <a:avLst/>
+          </a:prstGeom>
+          <a:noFill/>
+        </p:spPr>
+        <p:txBody>
+          <a:bodyPr wrap="square" lIns="0" tIns="0" rIns="0" bIns="0">
+            <a:spAutoFit/>
+          </a:bodyPr>
+          <a:lstStyle/>
+          <a:p>
+            <a:pPr algn="ctr">
+              <a:lnSpc>
+                <a:spcPct val="100000"/>
+              </a:lnSpc>
+              <a:spcAft>
+                <a:spcPts val="100"/>
+              </a:spcAft>
+              <a:defRPr sz="2200" b="1">
+                <a:solidFill>
+                  <a:srgbClr val="1F3A5F"/>
+                </a:solidFill>
+                <a:latin typeface="Calibri"/>
+              </a:defRPr>
+            </a:pPr>
+            <a:r>
+              <a:rPr sz="2200" b="1">
+                <a:solidFill>
+                  <a:srgbClr val="1F3A5F"/>
+                </a:solidFill>
+                <a:latin typeface="Calibri"/>
+              </a:rPr>
+              <a:t>V</a:t>
+            </a:r>
+          </a:p>
+        </p:txBody>
+      </p:sp>
+      <p:sp>
+        <p:nvSpPr>
+          <p:cNvPr id="20" name="Rectangle 19"/>
+          <p:cNvSpPr/>
+          <p:nvPr/>
+        </p:nvSpPr>
+        <p:spPr>
+          <a:xfrm>
+            <a:off x="6675120" y="3794760"/>
+            <a:ext cx="3017520" cy="914400"/>
+          </a:xfrm>
+          <a:prstGeom prst="rect">
+            <a:avLst/>
+          </a:prstGeom>
+          <a:solidFill>
+            <a:srgbClr val="F4F6F8"/>
+          </a:solidFill>
+          <a:ln w="9525">
+            <a:solidFill>
+              <a:srgbClr val="C8D2DE"/>
+            </a:solidFill>
+          </a:ln>
+          <a:effectLst/>
+        </p:spPr>
+        <p:style>
+          <a:lnRef idx="1">
+            <a:schemeClr val="accent1"/>
+          </a:lnRef>
+          <a:fillRef idx="3">
+            <a:schemeClr val="accent1"/>
+          </a:fillRef>
+          <a:effectRef idx="2">
+            <a:schemeClr val="accent1"/>
+          </a:effectRef>
+          <a:fontRef idx="minor">
+            <a:schemeClr val="lt1"/>
+          </a:fontRef>
+        </p:style>
+        <p:txBody>
+          <a:bodyPr rtlCol="0" anchor="ctr" wrap="square" lIns="45720" rIns="45720" tIns="18288" bIns="18288"/>
+          <a:lstStyle/>
+          <a:p>
+            <a:pPr algn="ctr">
+              <a:lnSpc>
+                <a:spcPct val="100000"/>
+              </a:lnSpc>
+              <a:spcAft>
+                <a:spcPts val="0"/>
+              </a:spcAft>
+              <a:defRPr sz="1400" b="0">
+                <a:solidFill>
+                  <a:srgbClr val="222222"/>
+                </a:solidFill>
+                <a:latin typeface="Consolas"/>
+              </a:defRPr>
+            </a:pPr>
+            <a:r>
+              <a:rPr sz="1400" b="0">
+                <a:solidFill>
+                  <a:srgbClr val="222222"/>
+                </a:solidFill>
+                <a:latin typeface="Consolas"/>
+              </a:rPr>
+              <a:t>P = I x V</a:t>
+            </a:r>
+          </a:p>
+          <a:p>
+            <a:pPr algn="ctr">
+              <a:lnSpc>
+                <a:spcPct val="100000"/>
+              </a:lnSpc>
+              <a:spcAft>
+                <a:spcPts val="0"/>
+              </a:spcAft>
+              <a:defRPr sz="1400" b="0">
+                <a:solidFill>
+                  <a:srgbClr val="222222"/>
+                </a:solidFill>
+                <a:latin typeface="Consolas"/>
+              </a:defRPr>
+            </a:pPr>
+            <a:r>
+              <a:rPr sz="1400" b="0">
+                <a:solidFill>
+                  <a:srgbClr val="222222"/>
+                </a:solidFill>
+                <a:latin typeface="Consolas"/>
+              </a:rPr>
+              <a:t>I = P / V</a:t>
+            </a:r>
+          </a:p>
+          <a:p>
+            <a:pPr algn="ctr">
+              <a:lnSpc>
+                <a:spcPct val="100000"/>
+              </a:lnSpc>
+              <a:spcAft>
+                <a:spcPts val="0"/>
+              </a:spcAft>
+              <a:defRPr sz="1400" b="0">
+                <a:solidFill>
+                  <a:srgbClr val="222222"/>
+                </a:solidFill>
+                <a:latin typeface="Consolas"/>
+              </a:defRPr>
+            </a:pPr>
+            <a:r>
+              <a:rPr sz="1400" b="0">
+                <a:solidFill>
+                  <a:srgbClr val="222222"/>
+                </a:solidFill>
+                <a:latin typeface="Consolas"/>
+              </a:rPr>
+              <a:t>V = P / I</a:t>
+            </a:r>
+          </a:p>
+        </p:txBody>
+      </p:sp>
+      <p:sp>
+        <p:nvSpPr>
+          <p:cNvPr id="21" name="TextBox 20"/>
+          <p:cNvSpPr txBox="1"/>
+          <p:nvPr/>
+        </p:nvSpPr>
+        <p:spPr>
+          <a:xfrm>
+            <a:off x="6675120" y="4818888"/>
+            <a:ext cx="3017520" cy="646684"/>
+          </a:xfrm>
+          <a:prstGeom prst="rect">
+            <a:avLst/>
+          </a:prstGeom>
+          <a:noFill/>
+        </p:spPr>
+        <p:txBody>
+          <a:bodyPr wrap="square" lIns="0" tIns="0" rIns="0" bIns="0">
+            <a:spAutoFit/>
+          </a:bodyPr>
+          <a:lstStyle/>
+          <a:p>
+            <a:pPr algn="ctr">
+              <a:lnSpc>
+                <a:spcPct val="100000"/>
+              </a:lnSpc>
+              <a:spcAft>
+                <a:spcPts val="0"/>
+              </a:spcAft>
+              <a:defRPr sz="1800" b="0">
+                <a:solidFill>
+                  <a:srgbClr val="666666"/>
+                </a:solidFill>
+                <a:latin typeface="Calibri"/>
+              </a:defRPr>
+            </a:pPr>
+            <a:r>
+              <a:rPr sz="1800" b="0">
+                <a:solidFill>
+                  <a:srgbClr val="666666"/>
+                </a:solidFill>
+                <a:latin typeface="Calibri"/>
+              </a:rPr>
+              <a:t>P  watts     I  amps     V  volts</a:t>
+            </a:r>
+          </a:p>
+        </p:txBody>
+      </p:sp>
+      <p:sp>
+        <p:nvSpPr>
+          <p:cNvPr id="22" name="Rectangle 21"/>
+          <p:cNvSpPr/>
+          <p:nvPr/>
+        </p:nvSpPr>
+        <p:spPr>
+          <a:xfrm>
+            <a:off x="4297680" y="1325880"/>
+            <a:ext cx="2194560" cy="3657600"/>
+          </a:xfrm>
+          <a:prstGeom prst="rect">
+            <a:avLst/>
+          </a:prstGeom>
+          <a:solidFill>
+            <a:srgbClr val="EEF3F8"/>
+          </a:solidFill>
+          <a:ln w="12700">
+            <a:solidFill>
+              <a:srgbClr val="0E7C86"/>
+            </a:solidFill>
+          </a:ln>
+          <a:effectLst/>
+        </p:spPr>
+        <p:style>
+          <a:lnRef idx="1">
+            <a:schemeClr val="accent1"/>
+          </a:lnRef>
+          <a:fillRef idx="3">
+            <a:schemeClr val="accent1"/>
+          </a:fillRef>
+          <a:effectRef idx="2">
+            <a:schemeClr val="accent1"/>
+          </a:effectRef>
+          <a:fontRef idx="minor">
+            <a:schemeClr val="lt1"/>
+          </a:fontRef>
+        </p:style>
+        <p:txBody>
+          <a:bodyPr rtlCol="0" anchor="ctr" wrap="square" lIns="45720" rIns="45720" tIns="18288" bIns="18288"/>
+          <a:lstStyle/>
+          <a:p>
+            <a:pPr algn="ctr">
+              <a:lnSpc>
+                <a:spcPct val="100000"/>
+              </a:lnSpc>
+              <a:spcAft>
+                <a:spcPts val="0"/>
+              </a:spcAft>
+              <a:defRPr sz="1800" b="0">
+                <a:solidFill>
+                  <a:srgbClr val="222222"/>
+                </a:solidFill>
+                <a:latin typeface="Calibri"/>
+              </a:defRPr>
+            </a:pPr>
+            <a:r>
+              <a:rPr sz="1800" b="0">
+                <a:solidFill>
+                  <a:srgbClr val="222222"/>
+                </a:solidFill>
+                <a:latin typeface="Calibri"/>
+              </a:rPr>
+              <a:t>ONE NEOPIXEL</a:t>
+            </a:r>
+          </a:p>
+          <a:p>
+            <a:pPr algn="ctr">
+              <a:lnSpc>
+                <a:spcPct val="100000"/>
+              </a:lnSpc>
+              <a:spcAft>
+                <a:spcPts val="0"/>
+              </a:spcAft>
+              <a:defRPr sz="1800" b="0">
+                <a:solidFill>
+                  <a:srgbClr val="222222"/>
+                </a:solidFill>
+                <a:latin typeface="Calibri"/>
+              </a:defRPr>
+            </a:pPr>
+            <a:r>
+              <a:rPr sz="1800" b="0">
+                <a:solidFill>
+                  <a:srgbClr val="222222"/>
+                </a:solidFill>
+                <a:latin typeface="Calibri"/>
+              </a:rPr>
+              <a:t>at full white</a:t>
+            </a:r>
+          </a:p>
+          <a:p>
+            <a:pPr algn="ctr">
+              <a:lnSpc>
+                <a:spcPct val="100000"/>
+              </a:lnSpc>
+              <a:spcAft>
+                <a:spcPts val="0"/>
+              </a:spcAft>
+              <a:defRPr sz="900" b="0">
+                <a:solidFill>
+                  <a:srgbClr val="222222"/>
+                </a:solidFill>
+                <a:latin typeface="Calibri"/>
+              </a:defRPr>
+            </a:pPr>
+          </a:p>
+          <a:p>
+            <a:pPr algn="ctr">
+              <a:lnSpc>
+                <a:spcPct val="100000"/>
+              </a:lnSpc>
+              <a:spcAft>
+                <a:spcPts val="0"/>
+              </a:spcAft>
+              <a:defRPr sz="1800" b="0">
+                <a:solidFill>
+                  <a:srgbClr val="222222"/>
+                </a:solidFill>
+                <a:latin typeface="Calibri"/>
+              </a:defRPr>
+            </a:pPr>
+            <a:r>
+              <a:rPr sz="1800" b="0">
+                <a:solidFill>
+                  <a:srgbClr val="222222"/>
+                </a:solidFill>
+                <a:latin typeface="Calibri"/>
+              </a:rPr>
+              <a:t>3 LEDs x 20 mA</a:t>
+            </a:r>
+          </a:p>
+          <a:p>
+            <a:pPr algn="ctr">
+              <a:lnSpc>
+                <a:spcPct val="100000"/>
+              </a:lnSpc>
+              <a:spcAft>
+                <a:spcPts val="0"/>
+              </a:spcAft>
+              <a:defRPr sz="1800" b="0">
+                <a:solidFill>
+                  <a:srgbClr val="222222"/>
+                </a:solidFill>
+                <a:latin typeface="Calibri"/>
+              </a:defRPr>
+            </a:pPr>
+            <a:r>
+              <a:rPr sz="1800" b="0">
+                <a:solidFill>
+                  <a:srgbClr val="222222"/>
+                </a:solidFill>
+                <a:latin typeface="Calibri"/>
+              </a:rPr>
+              <a:t>= 60 mA</a:t>
+            </a:r>
+          </a:p>
+          <a:p>
+            <a:pPr algn="ctr">
+              <a:lnSpc>
+                <a:spcPct val="100000"/>
+              </a:lnSpc>
+              <a:spcAft>
+                <a:spcPts val="0"/>
+              </a:spcAft>
+              <a:defRPr sz="900" b="0">
+                <a:solidFill>
+                  <a:srgbClr val="222222"/>
+                </a:solidFill>
+                <a:latin typeface="Calibri"/>
+              </a:defRPr>
+            </a:pPr>
+          </a:p>
+          <a:p>
+            <a:pPr algn="ctr">
+              <a:lnSpc>
+                <a:spcPct val="100000"/>
+              </a:lnSpc>
+              <a:spcAft>
+                <a:spcPts val="0"/>
+              </a:spcAft>
+              <a:defRPr sz="1800" b="0">
+                <a:solidFill>
+                  <a:srgbClr val="222222"/>
+                </a:solidFill>
+                <a:latin typeface="Calibri"/>
+              </a:defRPr>
+            </a:pPr>
+            <a:r>
+              <a:rPr sz="1800" b="0">
+                <a:solidFill>
+                  <a:srgbClr val="222222"/>
+                </a:solidFill>
+                <a:latin typeface="Calibri"/>
+              </a:rPr>
+              <a:t>P = I x V</a:t>
+            </a:r>
+          </a:p>
+          <a:p>
+            <a:pPr algn="ctr">
+              <a:lnSpc>
+                <a:spcPct val="100000"/>
+              </a:lnSpc>
+              <a:spcAft>
+                <a:spcPts val="0"/>
+              </a:spcAft>
+              <a:defRPr sz="1800" b="0">
+                <a:solidFill>
+                  <a:srgbClr val="222222"/>
+                </a:solidFill>
+                <a:latin typeface="Calibri"/>
+              </a:defRPr>
+            </a:pPr>
+            <a:r>
+              <a:rPr sz="1800" b="0">
+                <a:solidFill>
+                  <a:srgbClr val="222222"/>
+                </a:solidFill>
+                <a:latin typeface="Calibri"/>
+              </a:rPr>
+              <a:t>= 0.06 x 5</a:t>
+            </a:r>
+          </a:p>
+          <a:p>
+            <a:pPr algn="ctr">
+              <a:lnSpc>
+                <a:spcPct val="100000"/>
+              </a:lnSpc>
+              <a:spcAft>
+                <a:spcPts val="0"/>
+              </a:spcAft>
+              <a:defRPr sz="1800" b="0">
+                <a:solidFill>
+                  <a:srgbClr val="222222"/>
+                </a:solidFill>
+                <a:latin typeface="Calibri"/>
+              </a:defRPr>
+            </a:pPr>
+            <a:r>
+              <a:rPr sz="1800" b="0">
+                <a:solidFill>
+                  <a:srgbClr val="222222"/>
+                </a:solidFill>
+                <a:latin typeface="Calibri"/>
+              </a:rPr>
+              <a:t>= 0.3 W</a:t>
+            </a:r>
+          </a:p>
+          <a:p>
+            <a:pPr algn="ctr">
+              <a:lnSpc>
+                <a:spcPct val="100000"/>
+              </a:lnSpc>
+              <a:spcAft>
+                <a:spcPts val="0"/>
+              </a:spcAft>
+              <a:defRPr sz="900" b="0">
+                <a:solidFill>
+                  <a:srgbClr val="222222"/>
+                </a:solidFill>
+                <a:latin typeface="Calibri"/>
+              </a:defRPr>
+            </a:pPr>
+          </a:p>
+          <a:p>
+            <a:pPr algn="ctr">
+              <a:lnSpc>
+                <a:spcPct val="100000"/>
+              </a:lnSpc>
+              <a:spcAft>
+                <a:spcPts val="0"/>
+              </a:spcAft>
+              <a:defRPr sz="1800" b="0">
+                <a:solidFill>
+                  <a:srgbClr val="222222"/>
+                </a:solidFill>
+                <a:latin typeface="Calibri"/>
+              </a:defRPr>
+            </a:pPr>
+            <a:r>
+              <a:rPr sz="1800" b="0">
+                <a:solidFill>
+                  <a:srgbClr val="222222"/>
+                </a:solidFill>
+                <a:latin typeface="Calibri"/>
+              </a:rPr>
+              <a:t>x 32 pixels</a:t>
+            </a:r>
+          </a:p>
+          <a:p>
+            <a:pPr algn="ctr">
+              <a:lnSpc>
+                <a:spcPct val="100000"/>
+              </a:lnSpc>
+              <a:spcAft>
+                <a:spcPts val="0"/>
+              </a:spcAft>
+              <a:defRPr sz="1800" b="0">
+                <a:solidFill>
+                  <a:srgbClr val="222222"/>
+                </a:solidFill>
+                <a:latin typeface="Calibri"/>
+              </a:defRPr>
+            </a:pPr>
+            <a:r>
+              <a:rPr sz="1800" b="0">
+                <a:solidFill>
+                  <a:srgbClr val="222222"/>
+                </a:solidFill>
+                <a:latin typeface="Calibri"/>
+              </a:rPr>
+              <a:t>= 1.92 A</a:t>
+            </a:r>
+          </a:p>
+          <a:p>
+            <a:pPr algn="ctr">
+              <a:lnSpc>
+                <a:spcPct val="100000"/>
+              </a:lnSpc>
+              <a:spcAft>
+                <a:spcPts val="0"/>
+              </a:spcAft>
+              <a:defRPr sz="1800" b="0">
+                <a:solidFill>
+                  <a:srgbClr val="222222"/>
+                </a:solidFill>
+                <a:latin typeface="Calibri"/>
+              </a:defRPr>
+            </a:pPr>
+            <a:r>
+              <a:rPr sz="1800" b="0">
+                <a:solidFill>
+                  <a:srgbClr val="222222"/>
+                </a:solidFill>
+                <a:latin typeface="Calibri"/>
+              </a:rPr>
+              <a:t>= 9.6 W</a:t>
+            </a:r>
+          </a:p>
+        </p:txBody>
+      </p:sp>
+      <p:sp>
+        <p:nvSpPr>
+          <p:cNvPr id="23" name="Rounded Rectangle 22"/>
+          <p:cNvSpPr/>
+          <p:nvPr/>
+        </p:nvSpPr>
+        <p:spPr>
+          <a:xfrm>
+            <a:off x="502920" y="5303520"/>
+            <a:ext cx="11185855" cy="960120"/>
           </a:xfrm>
           <a:prstGeom prst="roundRect">
             <a:avLst>
@@ -18691,11 +19167,11 @@
             </a:avLst>
           </a:prstGeom>
           <a:solidFill>
-            <a:srgbClr val="F4F6F8"/>
+            <a:srgbClr val="EEF3F8"/>
           </a:solidFill>
           <a:ln w="12700">
             <a:solidFill>
-              <a:srgbClr val="C8D2DE"/>
+              <a:srgbClr val="0E7C86"/>
             </a:solidFill>
           </a:ln>
           <a:effectLst/>
@@ -18715,503 +19191,27 @@
           </a:fontRef>
         </p:style>
         <p:txBody>
-          <a:bodyPr rtlCol="0" anchor="t" wrap="square" lIns="146304" tIns="91440" bIns="73152"/>
-          <a:lstStyle/>
-          <a:p>
-            <a:pPr algn="l">
-              <a:lnSpc>
-                <a:spcPct val="100000"/>
-              </a:lnSpc>
-              <a:spcAft>
-                <a:spcPts val="0"/>
-              </a:spcAft>
-              <a:defRPr sz="1400">
-                <a:latin typeface="Consolas"/>
-              </a:defRPr>
-            </a:pPr>
-            <a:r>
-              <a:rPr sz="1400">
-                <a:solidFill>
-                  <a:srgbClr val="222222"/>
-                </a:solidFill>
-                <a:latin typeface="Consolas"/>
-              </a:rPr>
-              <a:t>uint16_t ina219_read16(uint8_t reg) {</a:t>
-            </a:r>
-          </a:p>
-          <a:p>
-            <a:pPr algn="l">
-              <a:lnSpc>
-                <a:spcPct val="100000"/>
-              </a:lnSpc>
-              <a:spcAft>
-                <a:spcPts val="0"/>
-              </a:spcAft>
-              <a:defRPr sz="1400">
-                <a:latin typeface="Consolas"/>
-              </a:defRPr>
-            </a:pPr>
-            <a:r>
-              <a:rPr sz="1400">
-                <a:solidFill>
-                  <a:srgbClr val="222222"/>
-                </a:solidFill>
-                <a:latin typeface="Consolas"/>
-              </a:rPr>
-              <a:t>  Wire.beginTransmission(INA219_I2C_ADDR);</a:t>
-            </a:r>
-          </a:p>
-          <a:p>
-            <a:pPr algn="l">
-              <a:lnSpc>
-                <a:spcPct val="100000"/>
-              </a:lnSpc>
-              <a:spcAft>
-                <a:spcPts val="0"/>
-              </a:spcAft>
-              <a:defRPr sz="1400">
-                <a:latin typeface="Consolas"/>
-              </a:defRPr>
-            </a:pPr>
-            <a:r>
-              <a:rPr sz="1400">
-                <a:solidFill>
-                  <a:srgbClr val="222222"/>
-                </a:solidFill>
-                <a:latin typeface="Consolas"/>
-              </a:rPr>
-              <a:t>  Wire.write(reg);</a:t>
-            </a:r>
-          </a:p>
-          <a:p>
-            <a:pPr algn="l">
-              <a:lnSpc>
-                <a:spcPct val="100000"/>
-              </a:lnSpc>
-              <a:spcAft>
-                <a:spcPts val="0"/>
-              </a:spcAft>
-              <a:defRPr sz="1400">
-                <a:latin typeface="Consolas"/>
-              </a:defRPr>
-            </a:pPr>
-            <a:r>
-              <a:rPr sz="1400" b="1">
+          <a:bodyPr rtlCol="0" anchor="ctr" wrap="square" lIns="164592" rIns="164592" tIns="73152" bIns="73152"/>
+          <a:lstStyle/>
+          <a:p>
+            <a:pPr algn="l"/>
+            <a:r>
+              <a:rPr sz="1300" b="1">
                 <a:solidFill>
                   <a:srgbClr val="0E7C86"/>
                 </a:solidFill>
-                <a:latin typeface="Consolas"/>
-              </a:rPr>
-              <a:t>  Wire.endTransmission(false);   // REPEATED START, keep the bus</a:t>
-            </a:r>
-          </a:p>
-          <a:p>
-            <a:pPr algn="l">
-              <a:lnSpc>
-                <a:spcPct val="100000"/>
-              </a:lnSpc>
-              <a:spcAft>
-                <a:spcPts val="0"/>
-              </a:spcAft>
-              <a:defRPr sz="1400">
-                <a:latin typeface="Consolas"/>
-              </a:defRPr>
-            </a:pPr>
-            <a:r>
-              <a:rPr sz="1400">
-                <a:solidFill>
-                  <a:srgbClr val="222222"/>
-                </a:solidFill>
-                <a:latin typeface="Consolas"/>
-              </a:rPr>
-              <a:t>  Wire.requestFrom((uint8_t)INA219_I2C_ADDR, (uint8_t)2);</a:t>
-            </a:r>
-          </a:p>
-          <a:p>
-            <a:pPr algn="l">
-              <a:lnSpc>
-                <a:spcPct val="100000"/>
-              </a:lnSpc>
-              <a:spcAft>
-                <a:spcPts val="0"/>
-              </a:spcAft>
-              <a:defRPr sz="1400">
-                <a:latin typeface="Consolas"/>
-              </a:defRPr>
-            </a:pPr>
-            <a:r>
-              <a:rPr sz="1400">
-                <a:solidFill>
-                  <a:srgbClr val="222222"/>
-                </a:solidFill>
-                <a:latin typeface="Consolas"/>
-              </a:rPr>
-              <a:t>  return Wire.available() &gt;= 2 ? (Wire.read() &lt;&lt; 8) | Wire.read() : 0;</a:t>
-            </a:r>
-          </a:p>
-          <a:p>
-            <a:pPr algn="l">
-              <a:lnSpc>
-                <a:spcPct val="100000"/>
-              </a:lnSpc>
-              <a:spcAft>
-                <a:spcPts val="0"/>
-              </a:spcAft>
-              <a:defRPr sz="1400">
-                <a:latin typeface="Consolas"/>
-              </a:defRPr>
-            </a:pPr>
-            <a:r>
-              <a:rPr sz="1400">
-                <a:solidFill>
-                  <a:srgbClr val="222222"/>
-                </a:solidFill>
-                <a:latin typeface="Consolas"/>
-              </a:rPr>
-              <a:t>}</a:t>
-            </a:r>
-          </a:p>
-          <a:p>
-            <a:pPr algn="l">
-              <a:lnSpc>
-                <a:spcPct val="100000"/>
-              </a:lnSpc>
-              <a:spcAft>
-                <a:spcPts val="0"/>
-              </a:spcAft>
-              <a:defRPr sz="1400">
-                <a:latin typeface="Consolas"/>
-              </a:defRPr>
-            </a:pPr>
-            <a:r>
-              <a:rPr sz="1400">
-                <a:solidFill>
-                  <a:srgbClr val="222222"/>
-                </a:solidFill>
-                <a:latin typeface="Consolas"/>
-              </a:rPr>
-              <a:t> </a:t>
-            </a:r>
-          </a:p>
-          <a:p>
-            <a:pPr algn="l">
-              <a:lnSpc>
-                <a:spcPct val="100000"/>
-              </a:lnSpc>
-              <a:spcAft>
-                <a:spcPts val="0"/>
-              </a:spcAft>
-              <a:defRPr sz="1400">
-                <a:latin typeface="Consolas"/>
-              </a:defRPr>
-            </a:pPr>
-            <a:r>
-              <a:rPr sz="1400">
-                <a:solidFill>
-                  <a:srgbClr val="222222"/>
-                </a:solidFill>
-                <a:latin typeface="Consolas"/>
-              </a:rPr>
-              <a:t>float readCurrentAmps() {</a:t>
-            </a:r>
-          </a:p>
-          <a:p>
-            <a:pPr algn="l">
-              <a:lnSpc>
-                <a:spcPct val="100000"/>
-              </a:lnSpc>
-              <a:spcAft>
-                <a:spcPts val="0"/>
-              </a:spcAft>
-              <a:defRPr sz="1400">
-                <a:latin typeface="Consolas"/>
-              </a:defRPr>
-            </a:pPr>
-            <a:r>
-              <a:rPr sz="1400" b="1">
-                <a:solidFill>
-                  <a:srgbClr val="0E7C86"/>
-                </a:solidFill>
-                <a:latin typeface="Consolas"/>
-              </a:rPr>
-              <a:t>  int16_t raw = (int16_t)ina219_read16(0x01);   // shunt reg, SIGNED</a:t>
-            </a:r>
-          </a:p>
-          <a:p>
-            <a:pPr algn="l">
-              <a:lnSpc>
-                <a:spcPct val="100000"/>
-              </a:lnSpc>
-              <a:spcAft>
-                <a:spcPts val="0"/>
-              </a:spcAft>
-              <a:defRPr sz="1400">
-                <a:latin typeface="Consolas"/>
-              </a:defRPr>
-            </a:pPr>
-            <a:r>
-              <a:rPr sz="1400">
-                <a:solidFill>
-                  <a:srgbClr val="222222"/>
-                </a:solidFill>
-                <a:latin typeface="Consolas"/>
-              </a:rPr>
-              <a:t>  return (raw * 0.01f) / (SHUNT_RESISTOR_OHMS * 1000.0f);</a:t>
-            </a:r>
-          </a:p>
-          <a:p>
-            <a:pPr algn="l">
-              <a:lnSpc>
-                <a:spcPct val="100000"/>
-              </a:lnSpc>
-              <a:spcAft>
-                <a:spcPts val="0"/>
-              </a:spcAft>
-              <a:defRPr sz="1400">
-                <a:latin typeface="Consolas"/>
-              </a:defRPr>
-            </a:pPr>
-            <a:r>
-              <a:rPr sz="1400">
-                <a:solidFill>
-                  <a:srgbClr val="222222"/>
-                </a:solidFill>
-                <a:latin typeface="Consolas"/>
-              </a:rPr>
-              <a:t>}</a:t>
-            </a:r>
-          </a:p>
-          <a:p>
-            <a:pPr algn="l">
-              <a:lnSpc>
-                <a:spcPct val="100000"/>
-              </a:lnSpc>
-              <a:spcAft>
-                <a:spcPts val="0"/>
-              </a:spcAft>
-              <a:defRPr sz="1400">
-                <a:latin typeface="Consolas"/>
-              </a:defRPr>
-            </a:pPr>
-            <a:r>
-              <a:rPr sz="1400">
-                <a:solidFill>
-                  <a:srgbClr val="222222"/>
-                </a:solidFill>
-                <a:latin typeface="Consolas"/>
-              </a:rPr>
-              <a:t> </a:t>
-            </a:r>
-          </a:p>
-          <a:p>
-            <a:pPr algn="l">
-              <a:lnSpc>
-                <a:spcPct val="100000"/>
-              </a:lnSpc>
-              <a:spcAft>
-                <a:spcPts val="0"/>
-              </a:spcAft>
-              <a:defRPr sz="1400">
-                <a:latin typeface="Consolas"/>
-              </a:defRPr>
-            </a:pPr>
-            <a:r>
-              <a:rPr sz="1400">
-                <a:solidFill>
-                  <a:srgbClr val="222222"/>
-                </a:solidFill>
-                <a:latin typeface="Consolas"/>
-              </a:rPr>
-              <a:t>float readBusVolts() {</a:t>
-            </a:r>
-          </a:p>
-          <a:p>
-            <a:pPr algn="l">
-              <a:lnSpc>
-                <a:spcPct val="100000"/>
-              </a:lnSpc>
-              <a:spcAft>
-                <a:spcPts val="0"/>
-              </a:spcAft>
-              <a:defRPr sz="1400">
-                <a:latin typeface="Consolas"/>
-              </a:defRPr>
-            </a:pPr>
-            <a:r>
-              <a:rPr sz="1400">
-                <a:solidFill>
-                  <a:srgbClr val="222222"/>
-                </a:solidFill>
-                <a:latin typeface="Consolas"/>
-              </a:rPr>
-              <a:t>  uint16_t value = ina219_read16(0x02);</a:t>
-            </a:r>
-          </a:p>
-          <a:p>
-            <a:pPr algn="l">
-              <a:lnSpc>
-                <a:spcPct val="100000"/>
-              </a:lnSpc>
-              <a:spcAft>
-                <a:spcPts val="0"/>
-              </a:spcAft>
-              <a:defRPr sz="1400">
-                <a:latin typeface="Consolas"/>
-              </a:defRPr>
-            </a:pPr>
-            <a:r>
-              <a:rPr sz="1400">
-                <a:solidFill>
-                  <a:srgbClr val="222222"/>
-                </a:solidFill>
-                <a:latin typeface="Consolas"/>
-              </a:rPr>
-              <a:t>  return (float)((value &gt;&gt; 3) * 4) * 0.001f;   // top 13 bits, 4 mV/count</a:t>
-            </a:r>
-          </a:p>
-          <a:p>
-            <a:pPr algn="l">
-              <a:lnSpc>
-                <a:spcPct val="100000"/>
-              </a:lnSpc>
-              <a:spcAft>
-                <a:spcPts val="0"/>
-              </a:spcAft>
-              <a:defRPr sz="1400">
-                <a:latin typeface="Consolas"/>
-              </a:defRPr>
-            </a:pPr>
-            <a:r>
-              <a:rPr sz="1400">
-                <a:solidFill>
-                  <a:srgbClr val="222222"/>
-                </a:solidFill>
-                <a:latin typeface="Consolas"/>
-              </a:rPr>
-              <a:t>}</a:t>
-            </a:r>
-          </a:p>
-        </p:txBody>
-      </p:sp>
-      <p:sp>
-        <p:nvSpPr>
-          <p:cNvPr id="8" name="TextBox 7"/>
-          <p:cNvSpPr txBox="1"/>
-          <p:nvPr/>
-        </p:nvSpPr>
-        <p:spPr>
-          <a:xfrm>
-            <a:off x="7870048" y="1517904"/>
-            <a:ext cx="3818727" cy="4745736"/>
-          </a:xfrm>
-          <a:prstGeom prst="rect">
-            <a:avLst/>
-          </a:prstGeom>
-          <a:noFill/>
-        </p:spPr>
-        <p:txBody>
-          <a:bodyPr wrap="square" lIns="0" tIns="0" rIns="0" bIns="0">
-            <a:spAutoFit/>
-          </a:bodyPr>
-          <a:lstStyle/>
-          <a:p>
-            <a:pPr algn="l">
-              <a:lnSpc>
-                <a:spcPct val="100000"/>
-              </a:lnSpc>
-              <a:spcAft>
-                <a:spcPts val="700"/>
-              </a:spcAft>
-              <a:defRPr sz="2100" b="0">
-                <a:solidFill>
-                  <a:srgbClr val="222222"/>
-                </a:solidFill>
-                <a:latin typeface="Calibri"/>
-              </a:defRPr>
-            </a:pPr>
-            <a:r>
-              <a:rPr sz="2100" b="0">
-                <a:solidFill>
-                  <a:srgbClr val="222222"/>
-                </a:solidFill>
-                <a:latin typeface="Calibri"/>
-              </a:rPr>
-              <a:t>endTransmission(FALSE) is a repeated start. A full stop would let another master grab the bus mid-read.</a:t>
-            </a:r>
-          </a:p>
-          <a:p>
-            <a:pPr algn="l">
-              <a:lnSpc>
-                <a:spcPct val="100000"/>
-              </a:lnSpc>
-              <a:spcAft>
-                <a:spcPts val="700"/>
-              </a:spcAft>
-              <a:defRPr sz="2100" b="0">
-                <a:solidFill>
-                  <a:srgbClr val="222222"/>
-                </a:solidFill>
-                <a:latin typeface="Calibri"/>
-              </a:defRPr>
-            </a:pPr>
-            <a:r>
-              <a:rPr sz="2100" b="0">
-                <a:solidFill>
-                  <a:srgbClr val="222222"/>
-                </a:solidFill>
-                <a:latin typeface="Calibri"/>
-              </a:rPr>
-              <a:t>The shunt register is SIGNED. Read it unsigned and every braking current becomes a huge positive number.</a:t>
-            </a:r>
-          </a:p>
-          <a:p>
-            <a:pPr algn="l">
-              <a:lnSpc>
-                <a:spcPct val="100000"/>
-              </a:lnSpc>
-              <a:spcAft>
-                <a:spcPts val="700"/>
-              </a:spcAft>
-              <a:defRPr sz="2100" b="0">
-                <a:solidFill>
-                  <a:srgbClr val="222222"/>
-                </a:solidFill>
-                <a:latin typeface="Calibri"/>
-              </a:defRPr>
-            </a:pPr>
-            <a:r>
-              <a:rPr sz="2100" b="0">
-                <a:solidFill>
-                  <a:srgbClr val="222222"/>
-                </a:solidFill>
-                <a:latin typeface="Calibri"/>
-              </a:rPr>
-              <a:t>Bus voltage sits in the top 13 bits, so it is shifted down.</a:t>
-            </a:r>
-          </a:p>
-          <a:p>
-            <a:pPr algn="l">
-              <a:lnSpc>
-                <a:spcPct val="100000"/>
-              </a:lnSpc>
-              <a:spcAft>
-                <a:spcPts val="700"/>
-              </a:spcAft>
-              <a:defRPr sz="2100" b="0">
-                <a:solidFill>
-                  <a:srgbClr val="222222"/>
-                </a:solidFill>
-                <a:latin typeface="Calibri"/>
-              </a:defRPr>
-            </a:pPr>
-            <a:r>
-              <a:rPr sz="2100" b="0">
-                <a:solidFill>
-                  <a:srgbClr val="222222"/>
-                </a:solidFill>
-                <a:latin typeface="Calibri"/>
-              </a:rPr>
-              <a:t>Forty lines of your own beats a library you cannot read.</a:t>
+                <a:latin typeface="Calibri"/>
+              </a:rPr>
+              <a:t>KEY POINT   </a:t>
+            </a:r>
+            <a:r>
+              <a:rPr sz="1500">
+                <a:solidFill>
+                  <a:srgbClr val="222222"/>
+                </a:solidFill>
+                <a:latin typeface="Calibri"/>
+              </a:rPr>
+              <a:t>Cover the quantity you want with your thumb and the triangle shows you the sum. These two turn up again in the LED budget, the shunt resistor, and how long your battery lasts.</a:t>
             </a:r>
           </a:p>
         </p:txBody>

--- a/ground-vehicle/docs/courses/advanced/l5_sensors_and_self_test.pptx
+++ b/ground-vehicle/docs/courses/advanced/l5_sensors_and_self_test.pptx
@@ -6079,7 +6079,7 @@
                 </a:solidFill>
                 <a:latin typeface="Calibri"/>
               </a:rPr>
-              <a:t>9</a:t>
+              <a:t>10</a:t>
             </a:r>
           </a:p>
         </p:txBody>
@@ -6873,7 +6873,7 @@
                 </a:solidFill>
                 <a:latin typeface="Calibri"/>
               </a:rPr>
-              <a:t>10</a:t>
+              <a:t>11</a:t>
             </a:r>
           </a:p>
         </p:txBody>
@@ -7606,7 +7606,7 @@
                 </a:solidFill>
                 <a:latin typeface="Calibri"/>
               </a:rPr>
-              <a:t>11</a:t>
+              <a:t>12</a:t>
             </a:r>
           </a:p>
         </p:txBody>
@@ -8097,7 +8097,7 @@
                 </a:solidFill>
                 <a:latin typeface="Calibri"/>
               </a:rPr>
-              <a:t>12</a:t>
+              <a:t>13</a:t>
             </a:r>
           </a:p>
         </p:txBody>
@@ -9838,7 +9838,7 @@
                 </a:solidFill>
                 <a:latin typeface="Calibri"/>
               </a:rPr>
-              <a:t>13</a:t>
+              <a:t>14</a:t>
             </a:r>
           </a:p>
         </p:txBody>
@@ -10331,7 +10331,7 @@
                 </a:solidFill>
                 <a:latin typeface="Calibri"/>
               </a:rPr>
-              <a:t>14</a:t>
+              <a:t>15</a:t>
             </a:r>
           </a:p>
         </p:txBody>
@@ -11043,7 +11043,7 @@
                 </a:solidFill>
                 <a:latin typeface="Calibri"/>
               </a:rPr>
-              <a:t>15</a:t>
+              <a:t>16</a:t>
             </a:r>
           </a:p>
         </p:txBody>
@@ -11598,7 +11598,7 @@
                 </a:solidFill>
                 <a:latin typeface="Calibri"/>
               </a:rPr>
-              <a:t>16</a:t>
+              <a:t>17</a:t>
             </a:r>
           </a:p>
         </p:txBody>
@@ -12242,7 +12242,7 @@
                 </a:solidFill>
                 <a:latin typeface="Calibri"/>
               </a:rPr>
-              <a:t>17</a:t>
+              <a:t>18</a:t>
             </a:r>
           </a:p>
         </p:txBody>
@@ -13004,7 +13004,7 @@
                 </a:solidFill>
                 <a:latin typeface="Calibri"/>
               </a:rPr>
-              <a:t>18</a:t>
+              <a:t>19</a:t>
             </a:r>
           </a:p>
         </p:txBody>
@@ -13509,7 +13509,7 @@
                 </a:solidFill>
                 <a:latin typeface="Calibri"/>
               </a:rPr>
-              <a:t>1</a:t>
+              <a:t>2</a:t>
             </a:r>
           </a:p>
         </p:txBody>
@@ -13934,7 +13934,7 @@
                 </a:solidFill>
                 <a:latin typeface="Calibri"/>
               </a:rPr>
-              <a:t>19</a:t>
+              <a:t>20</a:t>
             </a:r>
           </a:p>
         </p:txBody>
@@ -14434,7 +14434,7 @@
                 </a:solidFill>
                 <a:latin typeface="Calibri"/>
               </a:rPr>
-              <a:t>2</a:t>
+              <a:t>3</a:t>
             </a:r>
           </a:p>
         </p:txBody>
@@ -15124,7 +15124,7 @@
                 </a:solidFill>
                 <a:latin typeface="Calibri"/>
               </a:rPr>
-              <a:t>3</a:t>
+              <a:t>4</a:t>
             </a:r>
           </a:p>
         </p:txBody>
@@ -15477,7 +15477,7 @@
                 </a:solidFill>
                 <a:latin typeface="Calibri"/>
               </a:rPr>
-              <a:t>4</a:t>
+              <a:t>5</a:t>
             </a:r>
           </a:p>
         </p:txBody>
@@ -16127,7 +16127,7 @@
                 </a:solidFill>
                 <a:latin typeface="Calibri"/>
               </a:rPr>
-              <a:t>5</a:t>
+              <a:t>6</a:t>
             </a:r>
           </a:p>
         </p:txBody>
@@ -16679,7 +16679,7 @@
                 </a:solidFill>
                 <a:latin typeface="Calibri"/>
               </a:rPr>
-              <a:t>6</a:t>
+              <a:t>7</a:t>
             </a:r>
           </a:p>
         </p:txBody>
@@ -17377,7 +17377,7 @@
                 </a:solidFill>
                 <a:latin typeface="Calibri"/>
               </a:rPr>
-              <a:t>7</a:t>
+              <a:t>8</a:t>
             </a:r>
           </a:p>
         </p:txBody>
@@ -17900,7 +17900,7 @@
                 </a:solidFill>
                 <a:latin typeface="Calibri"/>
               </a:rPr>
-              <a:t>8</a:t>
+              <a:t>9</a:t>
             </a:r>
           </a:p>
         </p:txBody>

--- a/ground-vehicle/docs/courses/advanced/l5_sensors_and_self_test.pptx
+++ b/ground-vehicle/docs/courses/advanced/l5_sensors_and_self_test.pptx
@@ -7396,7 +7396,7 @@
               <a:t>SAFETY   </a:t>
             </a:r>
             <a:r>
-              <a:rPr sz="1500">
+              <a:rPr sz="1800">
                 <a:solidFill>
                   <a:srgbClr val="222222"/>
                 </a:solidFill>
@@ -9628,7 +9628,7 @@
               <a:t>WATCH OUT   </a:t>
             </a:r>
             <a:r>
-              <a:rPr sz="1500">
+              <a:rPr sz="1800">
                 <a:solidFill>
                   <a:srgbClr val="222222"/>
                 </a:solidFill>
@@ -10121,7 +10121,7 @@
               <a:t>KEY POINT   </a:t>
             </a:r>
             <a:r>
-              <a:rPr sz="1500">
+              <a:rPr sz="1800">
                 <a:solidFill>
                   <a:srgbClr val="222222"/>
                 </a:solidFill>
@@ -10833,7 +10833,7 @@
               <a:t>SAFETY   </a:t>
             </a:r>
             <a:r>
-              <a:rPr sz="1500">
+              <a:rPr sz="1800">
                 <a:solidFill>
                   <a:srgbClr val="222222"/>
                 </a:solidFill>
@@ -12032,7 +12032,7 @@
               <a:t>KEY POINT   </a:t>
             </a:r>
             <a:r>
-              <a:rPr sz="1500">
+              <a:rPr sz="1800">
                 <a:solidFill>
                   <a:srgbClr val="222222"/>
                 </a:solidFill>
@@ -12794,7 +12794,7 @@
               <a:t>KEY POINT   </a:t>
             </a:r>
             <a:r>
-              <a:rPr sz="1500">
+              <a:rPr sz="1800">
                 <a:solidFill>
                   <a:srgbClr val="222222"/>
                 </a:solidFill>
@@ -15357,7 +15357,7 @@
               <a:t>KEY POINT   </a:t>
             </a:r>
             <a:r>
-              <a:rPr sz="1500">
+              <a:rPr sz="1800">
                 <a:solidFill>
                   <a:srgbClr val="222222"/>
                 </a:solidFill>
@@ -19205,7 +19205,7 @@
               <a:t>KEY POINT   </a:t>
             </a:r>
             <a:r>
-              <a:rPr sz="1500">
+              <a:rPr sz="1800">
                 <a:solidFill>
                   <a:srgbClr val="222222"/>
                 </a:solidFill>

--- a/ground-vehicle/docs/courses/advanced/l5_sensors_and_self_test.pptx
+++ b/ground-vehicle/docs/courses/advanced/l5_sensors_and_self_test.pptx
@@ -831,7 +831,7 @@
               <a:rPr sz="1200">
                 <a:latin typeface="Calibri"/>
               </a:rPr>
-              <a:t>The close-up photograph is still outstanding for this deck. Until it arrives, pass a board round.</a:t>
+              <a:t>In the photograph the shunt is the pair marked R005 immediately right of the circled part. Point at them - a five-milliohm resistor looks like nothing, and that is the point.</a:t>
             </a:r>
           </a:p>
         </p:txBody>
@@ -7683,9 +7683,33 @@
           </a:prstGeom>
         </p:spPr>
       </p:pic>
-      <p:sp>
-        <p:nvSpPr>
-          <p:cNvPr id="8" name="TextBox 7"/>
+      <p:pic>
+        <p:nvPicPr>
+          <p:cNvPr id="8" name="Picture 7" descr="control-board-ina219.jpg"/>
+          <p:cNvPicPr>
+            <a:picLocks noChangeAspect="1"/>
+          </p:cNvPicPr>
+          <p:nvPr/>
+        </p:nvPicPr>
+        <p:blipFill>
+          <a:blip r:embed="rId3"/>
+          <a:stretch>
+            <a:fillRect/>
+          </a:stretch>
+        </p:blipFill>
+        <p:spPr>
+          <a:xfrm>
+            <a:off x="7067800" y="1810512"/>
+            <a:ext cx="3831900" cy="3675888"/>
+          </a:xfrm>
+          <a:prstGeom prst="rect">
+            <a:avLst/>
+          </a:prstGeom>
+        </p:spPr>
+      </p:pic>
+      <p:sp>
+        <p:nvSpPr>
+          <p:cNvPr id="9" name="TextBox 8"/>
           <p:cNvSpPr txBox="1"/>
           <p:nvPr/>
         </p:nvSpPr>
@@ -7733,125 +7757,6 @@
       </p:sp>
       <p:sp>
         <p:nvSpPr>
-          <p:cNvPr id="9" name="Rectangle 8"/>
-          <p:cNvSpPr/>
-          <p:nvPr/>
-        </p:nvSpPr>
-        <p:spPr>
-          <a:xfrm>
-            <a:off x="6278727" y="1810512"/>
-            <a:ext cx="5410047" cy="3675888"/>
-          </a:xfrm>
-          <a:prstGeom prst="rect">
-            <a:avLst/>
-          </a:prstGeom>
-          <a:solidFill>
-            <a:srgbClr val="EEF3F8"/>
-          </a:solidFill>
-          <a:ln w="19050">
-            <a:solidFill>
-              <a:srgbClr val="0E7C86"/>
-            </a:solidFill>
-            <a:prstDash val="dash"/>
-          </a:ln>
-          <a:effectLst/>
-        </p:spPr>
-        <p:style>
-          <a:lnRef idx="1">
-            <a:schemeClr val="accent1"/>
-          </a:lnRef>
-          <a:fillRef idx="3">
-            <a:schemeClr val="accent1"/>
-          </a:fillRef>
-          <a:effectRef idx="2">
-            <a:schemeClr val="accent1"/>
-          </a:effectRef>
-          <a:fontRef idx="minor">
-            <a:schemeClr val="lt1"/>
-          </a:fontRef>
-        </p:style>
-        <p:txBody>
-          <a:bodyPr rtlCol="0" anchor="ctr" wrap="square" lIns="164592" rIns="164592" tIns="109728" bIns="109728"/>
-          <a:lstStyle/>
-          <a:p>
-            <a:pPr algn="ctr">
-              <a:lnSpc>
-                <a:spcPct val="100000"/>
-              </a:lnSpc>
-              <a:spcAft>
-                <a:spcPts val="700"/>
-              </a:spcAft>
-              <a:defRPr sz="1600" b="0">
-                <a:solidFill>
-                  <a:srgbClr val="0E7C86"/>
-                </a:solidFill>
-                <a:latin typeface="Calibri"/>
-              </a:defRPr>
-            </a:pPr>
-            <a:r>
-              <a:rPr sz="1600" b="1">
-                <a:solidFill>
-                  <a:srgbClr val="666666"/>
-                </a:solidFill>
-                <a:latin typeface="Calibri"/>
-              </a:rPr>
-              <a:t>PLACEHOLDER</a:t>
-            </a:r>
-          </a:p>
-          <a:p>
-            <a:pPr algn="ctr">
-              <a:lnSpc>
-                <a:spcPct val="100000"/>
-              </a:lnSpc>
-              <a:spcAft>
-                <a:spcPts val="700"/>
-              </a:spcAft>
-              <a:defRPr sz="1600" b="0">
-                <a:solidFill>
-                  <a:srgbClr val="0E7C86"/>
-                </a:solidFill>
-                <a:latin typeface="Calibri"/>
-              </a:defRPr>
-            </a:pPr>
-            <a:r>
-              <a:rPr sz="1600" b="0">
-                <a:solidFill>
-                  <a:srgbClr val="0E7C86"/>
-                </a:solidFill>
-                <a:latin typeface="Calibri"/>
-              </a:rPr>
-              <a:t>PHOTO: the INA219 on a Gen 3 board, close up</a:t>
-            </a:r>
-          </a:p>
-          <a:p>
-            <a:pPr algn="ctr">
-              <a:lnSpc>
-                <a:spcPct val="100000"/>
-              </a:lnSpc>
-              <a:spcAft>
-                <a:spcPts val="700"/>
-              </a:spcAft>
-              <a:defRPr sz="1600" b="0">
-                <a:solidFill>
-                  <a:srgbClr val="0E7C86"/>
-                </a:solidFill>
-                <a:latin typeface="Calibri"/>
-              </a:defRPr>
-            </a:pPr>
-            <a:r>
-              <a:rPr sz="1600" b="0">
-                <a:solidFill>
-                  <a:srgbClr val="0E7C86"/>
-                </a:solidFill>
-                <a:latin typeface="Calibri"/>
-              </a:rPr>
-              <a:t>Close enough to read the part, with the shunt and the two I2C wires to GPIO 32 and 33 visible.</a:t>
-            </a:r>
-          </a:p>
-        </p:txBody>
-      </p:sp>
-      <p:sp>
-        <p:nvSpPr>
           <p:cNvPr id="10" name="TextBox 9"/>
           <p:cNvSpPr txBox="1"/>
           <p:nvPr/>
@@ -7877,7 +7782,7 @@
                 <a:spcPct val="100000"/>
               </a:lnSpc>
               <a:spcAft>
-                <a:spcPts val="600"/>
+                <a:spcPts val="200"/>
               </a:spcAft>
               <a:defRPr sz="1800" b="0">
                 <a:solidFill>
@@ -7893,7 +7798,7 @@
                 </a:solidFill>
                 <a:latin typeface="Calibri"/>
               </a:rPr>
-              <a:t>The INA219, and the shunt it measures across</a:t>
+              <a:t>Circled: the INA219. Beside it, R7 and R8  -  the shunt it measures across</a:t>
             </a:r>
           </a:p>
         </p:txBody>
